--- a/lecons/USA/Population Geography/05_USA_POP_PW02_Population_Distribution_and_Altitude.pptx
+++ b/lecons/USA/Population Geography/05_USA_POP_PW02_Population_Distribution_and_Altitude.pptx
@@ -57,9 +57,18 @@
     <p:sldId id="305" r:id="rId51"/>
     <p:sldId id="306" r:id="rId52"/>
     <p:sldId id="307" r:id="rId53"/>
+    <p:sldId id="308" r:id="rId54"/>
+    <p:sldId id="309" r:id="rId55"/>
+    <p:sldId id="310" r:id="rId56"/>
+    <p:sldId id="311" r:id="rId57"/>
+    <p:sldId id="312" r:id="rId58"/>
+    <p:sldId id="313" r:id="rId59"/>
+    <p:sldId id="314" r:id="rId60"/>
+    <p:sldId id="315" r:id="rId61"/>
+    <p:sldId id="316" r:id="rId62"/>
   </p:sldIdLst>
   <p:notesMasterIdLst>
-    <p:notesMasterId r:id="rId54"/>
+    <p:notesMasterId r:id="rId63"/>
   </p:notesMasterIdLst>
   <p:sldSz cx="12192000" cy="6858000"/>
   <p:notesSz cx="6858000" cy="12192000"/>
@@ -641,7 +650,7 @@
           <a:p>
             <a:r>
               <a:rPr lang="en-US" dirty="0"/>
-              <a:t>Question 1: What is the problem in the situation? Think for a moment, then raise your hand to answer.</a:t>
+              <a:t>Take your time to copy this part; we will continue together.</a:t>
             </a:r>
             <a:endParaRPr lang="en-US" dirty="0"/>
           </a:p>
@@ -729,7 +738,7 @@
           <a:p>
             <a:r>
               <a:rPr lang="en-US" dirty="0"/>
-              <a:t>Good. Learners must explain two different patterns.</a:t>
+              <a:t>Listen carefully to this situation from real life. In the Mount Cameroon area, farms and towns such as Buea and Limbe are found on the lower slopes, but there are no villages near the summit (4,095 m). Yet the Bamenda Highlands, at 1,000 to 2,000 m, are very crowded. A student studying a graph of population and altitude asks: "How do I read this graph, and why does density not always fall with altitude?" Think about it, because I am going to ask you some questions.</a:t>
             </a:r>
             <a:endParaRPr lang="en-US" dirty="0"/>
           </a:p>
@@ -817,7 +826,7 @@
           <a:p>
             <a:r>
               <a:rPr lang="en-US" dirty="0"/>
-              <a:t>Question 2: Where do Europeans mostly live? Think for a moment, then raise your hand to answer.</a:t>
+              <a:t>Question 1: What is the problem in the situation? Think for a moment, then raise your hand to answer.</a:t>
             </a:r>
             <a:endParaRPr lang="en-US" dirty="0"/>
           </a:p>
@@ -905,7 +914,7 @@
           <a:p>
             <a:r>
               <a:rPr lang="en-US" dirty="0"/>
-              <a:t>Good. On lowlands below 500 m.</a:t>
+              <a:t>Good. The student cannot read and explain a graph of population and altitude.</a:t>
             </a:r>
             <a:endParaRPr lang="en-US" dirty="0"/>
           </a:p>
@@ -993,7 +1002,7 @@
           <a:p>
             <a:r>
               <a:rPr lang="en-US" dirty="0"/>
-              <a:t>Question 3: Why do many tropical people live high up? Think for a moment, then raise your hand to answer.</a:t>
+              <a:t>Question 2: Why is there no village near the summit of Mount Cameroon? Think for a moment, then raise your hand to answer.</a:t>
             </a:r>
             <a:endParaRPr lang="en-US" dirty="0"/>
           </a:p>
@@ -1081,7 +1090,7 @@
           <a:p>
             <a:r>
               <a:rPr lang="en-US" dirty="0"/>
-              <a:t>Good. The highlands are cooler, healthier and fertile.</a:t>
+              <a:t>Good. It is too cold, steep and high, with little oxygen.</a:t>
             </a:r>
             <a:endParaRPr lang="en-US" dirty="0"/>
           </a:p>
@@ -1169,7 +1178,7 @@
           <a:p>
             <a:r>
               <a:rPr lang="en-US" dirty="0"/>
-              <a:t>From this situation, the action we are working towards in this lesson is the following: interpret graphs of population and altitude to explain settlement.</a:t>
+              <a:t>Question 3: Why are the Bamenda Highlands crowded? Think for a moment, then raise your hand to answer.</a:t>
             </a:r>
             <a:endParaRPr lang="en-US" dirty="0"/>
           </a:p>
@@ -1257,7 +1266,7 @@
           <a:p>
             <a:r>
               <a:rPr lang="en-US" dirty="0"/>
-              <a:t>Why is this lesson important for you? This practical work helps us to read graphs and link population to relief and climate.</a:t>
+              <a:t>Good. They are cool, healthy and fertile compared with the hot lowlands.</a:t>
             </a:r>
             <a:endParaRPr lang="en-US" dirty="0"/>
           </a:p>
@@ -1345,7 +1354,7 @@
           <a:p>
             <a:r>
               <a:rPr lang="en-US" dirty="0"/>
-              <a:t>Activity 1. Look carefully at this diagram: population by altitude in temperate and tropical lands (approximate). Observe every detail before I ask the question.</a:t>
+              <a:t>From this situation, the action we are working towards in this lesson is the following: always describe the general trend first, then the exceptions, with figures read from the graph.</a:t>
             </a:r>
             <a:endParaRPr lang="en-US" dirty="0"/>
           </a:p>
@@ -1433,7 +1442,7 @@
           <a:p>
             <a:r>
               <a:rPr lang="en-US" dirty="0"/>
-              <a:t>Here is the question for Activity 1: Which altitude zone has the most people in tropical lands? Take one minute to think and write your answer in your rough notebook.</a:t>
+              <a:t>Why is this lesson important for you? This practical work trains us to read graphs and to explain the role of altitude in the distribution of people.</a:t>
             </a:r>
             <a:endParaRPr lang="en-US" dirty="0"/>
           </a:p>
@@ -1609,7 +1618,7 @@
           <a:p>
             <a:r>
               <a:rPr lang="en-US" dirty="0"/>
-              <a:t>Let us check the answer together. The 1,000–2,000 m zone (about 32 %).</a:t>
+              <a:t>Activity 1. Look carefully at this diagram: population by altitude. Observe every detail before I ask the question.</a:t>
             </a:r>
             <a:endParaRPr lang="en-US" dirty="0"/>
           </a:p>
@@ -1697,7 +1706,7 @@
           <a:p>
             <a:r>
               <a:rPr lang="en-US" dirty="0"/>
-              <a:t>Activity 2. Look carefully at this picture: high, cold mountains. Observe every detail before I ask the question.</a:t>
+              <a:t>Here is the question for Activity 1: In temperate lands, in which altitude class do most people live? Take one minute to think and write your answer in your rough notebook.</a:t>
             </a:r>
             <a:endParaRPr lang="en-US" dirty="0"/>
           </a:p>
@@ -1785,7 +1794,7 @@
           <a:p>
             <a:r>
               <a:rPr lang="en-US" dirty="0"/>
-              <a:t>Here is the question for Activity 2: Why does population fall quickly with height in temperate lands? Take one minute to think and write your answer in your rough notebook.</a:t>
+              <a:t>Let us check the answer together. In the lowest class, 0–500 m.</a:t>
             </a:r>
             <a:endParaRPr lang="en-US" dirty="0"/>
           </a:p>
@@ -1873,7 +1882,7 @@
           <a:p>
             <a:r>
               <a:rPr lang="en-US" dirty="0"/>
-              <a:t>Let us check the answer together. High areas are cold, snowy and have poor soils.</a:t>
+              <a:t>Activity 2. Look carefully at this picture: high mountains. Observe every detail before I ask the question.</a:t>
             </a:r>
             <a:endParaRPr lang="en-US" dirty="0"/>
           </a:p>
@@ -1961,7 +1970,7 @@
           <a:p>
             <a:r>
               <a:rPr lang="en-US" dirty="0"/>
-              <a:t>Activity 3. Look carefully at this picture: la Paz, Bolivia, a large city at about 3,600 m. Observe every detail before I ask the question.</a:t>
+              <a:t>Here is the question for Activity 2: Give two reasons why density is very low above 3,000 m. Take one minute to think and write your answer in your rough notebook.</a:t>
             </a:r>
             <a:endParaRPr lang="en-US" dirty="0"/>
           </a:p>
@@ -2049,7 +2058,7 @@
           <a:p>
             <a:r>
               <a:rPr lang="en-US" dirty="0"/>
-              <a:t>Here is the question for Activity 3: Why do many people live high in the Andes? Take one minute to think and write your answer in your rough notebook.</a:t>
+              <a:t>Let us check the answer together. Cold temperatures, little oxygen, steep slopes and poor soils.</a:t>
             </a:r>
             <a:endParaRPr lang="en-US" dirty="0"/>
           </a:p>
@@ -2137,7 +2146,7 @@
           <a:p>
             <a:r>
               <a:rPr lang="en-US" dirty="0"/>
-              <a:t>Let us check the answer together. The lowlands are hot and unhealthy; the high plateaus are cooler and have mines and farms.</a:t>
+              <a:t>Activity 3. Look carefully at this diagram: towns, altitude and temperature in Cameroon. Observe every detail before I ask the question.</a:t>
             </a:r>
             <a:endParaRPr lang="en-US" dirty="0"/>
           </a:p>
@@ -2225,7 +2234,7 @@
           <a:p>
             <a:r>
               <a:rPr lang="en-US" dirty="0"/>
-              <a:t>Activity 4. Look carefully at this diagram: altitude and density in Cameroon. Observe every detail before I ask the question.</a:t>
+              <a:t>Here is the question for Activity 3: Why is Bamenda more pleasant to live in than a hot lowland? Take one minute to think and write your answer in your rough notebook.</a:t>
             </a:r>
             <a:endParaRPr lang="en-US" dirty="0"/>
           </a:p>
@@ -2313,7 +2322,7 @@
           <a:p>
             <a:r>
               <a:rPr lang="en-US" dirty="0"/>
-              <a:t>Here is the question for Activity 4: Why are Bamenda and Dschang densely populated? Take one minute to think and write your answer in your rough notebook.</a:t>
+              <a:t>Let us check the answer together. Its altitude gives it a cooler, healthier climate.</a:t>
             </a:r>
             <a:endParaRPr lang="en-US" dirty="0"/>
           </a:p>
@@ -2401,7 +2410,7 @@
           <a:p>
             <a:r>
               <a:rPr lang="en-US" dirty="0"/>
-              <a:t>Let us check the answer together. They are cool, fertile and healthy highlands.</a:t>
+              <a:t>Activity 4. Look carefully at this picture: la Paz, Bolivia. Observe every detail before I ask the question.</a:t>
             </a:r>
             <a:endParaRPr lang="en-US" dirty="0"/>
           </a:p>
@@ -2489,7 +2498,7 @@
           <a:p>
             <a:r>
               <a:rPr lang="en-US" dirty="0"/>
-              <a:t>Our topic is Population Numbers, and the sub-topic is Population Density and Distribution. The key notions we shall use today are: altitude, altitude zone, population percentage, tropical highlands, temperate lowlands. At the end, you should be able to do this: learners are able to read and explain graphs of population by altitude.</a:t>
+              <a:t>Our topic is Population Numbers, and the sub-topic is Population Density and Distribution. The key notions we shall use today are: altitude, population density, peak, decline, tropical highland, exception. At the end, you should be able to do this: learners are able to read, describe and explain a graph of population distribution with altitude.</a:t>
             </a:r>
             <a:endParaRPr lang="en-US" dirty="0"/>
           </a:p>
@@ -2577,7 +2586,7 @@
           <a:p>
             <a:r>
               <a:rPr lang="en-US" dirty="0"/>
-              <a:t>Activity 5. Look carefully at this picture: farms on cool highlands. Observe every detail before I ask the question.</a:t>
+              <a:t>Here is the question for Activity 4: Why does La Paz have a large population at about 3,600 m? Take one minute to think and write your answer in your rough notebook.</a:t>
             </a:r>
             <a:endParaRPr lang="en-US" dirty="0"/>
           </a:p>
@@ -2665,7 +2674,7 @@
           <a:p>
             <a:r>
               <a:rPr lang="en-US" dirty="0"/>
-              <a:t>Here is the question for Activity 5: Give two reasons for the tropical pattern. Take one minute to think and write your answer in your rough notebook.</a:t>
+              <a:t>Let us check the answer together. It is the seat of government and the main economic centre of Bolivia.</a:t>
             </a:r>
             <a:endParaRPr lang="en-US" dirty="0"/>
           </a:p>
@@ -2753,7 +2762,7 @@
           <a:p>
             <a:r>
               <a:rPr lang="en-US" dirty="0"/>
-              <a:t>Let us check the answer together. Cooler climate with fewer diseases, and fertile volcanic soils.</a:t>
+              <a:t>Activity 5. Look carefully at this picture: tea on tropical highlands. Observe every detail before I ask the question.</a:t>
             </a:r>
             <a:endParaRPr lang="en-US" dirty="0"/>
           </a:p>
@@ -2841,7 +2850,7 @@
           <a:p>
             <a:r>
               <a:rPr lang="en-US" dirty="0"/>
-              <a:t>Now we are going to copy the board summary. Write the title and the headings neatly in your notebooks. I will give you enough time for each slide, so do not rush.</a:t>
+              <a:t>Here is the question for Activity 5: Which activity keeps mid-altitude areas populated in the tropics? Take one minute to think and write your answer in your rough notebook.</a:t>
             </a:r>
             <a:endParaRPr lang="en-US" dirty="0"/>
           </a:p>
@@ -2929,7 +2938,7 @@
           <a:p>
             <a:r>
               <a:rPr lang="en-US" dirty="0"/>
-              <a:t>Let us copy the definitions. The key terms of this lesson are defined as follows. On this slide we have Altitudinal distribution. Write each point on a new line, with the key term first, and explain it in your own words when we revise.</a:t>
+              <a:t>Let us check the answer together. Plantation farming of tea and coffee, and market gardening.</a:t>
             </a:r>
             <a:endParaRPr lang="en-US" dirty="0"/>
           </a:p>
@@ -3017,7 +3026,7 @@
           <a:p>
             <a:r>
               <a:rPr lang="en-US" dirty="0"/>
-              <a:t>Let us copy Analysis of the Graph. The graph of population and altitude shows two patterns. On this slide we have Temperate pattern. Write each point on a new line, with the key term first, and explain it in your own words when we revise. When you finish, we go to the next slide.</a:t>
+              <a:t>Now we are going to copy the board summary. Write the title and the headings neatly in your notebooks. I will give you enough time for each slide, so do not rush.</a:t>
             </a:r>
             <a:endParaRPr lang="en-US" dirty="0"/>
           </a:p>
@@ -3105,7 +3114,7 @@
           <a:p>
             <a:r>
               <a:rPr lang="en-US" dirty="0"/>
-              <a:t>We continue with Analysis of the Graph. On this slide we have Tropical pattern. Write each point on a new line, with the key term first, and explain it in your own words when we revise.</a:t>
+              <a:t>Let us copy the definitions. The key terms of this lesson are defined as follows. On this slide we have Altitude and Peak (on a graph). Write each point on a new line, with the key term first, and explain it in your own words when we revise. When you finish, we go to the next slide.</a:t>
             </a:r>
             <a:endParaRPr lang="en-US" dirty="0"/>
           </a:p>
@@ -3193,7 +3202,7 @@
           <a:p>
             <a:r>
               <a:rPr lang="en-US" dirty="0"/>
-              <a:t>Now draw this illustration in your notebook: population and altitude. Give it a title and label it clearly.</a:t>
+              <a:t>We continue with the definitions. On this slide we have Decline (on a graph). Write each point on a new line, with the key term first, and explain it in your own words when we revise.</a:t>
             </a:r>
             <a:endParaRPr lang="en-US" dirty="0"/>
           </a:p>
@@ -3281,7 +3290,7 @@
           <a:p>
             <a:r>
               <a:rPr lang="en-US" dirty="0"/>
-              <a:t>Let us copy Explanation. The differences are explained as follows. On this slide we have Why highlands attract people in the tropics. Write each point on a new line, with the key term first, and explain it in your own words when we revise. When you finish, we go to the next slide.</a:t>
+              <a:t>Let us copy Reading the Graph. A graph of population and altitude is read with the following steps. Copy the point on Axes on the left, then draw the diagram on the right: population by altitude. Give it a title and label it clearly.</a:t>
             </a:r>
             <a:endParaRPr lang="en-US" dirty="0"/>
           </a:p>
@@ -3369,7 +3378,7 @@
           <a:p>
             <a:r>
               <a:rPr lang="en-US" dirty="0"/>
-              <a:t>We continue with Explanation. On this slide we have Why highlands repel people in temperate lands. Write each point on a new line, with the key term first, and explain it in your own words when we revise.</a:t>
+              <a:t>We continue with Reading the Graph. On this slide we have General trend and Figures. Write each point on a new line, with the key term first, and explain it in your own words when we revise. When you finish, we go to the next slide.</a:t>
             </a:r>
             <a:endParaRPr lang="en-US" dirty="0"/>
           </a:p>
@@ -3457,7 +3466,7 @@
           <a:p>
             <a:r>
               <a:rPr lang="en-US" dirty="0"/>
-              <a:t>Before we start the new lesson, let us correct the homework I gave you at the end of Lesson 3: Spatial Population Distribution and its Factors. The question was: Explain why the Far North plains are crowded while the East Region is sparse. Take out your exercise books.</a:t>
+              <a:t>Before we start the new lesson, let us correct the homework I gave you at the end of Lesson 3: Spatial Population Distribution and its Factors. The question was: State how population density changes as altitude increases. Take out your exercise books.</a:t>
             </a:r>
             <a:endParaRPr lang="en-US" dirty="0"/>
           </a:p>
@@ -3545,7 +3554,7 @@
           <a:p>
             <a:r>
               <a:rPr lang="en-US" dirty="0"/>
-              <a:t>Now draw this illustration in your notebook: altitude and density in Cameroon. Give it a title and label it clearly.</a:t>
+              <a:t>We continue with Reading the Graph. On this slide we have Peaks and declines. Write each point on a new line, with the key term first, and explain it in your own words when we revise.</a:t>
             </a:r>
             <a:endParaRPr lang="en-US" dirty="0"/>
           </a:p>
@@ -3633,7 +3642,7 @@
           <a:p>
             <a:r>
               <a:rPr lang="en-US" dirty="0"/>
-              <a:t>Now let us check what you have understood. Question 1: Describe the tropical pattern of population with altitude. Answer in your exercise book.</a:t>
+              <a:t>Let us copy The General Pattern. The general pattern of density with altitude is the following. Copy the point on Low altitudes (0–500 m) on the left, then draw the diagram on the right: a fertile lowland. Give it a title and label it clearly.</a:t>
             </a:r>
             <a:endParaRPr lang="en-US" dirty="0"/>
           </a:p>
@@ -3721,7 +3730,7 @@
           <a:p>
             <a:r>
               <a:rPr lang="en-US" dirty="0"/>
-              <a:t>The expected answer is: many people live at 1,000–3,000 m; highlands are crowded. If you got it right, well done.</a:t>
+              <a:t>We continue with The General Pattern. On this slide we have Medium altitudes (500–2,000 m). Write each point on a new line, with the key term first, and explain it in your own words when we revise.</a:t>
             </a:r>
             <a:endParaRPr lang="en-US" dirty="0"/>
           </a:p>
@@ -3809,7 +3818,7 @@
           <a:p>
             <a:r>
               <a:rPr lang="en-US" dirty="0"/>
-              <a:t>Now let us check what you have understood. Question 2: Why are lowlands preferred in temperate lands? Answer in your exercise book.</a:t>
+              <a:t>Copy the point on High altitudes (above 2,000 m) on the left, then draw the diagram on the right: high mountains. Give it a title and label it clearly.</a:t>
             </a:r>
             <a:endParaRPr lang="en-US" dirty="0"/>
           </a:p>
@@ -3897,7 +3906,7 @@
           <a:p>
             <a:r>
               <a:rPr lang="en-US" dirty="0"/>
-              <a:t>The expected answer is: they are warmer, fertile and easy to use for transport and industry. If you got it right, well done.</a:t>
+              <a:t>We continue with The General Pattern. On this slide we have Sharp decline above 3,000 m. Write each point on a new line, with the key term first, and explain it in your own words when we revise.</a:t>
             </a:r>
             <a:endParaRPr lang="en-US" dirty="0"/>
           </a:p>
@@ -3985,7 +3994,7 @@
           <a:p>
             <a:r>
               <a:rPr lang="en-US" dirty="0"/>
-              <a:t>For those who need more practice, fill in the blanks in your exercise book. The answers are: number 1, 500; number 2, Andes; number 3, healthier.</a:t>
+              <a:t>Let us copy Exceptions and Special Cases. The exceptions to the general pattern are the following. Copy the point on Tropical highlands on the left, then draw the diagram on the right: altitude and density in Cameroon. Give it a title and label it clearly.</a:t>
             </a:r>
             <a:endParaRPr lang="en-US" dirty="0"/>
           </a:p>
@@ -4073,7 +4082,7 @@
           <a:p>
             <a:r>
               <a:rPr lang="en-US" dirty="0"/>
-              <a:t>For your homework: Draw a bar graph of population by altitude from the table and write three sentences about it. We shall correct it at the beginning of our next lesson.</a:t>
+              <a:t>Copy the point on Example of Cameroon on the left, then draw the diagram on the right: the Bamenda Highlands. Give it a title and label it clearly.</a:t>
             </a:r>
             <a:endParaRPr lang="en-US" dirty="0"/>
           </a:p>
@@ -4161,7 +4170,7 @@
           <a:p>
             <a:r>
               <a:rPr lang="en-US" dirty="0"/>
-              <a:t>Our next lesson will be on Lesson 4: Modifications of Population Distribution. Thank you for your attention, and see you next time.</a:t>
+              <a:t>Copy the point on Plantation highlands on the left, then draw the diagram on the right: tea on highlands. Give it a title and label it clearly.</a:t>
             </a:r>
             <a:endParaRPr lang="en-US" dirty="0"/>
           </a:p>
@@ -4249,7 +4258,7 @@
           <a:p>
             <a:r>
               <a:rPr lang="en-US" dirty="0"/>
-              <a:t>Let us play the bilingual game. I say a word in English, and you give me the French word. Then we do the reverse.</a:t>
+              <a:t>Copy the point on High capital cities on the left, then draw the diagram on the right: la Paz. Give it a title and label it clearly.</a:t>
             </a:r>
             <a:endParaRPr lang="en-US" dirty="0"/>
           </a:p>
@@ -4337,7 +4346,7 @@
           <a:p>
             <a:r>
               <a:rPr lang="en-US" dirty="0"/>
-              <a:t>I record this information in the official logbook of the class after the lesson.</a:t>
+              <a:t>Now let us check what you have understood. Question 1: Why do low-altitude areas generally support high densities? Answer in your exercise book.</a:t>
             </a:r>
             <a:endParaRPr lang="en-US" dirty="0"/>
           </a:p>
@@ -4425,7 +4434,7 @@
           <a:p>
             <a:r>
               <a:rPr lang="en-US" dirty="0"/>
-              <a:t>Here is a good answer. The Far North plains are crowded because of fertile black soils, flat land, old settlement history and refuge in the Mandara Mountains. The East is sparse because of dense forest, poor soils, disease and poor roads. Compare it with your own answer and correct your work in red.</a:t>
+              <a:t>Here is a good answer. In general, population density decreases as altitude increases, except in some tropical highlands. Compare it with your own answer and correct your work in red.</a:t>
             </a:r>
             <a:endParaRPr lang="en-US" dirty="0"/>
           </a:p>
@@ -4513,7 +4522,7 @@
           <a:p>
             <a:r>
               <a:rPr lang="en-US" dirty="0"/>
-              <a:t>I complete the second page of the logbook: the matter taught, the evaluation, the homework and the attendance.</a:t>
+              <a:t>The expected answer is: they have fertile plains, water, a warm climate, easy transport and large towns. If you got it right, well done.</a:t>
             </a:r>
             <a:endParaRPr lang="en-US" dirty="0"/>
           </a:p>
@@ -4601,7 +4610,7 @@
           <a:p>
             <a:r>
               <a:rPr lang="en-US" dirty="0"/>
-              <a:t>This slide is for me, the teacher: it gives the timing of the lesson and what to do if the projector is not available.</a:t>
+              <a:t>Now let us check what you have understood. Question 2: Give one high-altitude area with a large population and explain why. Answer in your exercise book.</a:t>
             </a:r>
             <a:endParaRPr lang="en-US" dirty="0"/>
           </a:p>
@@ -4689,7 +4698,7 @@
           <a:p>
             <a:r>
               <a:rPr lang="en-US" dirty="0"/>
-              <a:t>These are the references and picture credits used to prepare this lesson.</a:t>
+              <a:t>The expected answer is: la Paz (about 3,600 m), the seat of government of Bolivia; or the Ethiopian Highlands, cooler and healthier than the lowlands. If you got it right, well done.</a:t>
             </a:r>
             <a:endParaRPr lang="en-US" dirty="0"/>
           </a:p>
@@ -4713,6 +4722,622 @@
             <a:fld id="{F7021451-1387-4CA6-816F-3879F97B5CBC}" type="slidenum">
               <a:rPr lang="en-US"/>
               <a:t>52</a:t>
+            </a:fld>
+            <a:endParaRPr lang="en-US"/>
+          </a:p>
+        </p:txBody>
+      </p:sp>
+    </p:spTree>
+    <p:extLst>
+      <p:ext uri="{BB962C8B-B14F-4D97-AF65-F5344CB8AC3E}">
+        <p14:creationId xmlns:p14="http://schemas.microsoft.com/office/powerpoint/2010/main" val="1024086991"/>
+      </p:ext>
+    </p:extLst>
+  </p:cSld>
+  <p:clrMapOvr>
+    <a:masterClrMapping/>
+  </p:clrMapOvr>
+</p:notes>
+</file>
+
+<file path=ppt/notesSlides/notesSlide53.xml><?xml version="1.0" encoding="utf-8"?>
+<p:notes xmlns:a="http://schemas.openxmlformats.org/drawingml/2006/main" xmlns:r="http://schemas.openxmlformats.org/officeDocument/2006/relationships" xmlns:p="http://schemas.openxmlformats.org/presentationml/2006/main">
+  <p:cSld>
+    <p:spTree>
+      <p:nvGrpSpPr>
+        <p:cNvPr id="1" name=""/>
+        <p:cNvGrpSpPr/>
+        <p:nvPr/>
+      </p:nvGrpSpPr>
+      <p:grpSpPr>
+        <a:xfrm>
+          <a:off x="0" y="0"/>
+          <a:ext cx="0" cy="0"/>
+          <a:chOff x="0" y="0"/>
+          <a:chExt cx="0" cy="0"/>
+        </a:xfrm>
+      </p:grpSpPr>
+      <p:sp>
+        <p:nvSpPr>
+          <p:cNvPr id="2" name="Slide Image Placeholder 1"/>
+          <p:cNvSpPr>
+            <a:spLocks noGrp="1" noRot="1" noChangeAspect="1"/>
+          </p:cNvSpPr>
+          <p:nvPr>
+            <p:ph type="sldImg"/>
+          </p:nvPr>
+        </p:nvSpPr>
+        <p:spPr/>
+      </p:sp>
+      <p:sp>
+        <p:nvSpPr>
+          <p:cNvPr id="3" name="Notes Placeholder 2"/>
+          <p:cNvSpPr>
+            <a:spLocks noGrp="1"/>
+          </p:cNvSpPr>
+          <p:nvPr>
+            <p:ph type="body" idx="1"/>
+          </p:nvPr>
+        </p:nvSpPr>
+        <p:spPr/>
+        <p:txBody>
+          <a:bodyPr/>
+          <a:lstStyle/>
+          <a:p>
+            <a:r>
+              <a:rPr lang="en-US" dirty="0"/>
+              <a:t>For those who need more practice, fill in the blanks in your exercise book. The answers are: number 1, decreases (falls); number 2, cooler (healthier); number 3, 3,600.</a:t>
+            </a:r>
+            <a:endParaRPr lang="en-US" dirty="0"/>
+          </a:p>
+        </p:txBody>
+      </p:sp>
+      <p:sp>
+        <p:nvSpPr>
+          <p:cNvPr id="4" name="Slide Number Placeholder 3"/>
+          <p:cNvSpPr>
+            <a:spLocks noGrp="1"/>
+          </p:cNvSpPr>
+          <p:nvPr>
+            <p:ph type="sldNum" sz="quarter" idx="10"/>
+          </p:nvPr>
+        </p:nvSpPr>
+        <p:spPr/>
+        <p:txBody>
+          <a:bodyPr/>
+          <a:lstStyle/>
+          <a:p>
+            <a:fld id="{F7021451-1387-4CA6-816F-3879F97B5CBC}" type="slidenum">
+              <a:rPr lang="en-US"/>
+              <a:t>53</a:t>
+            </a:fld>
+            <a:endParaRPr lang="en-US"/>
+          </a:p>
+        </p:txBody>
+      </p:sp>
+    </p:spTree>
+    <p:extLst>
+      <p:ext uri="{BB962C8B-B14F-4D97-AF65-F5344CB8AC3E}">
+        <p14:creationId xmlns:p14="http://schemas.microsoft.com/office/powerpoint/2010/main" val="1024086991"/>
+      </p:ext>
+    </p:extLst>
+  </p:cSld>
+  <p:clrMapOvr>
+    <a:masterClrMapping/>
+  </p:clrMapOvr>
+</p:notes>
+</file>
+
+<file path=ppt/notesSlides/notesSlide54.xml><?xml version="1.0" encoding="utf-8"?>
+<p:notes xmlns:a="http://schemas.openxmlformats.org/drawingml/2006/main" xmlns:r="http://schemas.openxmlformats.org/officeDocument/2006/relationships" xmlns:p="http://schemas.openxmlformats.org/presentationml/2006/main">
+  <p:cSld>
+    <p:spTree>
+      <p:nvGrpSpPr>
+        <p:cNvPr id="1" name=""/>
+        <p:cNvGrpSpPr/>
+        <p:nvPr/>
+      </p:nvGrpSpPr>
+      <p:grpSpPr>
+        <a:xfrm>
+          <a:off x="0" y="0"/>
+          <a:ext cx="0" cy="0"/>
+          <a:chOff x="0" y="0"/>
+          <a:chExt cx="0" cy="0"/>
+        </a:xfrm>
+      </p:grpSpPr>
+      <p:sp>
+        <p:nvSpPr>
+          <p:cNvPr id="2" name="Slide Image Placeholder 1"/>
+          <p:cNvSpPr>
+            <a:spLocks noGrp="1" noRot="1" noChangeAspect="1"/>
+          </p:cNvSpPr>
+          <p:nvPr>
+            <p:ph type="sldImg"/>
+          </p:nvPr>
+        </p:nvSpPr>
+        <p:spPr/>
+      </p:sp>
+      <p:sp>
+        <p:nvSpPr>
+          <p:cNvPr id="3" name="Notes Placeholder 2"/>
+          <p:cNvSpPr>
+            <a:spLocks noGrp="1"/>
+          </p:cNvSpPr>
+          <p:nvPr>
+            <p:ph type="body" idx="1"/>
+          </p:nvPr>
+        </p:nvSpPr>
+        <p:spPr/>
+        <p:txBody>
+          <a:bodyPr/>
+          <a:lstStyle/>
+          <a:p>
+            <a:r>
+              <a:rPr lang="en-US" dirty="0"/>
+              <a:t>For your homework: Name one push factor of rural-urban migration in Cameroon. We shall correct it at the beginning of our next lesson.</a:t>
+            </a:r>
+            <a:endParaRPr lang="en-US" dirty="0"/>
+          </a:p>
+        </p:txBody>
+      </p:sp>
+      <p:sp>
+        <p:nvSpPr>
+          <p:cNvPr id="4" name="Slide Number Placeholder 3"/>
+          <p:cNvSpPr>
+            <a:spLocks noGrp="1"/>
+          </p:cNvSpPr>
+          <p:nvPr>
+            <p:ph type="sldNum" sz="quarter" idx="10"/>
+          </p:nvPr>
+        </p:nvSpPr>
+        <p:spPr/>
+        <p:txBody>
+          <a:bodyPr/>
+          <a:lstStyle/>
+          <a:p>
+            <a:fld id="{F7021451-1387-4CA6-816F-3879F97B5CBC}" type="slidenum">
+              <a:rPr lang="en-US"/>
+              <a:t>54</a:t>
+            </a:fld>
+            <a:endParaRPr lang="en-US"/>
+          </a:p>
+        </p:txBody>
+      </p:sp>
+    </p:spTree>
+    <p:extLst>
+      <p:ext uri="{BB962C8B-B14F-4D97-AF65-F5344CB8AC3E}">
+        <p14:creationId xmlns:p14="http://schemas.microsoft.com/office/powerpoint/2010/main" val="1024086991"/>
+      </p:ext>
+    </p:extLst>
+  </p:cSld>
+  <p:clrMapOvr>
+    <a:masterClrMapping/>
+  </p:clrMapOvr>
+</p:notes>
+</file>
+
+<file path=ppt/notesSlides/notesSlide55.xml><?xml version="1.0" encoding="utf-8"?>
+<p:notes xmlns:a="http://schemas.openxmlformats.org/drawingml/2006/main" xmlns:r="http://schemas.openxmlformats.org/officeDocument/2006/relationships" xmlns:p="http://schemas.openxmlformats.org/presentationml/2006/main">
+  <p:cSld>
+    <p:spTree>
+      <p:nvGrpSpPr>
+        <p:cNvPr id="1" name=""/>
+        <p:cNvGrpSpPr/>
+        <p:nvPr/>
+      </p:nvGrpSpPr>
+      <p:grpSpPr>
+        <a:xfrm>
+          <a:off x="0" y="0"/>
+          <a:ext cx="0" cy="0"/>
+          <a:chOff x="0" y="0"/>
+          <a:chExt cx="0" cy="0"/>
+        </a:xfrm>
+      </p:grpSpPr>
+      <p:sp>
+        <p:nvSpPr>
+          <p:cNvPr id="2" name="Slide Image Placeholder 1"/>
+          <p:cNvSpPr>
+            <a:spLocks noGrp="1" noRot="1" noChangeAspect="1"/>
+          </p:cNvSpPr>
+          <p:nvPr>
+            <p:ph type="sldImg"/>
+          </p:nvPr>
+        </p:nvSpPr>
+        <p:spPr/>
+      </p:sp>
+      <p:sp>
+        <p:nvSpPr>
+          <p:cNvPr id="3" name="Notes Placeholder 2"/>
+          <p:cNvSpPr>
+            <a:spLocks noGrp="1"/>
+          </p:cNvSpPr>
+          <p:nvPr>
+            <p:ph type="body" idx="1"/>
+          </p:nvPr>
+        </p:nvSpPr>
+        <p:spPr/>
+        <p:txBody>
+          <a:bodyPr/>
+          <a:lstStyle/>
+          <a:p>
+            <a:r>
+              <a:rPr lang="en-US" dirty="0"/>
+              <a:t>Our next lesson will be on Lesson 4: Modifications of Population Distribution. Thank you for your attention, and see you next time.</a:t>
+            </a:r>
+            <a:endParaRPr lang="en-US" dirty="0"/>
+          </a:p>
+        </p:txBody>
+      </p:sp>
+      <p:sp>
+        <p:nvSpPr>
+          <p:cNvPr id="4" name="Slide Number Placeholder 3"/>
+          <p:cNvSpPr>
+            <a:spLocks noGrp="1"/>
+          </p:cNvSpPr>
+          <p:nvPr>
+            <p:ph type="sldNum" sz="quarter" idx="10"/>
+          </p:nvPr>
+        </p:nvSpPr>
+        <p:spPr/>
+        <p:txBody>
+          <a:bodyPr/>
+          <a:lstStyle/>
+          <a:p>
+            <a:fld id="{F7021451-1387-4CA6-816F-3879F97B5CBC}" type="slidenum">
+              <a:rPr lang="en-US"/>
+              <a:t>55</a:t>
+            </a:fld>
+            <a:endParaRPr lang="en-US"/>
+          </a:p>
+        </p:txBody>
+      </p:sp>
+    </p:spTree>
+    <p:extLst>
+      <p:ext uri="{BB962C8B-B14F-4D97-AF65-F5344CB8AC3E}">
+        <p14:creationId xmlns:p14="http://schemas.microsoft.com/office/powerpoint/2010/main" val="1024086991"/>
+      </p:ext>
+    </p:extLst>
+  </p:cSld>
+  <p:clrMapOvr>
+    <a:masterClrMapping/>
+  </p:clrMapOvr>
+</p:notes>
+</file>
+
+<file path=ppt/notesSlides/notesSlide56.xml><?xml version="1.0" encoding="utf-8"?>
+<p:notes xmlns:a="http://schemas.openxmlformats.org/drawingml/2006/main" xmlns:r="http://schemas.openxmlformats.org/officeDocument/2006/relationships" xmlns:p="http://schemas.openxmlformats.org/presentationml/2006/main">
+  <p:cSld>
+    <p:spTree>
+      <p:nvGrpSpPr>
+        <p:cNvPr id="1" name=""/>
+        <p:cNvGrpSpPr/>
+        <p:nvPr/>
+      </p:nvGrpSpPr>
+      <p:grpSpPr>
+        <a:xfrm>
+          <a:off x="0" y="0"/>
+          <a:ext cx="0" cy="0"/>
+          <a:chOff x="0" y="0"/>
+          <a:chExt cx="0" cy="0"/>
+        </a:xfrm>
+      </p:grpSpPr>
+      <p:sp>
+        <p:nvSpPr>
+          <p:cNvPr id="2" name="Slide Image Placeholder 1"/>
+          <p:cNvSpPr>
+            <a:spLocks noGrp="1" noRot="1" noChangeAspect="1"/>
+          </p:cNvSpPr>
+          <p:nvPr>
+            <p:ph type="sldImg"/>
+          </p:nvPr>
+        </p:nvSpPr>
+        <p:spPr/>
+      </p:sp>
+      <p:sp>
+        <p:nvSpPr>
+          <p:cNvPr id="3" name="Notes Placeholder 2"/>
+          <p:cNvSpPr>
+            <a:spLocks noGrp="1"/>
+          </p:cNvSpPr>
+          <p:nvPr>
+            <p:ph type="body" idx="1"/>
+          </p:nvPr>
+        </p:nvSpPr>
+        <p:spPr/>
+        <p:txBody>
+          <a:bodyPr/>
+          <a:lstStyle/>
+          <a:p>
+            <a:r>
+              <a:rPr lang="en-US" dirty="0"/>
+              <a:t>Let us play the bilingual game. I say a word in English, and you give me the French word. Then we do the reverse.</a:t>
+            </a:r>
+            <a:endParaRPr lang="en-US" dirty="0"/>
+          </a:p>
+        </p:txBody>
+      </p:sp>
+      <p:sp>
+        <p:nvSpPr>
+          <p:cNvPr id="4" name="Slide Number Placeholder 3"/>
+          <p:cNvSpPr>
+            <a:spLocks noGrp="1"/>
+          </p:cNvSpPr>
+          <p:nvPr>
+            <p:ph type="sldNum" sz="quarter" idx="10"/>
+          </p:nvPr>
+        </p:nvSpPr>
+        <p:spPr/>
+        <p:txBody>
+          <a:bodyPr/>
+          <a:lstStyle/>
+          <a:p>
+            <a:fld id="{F7021451-1387-4CA6-816F-3879F97B5CBC}" type="slidenum">
+              <a:rPr lang="en-US"/>
+              <a:t>56</a:t>
+            </a:fld>
+            <a:endParaRPr lang="en-US"/>
+          </a:p>
+        </p:txBody>
+      </p:sp>
+    </p:spTree>
+    <p:extLst>
+      <p:ext uri="{BB962C8B-B14F-4D97-AF65-F5344CB8AC3E}">
+        <p14:creationId xmlns:p14="http://schemas.microsoft.com/office/powerpoint/2010/main" val="1024086991"/>
+      </p:ext>
+    </p:extLst>
+  </p:cSld>
+  <p:clrMapOvr>
+    <a:masterClrMapping/>
+  </p:clrMapOvr>
+</p:notes>
+</file>
+
+<file path=ppt/notesSlides/notesSlide57.xml><?xml version="1.0" encoding="utf-8"?>
+<p:notes xmlns:a="http://schemas.openxmlformats.org/drawingml/2006/main" xmlns:r="http://schemas.openxmlformats.org/officeDocument/2006/relationships" xmlns:p="http://schemas.openxmlformats.org/presentationml/2006/main">
+  <p:cSld>
+    <p:spTree>
+      <p:nvGrpSpPr>
+        <p:cNvPr id="1" name=""/>
+        <p:cNvGrpSpPr/>
+        <p:nvPr/>
+      </p:nvGrpSpPr>
+      <p:grpSpPr>
+        <a:xfrm>
+          <a:off x="0" y="0"/>
+          <a:ext cx="0" cy="0"/>
+          <a:chOff x="0" y="0"/>
+          <a:chExt cx="0" cy="0"/>
+        </a:xfrm>
+      </p:grpSpPr>
+      <p:sp>
+        <p:nvSpPr>
+          <p:cNvPr id="2" name="Slide Image Placeholder 1"/>
+          <p:cNvSpPr>
+            <a:spLocks noGrp="1" noRot="1" noChangeAspect="1"/>
+          </p:cNvSpPr>
+          <p:nvPr>
+            <p:ph type="sldImg"/>
+          </p:nvPr>
+        </p:nvSpPr>
+        <p:spPr/>
+      </p:sp>
+      <p:sp>
+        <p:nvSpPr>
+          <p:cNvPr id="3" name="Notes Placeholder 2"/>
+          <p:cNvSpPr>
+            <a:spLocks noGrp="1"/>
+          </p:cNvSpPr>
+          <p:nvPr>
+            <p:ph type="body" idx="1"/>
+          </p:nvPr>
+        </p:nvSpPr>
+        <p:spPr/>
+        <p:txBody>
+          <a:bodyPr/>
+          <a:lstStyle/>
+          <a:p>
+            <a:r>
+              <a:rPr lang="en-US" dirty="0"/>
+              <a:t>I record this information in the official logbook of the class after the lesson.</a:t>
+            </a:r>
+            <a:endParaRPr lang="en-US" dirty="0"/>
+          </a:p>
+        </p:txBody>
+      </p:sp>
+      <p:sp>
+        <p:nvSpPr>
+          <p:cNvPr id="4" name="Slide Number Placeholder 3"/>
+          <p:cNvSpPr>
+            <a:spLocks noGrp="1"/>
+          </p:cNvSpPr>
+          <p:nvPr>
+            <p:ph type="sldNum" sz="quarter" idx="10"/>
+          </p:nvPr>
+        </p:nvSpPr>
+        <p:spPr/>
+        <p:txBody>
+          <a:bodyPr/>
+          <a:lstStyle/>
+          <a:p>
+            <a:fld id="{F7021451-1387-4CA6-816F-3879F97B5CBC}" type="slidenum">
+              <a:rPr lang="en-US"/>
+              <a:t>57</a:t>
+            </a:fld>
+            <a:endParaRPr lang="en-US"/>
+          </a:p>
+        </p:txBody>
+      </p:sp>
+    </p:spTree>
+    <p:extLst>
+      <p:ext uri="{BB962C8B-B14F-4D97-AF65-F5344CB8AC3E}">
+        <p14:creationId xmlns:p14="http://schemas.microsoft.com/office/powerpoint/2010/main" val="1024086991"/>
+      </p:ext>
+    </p:extLst>
+  </p:cSld>
+  <p:clrMapOvr>
+    <a:masterClrMapping/>
+  </p:clrMapOvr>
+</p:notes>
+</file>
+
+<file path=ppt/notesSlides/notesSlide58.xml><?xml version="1.0" encoding="utf-8"?>
+<p:notes xmlns:a="http://schemas.openxmlformats.org/drawingml/2006/main" xmlns:r="http://schemas.openxmlformats.org/officeDocument/2006/relationships" xmlns:p="http://schemas.openxmlformats.org/presentationml/2006/main">
+  <p:cSld>
+    <p:spTree>
+      <p:nvGrpSpPr>
+        <p:cNvPr id="1" name=""/>
+        <p:cNvGrpSpPr/>
+        <p:nvPr/>
+      </p:nvGrpSpPr>
+      <p:grpSpPr>
+        <a:xfrm>
+          <a:off x="0" y="0"/>
+          <a:ext cx="0" cy="0"/>
+          <a:chOff x="0" y="0"/>
+          <a:chExt cx="0" cy="0"/>
+        </a:xfrm>
+      </p:grpSpPr>
+      <p:sp>
+        <p:nvSpPr>
+          <p:cNvPr id="2" name="Slide Image Placeholder 1"/>
+          <p:cNvSpPr>
+            <a:spLocks noGrp="1" noRot="1" noChangeAspect="1"/>
+          </p:cNvSpPr>
+          <p:nvPr>
+            <p:ph type="sldImg"/>
+          </p:nvPr>
+        </p:nvSpPr>
+        <p:spPr/>
+      </p:sp>
+      <p:sp>
+        <p:nvSpPr>
+          <p:cNvPr id="3" name="Notes Placeholder 2"/>
+          <p:cNvSpPr>
+            <a:spLocks noGrp="1"/>
+          </p:cNvSpPr>
+          <p:nvPr>
+            <p:ph type="body" idx="1"/>
+          </p:nvPr>
+        </p:nvSpPr>
+        <p:spPr/>
+        <p:txBody>
+          <a:bodyPr/>
+          <a:lstStyle/>
+          <a:p>
+            <a:r>
+              <a:rPr lang="en-US" dirty="0"/>
+              <a:t>I complete the second page of the logbook: the matter taught, the evaluation, the homework and the attendance.</a:t>
+            </a:r>
+            <a:endParaRPr lang="en-US" dirty="0"/>
+          </a:p>
+        </p:txBody>
+      </p:sp>
+      <p:sp>
+        <p:nvSpPr>
+          <p:cNvPr id="4" name="Slide Number Placeholder 3"/>
+          <p:cNvSpPr>
+            <a:spLocks noGrp="1"/>
+          </p:cNvSpPr>
+          <p:nvPr>
+            <p:ph type="sldNum" sz="quarter" idx="10"/>
+          </p:nvPr>
+        </p:nvSpPr>
+        <p:spPr/>
+        <p:txBody>
+          <a:bodyPr/>
+          <a:lstStyle/>
+          <a:p>
+            <a:fld id="{F7021451-1387-4CA6-816F-3879F97B5CBC}" type="slidenum">
+              <a:rPr lang="en-US"/>
+              <a:t>58</a:t>
+            </a:fld>
+            <a:endParaRPr lang="en-US"/>
+          </a:p>
+        </p:txBody>
+      </p:sp>
+    </p:spTree>
+    <p:extLst>
+      <p:ext uri="{BB962C8B-B14F-4D97-AF65-F5344CB8AC3E}">
+        <p14:creationId xmlns:p14="http://schemas.microsoft.com/office/powerpoint/2010/main" val="1024086991"/>
+      </p:ext>
+    </p:extLst>
+  </p:cSld>
+  <p:clrMapOvr>
+    <a:masterClrMapping/>
+  </p:clrMapOvr>
+</p:notes>
+</file>
+
+<file path=ppt/notesSlides/notesSlide59.xml><?xml version="1.0" encoding="utf-8"?>
+<p:notes xmlns:a="http://schemas.openxmlformats.org/drawingml/2006/main" xmlns:r="http://schemas.openxmlformats.org/officeDocument/2006/relationships" xmlns:p="http://schemas.openxmlformats.org/presentationml/2006/main">
+  <p:cSld>
+    <p:spTree>
+      <p:nvGrpSpPr>
+        <p:cNvPr id="1" name=""/>
+        <p:cNvGrpSpPr/>
+        <p:nvPr/>
+      </p:nvGrpSpPr>
+      <p:grpSpPr>
+        <a:xfrm>
+          <a:off x="0" y="0"/>
+          <a:ext cx="0" cy="0"/>
+          <a:chOff x="0" y="0"/>
+          <a:chExt cx="0" cy="0"/>
+        </a:xfrm>
+      </p:grpSpPr>
+      <p:sp>
+        <p:nvSpPr>
+          <p:cNvPr id="2" name="Slide Image Placeholder 1"/>
+          <p:cNvSpPr>
+            <a:spLocks noGrp="1" noRot="1" noChangeAspect="1"/>
+          </p:cNvSpPr>
+          <p:nvPr>
+            <p:ph type="sldImg"/>
+          </p:nvPr>
+        </p:nvSpPr>
+        <p:spPr/>
+      </p:sp>
+      <p:sp>
+        <p:nvSpPr>
+          <p:cNvPr id="3" name="Notes Placeholder 2"/>
+          <p:cNvSpPr>
+            <a:spLocks noGrp="1"/>
+          </p:cNvSpPr>
+          <p:nvPr>
+            <p:ph type="body" idx="1"/>
+          </p:nvPr>
+        </p:nvSpPr>
+        <p:spPr/>
+        <p:txBody>
+          <a:bodyPr/>
+          <a:lstStyle/>
+          <a:p>
+            <a:r>
+              <a:rPr lang="en-US" dirty="0"/>
+              <a:t>This slide is for me, the teacher: it gives the timing of the lesson and what to do if the projector is not available.</a:t>
+            </a:r>
+            <a:endParaRPr lang="en-US" dirty="0"/>
+          </a:p>
+        </p:txBody>
+      </p:sp>
+      <p:sp>
+        <p:nvSpPr>
+          <p:cNvPr id="4" name="Slide Number Placeholder 3"/>
+          <p:cNvSpPr>
+            <a:spLocks noGrp="1"/>
+          </p:cNvSpPr>
+          <p:nvPr>
+            <p:ph type="sldNum" sz="quarter" idx="10"/>
+          </p:nvPr>
+        </p:nvSpPr>
+        <p:spPr/>
+        <p:txBody>
+          <a:bodyPr/>
+          <a:lstStyle/>
+          <a:p>
+            <a:fld id="{F7021451-1387-4CA6-816F-3879F97B5CBC}" type="slidenum">
+              <a:rPr lang="en-US"/>
+              <a:t>59</a:t>
             </a:fld>
             <a:endParaRPr lang="en-US"/>
           </a:p>
@@ -4819,6 +5444,182 @@
 </p:notes>
 </file>
 
+<file path=ppt/notesSlides/notesSlide60.xml><?xml version="1.0" encoding="utf-8"?>
+<p:notes xmlns:a="http://schemas.openxmlformats.org/drawingml/2006/main" xmlns:r="http://schemas.openxmlformats.org/officeDocument/2006/relationships" xmlns:p="http://schemas.openxmlformats.org/presentationml/2006/main">
+  <p:cSld>
+    <p:spTree>
+      <p:nvGrpSpPr>
+        <p:cNvPr id="1" name=""/>
+        <p:cNvGrpSpPr/>
+        <p:nvPr/>
+      </p:nvGrpSpPr>
+      <p:grpSpPr>
+        <a:xfrm>
+          <a:off x="0" y="0"/>
+          <a:ext cx="0" cy="0"/>
+          <a:chOff x="0" y="0"/>
+          <a:chExt cx="0" cy="0"/>
+        </a:xfrm>
+      </p:grpSpPr>
+      <p:sp>
+        <p:nvSpPr>
+          <p:cNvPr id="2" name="Slide Image Placeholder 1"/>
+          <p:cNvSpPr>
+            <a:spLocks noGrp="1" noRot="1" noChangeAspect="1"/>
+          </p:cNvSpPr>
+          <p:nvPr>
+            <p:ph type="sldImg"/>
+          </p:nvPr>
+        </p:nvSpPr>
+        <p:spPr/>
+      </p:sp>
+      <p:sp>
+        <p:nvSpPr>
+          <p:cNvPr id="3" name="Notes Placeholder 2"/>
+          <p:cNvSpPr>
+            <a:spLocks noGrp="1"/>
+          </p:cNvSpPr>
+          <p:nvPr>
+            <p:ph type="body" idx="1"/>
+          </p:nvPr>
+        </p:nvSpPr>
+        <p:spPr/>
+        <p:txBody>
+          <a:bodyPr/>
+          <a:lstStyle/>
+          <a:p>
+            <a:r>
+              <a:rPr lang="en-US" dirty="0"/>
+              <a:t>Take your time to copy this part; we will continue together.</a:t>
+            </a:r>
+            <a:endParaRPr lang="en-US" dirty="0"/>
+          </a:p>
+        </p:txBody>
+      </p:sp>
+      <p:sp>
+        <p:nvSpPr>
+          <p:cNvPr id="4" name="Slide Number Placeholder 3"/>
+          <p:cNvSpPr>
+            <a:spLocks noGrp="1"/>
+          </p:cNvSpPr>
+          <p:nvPr>
+            <p:ph type="sldNum" sz="quarter" idx="10"/>
+          </p:nvPr>
+        </p:nvSpPr>
+        <p:spPr/>
+        <p:txBody>
+          <a:bodyPr/>
+          <a:lstStyle/>
+          <a:p>
+            <a:fld id="{F7021451-1387-4CA6-816F-3879F97B5CBC}" type="slidenum">
+              <a:rPr lang="en-US"/>
+              <a:t>60</a:t>
+            </a:fld>
+            <a:endParaRPr lang="en-US"/>
+          </a:p>
+        </p:txBody>
+      </p:sp>
+    </p:spTree>
+    <p:extLst>
+      <p:ext uri="{BB962C8B-B14F-4D97-AF65-F5344CB8AC3E}">
+        <p14:creationId xmlns:p14="http://schemas.microsoft.com/office/powerpoint/2010/main" val="1024086991"/>
+      </p:ext>
+    </p:extLst>
+  </p:cSld>
+  <p:clrMapOvr>
+    <a:masterClrMapping/>
+  </p:clrMapOvr>
+</p:notes>
+</file>
+
+<file path=ppt/notesSlides/notesSlide61.xml><?xml version="1.0" encoding="utf-8"?>
+<p:notes xmlns:a="http://schemas.openxmlformats.org/drawingml/2006/main" xmlns:r="http://schemas.openxmlformats.org/officeDocument/2006/relationships" xmlns:p="http://schemas.openxmlformats.org/presentationml/2006/main">
+  <p:cSld>
+    <p:spTree>
+      <p:nvGrpSpPr>
+        <p:cNvPr id="1" name=""/>
+        <p:cNvGrpSpPr/>
+        <p:nvPr/>
+      </p:nvGrpSpPr>
+      <p:grpSpPr>
+        <a:xfrm>
+          <a:off x="0" y="0"/>
+          <a:ext cx="0" cy="0"/>
+          <a:chOff x="0" y="0"/>
+          <a:chExt cx="0" cy="0"/>
+        </a:xfrm>
+      </p:grpSpPr>
+      <p:sp>
+        <p:nvSpPr>
+          <p:cNvPr id="2" name="Slide Image Placeholder 1"/>
+          <p:cNvSpPr>
+            <a:spLocks noGrp="1" noRot="1" noChangeAspect="1"/>
+          </p:cNvSpPr>
+          <p:nvPr>
+            <p:ph type="sldImg"/>
+          </p:nvPr>
+        </p:nvSpPr>
+        <p:spPr/>
+      </p:sp>
+      <p:sp>
+        <p:nvSpPr>
+          <p:cNvPr id="3" name="Notes Placeholder 2"/>
+          <p:cNvSpPr>
+            <a:spLocks noGrp="1"/>
+          </p:cNvSpPr>
+          <p:nvPr>
+            <p:ph type="body" idx="1"/>
+          </p:nvPr>
+        </p:nvSpPr>
+        <p:spPr/>
+        <p:txBody>
+          <a:bodyPr/>
+          <a:lstStyle/>
+          <a:p>
+            <a:r>
+              <a:rPr lang="en-US" dirty="0"/>
+              <a:t>These are the references and picture credits used to prepare this lesson.</a:t>
+            </a:r>
+            <a:endParaRPr lang="en-US" dirty="0"/>
+          </a:p>
+        </p:txBody>
+      </p:sp>
+      <p:sp>
+        <p:nvSpPr>
+          <p:cNvPr id="4" name="Slide Number Placeholder 3"/>
+          <p:cNvSpPr>
+            <a:spLocks noGrp="1"/>
+          </p:cNvSpPr>
+          <p:nvPr>
+            <p:ph type="sldNum" sz="quarter" idx="10"/>
+          </p:nvPr>
+        </p:nvSpPr>
+        <p:spPr/>
+        <p:txBody>
+          <a:bodyPr/>
+          <a:lstStyle/>
+          <a:p>
+            <a:fld id="{F7021451-1387-4CA6-816F-3879F97B5CBC}" type="slidenum">
+              <a:rPr lang="en-US"/>
+              <a:t>61</a:t>
+            </a:fld>
+            <a:endParaRPr lang="en-US"/>
+          </a:p>
+        </p:txBody>
+      </p:sp>
+    </p:spTree>
+    <p:extLst>
+      <p:ext uri="{BB962C8B-B14F-4D97-AF65-F5344CB8AC3E}">
+        <p14:creationId xmlns:p14="http://schemas.microsoft.com/office/powerpoint/2010/main" val="1024086991"/>
+      </p:ext>
+    </p:extLst>
+  </p:cSld>
+  <p:clrMapOvr>
+    <a:masterClrMapping/>
+  </p:clrMapOvr>
+</p:notes>
+</file>
+
 <file path=ppt/notesSlides/notesSlide7.xml><?xml version="1.0" encoding="utf-8"?>
 <p:notes xmlns:a="http://schemas.openxmlformats.org/drawingml/2006/main" xmlns:r="http://schemas.openxmlformats.org/officeDocument/2006/relationships" xmlns:p="http://schemas.openxmlformats.org/presentationml/2006/main">
   <p:cSld>
@@ -4865,7 +5666,7 @@
           <a:p>
             <a:r>
               <a:rPr lang="en-US" dirty="0"/>
-              <a:t>By the end of this lesson, you should be able to do three things. Number 1: read a graph of population by altitude. Number 2: compare tropical and temperate patterns. Number 3: explain the differences.</a:t>
+              <a:t>Take your time to copy this part; we will continue together.</a:t>
             </a:r>
             <a:endParaRPr lang="en-US" dirty="0"/>
           </a:p>
@@ -4953,7 +5754,7 @@
           <a:p>
             <a:r>
               <a:rPr lang="en-US" dirty="0"/>
-              <a:t>Let us first remember what you already know. Temperature falls with altitude. Cool highlands in the tropics can be crowded. Keep this in mind, because we shall build on it today.</a:t>
+              <a:t>By the end of this lesson, you should be able to do four things. Number 1: read a graph of population by altitude. Number 2: describe the general trend of population with altitude. Number 3: explain peaks and declines of density. Number 4: explain the exceptions in tropical highlands.</a:t>
             </a:r>
             <a:endParaRPr lang="en-US" dirty="0"/>
           </a:p>
@@ -5041,7 +5842,7 @@
           <a:p>
             <a:r>
               <a:rPr lang="en-US" dirty="0"/>
-              <a:t>Listen carefully to this situation from real life. A graph in the textbook shows that in Europe most people live below 500 m, but in Bolivia and Ethiopia many people live above 2,000 m. Learners must explain this difference. Think about it, because I am going to ask you some questions.</a:t>
+              <a:t>Let us first remember what you already know. Density generally falls with altitude. Temperature falls by about 0.6 °C every 100 m. The Bamenda Highlands are densely populated. Keep this in mind, because we shall build on it today.</a:t>
             </a:r>
             <a:endParaRPr lang="en-US" dirty="0"/>
           </a:p>
@@ -6421,7 +7222,7 @@
         <p:spPr>
           <a:xfrm>
             <a:off x="0" y="658368"/>
-            <a:ext cx="5120640" cy="5833872"/>
+            <a:ext cx="2468880" cy="5833872"/>
           </a:xfrm>
           <a:prstGeom prst="rect">
             <a:avLst/>
@@ -6436,8 +7237,8 @@
         </p:nvSpPr>
         <p:spPr>
           <a:xfrm>
-            <a:off x="5349240" y="1005840"/>
-            <a:ext cx="6522415" cy="731520"/>
+            <a:off x="2697480" y="1005840"/>
+            <a:ext cx="9174175" cy="731520"/>
           </a:xfrm>
           <a:prstGeom prst="rect">
             <a:avLst/>
@@ -6463,7 +7264,7 @@
                 <a:ea typeface="Times New Roman" pitchFamily="34" charset="-122"/>
                 <a:cs typeface="Times New Roman" pitchFamily="34" charset="-120"/>
               </a:rPr>
-              <a:t>Situation: Question 1</a:t>
+              <a:t>Situation in Real Life</a:t>
             </a:r>
             <a:endParaRPr lang="en-US" sz="3600" dirty="0"/>
           </a:p>
@@ -6477,8 +7278,8 @@
         </p:nvSpPr>
         <p:spPr>
           <a:xfrm>
-            <a:off x="5349240" y="1783080"/>
-            <a:ext cx="6522415" cy="4663440"/>
+            <a:off x="2697480" y="1783080"/>
+            <a:ext cx="9174175" cy="4663440"/>
           </a:xfrm>
           <a:prstGeom prst="rect">
             <a:avLst/>
@@ -6505,7 +7306,27 @@
                 <a:ea typeface="Times New Roman" pitchFamily="34" charset="-122"/>
                 <a:cs typeface="Times New Roman" pitchFamily="34" charset="-120"/>
               </a:rPr>
-              <a:t>What is the problem in the situation?</a:t>
+              <a:t>In the Mount Cameroon area, farms and towns such as Buea and Limbe are found on the lower slopes, but there are no villages near the summit (4,095 m).</a:t>
+            </a:r>
+            <a:endParaRPr lang="en-US" sz="4000" dirty="0"/>
+          </a:p>
+          <a:p>
+            <a:pPr algn="l" indent="0" marL="0">
+              <a:spcAft>
+                <a:spcPts val="800"/>
+              </a:spcAft>
+              <a:buNone/>
+            </a:pPr>
+            <a:r>
+              <a:rPr lang="en-US" sz="4000" dirty="0">
+                <a:solidFill>
+                  <a:srgbClr val="111111"/>
+                </a:solidFill>
+                <a:latin typeface="Times New Roman" pitchFamily="34" charset="0"/>
+                <a:ea typeface="Times New Roman" pitchFamily="34" charset="-122"/>
+                <a:cs typeface="Times New Roman" pitchFamily="34" charset="-120"/>
+              </a:rPr>
+              <a:t>Yet the Bamenda Highlands, at 1,000 to 2,000 m, are very crowded.</a:t>
             </a:r>
             <a:endParaRPr lang="en-US" sz="4000" dirty="0"/>
           </a:p>
@@ -6682,7 +7503,7 @@
                 <a:ea typeface="Times New Roman" pitchFamily="34" charset="-122"/>
                 <a:cs typeface="Times New Roman" pitchFamily="34" charset="-120"/>
               </a:rPr>
-              <a:t>Answer</a:t>
+              <a:t>Situation in Real Life (continued)</a:t>
             </a:r>
             <a:endParaRPr lang="en-US" sz="3600" dirty="0"/>
           </a:p>
@@ -6724,7 +7545,7 @@
                 <a:ea typeface="Times New Roman" pitchFamily="34" charset="-122"/>
                 <a:cs typeface="Times New Roman" pitchFamily="34" charset="-120"/>
               </a:rPr>
-              <a:t>Learners must explain two different patterns.</a:t>
+              <a:t>A student studying a graph of population and altitude asks: "How do I read this graph, and why does density not always fall with altitude?"</a:t>
             </a:r>
             <a:endParaRPr lang="en-US" sz="4000" dirty="0"/>
           </a:p>
@@ -6901,7 +7722,7 @@
                 <a:ea typeface="Times New Roman" pitchFamily="34" charset="-122"/>
                 <a:cs typeface="Times New Roman" pitchFamily="34" charset="-120"/>
               </a:rPr>
-              <a:t>Situation: Question 2</a:t>
+              <a:t>Situation: Question 1</a:t>
             </a:r>
             <a:endParaRPr lang="en-US" sz="3600" dirty="0"/>
           </a:p>
@@ -6943,7 +7764,7 @@
                 <a:ea typeface="Times New Roman" pitchFamily="34" charset="-122"/>
                 <a:cs typeface="Times New Roman" pitchFamily="34" charset="-120"/>
               </a:rPr>
-              <a:t>Where do Europeans mostly live?</a:t>
+              <a:t>What is the problem in the situation?</a:t>
             </a:r>
             <a:endParaRPr lang="en-US" sz="4000" dirty="0"/>
           </a:p>
@@ -7162,7 +7983,7 @@
                 <a:ea typeface="Times New Roman" pitchFamily="34" charset="-122"/>
                 <a:cs typeface="Times New Roman" pitchFamily="34" charset="-120"/>
               </a:rPr>
-              <a:t>On lowlands below 500 m.</a:t>
+              <a:t>The student cannot read and explain a graph of population and altitude.</a:t>
             </a:r>
             <a:endParaRPr lang="en-US" sz="4000" dirty="0"/>
           </a:p>
@@ -7339,7 +8160,7 @@
                 <a:ea typeface="Times New Roman" pitchFamily="34" charset="-122"/>
                 <a:cs typeface="Times New Roman" pitchFamily="34" charset="-120"/>
               </a:rPr>
-              <a:t>Situation: Question 3</a:t>
+              <a:t>Situation: Question 2</a:t>
             </a:r>
             <a:endParaRPr lang="en-US" sz="3600" dirty="0"/>
           </a:p>
@@ -7381,7 +8202,7 @@
                 <a:ea typeface="Times New Roman" pitchFamily="34" charset="-122"/>
                 <a:cs typeface="Times New Roman" pitchFamily="34" charset="-120"/>
               </a:rPr>
-              <a:t>Why do many tropical people live high up?</a:t>
+              <a:t>Why is there no village near the summit of Mount Cameroon?</a:t>
             </a:r>
             <a:endParaRPr lang="en-US" sz="4000" dirty="0"/>
           </a:p>
@@ -7558,7 +8379,7 @@
                 <a:ea typeface="Times New Roman" pitchFamily="34" charset="-122"/>
                 <a:cs typeface="Times New Roman" pitchFamily="34" charset="-120"/>
               </a:rPr>
-              <a:t>Possible Answer</a:t>
+              <a:t>Answer</a:t>
             </a:r>
             <a:endParaRPr lang="en-US" sz="3600" dirty="0"/>
           </a:p>
@@ -7600,7 +8421,7 @@
                 <a:ea typeface="Times New Roman" pitchFamily="34" charset="-122"/>
                 <a:cs typeface="Times New Roman" pitchFamily="34" charset="-120"/>
               </a:rPr>
-              <a:t>The highlands are cooler, healthier and fertile.</a:t>
+              <a:t>It is too cold, steep and high, with little oxygen.</a:t>
             </a:r>
             <a:endParaRPr lang="en-US" sz="4000" dirty="0"/>
           </a:p>
@@ -7712,7 +8533,7 @@
                 <a:ea typeface="Calibri" pitchFamily="34" charset="-122"/>
                 <a:cs typeface="Calibri" pitchFamily="34" charset="-120"/>
               </a:rPr>
-              <a:t>ACTION TO TAKE</a:t>
+              <a:t>REAL-LIFE SITUATION</a:t>
             </a:r>
             <a:endParaRPr lang="en-US" sz="1400" dirty="0"/>
           </a:p>
@@ -7777,7 +8598,7 @@
                 <a:ea typeface="Times New Roman" pitchFamily="34" charset="-122"/>
                 <a:cs typeface="Times New Roman" pitchFamily="34" charset="-120"/>
               </a:rPr>
-              <a:t>Action to Take</a:t>
+              <a:t>Situation: Question 3</a:t>
             </a:r>
             <a:endParaRPr lang="en-US" sz="3600" dirty="0"/>
           </a:p>
@@ -7819,7 +8640,7 @@
                 <a:ea typeface="Times New Roman" pitchFamily="34" charset="-122"/>
                 <a:cs typeface="Times New Roman" pitchFamily="34" charset="-120"/>
               </a:rPr>
-              <a:t>Interpret graphs of population and altitude to explain settlement.</a:t>
+              <a:t>Why are the Bamenda Highlands crowded?</a:t>
             </a:r>
             <a:endParaRPr lang="en-US" sz="4000" dirty="0"/>
           </a:p>
@@ -7931,7 +8752,7 @@
                 <a:ea typeface="Calibri" pitchFamily="34" charset="-122"/>
                 <a:cs typeface="Calibri" pitchFamily="34" charset="-120"/>
               </a:rPr>
-              <a:t>JUSTIFICATION</a:t>
+              <a:t>REAL-LIFE SITUATION</a:t>
             </a:r>
             <a:endParaRPr lang="en-US" sz="1400" dirty="0"/>
           </a:p>
@@ -7996,7 +8817,7 @@
                 <a:ea typeface="Times New Roman" pitchFamily="34" charset="-122"/>
                 <a:cs typeface="Times New Roman" pitchFamily="34" charset="-120"/>
               </a:rPr>
-              <a:t>Justification of the Lesson</a:t>
+              <a:t>Possible Answer</a:t>
             </a:r>
             <a:endParaRPr lang="en-US" sz="3600" dirty="0"/>
           </a:p>
@@ -8038,7 +8859,7 @@
                 <a:ea typeface="Times New Roman" pitchFamily="34" charset="-122"/>
                 <a:cs typeface="Times New Roman" pitchFamily="34" charset="-120"/>
               </a:rPr>
-              <a:t>This practical work helps us to read graphs and link population to relief and climate.</a:t>
+              <a:t>They are cool, healthy and fertile compared with the hot lowlands.</a:t>
             </a:r>
             <a:endParaRPr lang="en-US" sz="4000" dirty="0"/>
           </a:p>
@@ -8150,54 +8971,15 @@
                 <a:ea typeface="Calibri" pitchFamily="34" charset="-122"/>
                 <a:cs typeface="Calibri" pitchFamily="34" charset="-120"/>
               </a:rPr>
-              <a:t>1. READING THE GRAPH</a:t>
+              <a:t>ACTION TO TAKE</a:t>
             </a:r>
             <a:endParaRPr lang="en-US" sz="1400" dirty="0"/>
-          </a:p>
-        </p:txBody>
-      </p:sp>
-      <p:sp>
-        <p:nvSpPr>
-          <p:cNvPr id="3" name="Text 1"/>
-          <p:cNvSpPr/>
-          <p:nvPr/>
-        </p:nvSpPr>
-        <p:spPr>
-          <a:xfrm>
-            <a:off x="457200" y="1005840"/>
-            <a:ext cx="11277295" cy="731520"/>
-          </a:xfrm>
-          <a:prstGeom prst="rect">
-            <a:avLst/>
-          </a:prstGeom>
-          <a:noFill/>
-          <a:ln/>
-        </p:spPr>
-        <p:txBody>
-          <a:bodyPr wrap="square" lIns="0" tIns="0" rIns="0" bIns="0" rtlCol="0" anchor="ctr"/>
-          <a:lstStyle/>
-          <a:p>
-            <a:pPr algn="ctr" indent="0" marL="0">
-              <a:buNone/>
-            </a:pPr>
-            <a:r>
-              <a:rPr lang="en-US" sz="3600" b="1" dirty="0">
-                <a:solidFill>
-                  <a:srgbClr val="990011"/>
-                </a:solidFill>
-                <a:latin typeface="Times New Roman" pitchFamily="34" charset="0"/>
-                <a:ea typeface="Times New Roman" pitchFamily="34" charset="-122"/>
-                <a:cs typeface="Times New Roman" pitchFamily="34" charset="-120"/>
-              </a:rPr>
-              <a:t>Activity 1</a:t>
-            </a:r>
-            <a:endParaRPr lang="en-US" sz="3600" dirty="0"/>
           </a:p>
         </p:txBody>
       </p:sp>
       <p:pic>
         <p:nvPicPr>
-          <p:cNvPr id="4" name="Image 0" descr="/home/claude/f4/img/v2/altitude_pop_big.png">    </p:cNvPr>
+          <p:cNvPr id="3" name="Image 0" descr="/home/claude/f4/img/minesec_sheet.png">    </p:cNvPr>
           <p:cNvPicPr>
             <a:picLocks noChangeAspect="1"/>
           </p:cNvPicPr>
@@ -8211,8 +8993,8 @@
         </p:blipFill>
         <p:spPr>
           <a:xfrm>
-            <a:off x="1215564" y="1783080"/>
-            <a:ext cx="9760567" cy="4270248"/>
+            <a:off x="0" y="658368"/>
+            <a:ext cx="5120640" cy="5833872"/>
           </a:xfrm>
           <a:prstGeom prst="rect">
             <a:avLst/>
@@ -8221,14 +9003,14 @@
       </p:pic>
       <p:sp>
         <p:nvSpPr>
-          <p:cNvPr id="5" name="Text 2"/>
+          <p:cNvPr id="4" name="Text 1"/>
           <p:cNvSpPr/>
           <p:nvPr/>
         </p:nvSpPr>
         <p:spPr>
           <a:xfrm>
-            <a:off x="457200" y="6089904"/>
-            <a:ext cx="11277295" cy="347472"/>
+            <a:off x="5349240" y="1005840"/>
+            <a:ext cx="6522415" cy="731520"/>
           </a:xfrm>
           <a:prstGeom prst="rect">
             <a:avLst/>
@@ -8237,24 +9019,68 @@
           <a:ln/>
         </p:spPr>
         <p:txBody>
-          <a:bodyPr wrap="square" lIns="0" tIns="0" rIns="0" bIns="0" rtlCol="0" anchor="ctr"/>
+          <a:bodyPr wrap="square" lIns="0" tIns="0" rIns="0" bIns="0" rtlCol="0" anchor="ctr">
+            <a:normAutofit/>
+          </a:bodyPr>
           <a:lstStyle/>
           <a:p>
             <a:pPr algn="ctr" indent="0" marL="0">
               <a:buNone/>
             </a:pPr>
             <a:r>
-              <a:rPr lang="en-US" sz="1800" i="1" dirty="0">
-                <a:solidFill>
-                  <a:srgbClr val="555555"/>
+              <a:rPr lang="en-US" sz="3600" b="1" dirty="0">
+                <a:solidFill>
+                  <a:srgbClr val="990011"/>
                 </a:solidFill>
                 <a:latin typeface="Times New Roman" pitchFamily="34" charset="0"/>
                 <a:ea typeface="Times New Roman" pitchFamily="34" charset="-122"/>
                 <a:cs typeface="Times New Roman" pitchFamily="34" charset="-120"/>
               </a:rPr>
-              <a:t>Population by altitude in temperate and tropical lands (approximate).</a:t>
-            </a:r>
-            <a:endParaRPr lang="en-US" sz="1800" dirty="0"/>
+              <a:t>Action to Take</a:t>
+            </a:r>
+            <a:endParaRPr lang="en-US" sz="3600" dirty="0"/>
+          </a:p>
+        </p:txBody>
+      </p:sp>
+      <p:sp>
+        <p:nvSpPr>
+          <p:cNvPr id="5" name="Text 2"/>
+          <p:cNvSpPr/>
+          <p:nvPr/>
+        </p:nvSpPr>
+        <p:spPr>
+          <a:xfrm>
+            <a:off x="5349240" y="1783080"/>
+            <a:ext cx="6522415" cy="4663440"/>
+          </a:xfrm>
+          <a:prstGeom prst="rect">
+            <a:avLst/>
+          </a:prstGeom>
+          <a:noFill/>
+          <a:ln/>
+        </p:spPr>
+        <p:txBody>
+          <a:bodyPr wrap="square" lIns="0" tIns="0" rIns="0" bIns="0" rtlCol="0" anchor="t"/>
+          <a:lstStyle/>
+          <a:p>
+            <a:pPr algn="l" indent="0" marL="0">
+              <a:spcAft>
+                <a:spcPts val="800"/>
+              </a:spcAft>
+              <a:buNone/>
+            </a:pPr>
+            <a:r>
+              <a:rPr lang="en-US" sz="4000" dirty="0">
+                <a:solidFill>
+                  <a:srgbClr val="111111"/>
+                </a:solidFill>
+                <a:latin typeface="Times New Roman" pitchFamily="34" charset="0"/>
+                <a:ea typeface="Times New Roman" pitchFamily="34" charset="-122"/>
+                <a:cs typeface="Times New Roman" pitchFamily="34" charset="-120"/>
+              </a:rPr>
+              <a:t>Always describe the general trend first, then the exceptions, with figures read from the graph.</a:t>
+            </a:r>
+            <a:endParaRPr lang="en-US" sz="4000" dirty="0"/>
           </a:p>
         </p:txBody>
       </p:sp>
@@ -8364,7 +9190,7 @@
                 <a:ea typeface="Calibri" pitchFamily="34" charset="-122"/>
                 <a:cs typeface="Calibri" pitchFamily="34" charset="-120"/>
               </a:rPr>
-              <a:t>1. READING THE GRAPH</a:t>
+              <a:t>JUSTIFICATION</a:t>
             </a:r>
             <a:endParaRPr lang="en-US" sz="1400" dirty="0"/>
           </a:p>
@@ -8429,7 +9255,7 @@
                 <a:ea typeface="Times New Roman" pitchFamily="34" charset="-122"/>
                 <a:cs typeface="Times New Roman" pitchFamily="34" charset="-120"/>
               </a:rPr>
-              <a:t>Activity 1: Question</a:t>
+              <a:t>Justification of the Lesson</a:t>
             </a:r>
             <a:endParaRPr lang="en-US" sz="3600" dirty="0"/>
           </a:p>
@@ -8471,7 +9297,7 @@
                 <a:ea typeface="Times New Roman" pitchFamily="34" charset="-122"/>
                 <a:cs typeface="Times New Roman" pitchFamily="34" charset="-120"/>
               </a:rPr>
-              <a:t>Which altitude zone has the most people in tropical lands?</a:t>
+              <a:t>This practical work trains us to read graphs and to explain the role of altitude in the distribution of people.</a:t>
             </a:r>
             <a:endParaRPr lang="en-US" sz="4000" dirty="0"/>
           </a:p>
@@ -9178,15 +10004,54 @@
                 <a:ea typeface="Calibri" pitchFamily="34" charset="-122"/>
                 <a:cs typeface="Calibri" pitchFamily="34" charset="-120"/>
               </a:rPr>
-              <a:t>1. READING THE GRAPH</a:t>
+              <a:t>1. GENERAL TREND</a:t>
             </a:r>
             <a:endParaRPr lang="en-US" sz="1400" dirty="0"/>
+          </a:p>
+        </p:txBody>
+      </p:sp>
+      <p:sp>
+        <p:nvSpPr>
+          <p:cNvPr id="3" name="Text 1"/>
+          <p:cNvSpPr/>
+          <p:nvPr/>
+        </p:nvSpPr>
+        <p:spPr>
+          <a:xfrm>
+            <a:off x="457200" y="1005840"/>
+            <a:ext cx="11277295" cy="731520"/>
+          </a:xfrm>
+          <a:prstGeom prst="rect">
+            <a:avLst/>
+          </a:prstGeom>
+          <a:noFill/>
+          <a:ln/>
+        </p:spPr>
+        <p:txBody>
+          <a:bodyPr wrap="square" lIns="0" tIns="0" rIns="0" bIns="0" rtlCol="0" anchor="ctr"/>
+          <a:lstStyle/>
+          <a:p>
+            <a:pPr algn="ctr" indent="0" marL="0">
+              <a:buNone/>
+            </a:pPr>
+            <a:r>
+              <a:rPr lang="en-US" sz="3600" b="1" dirty="0">
+                <a:solidFill>
+                  <a:srgbClr val="990011"/>
+                </a:solidFill>
+                <a:latin typeface="Times New Roman" pitchFamily="34" charset="0"/>
+                <a:ea typeface="Times New Roman" pitchFamily="34" charset="-122"/>
+                <a:cs typeface="Times New Roman" pitchFamily="34" charset="-120"/>
+              </a:rPr>
+              <a:t>Activity 1</a:t>
+            </a:r>
+            <a:endParaRPr lang="en-US" sz="3600" dirty="0"/>
           </a:p>
         </p:txBody>
       </p:sp>
       <p:pic>
         <p:nvPicPr>
-          <p:cNvPr id="3" name="Image 0" descr="/home/claude/f4/img/minesec_sheet.png">    </p:cNvPr>
+          <p:cNvPr id="4" name="Image 0" descr="/home/claude/f4/img/v2/altitude_pop_big.png">    </p:cNvPr>
           <p:cNvPicPr>
             <a:picLocks noChangeAspect="1"/>
           </p:cNvPicPr>
@@ -9200,8 +10065,8 @@
         </p:blipFill>
         <p:spPr>
           <a:xfrm>
-            <a:off x="0" y="658368"/>
-            <a:ext cx="5120640" cy="5833872"/>
+            <a:off x="1215564" y="1783080"/>
+            <a:ext cx="9760567" cy="4270248"/>
           </a:xfrm>
           <a:prstGeom prst="rect">
             <a:avLst/>
@@ -9210,14 +10075,14 @@
       </p:pic>
       <p:sp>
         <p:nvSpPr>
-          <p:cNvPr id="4" name="Text 1"/>
+          <p:cNvPr id="5" name="Text 2"/>
           <p:cNvSpPr/>
           <p:nvPr/>
         </p:nvSpPr>
         <p:spPr>
           <a:xfrm>
-            <a:off x="5349240" y="1005840"/>
-            <a:ext cx="6522415" cy="731520"/>
+            <a:off x="457200" y="6089904"/>
+            <a:ext cx="11277295" cy="347472"/>
           </a:xfrm>
           <a:prstGeom prst="rect">
             <a:avLst/>
@@ -9226,68 +10091,24 @@
           <a:ln/>
         </p:spPr>
         <p:txBody>
-          <a:bodyPr wrap="square" lIns="0" tIns="0" rIns="0" bIns="0" rtlCol="0" anchor="ctr">
-            <a:normAutofit/>
-          </a:bodyPr>
+          <a:bodyPr wrap="square" lIns="0" tIns="0" rIns="0" bIns="0" rtlCol="0" anchor="ctr"/>
           <a:lstStyle/>
           <a:p>
             <a:pPr algn="ctr" indent="0" marL="0">
               <a:buNone/>
             </a:pPr>
             <a:r>
-              <a:rPr lang="en-US" sz="3600" b="1" dirty="0">
-                <a:solidFill>
-                  <a:srgbClr val="990011"/>
+              <a:rPr lang="en-US" sz="1800" i="1" dirty="0">
+                <a:solidFill>
+                  <a:srgbClr val="555555"/>
                 </a:solidFill>
                 <a:latin typeface="Times New Roman" pitchFamily="34" charset="0"/>
                 <a:ea typeface="Times New Roman" pitchFamily="34" charset="-122"/>
                 <a:cs typeface="Times New Roman" pitchFamily="34" charset="-120"/>
               </a:rPr>
-              <a:t>Activity 1: Answer</a:t>
-            </a:r>
-            <a:endParaRPr lang="en-US" sz="3600" dirty="0"/>
-          </a:p>
-        </p:txBody>
-      </p:sp>
-      <p:sp>
-        <p:nvSpPr>
-          <p:cNvPr id="5" name="Text 2"/>
-          <p:cNvSpPr/>
-          <p:nvPr/>
-        </p:nvSpPr>
-        <p:spPr>
-          <a:xfrm>
-            <a:off x="5349240" y="1783080"/>
-            <a:ext cx="6522415" cy="4663440"/>
-          </a:xfrm>
-          <a:prstGeom prst="rect">
-            <a:avLst/>
-          </a:prstGeom>
-          <a:noFill/>
-          <a:ln/>
-        </p:spPr>
-        <p:txBody>
-          <a:bodyPr wrap="square" lIns="0" tIns="0" rIns="0" bIns="0" rtlCol="0" anchor="t"/>
-          <a:lstStyle/>
-          <a:p>
-            <a:pPr algn="l" indent="0" marL="0">
-              <a:spcAft>
-                <a:spcPts val="800"/>
-              </a:spcAft>
-              <a:buNone/>
-            </a:pPr>
-            <a:r>
-              <a:rPr lang="en-US" sz="4000" dirty="0">
-                <a:solidFill>
-                  <a:srgbClr val="111111"/>
-                </a:solidFill>
-                <a:latin typeface="Times New Roman" pitchFamily="34" charset="0"/>
-                <a:ea typeface="Times New Roman" pitchFamily="34" charset="-122"/>
-                <a:cs typeface="Times New Roman" pitchFamily="34" charset="-120"/>
-              </a:rPr>
-              <a:t>The 1,000–2,000 m zone (about 32 %).</a:t>
-            </a:r>
-            <a:endParaRPr lang="en-US" sz="4000" dirty="0"/>
+              <a:t>Population by altitude.</a:t>
+            </a:r>
+            <a:endParaRPr lang="en-US" sz="1800" dirty="0"/>
           </a:p>
         </p:txBody>
       </p:sp>
@@ -9397,54 +10218,15 @@
                 <a:ea typeface="Calibri" pitchFamily="34" charset="-122"/>
                 <a:cs typeface="Calibri" pitchFamily="34" charset="-120"/>
               </a:rPr>
-              <a:t>2. TEMPERATE PATTERN</a:t>
+              <a:t>1. GENERAL TREND</a:t>
             </a:r>
             <a:endParaRPr lang="en-US" sz="1400" dirty="0"/>
-          </a:p>
-        </p:txBody>
-      </p:sp>
-      <p:sp>
-        <p:nvSpPr>
-          <p:cNvPr id="3" name="Text 1"/>
-          <p:cNvSpPr/>
-          <p:nvPr/>
-        </p:nvSpPr>
-        <p:spPr>
-          <a:xfrm>
-            <a:off x="457200" y="1005840"/>
-            <a:ext cx="11277295" cy="731520"/>
-          </a:xfrm>
-          <a:prstGeom prst="rect">
-            <a:avLst/>
-          </a:prstGeom>
-          <a:noFill/>
-          <a:ln/>
-        </p:spPr>
-        <p:txBody>
-          <a:bodyPr wrap="square" lIns="0" tIns="0" rIns="0" bIns="0" rtlCol="0" anchor="ctr"/>
-          <a:lstStyle/>
-          <a:p>
-            <a:pPr algn="ctr" indent="0" marL="0">
-              <a:buNone/>
-            </a:pPr>
-            <a:r>
-              <a:rPr lang="en-US" sz="3600" b="1" dirty="0">
-                <a:solidFill>
-                  <a:srgbClr val="990011"/>
-                </a:solidFill>
-                <a:latin typeface="Times New Roman" pitchFamily="34" charset="0"/>
-                <a:ea typeface="Times New Roman" pitchFamily="34" charset="-122"/>
-                <a:cs typeface="Times New Roman" pitchFamily="34" charset="-120"/>
-              </a:rPr>
-              <a:t>Activity 2</a:t>
-            </a:r>
-            <a:endParaRPr lang="en-US" sz="3600" dirty="0"/>
           </a:p>
         </p:txBody>
       </p:sp>
       <p:pic>
         <p:nvPicPr>
-          <p:cNvPr id="4" name="Image 0" descr="/home/claude/f4/img/v2/lsa_himalaya.jpg">    </p:cNvPr>
+          <p:cNvPr id="3" name="Image 0" descr="/home/claude/f4/img/minesec_sheet.png">    </p:cNvPr>
           <p:cNvPicPr>
             <a:picLocks noChangeAspect="1"/>
           </p:cNvPicPr>
@@ -9458,8 +10240,8 @@
         </p:blipFill>
         <p:spPr>
           <a:xfrm>
-            <a:off x="2246610" y="1783080"/>
-            <a:ext cx="7698475" cy="4270248"/>
+            <a:off x="0" y="658368"/>
+            <a:ext cx="5120640" cy="5833872"/>
           </a:xfrm>
           <a:prstGeom prst="rect">
             <a:avLst/>
@@ -9468,14 +10250,14 @@
       </p:pic>
       <p:sp>
         <p:nvSpPr>
-          <p:cNvPr id="5" name="Text 2"/>
+          <p:cNvPr id="4" name="Text 1"/>
           <p:cNvSpPr/>
           <p:nvPr/>
         </p:nvSpPr>
         <p:spPr>
           <a:xfrm>
-            <a:off x="457200" y="6089904"/>
-            <a:ext cx="11277295" cy="347472"/>
+            <a:off x="5349240" y="1005840"/>
+            <a:ext cx="6522415" cy="731520"/>
           </a:xfrm>
           <a:prstGeom prst="rect">
             <a:avLst/>
@@ -9484,24 +10266,68 @@
           <a:ln/>
         </p:spPr>
         <p:txBody>
-          <a:bodyPr wrap="square" lIns="0" tIns="0" rIns="0" bIns="0" rtlCol="0" anchor="ctr"/>
+          <a:bodyPr wrap="square" lIns="0" tIns="0" rIns="0" bIns="0" rtlCol="0" anchor="ctr">
+            <a:normAutofit/>
+          </a:bodyPr>
           <a:lstStyle/>
           <a:p>
             <a:pPr algn="ctr" indent="0" marL="0">
               <a:buNone/>
             </a:pPr>
             <a:r>
-              <a:rPr lang="en-US" sz="1800" i="1" dirty="0">
-                <a:solidFill>
-                  <a:srgbClr val="555555"/>
+              <a:rPr lang="en-US" sz="3600" b="1" dirty="0">
+                <a:solidFill>
+                  <a:srgbClr val="990011"/>
                 </a:solidFill>
                 <a:latin typeface="Times New Roman" pitchFamily="34" charset="0"/>
                 <a:ea typeface="Times New Roman" pitchFamily="34" charset="-122"/>
                 <a:cs typeface="Times New Roman" pitchFamily="34" charset="-120"/>
               </a:rPr>
-              <a:t>High, cold mountains.</a:t>
-            </a:r>
-            <a:endParaRPr lang="en-US" sz="1800" dirty="0"/>
+              <a:t>Activity 1: Question</a:t>
+            </a:r>
+            <a:endParaRPr lang="en-US" sz="3600" dirty="0"/>
+          </a:p>
+        </p:txBody>
+      </p:sp>
+      <p:sp>
+        <p:nvSpPr>
+          <p:cNvPr id="5" name="Text 2"/>
+          <p:cNvSpPr/>
+          <p:nvPr/>
+        </p:nvSpPr>
+        <p:spPr>
+          <a:xfrm>
+            <a:off x="5349240" y="1783080"/>
+            <a:ext cx="6522415" cy="4663440"/>
+          </a:xfrm>
+          <a:prstGeom prst="rect">
+            <a:avLst/>
+          </a:prstGeom>
+          <a:noFill/>
+          <a:ln/>
+        </p:spPr>
+        <p:txBody>
+          <a:bodyPr wrap="square" lIns="0" tIns="0" rIns="0" bIns="0" rtlCol="0" anchor="t"/>
+          <a:lstStyle/>
+          <a:p>
+            <a:pPr algn="l" indent="0" marL="0">
+              <a:spcAft>
+                <a:spcPts val="800"/>
+              </a:spcAft>
+              <a:buNone/>
+            </a:pPr>
+            <a:r>
+              <a:rPr lang="en-US" sz="4000" dirty="0">
+                <a:solidFill>
+                  <a:srgbClr val="111111"/>
+                </a:solidFill>
+                <a:latin typeface="Times New Roman" pitchFamily="34" charset="0"/>
+                <a:ea typeface="Times New Roman" pitchFamily="34" charset="-122"/>
+                <a:cs typeface="Times New Roman" pitchFamily="34" charset="-120"/>
+              </a:rPr>
+              <a:t>In temperate lands, in which altitude class do most people live?</a:t>
+            </a:r>
+            <a:endParaRPr lang="en-US" sz="4000" dirty="0"/>
           </a:p>
         </p:txBody>
       </p:sp>
@@ -9611,7 +10437,7 @@
                 <a:ea typeface="Calibri" pitchFamily="34" charset="-122"/>
                 <a:cs typeface="Calibri" pitchFamily="34" charset="-120"/>
               </a:rPr>
-              <a:t>2. TEMPERATE PATTERN</a:t>
+              <a:t>1. GENERAL TREND</a:t>
             </a:r>
             <a:endParaRPr lang="en-US" sz="1400" dirty="0"/>
           </a:p>
@@ -9676,7 +10502,7 @@
                 <a:ea typeface="Times New Roman" pitchFamily="34" charset="-122"/>
                 <a:cs typeface="Times New Roman" pitchFamily="34" charset="-120"/>
               </a:rPr>
-              <a:t>Activity 2: Question</a:t>
+              <a:t>Activity 1: Answer</a:t>
             </a:r>
             <a:endParaRPr lang="en-US" sz="3600" dirty="0"/>
           </a:p>
@@ -9718,7 +10544,7 @@
                 <a:ea typeface="Times New Roman" pitchFamily="34" charset="-122"/>
                 <a:cs typeface="Times New Roman" pitchFamily="34" charset="-120"/>
               </a:rPr>
-              <a:t>Why does population fall quickly with height in temperate lands?</a:t>
+              <a:t>In the lowest class, 0–500 m.</a:t>
             </a:r>
             <a:endParaRPr lang="en-US" sz="4000" dirty="0"/>
           </a:p>
@@ -9830,15 +10656,54 @@
                 <a:ea typeface="Calibri" pitchFamily="34" charset="-122"/>
                 <a:cs typeface="Calibri" pitchFamily="34" charset="-120"/>
               </a:rPr>
-              <a:t>2. TEMPERATE PATTERN</a:t>
+              <a:t>1. GENERAL TREND</a:t>
             </a:r>
             <a:endParaRPr lang="en-US" sz="1400" dirty="0"/>
+          </a:p>
+        </p:txBody>
+      </p:sp>
+      <p:sp>
+        <p:nvSpPr>
+          <p:cNvPr id="3" name="Text 1"/>
+          <p:cNvSpPr/>
+          <p:nvPr/>
+        </p:nvSpPr>
+        <p:spPr>
+          <a:xfrm>
+            <a:off x="457200" y="1005840"/>
+            <a:ext cx="11277295" cy="731520"/>
+          </a:xfrm>
+          <a:prstGeom prst="rect">
+            <a:avLst/>
+          </a:prstGeom>
+          <a:noFill/>
+          <a:ln/>
+        </p:spPr>
+        <p:txBody>
+          <a:bodyPr wrap="square" lIns="0" tIns="0" rIns="0" bIns="0" rtlCol="0" anchor="ctr"/>
+          <a:lstStyle/>
+          <a:p>
+            <a:pPr algn="ctr" indent="0" marL="0">
+              <a:buNone/>
+            </a:pPr>
+            <a:r>
+              <a:rPr lang="en-US" sz="3600" b="1" dirty="0">
+                <a:solidFill>
+                  <a:srgbClr val="990011"/>
+                </a:solidFill>
+                <a:latin typeface="Times New Roman" pitchFamily="34" charset="0"/>
+                <a:ea typeface="Times New Roman" pitchFamily="34" charset="-122"/>
+                <a:cs typeface="Times New Roman" pitchFamily="34" charset="-120"/>
+              </a:rPr>
+              <a:t>Activity 2</a:t>
+            </a:r>
+            <a:endParaRPr lang="en-US" sz="3600" dirty="0"/>
           </a:p>
         </p:txBody>
       </p:sp>
       <p:pic>
         <p:nvPicPr>
-          <p:cNvPr id="3" name="Image 0" descr="/home/claude/f4/img/minesec_sheet.png">    </p:cNvPr>
+          <p:cNvPr id="4" name="Image 0" descr="/home/claude/f4/img/v2/lsa_himalaya.jpg">    </p:cNvPr>
           <p:cNvPicPr>
             <a:picLocks noChangeAspect="1"/>
           </p:cNvPicPr>
@@ -9852,8 +10717,8 @@
         </p:blipFill>
         <p:spPr>
           <a:xfrm>
-            <a:off x="0" y="658368"/>
-            <a:ext cx="5120640" cy="5833872"/>
+            <a:off x="2246610" y="1783080"/>
+            <a:ext cx="7698475" cy="4270248"/>
           </a:xfrm>
           <a:prstGeom prst="rect">
             <a:avLst/>
@@ -9862,14 +10727,14 @@
       </p:pic>
       <p:sp>
         <p:nvSpPr>
-          <p:cNvPr id="4" name="Text 1"/>
+          <p:cNvPr id="5" name="Text 2"/>
           <p:cNvSpPr/>
           <p:nvPr/>
         </p:nvSpPr>
         <p:spPr>
           <a:xfrm>
-            <a:off x="5349240" y="1005840"/>
-            <a:ext cx="6522415" cy="731520"/>
+            <a:off x="457200" y="6089904"/>
+            <a:ext cx="11277295" cy="347472"/>
           </a:xfrm>
           <a:prstGeom prst="rect">
             <a:avLst/>
@@ -9878,68 +10743,24 @@
           <a:ln/>
         </p:spPr>
         <p:txBody>
-          <a:bodyPr wrap="square" lIns="0" tIns="0" rIns="0" bIns="0" rtlCol="0" anchor="ctr">
-            <a:normAutofit/>
-          </a:bodyPr>
+          <a:bodyPr wrap="square" lIns="0" tIns="0" rIns="0" bIns="0" rtlCol="0" anchor="ctr"/>
           <a:lstStyle/>
           <a:p>
             <a:pPr algn="ctr" indent="0" marL="0">
               <a:buNone/>
             </a:pPr>
             <a:r>
-              <a:rPr lang="en-US" sz="3600" b="1" dirty="0">
-                <a:solidFill>
-                  <a:srgbClr val="990011"/>
+              <a:rPr lang="en-US" sz="1800" i="1" dirty="0">
+                <a:solidFill>
+                  <a:srgbClr val="555555"/>
                 </a:solidFill>
                 <a:latin typeface="Times New Roman" pitchFamily="34" charset="0"/>
                 <a:ea typeface="Times New Roman" pitchFamily="34" charset="-122"/>
                 <a:cs typeface="Times New Roman" pitchFamily="34" charset="-120"/>
               </a:rPr>
-              <a:t>Activity 2: Answer</a:t>
-            </a:r>
-            <a:endParaRPr lang="en-US" sz="3600" dirty="0"/>
-          </a:p>
-        </p:txBody>
-      </p:sp>
-      <p:sp>
-        <p:nvSpPr>
-          <p:cNvPr id="5" name="Text 2"/>
-          <p:cNvSpPr/>
-          <p:nvPr/>
-        </p:nvSpPr>
-        <p:spPr>
-          <a:xfrm>
-            <a:off x="5349240" y="1783080"/>
-            <a:ext cx="6522415" cy="4663440"/>
-          </a:xfrm>
-          <a:prstGeom prst="rect">
-            <a:avLst/>
-          </a:prstGeom>
-          <a:noFill/>
-          <a:ln/>
-        </p:spPr>
-        <p:txBody>
-          <a:bodyPr wrap="square" lIns="0" tIns="0" rIns="0" bIns="0" rtlCol="0" anchor="t"/>
-          <a:lstStyle/>
-          <a:p>
-            <a:pPr algn="l" indent="0" marL="0">
-              <a:spcAft>
-                <a:spcPts val="800"/>
-              </a:spcAft>
-              <a:buNone/>
-            </a:pPr>
-            <a:r>
-              <a:rPr lang="en-US" sz="4000" dirty="0">
-                <a:solidFill>
-                  <a:srgbClr val="111111"/>
-                </a:solidFill>
-                <a:latin typeface="Times New Roman" pitchFamily="34" charset="0"/>
-                <a:ea typeface="Times New Roman" pitchFamily="34" charset="-122"/>
-                <a:cs typeface="Times New Roman" pitchFamily="34" charset="-120"/>
-              </a:rPr>
-              <a:t>High areas are cold, snowy and have poor soils.</a:t>
-            </a:r>
-            <a:endParaRPr lang="en-US" sz="4000" dirty="0"/>
+              <a:t>High mountains.</a:t>
+            </a:r>
+            <a:endParaRPr lang="en-US" sz="1800" dirty="0"/>
           </a:p>
         </p:txBody>
       </p:sp>
@@ -10049,54 +10870,15 @@
                 <a:ea typeface="Calibri" pitchFamily="34" charset="-122"/>
                 <a:cs typeface="Calibri" pitchFamily="34" charset="-120"/>
               </a:rPr>
-              <a:t>3. TROPICAL PATTERN</a:t>
+              <a:t>1. GENERAL TREND</a:t>
             </a:r>
             <a:endParaRPr lang="en-US" sz="1400" dirty="0"/>
-          </a:p>
-        </p:txBody>
-      </p:sp>
-      <p:sp>
-        <p:nvSpPr>
-          <p:cNvPr id="3" name="Text 1"/>
-          <p:cNvSpPr/>
-          <p:nvPr/>
-        </p:nvSpPr>
-        <p:spPr>
-          <a:xfrm>
-            <a:off x="457200" y="1005840"/>
-            <a:ext cx="11277295" cy="731520"/>
-          </a:xfrm>
-          <a:prstGeom prst="rect">
-            <a:avLst/>
-          </a:prstGeom>
-          <a:noFill/>
-          <a:ln/>
-        </p:spPr>
-        <p:txBody>
-          <a:bodyPr wrap="square" lIns="0" tIns="0" rIns="0" bIns="0" rtlCol="0" anchor="ctr"/>
-          <a:lstStyle/>
-          <a:p>
-            <a:pPr algn="ctr" indent="0" marL="0">
-              <a:buNone/>
-            </a:pPr>
-            <a:r>
-              <a:rPr lang="en-US" sz="3600" b="1" dirty="0">
-                <a:solidFill>
-                  <a:srgbClr val="990011"/>
-                </a:solidFill>
-                <a:latin typeface="Times New Roman" pitchFamily="34" charset="0"/>
-                <a:ea typeface="Times New Roman" pitchFamily="34" charset="-122"/>
-                <a:cs typeface="Times New Roman" pitchFamily="34" charset="-120"/>
-              </a:rPr>
-              <a:t>Activity 3</a:t>
-            </a:r>
-            <a:endParaRPr lang="en-US" sz="3600" dirty="0"/>
           </a:p>
         </p:txBody>
       </p:sp>
       <p:pic>
         <p:nvPicPr>
-          <p:cNvPr id="4" name="Image 0" descr="/home/claude/f4/img/v2/usa_lapaz.jpg">    </p:cNvPr>
+          <p:cNvPr id="3" name="Image 0" descr="/home/claude/f4/img/minesec_sheet.png">    </p:cNvPr>
           <p:cNvPicPr>
             <a:picLocks noChangeAspect="1"/>
           </p:cNvPicPr>
@@ -10110,8 +10892,8 @@
         </p:blipFill>
         <p:spPr>
           <a:xfrm>
-            <a:off x="2246610" y="1783080"/>
-            <a:ext cx="7698475" cy="4270248"/>
+            <a:off x="0" y="658368"/>
+            <a:ext cx="5120640" cy="5833872"/>
           </a:xfrm>
           <a:prstGeom prst="rect">
             <a:avLst/>
@@ -10120,14 +10902,14 @@
       </p:pic>
       <p:sp>
         <p:nvSpPr>
-          <p:cNvPr id="5" name="Text 2"/>
+          <p:cNvPr id="4" name="Text 1"/>
           <p:cNvSpPr/>
           <p:nvPr/>
         </p:nvSpPr>
         <p:spPr>
           <a:xfrm>
-            <a:off x="457200" y="6089904"/>
-            <a:ext cx="11277295" cy="347472"/>
+            <a:off x="5349240" y="1005840"/>
+            <a:ext cx="6522415" cy="731520"/>
           </a:xfrm>
           <a:prstGeom prst="rect">
             <a:avLst/>
@@ -10136,24 +10918,68 @@
           <a:ln/>
         </p:spPr>
         <p:txBody>
-          <a:bodyPr wrap="square" lIns="0" tIns="0" rIns="0" bIns="0" rtlCol="0" anchor="ctr"/>
+          <a:bodyPr wrap="square" lIns="0" tIns="0" rIns="0" bIns="0" rtlCol="0" anchor="ctr">
+            <a:normAutofit/>
+          </a:bodyPr>
           <a:lstStyle/>
           <a:p>
             <a:pPr algn="ctr" indent="0" marL="0">
               <a:buNone/>
             </a:pPr>
             <a:r>
-              <a:rPr lang="en-US" sz="1800" i="1" dirty="0">
-                <a:solidFill>
-                  <a:srgbClr val="555555"/>
+              <a:rPr lang="en-US" sz="3600" b="1" dirty="0">
+                <a:solidFill>
+                  <a:srgbClr val="990011"/>
                 </a:solidFill>
                 <a:latin typeface="Times New Roman" pitchFamily="34" charset="0"/>
                 <a:ea typeface="Times New Roman" pitchFamily="34" charset="-122"/>
                 <a:cs typeface="Times New Roman" pitchFamily="34" charset="-120"/>
               </a:rPr>
-              <a:t>La Paz, Bolivia, a large city at about 3,600 m.</a:t>
-            </a:r>
-            <a:endParaRPr lang="en-US" sz="1800" dirty="0"/>
+              <a:t>Activity 2: Question</a:t>
+            </a:r>
+            <a:endParaRPr lang="en-US" sz="3600" dirty="0"/>
+          </a:p>
+        </p:txBody>
+      </p:sp>
+      <p:sp>
+        <p:nvSpPr>
+          <p:cNvPr id="5" name="Text 2"/>
+          <p:cNvSpPr/>
+          <p:nvPr/>
+        </p:nvSpPr>
+        <p:spPr>
+          <a:xfrm>
+            <a:off x="5349240" y="1783080"/>
+            <a:ext cx="6522415" cy="4663440"/>
+          </a:xfrm>
+          <a:prstGeom prst="rect">
+            <a:avLst/>
+          </a:prstGeom>
+          <a:noFill/>
+          <a:ln/>
+        </p:spPr>
+        <p:txBody>
+          <a:bodyPr wrap="square" lIns="0" tIns="0" rIns="0" bIns="0" rtlCol="0" anchor="t"/>
+          <a:lstStyle/>
+          <a:p>
+            <a:pPr algn="l" indent="0" marL="0">
+              <a:spcAft>
+                <a:spcPts val="800"/>
+              </a:spcAft>
+              <a:buNone/>
+            </a:pPr>
+            <a:r>
+              <a:rPr lang="en-US" sz="4000" dirty="0">
+                <a:solidFill>
+                  <a:srgbClr val="111111"/>
+                </a:solidFill>
+                <a:latin typeface="Times New Roman" pitchFamily="34" charset="0"/>
+                <a:ea typeface="Times New Roman" pitchFamily="34" charset="-122"/>
+                <a:cs typeface="Times New Roman" pitchFamily="34" charset="-120"/>
+              </a:rPr>
+              <a:t>Give two reasons why density is very low above 3,000 m.</a:t>
+            </a:r>
+            <a:endParaRPr lang="en-US" sz="4000" dirty="0"/>
           </a:p>
         </p:txBody>
       </p:sp>
@@ -10263,7 +11089,7 @@
                 <a:ea typeface="Calibri" pitchFamily="34" charset="-122"/>
                 <a:cs typeface="Calibri" pitchFamily="34" charset="-120"/>
               </a:rPr>
-              <a:t>3. TROPICAL PATTERN</a:t>
+              <a:t>1. GENERAL TREND</a:t>
             </a:r>
             <a:endParaRPr lang="en-US" sz="1400" dirty="0"/>
           </a:p>
@@ -10328,7 +11154,7 @@
                 <a:ea typeface="Times New Roman" pitchFamily="34" charset="-122"/>
                 <a:cs typeface="Times New Roman" pitchFamily="34" charset="-120"/>
               </a:rPr>
-              <a:t>Activity 3: Question</a:t>
+              <a:t>Activity 2: Answer</a:t>
             </a:r>
             <a:endParaRPr lang="en-US" sz="3600" dirty="0"/>
           </a:p>
@@ -10370,7 +11196,7 @@
                 <a:ea typeface="Times New Roman" pitchFamily="34" charset="-122"/>
                 <a:cs typeface="Times New Roman" pitchFamily="34" charset="-120"/>
               </a:rPr>
-              <a:t>Why do many people live high in the Andes?</a:t>
+              <a:t>Cold temperatures, little oxygen, steep slopes and poor soils.</a:t>
             </a:r>
             <a:endParaRPr lang="en-US" sz="4000" dirty="0"/>
           </a:p>
@@ -10482,15 +11308,54 @@
                 <a:ea typeface="Calibri" pitchFamily="34" charset="-122"/>
                 <a:cs typeface="Calibri" pitchFamily="34" charset="-120"/>
               </a:rPr>
-              <a:t>3. TROPICAL PATTERN</a:t>
+              <a:t>2. EXCEPTIONS</a:t>
             </a:r>
             <a:endParaRPr lang="en-US" sz="1400" dirty="0"/>
+          </a:p>
+        </p:txBody>
+      </p:sp>
+      <p:sp>
+        <p:nvSpPr>
+          <p:cNvPr id="3" name="Text 1"/>
+          <p:cNvSpPr/>
+          <p:nvPr/>
+        </p:nvSpPr>
+        <p:spPr>
+          <a:xfrm>
+            <a:off x="457200" y="1005840"/>
+            <a:ext cx="11277295" cy="731520"/>
+          </a:xfrm>
+          <a:prstGeom prst="rect">
+            <a:avLst/>
+          </a:prstGeom>
+          <a:noFill/>
+          <a:ln/>
+        </p:spPr>
+        <p:txBody>
+          <a:bodyPr wrap="square" lIns="0" tIns="0" rIns="0" bIns="0" rtlCol="0" anchor="ctr"/>
+          <a:lstStyle/>
+          <a:p>
+            <a:pPr algn="ctr" indent="0" marL="0">
+              <a:buNone/>
+            </a:pPr>
+            <a:r>
+              <a:rPr lang="en-US" sz="3600" b="1" dirty="0">
+                <a:solidFill>
+                  <a:srgbClr val="990011"/>
+                </a:solidFill>
+                <a:latin typeface="Times New Roman" pitchFamily="34" charset="0"/>
+                <a:ea typeface="Times New Roman" pitchFamily="34" charset="-122"/>
+                <a:cs typeface="Times New Roman" pitchFamily="34" charset="-120"/>
+              </a:rPr>
+              <a:t>Activity 3</a:t>
+            </a:r>
+            <a:endParaRPr lang="en-US" sz="3600" dirty="0"/>
           </a:p>
         </p:txBody>
       </p:sp>
       <p:pic>
         <p:nvPicPr>
-          <p:cNvPr id="3" name="Image 0" descr="/home/claude/f4/img/minesec_sheet.png">    </p:cNvPr>
+          <p:cNvPr id="4" name="Image 0" descr="/home/claude/f4/img/v2/altitude_table_big.png">    </p:cNvPr>
           <p:cNvPicPr>
             <a:picLocks noChangeAspect="1"/>
           </p:cNvPicPr>
@@ -10504,8 +11369,8 @@
         </p:blipFill>
         <p:spPr>
           <a:xfrm>
-            <a:off x="0" y="658368"/>
-            <a:ext cx="5120640" cy="5833872"/>
+            <a:off x="629930" y="1783080"/>
+            <a:ext cx="10931835" cy="4270248"/>
           </a:xfrm>
           <a:prstGeom prst="rect">
             <a:avLst/>
@@ -10514,14 +11379,14 @@
       </p:pic>
       <p:sp>
         <p:nvSpPr>
-          <p:cNvPr id="4" name="Text 1"/>
+          <p:cNvPr id="5" name="Text 2"/>
           <p:cNvSpPr/>
           <p:nvPr/>
         </p:nvSpPr>
         <p:spPr>
           <a:xfrm>
-            <a:off x="5349240" y="1005840"/>
-            <a:ext cx="6522415" cy="731520"/>
+            <a:off x="457200" y="6089904"/>
+            <a:ext cx="11277295" cy="347472"/>
           </a:xfrm>
           <a:prstGeom prst="rect">
             <a:avLst/>
@@ -10530,68 +11395,24 @@
           <a:ln/>
         </p:spPr>
         <p:txBody>
-          <a:bodyPr wrap="square" lIns="0" tIns="0" rIns="0" bIns="0" rtlCol="0" anchor="ctr">
-            <a:normAutofit/>
-          </a:bodyPr>
+          <a:bodyPr wrap="square" lIns="0" tIns="0" rIns="0" bIns="0" rtlCol="0" anchor="ctr"/>
           <a:lstStyle/>
           <a:p>
             <a:pPr algn="ctr" indent="0" marL="0">
               <a:buNone/>
             </a:pPr>
             <a:r>
-              <a:rPr lang="en-US" sz="3600" b="1" dirty="0">
-                <a:solidFill>
-                  <a:srgbClr val="990011"/>
+              <a:rPr lang="en-US" sz="1800" i="1" dirty="0">
+                <a:solidFill>
+                  <a:srgbClr val="555555"/>
                 </a:solidFill>
                 <a:latin typeface="Times New Roman" pitchFamily="34" charset="0"/>
                 <a:ea typeface="Times New Roman" pitchFamily="34" charset="-122"/>
                 <a:cs typeface="Times New Roman" pitchFamily="34" charset="-120"/>
               </a:rPr>
-              <a:t>Activity 3: Answer</a:t>
-            </a:r>
-            <a:endParaRPr lang="en-US" sz="3600" dirty="0"/>
-          </a:p>
-        </p:txBody>
-      </p:sp>
-      <p:sp>
-        <p:nvSpPr>
-          <p:cNvPr id="5" name="Text 2"/>
-          <p:cNvSpPr/>
-          <p:nvPr/>
-        </p:nvSpPr>
-        <p:spPr>
-          <a:xfrm>
-            <a:off x="5349240" y="1783080"/>
-            <a:ext cx="6522415" cy="4663440"/>
-          </a:xfrm>
-          <a:prstGeom prst="rect">
-            <a:avLst/>
-          </a:prstGeom>
-          <a:noFill/>
-          <a:ln/>
-        </p:spPr>
-        <p:txBody>
-          <a:bodyPr wrap="square" lIns="0" tIns="0" rIns="0" bIns="0" rtlCol="0" anchor="t"/>
-          <a:lstStyle/>
-          <a:p>
-            <a:pPr algn="l" indent="0" marL="0">
-              <a:spcAft>
-                <a:spcPts val="800"/>
-              </a:spcAft>
-              <a:buNone/>
-            </a:pPr>
-            <a:r>
-              <a:rPr lang="en-US" sz="4000" dirty="0">
-                <a:solidFill>
-                  <a:srgbClr val="111111"/>
-                </a:solidFill>
-                <a:latin typeface="Times New Roman" pitchFamily="34" charset="0"/>
-                <a:ea typeface="Times New Roman" pitchFamily="34" charset="-122"/>
-                <a:cs typeface="Times New Roman" pitchFamily="34" charset="-120"/>
-              </a:rPr>
-              <a:t>The lowlands are hot and unhealthy; the high plateaus are cooler and have mines and farms.</a:t>
-            </a:r>
-            <a:endParaRPr lang="en-US" sz="4000" dirty="0"/>
+              <a:t>Towns, altitude and temperature in Cameroon.</a:t>
+            </a:r>
+            <a:endParaRPr lang="en-US" sz="1800" dirty="0"/>
           </a:p>
         </p:txBody>
       </p:sp>
@@ -10701,54 +11522,15 @@
                 <a:ea typeface="Calibri" pitchFamily="34" charset="-122"/>
                 <a:cs typeface="Calibri" pitchFamily="34" charset="-120"/>
               </a:rPr>
-              <a:t>3. TROPICAL PATTERN: CAMEROON</a:t>
+              <a:t>2. EXCEPTIONS</a:t>
             </a:r>
             <a:endParaRPr lang="en-US" sz="1400" dirty="0"/>
-          </a:p>
-        </p:txBody>
-      </p:sp>
-      <p:sp>
-        <p:nvSpPr>
-          <p:cNvPr id="3" name="Text 1"/>
-          <p:cNvSpPr/>
-          <p:nvPr/>
-        </p:nvSpPr>
-        <p:spPr>
-          <a:xfrm>
-            <a:off x="457200" y="1005840"/>
-            <a:ext cx="11277295" cy="731520"/>
-          </a:xfrm>
-          <a:prstGeom prst="rect">
-            <a:avLst/>
-          </a:prstGeom>
-          <a:noFill/>
-          <a:ln/>
-        </p:spPr>
-        <p:txBody>
-          <a:bodyPr wrap="square" lIns="0" tIns="0" rIns="0" bIns="0" rtlCol="0" anchor="ctr"/>
-          <a:lstStyle/>
-          <a:p>
-            <a:pPr algn="ctr" indent="0" marL="0">
-              <a:buNone/>
-            </a:pPr>
-            <a:r>
-              <a:rPr lang="en-US" sz="3600" b="1" dirty="0">
-                <a:solidFill>
-                  <a:srgbClr val="990011"/>
-                </a:solidFill>
-                <a:latin typeface="Times New Roman" pitchFamily="34" charset="0"/>
-                <a:ea typeface="Times New Roman" pitchFamily="34" charset="-122"/>
-                <a:cs typeface="Times New Roman" pitchFamily="34" charset="-120"/>
-              </a:rPr>
-              <a:t>Activity 4</a:t>
-            </a:r>
-            <a:endParaRPr lang="en-US" sz="3600" dirty="0"/>
           </a:p>
         </p:txBody>
       </p:sp>
       <p:pic>
         <p:nvPicPr>
-          <p:cNvPr id="4" name="Image 0" descr="/home/claude/f4/img/v2/altitude_table_big.png">    </p:cNvPr>
+          <p:cNvPr id="3" name="Image 0" descr="/home/claude/f4/img/minesec_sheet.png">    </p:cNvPr>
           <p:cNvPicPr>
             <a:picLocks noChangeAspect="1"/>
           </p:cNvPicPr>
@@ -10762,8 +11544,8 @@
         </p:blipFill>
         <p:spPr>
           <a:xfrm>
-            <a:off x="629930" y="1783080"/>
-            <a:ext cx="10931835" cy="4270248"/>
+            <a:off x="0" y="658368"/>
+            <a:ext cx="5120640" cy="5833872"/>
           </a:xfrm>
           <a:prstGeom prst="rect">
             <a:avLst/>
@@ -10772,14 +11554,14 @@
       </p:pic>
       <p:sp>
         <p:nvSpPr>
-          <p:cNvPr id="5" name="Text 2"/>
+          <p:cNvPr id="4" name="Text 1"/>
           <p:cNvSpPr/>
           <p:nvPr/>
         </p:nvSpPr>
         <p:spPr>
           <a:xfrm>
-            <a:off x="457200" y="6089904"/>
-            <a:ext cx="11277295" cy="347472"/>
+            <a:off x="5349240" y="1005840"/>
+            <a:ext cx="6522415" cy="731520"/>
           </a:xfrm>
           <a:prstGeom prst="rect">
             <a:avLst/>
@@ -10788,24 +11570,68 @@
           <a:ln/>
         </p:spPr>
         <p:txBody>
-          <a:bodyPr wrap="square" lIns="0" tIns="0" rIns="0" bIns="0" rtlCol="0" anchor="ctr"/>
+          <a:bodyPr wrap="square" lIns="0" tIns="0" rIns="0" bIns="0" rtlCol="0" anchor="ctr">
+            <a:normAutofit/>
+          </a:bodyPr>
           <a:lstStyle/>
           <a:p>
             <a:pPr algn="ctr" indent="0" marL="0">
               <a:buNone/>
             </a:pPr>
             <a:r>
-              <a:rPr lang="en-US" sz="1800" i="1" dirty="0">
-                <a:solidFill>
-                  <a:srgbClr val="555555"/>
+              <a:rPr lang="en-US" sz="3600" b="1" dirty="0">
+                <a:solidFill>
+                  <a:srgbClr val="990011"/>
                 </a:solidFill>
                 <a:latin typeface="Times New Roman" pitchFamily="34" charset="0"/>
                 <a:ea typeface="Times New Roman" pitchFamily="34" charset="-122"/>
                 <a:cs typeface="Times New Roman" pitchFamily="34" charset="-120"/>
               </a:rPr>
-              <a:t>Altitude and density in Cameroon.</a:t>
-            </a:r>
-            <a:endParaRPr lang="en-US" sz="1800" dirty="0"/>
+              <a:t>Activity 3: Question</a:t>
+            </a:r>
+            <a:endParaRPr lang="en-US" sz="3600" dirty="0"/>
+          </a:p>
+        </p:txBody>
+      </p:sp>
+      <p:sp>
+        <p:nvSpPr>
+          <p:cNvPr id="5" name="Text 2"/>
+          <p:cNvSpPr/>
+          <p:nvPr/>
+        </p:nvSpPr>
+        <p:spPr>
+          <a:xfrm>
+            <a:off x="5349240" y="1783080"/>
+            <a:ext cx="6522415" cy="4663440"/>
+          </a:xfrm>
+          <a:prstGeom prst="rect">
+            <a:avLst/>
+          </a:prstGeom>
+          <a:noFill/>
+          <a:ln/>
+        </p:spPr>
+        <p:txBody>
+          <a:bodyPr wrap="square" lIns="0" tIns="0" rIns="0" bIns="0" rtlCol="0" anchor="t"/>
+          <a:lstStyle/>
+          <a:p>
+            <a:pPr algn="l" indent="0" marL="0">
+              <a:spcAft>
+                <a:spcPts val="800"/>
+              </a:spcAft>
+              <a:buNone/>
+            </a:pPr>
+            <a:r>
+              <a:rPr lang="en-US" sz="4000" dirty="0">
+                <a:solidFill>
+                  <a:srgbClr val="111111"/>
+                </a:solidFill>
+                <a:latin typeface="Times New Roman" pitchFamily="34" charset="0"/>
+                <a:ea typeface="Times New Roman" pitchFamily="34" charset="-122"/>
+                <a:cs typeface="Times New Roman" pitchFamily="34" charset="-120"/>
+              </a:rPr>
+              <a:t>Why is Bamenda more pleasant to live in than a hot lowland?</a:t>
+            </a:r>
+            <a:endParaRPr lang="en-US" sz="4000" dirty="0"/>
           </a:p>
         </p:txBody>
       </p:sp>
@@ -10915,7 +11741,7 @@
                 <a:ea typeface="Calibri" pitchFamily="34" charset="-122"/>
                 <a:cs typeface="Calibri" pitchFamily="34" charset="-120"/>
               </a:rPr>
-              <a:t>3. TROPICAL PATTERN: CAMEROON</a:t>
+              <a:t>2. EXCEPTIONS</a:t>
             </a:r>
             <a:endParaRPr lang="en-US" sz="1400" dirty="0"/>
           </a:p>
@@ -10980,7 +11806,7 @@
                 <a:ea typeface="Times New Roman" pitchFamily="34" charset="-122"/>
                 <a:cs typeface="Times New Roman" pitchFamily="34" charset="-120"/>
               </a:rPr>
-              <a:t>Activity 4: Question</a:t>
+              <a:t>Activity 3: Answer</a:t>
             </a:r>
             <a:endParaRPr lang="en-US" sz="3600" dirty="0"/>
           </a:p>
@@ -11022,7 +11848,7 @@
                 <a:ea typeface="Times New Roman" pitchFamily="34" charset="-122"/>
                 <a:cs typeface="Times New Roman" pitchFamily="34" charset="-120"/>
               </a:rPr>
-              <a:t>Why are Bamenda and Dschang densely populated?</a:t>
+              <a:t>Its altitude gives it a cooler, healthier climate.</a:t>
             </a:r>
             <a:endParaRPr lang="en-US" sz="4000" dirty="0"/>
           </a:p>
@@ -11134,15 +11960,54 @@
                 <a:ea typeface="Calibri" pitchFamily="34" charset="-122"/>
                 <a:cs typeface="Calibri" pitchFamily="34" charset="-120"/>
               </a:rPr>
-              <a:t>3. TROPICAL PATTERN: CAMEROON</a:t>
+              <a:t>2. EXCEPTIONS</a:t>
             </a:r>
             <a:endParaRPr lang="en-US" sz="1400" dirty="0"/>
+          </a:p>
+        </p:txBody>
+      </p:sp>
+      <p:sp>
+        <p:nvSpPr>
+          <p:cNvPr id="3" name="Text 1"/>
+          <p:cNvSpPr/>
+          <p:nvPr/>
+        </p:nvSpPr>
+        <p:spPr>
+          <a:xfrm>
+            <a:off x="457200" y="1005840"/>
+            <a:ext cx="11277295" cy="731520"/>
+          </a:xfrm>
+          <a:prstGeom prst="rect">
+            <a:avLst/>
+          </a:prstGeom>
+          <a:noFill/>
+          <a:ln/>
+        </p:spPr>
+        <p:txBody>
+          <a:bodyPr wrap="square" lIns="0" tIns="0" rIns="0" bIns="0" rtlCol="0" anchor="ctr"/>
+          <a:lstStyle/>
+          <a:p>
+            <a:pPr algn="ctr" indent="0" marL="0">
+              <a:buNone/>
+            </a:pPr>
+            <a:r>
+              <a:rPr lang="en-US" sz="3600" b="1" dirty="0">
+                <a:solidFill>
+                  <a:srgbClr val="990011"/>
+                </a:solidFill>
+                <a:latin typeface="Times New Roman" pitchFamily="34" charset="0"/>
+                <a:ea typeface="Times New Roman" pitchFamily="34" charset="-122"/>
+                <a:cs typeface="Times New Roman" pitchFamily="34" charset="-120"/>
+              </a:rPr>
+              <a:t>Activity 4</a:t>
+            </a:r>
+            <a:endParaRPr lang="en-US" sz="3600" dirty="0"/>
           </a:p>
         </p:txBody>
       </p:sp>
       <p:pic>
         <p:nvPicPr>
-          <p:cNvPr id="3" name="Image 0" descr="/home/claude/f4/img/minesec_sheet.png">    </p:cNvPr>
+          <p:cNvPr id="4" name="Image 0" descr="/home/claude/f4/img/v2/usa_lapaz.jpg">    </p:cNvPr>
           <p:cNvPicPr>
             <a:picLocks noChangeAspect="1"/>
           </p:cNvPicPr>
@@ -11156,8 +12021,8 @@
         </p:blipFill>
         <p:spPr>
           <a:xfrm>
-            <a:off x="0" y="658368"/>
-            <a:ext cx="5120640" cy="5833872"/>
+            <a:off x="2246610" y="1783080"/>
+            <a:ext cx="7698475" cy="4270248"/>
           </a:xfrm>
           <a:prstGeom prst="rect">
             <a:avLst/>
@@ -11166,14 +12031,14 @@
       </p:pic>
       <p:sp>
         <p:nvSpPr>
-          <p:cNvPr id="4" name="Text 1"/>
+          <p:cNvPr id="5" name="Text 2"/>
           <p:cNvSpPr/>
           <p:nvPr/>
         </p:nvSpPr>
         <p:spPr>
           <a:xfrm>
-            <a:off x="5349240" y="1005840"/>
-            <a:ext cx="6522415" cy="731520"/>
+            <a:off x="457200" y="6089904"/>
+            <a:ext cx="11277295" cy="347472"/>
           </a:xfrm>
           <a:prstGeom prst="rect">
             <a:avLst/>
@@ -11182,68 +12047,24 @@
           <a:ln/>
         </p:spPr>
         <p:txBody>
-          <a:bodyPr wrap="square" lIns="0" tIns="0" rIns="0" bIns="0" rtlCol="0" anchor="ctr">
-            <a:normAutofit/>
-          </a:bodyPr>
+          <a:bodyPr wrap="square" lIns="0" tIns="0" rIns="0" bIns="0" rtlCol="0" anchor="ctr"/>
           <a:lstStyle/>
           <a:p>
             <a:pPr algn="ctr" indent="0" marL="0">
               <a:buNone/>
             </a:pPr>
             <a:r>
-              <a:rPr lang="en-US" sz="3600" b="1" dirty="0">
-                <a:solidFill>
-                  <a:srgbClr val="990011"/>
+              <a:rPr lang="en-US" sz="1800" i="1" dirty="0">
+                <a:solidFill>
+                  <a:srgbClr val="555555"/>
                 </a:solidFill>
                 <a:latin typeface="Times New Roman" pitchFamily="34" charset="0"/>
                 <a:ea typeface="Times New Roman" pitchFamily="34" charset="-122"/>
                 <a:cs typeface="Times New Roman" pitchFamily="34" charset="-120"/>
               </a:rPr>
-              <a:t>Activity 4: Answer</a:t>
-            </a:r>
-            <a:endParaRPr lang="en-US" sz="3600" dirty="0"/>
-          </a:p>
-        </p:txBody>
-      </p:sp>
-      <p:sp>
-        <p:nvSpPr>
-          <p:cNvPr id="5" name="Text 2"/>
-          <p:cNvSpPr/>
-          <p:nvPr/>
-        </p:nvSpPr>
-        <p:spPr>
-          <a:xfrm>
-            <a:off x="5349240" y="1783080"/>
-            <a:ext cx="6522415" cy="4663440"/>
-          </a:xfrm>
-          <a:prstGeom prst="rect">
-            <a:avLst/>
-          </a:prstGeom>
-          <a:noFill/>
-          <a:ln/>
-        </p:spPr>
-        <p:txBody>
-          <a:bodyPr wrap="square" lIns="0" tIns="0" rIns="0" bIns="0" rtlCol="0" anchor="t"/>
-          <a:lstStyle/>
-          <a:p>
-            <a:pPr algn="l" indent="0" marL="0">
-              <a:spcAft>
-                <a:spcPts val="800"/>
-              </a:spcAft>
-              <a:buNone/>
-            </a:pPr>
-            <a:r>
-              <a:rPr lang="en-US" sz="4000" dirty="0">
-                <a:solidFill>
-                  <a:srgbClr val="111111"/>
-                </a:solidFill>
-                <a:latin typeface="Times New Roman" pitchFamily="34" charset="0"/>
-                <a:ea typeface="Times New Roman" pitchFamily="34" charset="-122"/>
-                <a:cs typeface="Times New Roman" pitchFamily="34" charset="-120"/>
-              </a:rPr>
-              <a:t>They are cool, fertile and healthy highlands.</a:t>
-            </a:r>
-            <a:endParaRPr lang="en-US" sz="4000" dirty="0"/>
+              <a:t>La Paz, Bolivia.</a:t>
+            </a:r>
+            <a:endParaRPr lang="en-US" sz="1800" dirty="0"/>
           </a:p>
         </p:txBody>
       </p:sp>
@@ -11924,7 +12745,7 @@
                           <a:ea typeface="Calibri" pitchFamily="34" charset="-122"/>
                           <a:cs typeface="Calibri" pitchFamily="34" charset="-120"/>
                         </a:rPr>
-                        <a:t>Altitude, altitude zone, population percentage, tropical highlands, temperate lowlands.</a:t>
+                        <a:t>Altitude, population density, peak, decline, tropical highland, exception.</a:t>
                       </a:r>
                       <a:endParaRPr lang="en-US" sz="1700" dirty="0">
                         <a:latin typeface="Calibri" charset="0"/>
@@ -12062,7 +12883,7 @@
                           <a:ea typeface="Calibri" pitchFamily="34" charset="-122"/>
                           <a:cs typeface="Calibri" pitchFamily="34" charset="-120"/>
                         </a:rPr>
-                        <a:t>Analyse, interpret and explain graphs showing the variation of population with altitude.</a:t>
+                        <a:t>Reading and interpreting graphs of population distribution with altitude: general trend, peaks and declines, exceptions in tropical highlands.</a:t>
                       </a:r>
                       <a:endParaRPr lang="en-US" sz="1700" dirty="0">
                         <a:latin typeface="Calibri" charset="0"/>
@@ -12200,7 +13021,7 @@
                           <a:ea typeface="Calibri" pitchFamily="34" charset="-122"/>
                           <a:cs typeface="Calibri" pitchFamily="34" charset="-120"/>
                         </a:rPr>
-                        <a:t>Learners are able to read and explain graphs of population by altitude.</a:t>
+                        <a:t>Learners are able to read, describe and explain a graph of population distribution with altitude.</a:t>
                       </a:r>
                       <a:endParaRPr lang="en-US" sz="1700" dirty="0">
                         <a:latin typeface="Calibri" charset="0"/>
@@ -12362,54 +13183,15 @@
                 <a:ea typeface="Calibri" pitchFamily="34" charset="-122"/>
                 <a:cs typeface="Calibri" pitchFamily="34" charset="-120"/>
               </a:rPr>
-              <a:t>4. EXPLANATION</a:t>
+              <a:t>2. EXCEPTIONS</a:t>
             </a:r>
             <a:endParaRPr lang="en-US" sz="1400" dirty="0"/>
-          </a:p>
-        </p:txBody>
-      </p:sp>
-      <p:sp>
-        <p:nvSpPr>
-          <p:cNvPr id="3" name="Text 1"/>
-          <p:cNvSpPr/>
-          <p:nvPr/>
-        </p:nvSpPr>
-        <p:spPr>
-          <a:xfrm>
-            <a:off x="457200" y="1005840"/>
-            <a:ext cx="11277295" cy="731520"/>
-          </a:xfrm>
-          <a:prstGeom prst="rect">
-            <a:avLst/>
-          </a:prstGeom>
-          <a:noFill/>
-          <a:ln/>
-        </p:spPr>
-        <p:txBody>
-          <a:bodyPr wrap="square" lIns="0" tIns="0" rIns="0" bIns="0" rtlCol="0" anchor="ctr"/>
-          <a:lstStyle/>
-          <a:p>
-            <a:pPr algn="ctr" indent="0" marL="0">
-              <a:buNone/>
-            </a:pPr>
-            <a:r>
-              <a:rPr lang="en-US" sz="3600" b="1" dirty="0">
-                <a:solidFill>
-                  <a:srgbClr val="990011"/>
-                </a:solidFill>
-                <a:latin typeface="Times New Roman" pitchFamily="34" charset="0"/>
-                <a:ea typeface="Times New Roman" pitchFamily="34" charset="-122"/>
-                <a:cs typeface="Times New Roman" pitchFamily="34" charset="-120"/>
-              </a:rPr>
-              <a:t>Activity 5</a:t>
-            </a:r>
-            <a:endParaRPr lang="en-US" sz="3600" dirty="0"/>
           </a:p>
         </p:txBody>
       </p:sp>
       <p:pic>
         <p:nvPicPr>
-          <p:cNvPr id="4" name="Image 0" descr="/home/claude/f4/img/v2/f2t_tea_highlands.jpg">    </p:cNvPr>
+          <p:cNvPr id="3" name="Image 0" descr="/home/claude/f4/img/minesec_sheet.png">    </p:cNvPr>
           <p:cNvPicPr>
             <a:picLocks noChangeAspect="1"/>
           </p:cNvPicPr>
@@ -12423,8 +13205,8 @@
         </p:blipFill>
         <p:spPr>
           <a:xfrm>
-            <a:off x="1248027" y="1783080"/>
-            <a:ext cx="9695641" cy="4270248"/>
+            <a:off x="0" y="658368"/>
+            <a:ext cx="5120640" cy="5833872"/>
           </a:xfrm>
           <a:prstGeom prst="rect">
             <a:avLst/>
@@ -12433,14 +13215,14 @@
       </p:pic>
       <p:sp>
         <p:nvSpPr>
-          <p:cNvPr id="5" name="Text 2"/>
+          <p:cNvPr id="4" name="Text 1"/>
           <p:cNvSpPr/>
           <p:nvPr/>
         </p:nvSpPr>
         <p:spPr>
           <a:xfrm>
-            <a:off x="457200" y="6089904"/>
-            <a:ext cx="11277295" cy="347472"/>
+            <a:off x="5349240" y="1005840"/>
+            <a:ext cx="6522415" cy="731520"/>
           </a:xfrm>
           <a:prstGeom prst="rect">
             <a:avLst/>
@@ -12449,24 +13231,68 @@
           <a:ln/>
         </p:spPr>
         <p:txBody>
-          <a:bodyPr wrap="square" lIns="0" tIns="0" rIns="0" bIns="0" rtlCol="0" anchor="ctr"/>
+          <a:bodyPr wrap="square" lIns="0" tIns="0" rIns="0" bIns="0" rtlCol="0" anchor="ctr">
+            <a:normAutofit/>
+          </a:bodyPr>
           <a:lstStyle/>
           <a:p>
             <a:pPr algn="ctr" indent="0" marL="0">
               <a:buNone/>
             </a:pPr>
             <a:r>
-              <a:rPr lang="en-US" sz="1800" i="1" dirty="0">
-                <a:solidFill>
-                  <a:srgbClr val="555555"/>
+              <a:rPr lang="en-US" sz="3600" b="1" dirty="0">
+                <a:solidFill>
+                  <a:srgbClr val="990011"/>
                 </a:solidFill>
                 <a:latin typeface="Times New Roman" pitchFamily="34" charset="0"/>
                 <a:ea typeface="Times New Roman" pitchFamily="34" charset="-122"/>
                 <a:cs typeface="Times New Roman" pitchFamily="34" charset="-120"/>
               </a:rPr>
-              <a:t>Farms on cool highlands.</a:t>
-            </a:r>
-            <a:endParaRPr lang="en-US" sz="1800" dirty="0"/>
+              <a:t>Activity 4: Question</a:t>
+            </a:r>
+            <a:endParaRPr lang="en-US" sz="3600" dirty="0"/>
+          </a:p>
+        </p:txBody>
+      </p:sp>
+      <p:sp>
+        <p:nvSpPr>
+          <p:cNvPr id="5" name="Text 2"/>
+          <p:cNvSpPr/>
+          <p:nvPr/>
+        </p:nvSpPr>
+        <p:spPr>
+          <a:xfrm>
+            <a:off x="5349240" y="1783080"/>
+            <a:ext cx="6522415" cy="4663440"/>
+          </a:xfrm>
+          <a:prstGeom prst="rect">
+            <a:avLst/>
+          </a:prstGeom>
+          <a:noFill/>
+          <a:ln/>
+        </p:spPr>
+        <p:txBody>
+          <a:bodyPr wrap="square" lIns="0" tIns="0" rIns="0" bIns="0" rtlCol="0" anchor="t"/>
+          <a:lstStyle/>
+          <a:p>
+            <a:pPr algn="l" indent="0" marL="0">
+              <a:spcAft>
+                <a:spcPts val="800"/>
+              </a:spcAft>
+              <a:buNone/>
+            </a:pPr>
+            <a:r>
+              <a:rPr lang="en-US" sz="4000" dirty="0">
+                <a:solidFill>
+                  <a:srgbClr val="111111"/>
+                </a:solidFill>
+                <a:latin typeface="Times New Roman" pitchFamily="34" charset="0"/>
+                <a:ea typeface="Times New Roman" pitchFamily="34" charset="-122"/>
+                <a:cs typeface="Times New Roman" pitchFamily="34" charset="-120"/>
+              </a:rPr>
+              <a:t>Why does La Paz have a large population at about 3,600 m?</a:t>
+            </a:r>
+            <a:endParaRPr lang="en-US" sz="4000" dirty="0"/>
           </a:p>
         </p:txBody>
       </p:sp>
@@ -12576,7 +13402,7 @@
                 <a:ea typeface="Calibri" pitchFamily="34" charset="-122"/>
                 <a:cs typeface="Calibri" pitchFamily="34" charset="-120"/>
               </a:rPr>
-              <a:t>4. EXPLANATION</a:t>
+              <a:t>2. EXCEPTIONS</a:t>
             </a:r>
             <a:endParaRPr lang="en-US" sz="1400" dirty="0"/>
           </a:p>
@@ -12641,7 +13467,7 @@
                 <a:ea typeface="Times New Roman" pitchFamily="34" charset="-122"/>
                 <a:cs typeface="Times New Roman" pitchFamily="34" charset="-120"/>
               </a:rPr>
-              <a:t>Activity 5: Question</a:t>
+              <a:t>Activity 4: Answer</a:t>
             </a:r>
             <a:endParaRPr lang="en-US" sz="3600" dirty="0"/>
           </a:p>
@@ -12683,7 +13509,7 @@
                 <a:ea typeface="Times New Roman" pitchFamily="34" charset="-122"/>
                 <a:cs typeface="Times New Roman" pitchFamily="34" charset="-120"/>
               </a:rPr>
-              <a:t>Give two reasons for the tropical pattern.</a:t>
+              <a:t>It is the seat of government and the main economic centre of Bolivia.</a:t>
             </a:r>
             <a:endParaRPr lang="en-US" sz="4000" dirty="0"/>
           </a:p>
@@ -12795,15 +13621,54 @@
                 <a:ea typeface="Calibri" pitchFamily="34" charset="-122"/>
                 <a:cs typeface="Calibri" pitchFamily="34" charset="-120"/>
               </a:rPr>
-              <a:t>4. EXPLANATION</a:t>
+              <a:t>3. INTERPRETATION</a:t>
             </a:r>
             <a:endParaRPr lang="en-US" sz="1400" dirty="0"/>
+          </a:p>
+        </p:txBody>
+      </p:sp>
+      <p:sp>
+        <p:nvSpPr>
+          <p:cNvPr id="3" name="Text 1"/>
+          <p:cNvSpPr/>
+          <p:nvPr/>
+        </p:nvSpPr>
+        <p:spPr>
+          <a:xfrm>
+            <a:off x="457200" y="1005840"/>
+            <a:ext cx="11277295" cy="731520"/>
+          </a:xfrm>
+          <a:prstGeom prst="rect">
+            <a:avLst/>
+          </a:prstGeom>
+          <a:noFill/>
+          <a:ln/>
+        </p:spPr>
+        <p:txBody>
+          <a:bodyPr wrap="square" lIns="0" tIns="0" rIns="0" bIns="0" rtlCol="0" anchor="ctr"/>
+          <a:lstStyle/>
+          <a:p>
+            <a:pPr algn="ctr" indent="0" marL="0">
+              <a:buNone/>
+            </a:pPr>
+            <a:r>
+              <a:rPr lang="en-US" sz="3600" b="1" dirty="0">
+                <a:solidFill>
+                  <a:srgbClr val="990011"/>
+                </a:solidFill>
+                <a:latin typeface="Times New Roman" pitchFamily="34" charset="0"/>
+                <a:ea typeface="Times New Roman" pitchFamily="34" charset="-122"/>
+                <a:cs typeface="Times New Roman" pitchFamily="34" charset="-120"/>
+              </a:rPr>
+              <a:t>Activity 5</a:t>
+            </a:r>
+            <a:endParaRPr lang="en-US" sz="3600" dirty="0"/>
           </a:p>
         </p:txBody>
       </p:sp>
       <p:pic>
         <p:nvPicPr>
-          <p:cNvPr id="3" name="Image 0" descr="/home/claude/f4/img/minesec_sheet.png">    </p:cNvPr>
+          <p:cNvPr id="4" name="Image 0" descr="/home/claude/f4/img/v2/f2t_tea_highlands.jpg">    </p:cNvPr>
           <p:cNvPicPr>
             <a:picLocks noChangeAspect="1"/>
           </p:cNvPicPr>
@@ -12817,8 +13682,8 @@
         </p:blipFill>
         <p:spPr>
           <a:xfrm>
-            <a:off x="0" y="658368"/>
-            <a:ext cx="5120640" cy="5833872"/>
+            <a:off x="1248027" y="1783080"/>
+            <a:ext cx="9695641" cy="4270248"/>
           </a:xfrm>
           <a:prstGeom prst="rect">
             <a:avLst/>
@@ -12827,14 +13692,14 @@
       </p:pic>
       <p:sp>
         <p:nvSpPr>
-          <p:cNvPr id="4" name="Text 1"/>
+          <p:cNvPr id="5" name="Text 2"/>
           <p:cNvSpPr/>
           <p:nvPr/>
         </p:nvSpPr>
         <p:spPr>
           <a:xfrm>
-            <a:off x="5349240" y="1005840"/>
-            <a:ext cx="6522415" cy="731520"/>
+            <a:off x="457200" y="6089904"/>
+            <a:ext cx="11277295" cy="347472"/>
           </a:xfrm>
           <a:prstGeom prst="rect">
             <a:avLst/>
@@ -12843,68 +13708,24 @@
           <a:ln/>
         </p:spPr>
         <p:txBody>
-          <a:bodyPr wrap="square" lIns="0" tIns="0" rIns="0" bIns="0" rtlCol="0" anchor="ctr">
-            <a:normAutofit/>
-          </a:bodyPr>
+          <a:bodyPr wrap="square" lIns="0" tIns="0" rIns="0" bIns="0" rtlCol="0" anchor="ctr"/>
           <a:lstStyle/>
           <a:p>
             <a:pPr algn="ctr" indent="0" marL="0">
               <a:buNone/>
             </a:pPr>
             <a:r>
-              <a:rPr lang="en-US" sz="3600" b="1" dirty="0">
-                <a:solidFill>
-                  <a:srgbClr val="990011"/>
+              <a:rPr lang="en-US" sz="1800" i="1" dirty="0">
+                <a:solidFill>
+                  <a:srgbClr val="555555"/>
                 </a:solidFill>
                 <a:latin typeface="Times New Roman" pitchFamily="34" charset="0"/>
                 <a:ea typeface="Times New Roman" pitchFamily="34" charset="-122"/>
                 <a:cs typeface="Times New Roman" pitchFamily="34" charset="-120"/>
               </a:rPr>
-              <a:t>Activity 5: Answer</a:t>
-            </a:r>
-            <a:endParaRPr lang="en-US" sz="3600" dirty="0"/>
-          </a:p>
-        </p:txBody>
-      </p:sp>
-      <p:sp>
-        <p:nvSpPr>
-          <p:cNvPr id="5" name="Text 2"/>
-          <p:cNvSpPr/>
-          <p:nvPr/>
-        </p:nvSpPr>
-        <p:spPr>
-          <a:xfrm>
-            <a:off x="5349240" y="1783080"/>
-            <a:ext cx="6522415" cy="4663440"/>
-          </a:xfrm>
-          <a:prstGeom prst="rect">
-            <a:avLst/>
-          </a:prstGeom>
-          <a:noFill/>
-          <a:ln/>
-        </p:spPr>
-        <p:txBody>
-          <a:bodyPr wrap="square" lIns="0" tIns="0" rIns="0" bIns="0" rtlCol="0" anchor="t"/>
-          <a:lstStyle/>
-          <a:p>
-            <a:pPr algn="l" indent="0" marL="0">
-              <a:spcAft>
-                <a:spcPts val="800"/>
-              </a:spcAft>
-              <a:buNone/>
-            </a:pPr>
-            <a:r>
-              <a:rPr lang="en-US" sz="4000" dirty="0">
-                <a:solidFill>
-                  <a:srgbClr val="111111"/>
-                </a:solidFill>
-                <a:latin typeface="Times New Roman" pitchFamily="34" charset="0"/>
-                <a:ea typeface="Times New Roman" pitchFamily="34" charset="-122"/>
-                <a:cs typeface="Times New Roman" pitchFamily="34" charset="-120"/>
-              </a:rPr>
-              <a:t>Cooler climate with fewer diseases, and fertile volcanic soils.</a:t>
-            </a:r>
-            <a:endParaRPr lang="en-US" sz="4000" dirty="0"/>
+              <a:t>Tea on tropical highlands.</a:t>
+            </a:r>
+            <a:endParaRPr lang="en-US" sz="1800" dirty="0"/>
           </a:p>
         </p:txBody>
       </p:sp>
@@ -13014,7 +13835,7 @@
                 <a:ea typeface="Calibri" pitchFamily="34" charset="-122"/>
                 <a:cs typeface="Calibri" pitchFamily="34" charset="-120"/>
               </a:rPr>
-              <a:t>BOARD SUMMARY</a:t>
+              <a:t>3. INTERPRETATION</a:t>
             </a:r>
             <a:endParaRPr lang="en-US" sz="1400" dirty="0"/>
           </a:p>
@@ -13079,7 +13900,7 @@
                 <a:ea typeface="Times New Roman" pitchFamily="34" charset="-122"/>
                 <a:cs typeface="Times New Roman" pitchFamily="34" charset="-120"/>
               </a:rPr>
-              <a:t>Board Summary</a:t>
+              <a:t>Activity 5: Question</a:t>
             </a:r>
             <a:endParaRPr lang="en-US" sz="3600" dirty="0"/>
           </a:p>
@@ -13113,7 +13934,7 @@
               <a:buNone/>
             </a:pPr>
             <a:r>
-              <a:rPr lang="en-US" sz="4000" b="1" dirty="0">
+              <a:rPr lang="en-US" sz="4000" dirty="0">
                 <a:solidFill>
                   <a:srgbClr val="111111"/>
                 </a:solidFill>
@@ -13121,47 +13942,7 @@
                 <a:ea typeface="Times New Roman" pitchFamily="34" charset="-122"/>
                 <a:cs typeface="Times New Roman" pitchFamily="34" charset="-120"/>
               </a:rPr>
-              <a:t>Topic: Population Numbers</a:t>
-            </a:r>
-            <a:endParaRPr lang="en-US" sz="4000" dirty="0"/>
-          </a:p>
-          <a:p>
-            <a:pPr algn="l" indent="0" marL="0">
-              <a:spcAft>
-                <a:spcPts val="800"/>
-              </a:spcAft>
-              <a:buNone/>
-            </a:pPr>
-            <a:r>
-              <a:rPr lang="en-US" sz="4000" b="1" dirty="0">
-                <a:solidFill>
-                  <a:srgbClr val="111111"/>
-                </a:solidFill>
-                <a:latin typeface="Times New Roman" pitchFamily="34" charset="0"/>
-                <a:ea typeface="Times New Roman" pitchFamily="34" charset="-122"/>
-                <a:cs typeface="Times New Roman" pitchFamily="34" charset="-120"/>
-              </a:rPr>
-              <a:t>Sub-topic: Population Density and Distribution</a:t>
-            </a:r>
-            <a:endParaRPr lang="en-US" sz="4000" dirty="0"/>
-          </a:p>
-          <a:p>
-            <a:pPr algn="l" indent="0" marL="0">
-              <a:spcAft>
-                <a:spcPts val="800"/>
-              </a:spcAft>
-              <a:buNone/>
-            </a:pPr>
-            <a:r>
-              <a:rPr lang="en-US" sz="4000" b="1" dirty="0">
-                <a:solidFill>
-                  <a:srgbClr val="990011"/>
-                </a:solidFill>
-                <a:latin typeface="Times New Roman" pitchFamily="34" charset="0"/>
-                <a:ea typeface="Times New Roman" pitchFamily="34" charset="-122"/>
-                <a:cs typeface="Times New Roman" pitchFamily="34" charset="-120"/>
-              </a:rPr>
-              <a:t>Practical Work 2: Population Distribution and Altitude</a:t>
+              <a:t>Which activity keeps mid-altitude areas populated in the tropics?</a:t>
             </a:r>
             <a:endParaRPr lang="en-US" sz="4000" dirty="0"/>
           </a:p>
@@ -13273,7 +14054,7 @@
                 <a:ea typeface="Calibri" pitchFamily="34" charset="-122"/>
                 <a:cs typeface="Calibri" pitchFamily="34" charset="-120"/>
               </a:rPr>
-              <a:t>BOARD SUMMARY</a:t>
+              <a:t>3. INTERPRETATION</a:t>
             </a:r>
             <a:endParaRPr lang="en-US" sz="1400" dirty="0"/>
           </a:p>
@@ -13338,7 +14119,7 @@
                 <a:ea typeface="Times New Roman" pitchFamily="34" charset="-122"/>
                 <a:cs typeface="Times New Roman" pitchFamily="34" charset="-120"/>
               </a:rPr>
-              <a:t>DEFINITIONS</a:t>
+              <a:t>Activity 5: Answer</a:t>
             </a:r>
             <a:endParaRPr lang="en-US" sz="3600" dirty="0"/>
           </a:p>
@@ -13372,7 +14153,7 @@
               <a:buNone/>
             </a:pPr>
             <a:r>
-              <a:rPr lang="en-US" sz="4000" i="1" dirty="0">
+              <a:rPr lang="en-US" sz="4000" dirty="0">
                 <a:solidFill>
                   <a:srgbClr val="111111"/>
                 </a:solidFill>
@@ -13380,44 +14161,7 @@
                 <a:ea typeface="Times New Roman" pitchFamily="34" charset="-122"/>
                 <a:cs typeface="Times New Roman" pitchFamily="34" charset="-120"/>
               </a:rPr>
-              <a:t>The key terms of this lesson are defined as follows:</a:t>
-            </a:r>
-            <a:endParaRPr lang="en-US" sz="4000" dirty="0"/>
-          </a:p>
-          <a:p>
-            <a:pPr algn="l" indent="0" marL="0">
-              <a:spcAft>
-                <a:spcPts val="800"/>
-              </a:spcAft>
-              <a:buNone/>
-            </a:pPr>
-            <a:r>
-              <a:rPr lang="en-US" sz="4000" b="1" dirty="0">
-                <a:solidFill>
-                  <a:srgbClr val="111111"/>
-                </a:solidFill>
-                <a:latin typeface="Times New Roman" pitchFamily="34" charset="0"/>
-                <a:ea typeface="Times New Roman" pitchFamily="34" charset="-122"/>
-                <a:cs typeface="Times New Roman" pitchFamily="34" charset="-120"/>
-              </a:rPr>
-              <a:t>Altitudinal distribution: </a:t>
-            </a:r>
-            <a:pPr algn="l" indent="0" marL="0">
-              <a:spcAft>
-                <a:spcPts val="800"/>
-              </a:spcAft>
-              <a:buNone/>
-            </a:pPr>
-            <a:r>
-              <a:rPr lang="en-US" sz="4000" dirty="0">
-                <a:solidFill>
-                  <a:srgbClr val="111111"/>
-                </a:solidFill>
-                <a:latin typeface="Times New Roman" pitchFamily="34" charset="0"/>
-                <a:ea typeface="Times New Roman" pitchFamily="34" charset="-122"/>
-                <a:cs typeface="Times New Roman" pitchFamily="34" charset="-120"/>
-              </a:rPr>
-              <a:t>It is the distribution of population according to height above sea level.</a:t>
+              <a:t>Plantation farming of tea and coffee, and market gardening.</a:t>
             </a:r>
             <a:endParaRPr lang="en-US" sz="4000" dirty="0"/>
           </a:p>
@@ -13552,7 +14296,7 @@
         <p:spPr>
           <a:xfrm>
             <a:off x="0" y="658368"/>
-            <a:ext cx="3840480" cy="5833872"/>
+            <a:ext cx="5120640" cy="5833872"/>
           </a:xfrm>
           <a:prstGeom prst="rect">
             <a:avLst/>
@@ -13567,8 +14311,8 @@
         </p:nvSpPr>
         <p:spPr>
           <a:xfrm>
-            <a:off x="4069080" y="1005840"/>
-            <a:ext cx="7802575" cy="731520"/>
+            <a:off x="5349240" y="1005840"/>
+            <a:ext cx="6522415" cy="731520"/>
           </a:xfrm>
           <a:prstGeom prst="rect">
             <a:avLst/>
@@ -13594,7 +14338,7 @@
                 <a:ea typeface="Times New Roman" pitchFamily="34" charset="-122"/>
                 <a:cs typeface="Times New Roman" pitchFamily="34" charset="-120"/>
               </a:rPr>
-              <a:t>1. Analysis of the Graph</a:t>
+              <a:t>Board Summary</a:t>
             </a:r>
             <a:endParaRPr lang="en-US" sz="3600" dirty="0"/>
           </a:p>
@@ -13608,8 +14352,8 @@
         </p:nvSpPr>
         <p:spPr>
           <a:xfrm>
-            <a:off x="4069080" y="1783080"/>
-            <a:ext cx="7802575" cy="4663440"/>
+            <a:off x="5349240" y="1783080"/>
+            <a:ext cx="6522415" cy="4663440"/>
           </a:xfrm>
           <a:prstGeom prst="rect">
             <a:avLst/>
@@ -13628,7 +14372,7 @@
               <a:buNone/>
             </a:pPr>
             <a:r>
-              <a:rPr lang="en-US" sz="4000" i="1" dirty="0">
+              <a:rPr lang="en-US" sz="4000" b="1" dirty="0">
                 <a:solidFill>
                   <a:srgbClr val="111111"/>
                 </a:solidFill>
@@ -13636,7 +14380,7 @@
                 <a:ea typeface="Times New Roman" pitchFamily="34" charset="-122"/>
                 <a:cs typeface="Times New Roman" pitchFamily="34" charset="-120"/>
               </a:rPr>
-              <a:t>The graph of population and altitude shows two patterns:</a:t>
+              <a:t>Topic: Population Numbers</a:t>
             </a:r>
             <a:endParaRPr lang="en-US" sz="4000" dirty="0"/>
           </a:p>
@@ -13656,8 +14400,11 @@
                 <a:ea typeface="Times New Roman" pitchFamily="34" charset="-122"/>
                 <a:cs typeface="Times New Roman" pitchFamily="34" charset="-120"/>
               </a:rPr>
-              <a:t>Temperate pattern: </a:t>
-            </a:r>
+              <a:t>Sub-topic: Population Density and Distribution</a:t>
+            </a:r>
+            <a:endParaRPr lang="en-US" sz="4000" dirty="0"/>
+          </a:p>
+          <a:p>
             <a:pPr algn="l" indent="0" marL="0">
               <a:spcAft>
                 <a:spcPts val="800"/>
@@ -13665,15 +14412,15 @@
               <a:buNone/>
             </a:pPr>
             <a:r>
-              <a:rPr lang="en-US" sz="4000" dirty="0">
-                <a:solidFill>
-                  <a:srgbClr val="111111"/>
+              <a:rPr lang="en-US" sz="4000" b="1" dirty="0">
+                <a:solidFill>
+                  <a:srgbClr val="990011"/>
                 </a:solidFill>
                 <a:latin typeface="Times New Roman" pitchFamily="34" charset="0"/>
                 <a:ea typeface="Times New Roman" pitchFamily="34" charset="-122"/>
                 <a:cs typeface="Times New Roman" pitchFamily="34" charset="-120"/>
               </a:rPr>
-              <a:t>Population decreases quickly with altitude; most people live below 500 m. High mountains such as the Alps are cold and sparsely populated.</a:t>
+              <a:t>Practical Work 2: Population Distribution and Altitude</a:t>
             </a:r>
             <a:endParaRPr lang="en-US" sz="4000" dirty="0"/>
           </a:p>
@@ -13808,7 +14555,7 @@
         <p:spPr>
           <a:xfrm>
             <a:off x="0" y="658368"/>
-            <a:ext cx="5120640" cy="5833872"/>
+            <a:ext cx="2468880" cy="5833872"/>
           </a:xfrm>
           <a:prstGeom prst="rect">
             <a:avLst/>
@@ -13823,8 +14570,8 @@
         </p:nvSpPr>
         <p:spPr>
           <a:xfrm>
-            <a:off x="5349240" y="1005840"/>
-            <a:ext cx="6522415" cy="731520"/>
+            <a:off x="2697480" y="1005840"/>
+            <a:ext cx="9174175" cy="731520"/>
           </a:xfrm>
           <a:prstGeom prst="rect">
             <a:avLst/>
@@ -13850,7 +14597,7 @@
                 <a:ea typeface="Times New Roman" pitchFamily="34" charset="-122"/>
                 <a:cs typeface="Times New Roman" pitchFamily="34" charset="-120"/>
               </a:rPr>
-              <a:t>1. Analysis of the Graph (continued)</a:t>
+              <a:t>DEFINITIONS</a:t>
             </a:r>
             <a:endParaRPr lang="en-US" sz="3600" dirty="0"/>
           </a:p>
@@ -13864,8 +14611,8 @@
         </p:nvSpPr>
         <p:spPr>
           <a:xfrm>
-            <a:off x="5349240" y="1783080"/>
-            <a:ext cx="6522415" cy="4663440"/>
+            <a:off x="2697480" y="1783080"/>
+            <a:ext cx="9174175" cy="4663440"/>
           </a:xfrm>
           <a:prstGeom prst="rect">
             <a:avLst/>
@@ -13884,7 +14631,7 @@
               <a:buNone/>
             </a:pPr>
             <a:r>
-              <a:rPr lang="en-US" sz="4000" b="1" dirty="0">
+              <a:rPr lang="en-US" sz="4000" i="1" dirty="0">
                 <a:solidFill>
                   <a:srgbClr val="111111"/>
                 </a:solidFill>
@@ -13892,8 +14639,11 @@
                 <a:ea typeface="Times New Roman" pitchFamily="34" charset="-122"/>
                 <a:cs typeface="Times New Roman" pitchFamily="34" charset="-120"/>
               </a:rPr>
-              <a:t>Tropical pattern: </a:t>
-            </a:r>
+              <a:t>The key terms of this lesson are defined as follows:</a:t>
+            </a:r>
+            <a:endParaRPr lang="en-US" sz="4000" dirty="0"/>
+          </a:p>
+          <a:p>
             <a:pPr algn="l" indent="0" marL="0">
               <a:spcAft>
                 <a:spcPts val="800"/>
@@ -13901,7 +14651,7 @@
               <a:buNone/>
             </a:pPr>
             <a:r>
-              <a:rPr lang="en-US" sz="4000" dirty="0">
+              <a:rPr lang="en-US" sz="4000" b="1" dirty="0">
                 <a:solidFill>
                   <a:srgbClr val="111111"/>
                 </a:solidFill>
@@ -13909,7 +14659,61 @@
                 <a:ea typeface="Times New Roman" pitchFamily="34" charset="-122"/>
                 <a:cs typeface="Times New Roman" pitchFamily="34" charset="-120"/>
               </a:rPr>
-              <a:t>Many people live at medium altitudes (1,000–2,500 m). Cities such as La Paz, Addis Ababa and Bamenda are in highlands.</a:t>
+              <a:t>Altitude: </a:t>
+            </a:r>
+            <a:pPr algn="l" indent="0" marL="0">
+              <a:spcAft>
+                <a:spcPts val="800"/>
+              </a:spcAft>
+              <a:buNone/>
+            </a:pPr>
+            <a:r>
+              <a:rPr lang="en-US" sz="4000" dirty="0">
+                <a:solidFill>
+                  <a:srgbClr val="111111"/>
+                </a:solidFill>
+                <a:latin typeface="Times New Roman" pitchFamily="34" charset="0"/>
+                <a:ea typeface="Times New Roman" pitchFamily="34" charset="-122"/>
+                <a:cs typeface="Times New Roman" pitchFamily="34" charset="-120"/>
+              </a:rPr>
+              <a:t>It is the height of a place above sea level.</a:t>
+            </a:r>
+            <a:endParaRPr lang="en-US" sz="4000" dirty="0"/>
+          </a:p>
+          <a:p>
+            <a:pPr algn="l" indent="0" marL="0">
+              <a:spcAft>
+                <a:spcPts val="800"/>
+              </a:spcAft>
+              <a:buNone/>
+            </a:pPr>
+            <a:r>
+              <a:rPr lang="en-US" sz="4000" b="1" dirty="0">
+                <a:solidFill>
+                  <a:srgbClr val="111111"/>
+                </a:solidFill>
+                <a:latin typeface="Times New Roman" pitchFamily="34" charset="0"/>
+                <a:ea typeface="Times New Roman" pitchFamily="34" charset="-122"/>
+                <a:cs typeface="Times New Roman" pitchFamily="34" charset="-120"/>
+              </a:rPr>
+              <a:t>Peak (on a graph): </a:t>
+            </a:r>
+            <a:pPr algn="l" indent="0" marL="0">
+              <a:spcAft>
+                <a:spcPts val="800"/>
+              </a:spcAft>
+              <a:buNone/>
+            </a:pPr>
+            <a:r>
+              <a:rPr lang="en-US" sz="4000" dirty="0">
+                <a:solidFill>
+                  <a:srgbClr val="111111"/>
+                </a:solidFill>
+                <a:latin typeface="Times New Roman" pitchFamily="34" charset="0"/>
+                <a:ea typeface="Times New Roman" pitchFamily="34" charset="-122"/>
+                <a:cs typeface="Times New Roman" pitchFamily="34" charset="-120"/>
+              </a:rPr>
+              <a:t>It is the highest value of a curve or of a bar, showing where density is highest.</a:t>
             </a:r>
             <a:endParaRPr lang="en-US" sz="4000" dirty="0"/>
           </a:p>
@@ -14027,48 +14831,9 @@
           </a:p>
         </p:txBody>
       </p:sp>
-      <p:sp>
-        <p:nvSpPr>
-          <p:cNvPr id="3" name="Text 1"/>
-          <p:cNvSpPr/>
-          <p:nvPr/>
-        </p:nvSpPr>
-        <p:spPr>
-          <a:xfrm>
-            <a:off x="457200" y="1005840"/>
-            <a:ext cx="11277295" cy="731520"/>
-          </a:xfrm>
-          <a:prstGeom prst="rect">
-            <a:avLst/>
-          </a:prstGeom>
-          <a:noFill/>
-          <a:ln/>
-        </p:spPr>
-        <p:txBody>
-          <a:bodyPr wrap="square" lIns="0" tIns="0" rIns="0" bIns="0" rtlCol="0" anchor="ctr"/>
-          <a:lstStyle/>
-          <a:p>
-            <a:pPr algn="ctr" indent="0" marL="0">
-              <a:buNone/>
-            </a:pPr>
-            <a:r>
-              <a:rPr lang="en-US" sz="3600" b="1" dirty="0">
-                <a:solidFill>
-                  <a:srgbClr val="990011"/>
-                </a:solidFill>
-                <a:latin typeface="Times New Roman" pitchFamily="34" charset="0"/>
-                <a:ea typeface="Times New Roman" pitchFamily="34" charset="-122"/>
-                <a:cs typeface="Times New Roman" pitchFamily="34" charset="-120"/>
-              </a:rPr>
-              <a:t>1. Analysis of the Graph</a:t>
-            </a:r>
-            <a:endParaRPr lang="en-US" sz="3600" dirty="0"/>
-          </a:p>
-        </p:txBody>
-      </p:sp>
       <p:pic>
         <p:nvPicPr>
-          <p:cNvPr id="4" name="Image 0" descr="/home/claude/f4/img/v2/altitude_pop_big.png">    </p:cNvPr>
+          <p:cNvPr id="3" name="Image 0" descr="/home/claude/f4/img/minesec_sheet.png">    </p:cNvPr>
           <p:cNvPicPr>
             <a:picLocks noChangeAspect="1"/>
           </p:cNvPicPr>
@@ -14082,8 +14847,8 @@
         </p:blipFill>
         <p:spPr>
           <a:xfrm>
-            <a:off x="1215564" y="1783080"/>
-            <a:ext cx="9760567" cy="4270248"/>
+            <a:off x="0" y="658368"/>
+            <a:ext cx="5120640" cy="5833872"/>
           </a:xfrm>
           <a:prstGeom prst="rect">
             <a:avLst/>
@@ -14092,14 +14857,14 @@
       </p:pic>
       <p:sp>
         <p:nvSpPr>
-          <p:cNvPr id="5" name="Text 2"/>
+          <p:cNvPr id="4" name="Text 1"/>
           <p:cNvSpPr/>
           <p:nvPr/>
         </p:nvSpPr>
         <p:spPr>
           <a:xfrm>
-            <a:off x="457200" y="6089904"/>
-            <a:ext cx="11277295" cy="347472"/>
+            <a:off x="5349240" y="1005840"/>
+            <a:ext cx="6522415" cy="731520"/>
           </a:xfrm>
           <a:prstGeom prst="rect">
             <a:avLst/>
@@ -14108,24 +14873,85 @@
           <a:ln/>
         </p:spPr>
         <p:txBody>
-          <a:bodyPr wrap="square" lIns="0" tIns="0" rIns="0" bIns="0" rtlCol="0" anchor="ctr"/>
+          <a:bodyPr wrap="square" lIns="0" tIns="0" rIns="0" bIns="0" rtlCol="0" anchor="ctr">
+            <a:normAutofit/>
+          </a:bodyPr>
           <a:lstStyle/>
           <a:p>
             <a:pPr algn="ctr" indent="0" marL="0">
               <a:buNone/>
             </a:pPr>
             <a:r>
-              <a:rPr lang="en-US" sz="1800" i="1" dirty="0">
-                <a:solidFill>
-                  <a:srgbClr val="555555"/>
+              <a:rPr lang="en-US" sz="3600" b="1" dirty="0">
+                <a:solidFill>
+                  <a:srgbClr val="990011"/>
                 </a:solidFill>
                 <a:latin typeface="Times New Roman" pitchFamily="34" charset="0"/>
                 <a:ea typeface="Times New Roman" pitchFamily="34" charset="-122"/>
                 <a:cs typeface="Times New Roman" pitchFamily="34" charset="-120"/>
               </a:rPr>
-              <a:t>Illustration: population and altitude</a:t>
-            </a:r>
-            <a:endParaRPr lang="en-US" sz="1800" dirty="0"/>
+              <a:t>DEFINITIONS (continued)</a:t>
+            </a:r>
+            <a:endParaRPr lang="en-US" sz="3600" dirty="0"/>
+          </a:p>
+        </p:txBody>
+      </p:sp>
+      <p:sp>
+        <p:nvSpPr>
+          <p:cNvPr id="5" name="Text 2"/>
+          <p:cNvSpPr/>
+          <p:nvPr/>
+        </p:nvSpPr>
+        <p:spPr>
+          <a:xfrm>
+            <a:off x="5349240" y="1783080"/>
+            <a:ext cx="6522415" cy="4663440"/>
+          </a:xfrm>
+          <a:prstGeom prst="rect">
+            <a:avLst/>
+          </a:prstGeom>
+          <a:noFill/>
+          <a:ln/>
+        </p:spPr>
+        <p:txBody>
+          <a:bodyPr wrap="square" lIns="0" tIns="0" rIns="0" bIns="0" rtlCol="0" anchor="t"/>
+          <a:lstStyle/>
+          <a:p>
+            <a:pPr algn="l" indent="0" marL="0">
+              <a:spcAft>
+                <a:spcPts val="800"/>
+              </a:spcAft>
+              <a:buNone/>
+            </a:pPr>
+            <a:r>
+              <a:rPr lang="en-US" sz="4000" b="1" dirty="0">
+                <a:solidFill>
+                  <a:srgbClr val="111111"/>
+                </a:solidFill>
+                <a:latin typeface="Times New Roman" pitchFamily="34" charset="0"/>
+                <a:ea typeface="Times New Roman" pitchFamily="34" charset="-122"/>
+                <a:cs typeface="Times New Roman" pitchFamily="34" charset="-120"/>
+              </a:rPr>
+              <a:t>Decline (on a graph): </a:t>
+            </a:r>
+            <a:pPr algn="l" indent="0" marL="0">
+              <a:spcAft>
+                <a:spcPts val="800"/>
+              </a:spcAft>
+              <a:buNone/>
+            </a:pPr>
+            <a:r>
+              <a:rPr lang="en-US" sz="4000" dirty="0">
+                <a:solidFill>
+                  <a:srgbClr val="111111"/>
+                </a:solidFill>
+                <a:latin typeface="Times New Roman" pitchFamily="34" charset="0"/>
+                <a:ea typeface="Times New Roman" pitchFamily="34" charset="-122"/>
+                <a:cs typeface="Times New Roman" pitchFamily="34" charset="-120"/>
+              </a:rPr>
+              <a:t>It is a fall in the values, showing where density decreases.</a:t>
+            </a:r>
+            <a:endParaRPr lang="en-US" sz="4000" dirty="0"/>
           </a:p>
         </p:txBody>
       </p:sp>
@@ -14241,9 +15067,129 @@
           </a:p>
         </p:txBody>
       </p:sp>
+      <p:sp>
+        <p:nvSpPr>
+          <p:cNvPr id="3" name="Text 1"/>
+          <p:cNvSpPr/>
+          <p:nvPr/>
+        </p:nvSpPr>
+        <p:spPr>
+          <a:xfrm>
+            <a:off x="365760" y="1005840"/>
+            <a:ext cx="11460175" cy="731520"/>
+          </a:xfrm>
+          <a:prstGeom prst="rect">
+            <a:avLst/>
+          </a:prstGeom>
+          <a:noFill/>
+          <a:ln/>
+        </p:spPr>
+        <p:txBody>
+          <a:bodyPr wrap="square" lIns="0" tIns="0" rIns="0" bIns="0" rtlCol="0" anchor="ctr">
+            <a:normAutofit/>
+          </a:bodyPr>
+          <a:lstStyle/>
+          <a:p>
+            <a:pPr algn="ctr" indent="0" marL="0">
+              <a:buNone/>
+            </a:pPr>
+            <a:r>
+              <a:rPr lang="en-US" sz="3600" b="1" dirty="0">
+                <a:solidFill>
+                  <a:srgbClr val="990011"/>
+                </a:solidFill>
+                <a:latin typeface="Times New Roman" pitchFamily="34" charset="0"/>
+                <a:ea typeface="Times New Roman" pitchFamily="34" charset="-122"/>
+                <a:cs typeface="Times New Roman" pitchFamily="34" charset="-120"/>
+              </a:rPr>
+              <a:t>1. Reading the Graph</a:t>
+            </a:r>
+            <a:endParaRPr lang="en-US" sz="3600" dirty="0"/>
+          </a:p>
+        </p:txBody>
+      </p:sp>
+      <p:sp>
+        <p:nvSpPr>
+          <p:cNvPr id="4" name="Text 2"/>
+          <p:cNvSpPr/>
+          <p:nvPr/>
+        </p:nvSpPr>
+        <p:spPr>
+          <a:xfrm>
+            <a:off x="365760" y="1783080"/>
+            <a:ext cx="4846320" cy="4617720"/>
+          </a:xfrm>
+          <a:prstGeom prst="rect">
+            <a:avLst/>
+          </a:prstGeom>
+          <a:noFill/>
+          <a:ln/>
+        </p:spPr>
+        <p:txBody>
+          <a:bodyPr wrap="square" lIns="0" tIns="0" rIns="0" bIns="0" rtlCol="0" anchor="t"/>
+          <a:lstStyle/>
+          <a:p>
+            <a:pPr algn="l" indent="0" marL="0">
+              <a:spcAft>
+                <a:spcPts val="800"/>
+              </a:spcAft>
+              <a:buNone/>
+            </a:pPr>
+            <a:r>
+              <a:rPr lang="en-US" sz="3200" i="1" dirty="0">
+                <a:solidFill>
+                  <a:srgbClr val="111111"/>
+                </a:solidFill>
+                <a:latin typeface="Times New Roman" pitchFamily="34" charset="0"/>
+                <a:ea typeface="Times New Roman" pitchFamily="34" charset="-122"/>
+                <a:cs typeface="Times New Roman" pitchFamily="34" charset="-120"/>
+              </a:rPr>
+              <a:t>A graph of population and altitude is read with the following steps:</a:t>
+            </a:r>
+            <a:endParaRPr lang="en-US" sz="3200" dirty="0"/>
+          </a:p>
+          <a:p>
+            <a:pPr algn="l" indent="0" marL="0">
+              <a:spcAft>
+                <a:spcPts val="800"/>
+              </a:spcAft>
+              <a:buNone/>
+            </a:pPr>
+            <a:r>
+              <a:rPr lang="en-US" sz="3200" b="1" dirty="0">
+                <a:solidFill>
+                  <a:srgbClr val="111111"/>
+                </a:solidFill>
+                <a:latin typeface="Times New Roman" pitchFamily="34" charset="0"/>
+                <a:ea typeface="Times New Roman" pitchFamily="34" charset="-122"/>
+                <a:cs typeface="Times New Roman" pitchFamily="34" charset="-120"/>
+              </a:rPr>
+              <a:t>Axes: </a:t>
+            </a:r>
+            <a:pPr algn="l" indent="0" marL="0">
+              <a:spcAft>
+                <a:spcPts val="800"/>
+              </a:spcAft>
+              <a:buNone/>
+            </a:pPr>
+            <a:r>
+              <a:rPr lang="en-US" sz="3200" dirty="0">
+                <a:solidFill>
+                  <a:srgbClr val="111111"/>
+                </a:solidFill>
+                <a:latin typeface="Times New Roman" pitchFamily="34" charset="0"/>
+                <a:ea typeface="Times New Roman" pitchFamily="34" charset="-122"/>
+                <a:cs typeface="Times New Roman" pitchFamily="34" charset="-120"/>
+              </a:rPr>
+              <a:t>Altitude (in metres) is on the horizontal axis and population density (or % of population) on the vertical axis.</a:t>
+            </a:r>
+            <a:endParaRPr lang="en-US" sz="3200" dirty="0"/>
+          </a:p>
+        </p:txBody>
+      </p:sp>
       <p:pic>
         <p:nvPicPr>
-          <p:cNvPr id="3" name="Image 0" descr="/home/claude/f4/img/minesec_sheet.png">    </p:cNvPr>
+          <p:cNvPr id="5" name="Image 0" descr="/home/claude/f4/img/v2/altitude_pop_big.png">    </p:cNvPr>
           <p:cNvPicPr>
             <a:picLocks noChangeAspect="1"/>
           </p:cNvPicPr>
@@ -14257,8 +15203,8 @@
         </p:blipFill>
         <p:spPr>
           <a:xfrm>
-            <a:off x="0" y="658368"/>
-            <a:ext cx="2468880" cy="5833872"/>
+            <a:off x="5349240" y="2461422"/>
+            <a:ext cx="6659575" cy="2913564"/>
           </a:xfrm>
           <a:prstGeom prst="rect">
             <a:avLst/>
@@ -14267,14 +15213,14 @@
       </p:pic>
       <p:sp>
         <p:nvSpPr>
-          <p:cNvPr id="4" name="Text 1"/>
+          <p:cNvPr id="6" name="Text 3"/>
           <p:cNvSpPr/>
           <p:nvPr/>
         </p:nvSpPr>
         <p:spPr>
           <a:xfrm>
-            <a:off x="2697480" y="1005840"/>
-            <a:ext cx="9174175" cy="731520"/>
+            <a:off x="5349240" y="6089904"/>
+            <a:ext cx="6659575" cy="347472"/>
           </a:xfrm>
           <a:prstGeom prst="rect">
             <a:avLst/>
@@ -14283,105 +15229,24 @@
           <a:ln/>
         </p:spPr>
         <p:txBody>
-          <a:bodyPr wrap="square" lIns="0" tIns="0" rIns="0" bIns="0" rtlCol="0" anchor="ctr">
-            <a:normAutofit/>
-          </a:bodyPr>
+          <a:bodyPr wrap="square" lIns="0" tIns="0" rIns="0" bIns="0" rtlCol="0" anchor="ctr"/>
           <a:lstStyle/>
           <a:p>
             <a:pPr algn="ctr" indent="0" marL="0">
               <a:buNone/>
             </a:pPr>
             <a:r>
-              <a:rPr lang="en-US" sz="3600" b="1" dirty="0">
-                <a:solidFill>
-                  <a:srgbClr val="990011"/>
+              <a:rPr lang="en-US" sz="1600" i="1" dirty="0">
+                <a:solidFill>
+                  <a:srgbClr val="555555"/>
                 </a:solidFill>
                 <a:latin typeface="Times New Roman" pitchFamily="34" charset="0"/>
                 <a:ea typeface="Times New Roman" pitchFamily="34" charset="-122"/>
                 <a:cs typeface="Times New Roman" pitchFamily="34" charset="-120"/>
               </a:rPr>
-              <a:t>2. Explanation</a:t>
-            </a:r>
-            <a:endParaRPr lang="en-US" sz="3600" dirty="0"/>
-          </a:p>
-        </p:txBody>
-      </p:sp>
-      <p:sp>
-        <p:nvSpPr>
-          <p:cNvPr id="5" name="Text 2"/>
-          <p:cNvSpPr/>
-          <p:nvPr/>
-        </p:nvSpPr>
-        <p:spPr>
-          <a:xfrm>
-            <a:off x="2697480" y="1783080"/>
-            <a:ext cx="9174175" cy="4663440"/>
-          </a:xfrm>
-          <a:prstGeom prst="rect">
-            <a:avLst/>
-          </a:prstGeom>
-          <a:noFill/>
-          <a:ln/>
-        </p:spPr>
-        <p:txBody>
-          <a:bodyPr wrap="square" lIns="0" tIns="0" rIns="0" bIns="0" rtlCol="0" anchor="t"/>
-          <a:lstStyle/>
-          <a:p>
-            <a:pPr algn="l" indent="0" marL="0">
-              <a:spcAft>
-                <a:spcPts val="800"/>
-              </a:spcAft>
-              <a:buNone/>
-            </a:pPr>
-            <a:r>
-              <a:rPr lang="en-US" sz="4000" i="1" dirty="0">
-                <a:solidFill>
-                  <a:srgbClr val="111111"/>
-                </a:solidFill>
-                <a:latin typeface="Times New Roman" pitchFamily="34" charset="0"/>
-                <a:ea typeface="Times New Roman" pitchFamily="34" charset="-122"/>
-                <a:cs typeface="Times New Roman" pitchFamily="34" charset="-120"/>
-              </a:rPr>
-              <a:t>The differences are explained as follows:</a:t>
-            </a:r>
-            <a:endParaRPr lang="en-US" sz="4000" dirty="0"/>
-          </a:p>
-          <a:p>
-            <a:pPr algn="l" indent="0" marL="0">
-              <a:spcAft>
-                <a:spcPts val="800"/>
-              </a:spcAft>
-              <a:buNone/>
-            </a:pPr>
-            <a:r>
-              <a:rPr lang="en-US" sz="4000" b="1" dirty="0">
-                <a:solidFill>
-                  <a:srgbClr val="111111"/>
-                </a:solidFill>
-                <a:latin typeface="Times New Roman" pitchFamily="34" charset="0"/>
-                <a:ea typeface="Times New Roman" pitchFamily="34" charset="-122"/>
-                <a:cs typeface="Times New Roman" pitchFamily="34" charset="-120"/>
-              </a:rPr>
-              <a:t>Why highlands attract people in the tropics: </a:t>
-            </a:r>
-            <a:pPr algn="l" indent="0" marL="0">
-              <a:spcAft>
-                <a:spcPts val="800"/>
-              </a:spcAft>
-              <a:buNone/>
-            </a:pPr>
-            <a:r>
-              <a:rPr lang="en-US" sz="4000" dirty="0">
-                <a:solidFill>
-                  <a:srgbClr val="111111"/>
-                </a:solidFill>
-                <a:latin typeface="Times New Roman" pitchFamily="34" charset="0"/>
-                <a:ea typeface="Times New Roman" pitchFamily="34" charset="-122"/>
-                <a:cs typeface="Times New Roman" pitchFamily="34" charset="-120"/>
-              </a:rPr>
-              <a:t>Highlands are cooler, healthier (less malaria) and have fertile volcanic soils. The lowlands are hot, humid and full of disease.</a:t>
-            </a:r>
-            <a:endParaRPr lang="en-US" sz="4000" dirty="0"/>
+              <a:t>Illustration: population by altitude</a:t>
+            </a:r>
+            <a:endParaRPr lang="en-US" sz="1600" dirty="0"/>
           </a:p>
         </p:txBody>
       </p:sp>
@@ -14556,7 +15421,7 @@
                 <a:ea typeface="Times New Roman" pitchFamily="34" charset="-122"/>
                 <a:cs typeface="Times New Roman" pitchFamily="34" charset="-120"/>
               </a:rPr>
-              <a:t>2. Explanation (continued)</a:t>
+              <a:t>1. Reading the Graph</a:t>
             </a:r>
             <a:endParaRPr lang="en-US" sz="3600" dirty="0"/>
           </a:p>
@@ -14598,7 +15463,7 @@
                 <a:ea typeface="Times New Roman" pitchFamily="34" charset="-122"/>
                 <a:cs typeface="Times New Roman" pitchFamily="34" charset="-120"/>
               </a:rPr>
-              <a:t>Why highlands repel people in temperate lands: </a:t>
+              <a:t>General trend: </a:t>
             </a:r>
             <a:pPr algn="l" indent="0" marL="0">
               <a:spcAft>
@@ -14615,7 +15480,44 @@
                 <a:ea typeface="Times New Roman" pitchFamily="34" charset="-122"/>
                 <a:cs typeface="Times New Roman" pitchFamily="34" charset="-120"/>
               </a:rPr>
-              <a:t>Temperature falls with altitude and highlands become too cold for crops. Lowlands are warmer and easier for farming and transport.</a:t>
+              <a:t>First describe the overall direction: in most regions, density falls as altitude rises.</a:t>
+            </a:r>
+            <a:endParaRPr lang="en-US" sz="4000" dirty="0"/>
+          </a:p>
+          <a:p>
+            <a:pPr algn="l" indent="0" marL="0">
+              <a:spcAft>
+                <a:spcPts val="800"/>
+              </a:spcAft>
+              <a:buNone/>
+            </a:pPr>
+            <a:r>
+              <a:rPr lang="en-US" sz="4000" b="1" dirty="0">
+                <a:solidFill>
+                  <a:srgbClr val="111111"/>
+                </a:solidFill>
+                <a:latin typeface="Times New Roman" pitchFamily="34" charset="0"/>
+                <a:ea typeface="Times New Roman" pitchFamily="34" charset="-122"/>
+                <a:cs typeface="Times New Roman" pitchFamily="34" charset="-120"/>
+              </a:rPr>
+              <a:t>Figures: </a:t>
+            </a:r>
+            <a:pPr algn="l" indent="0" marL="0">
+              <a:spcAft>
+                <a:spcPts val="800"/>
+              </a:spcAft>
+              <a:buNone/>
+            </a:pPr>
+            <a:r>
+              <a:rPr lang="en-US" sz="4000" dirty="0">
+                <a:solidFill>
+                  <a:srgbClr val="111111"/>
+                </a:solidFill>
+                <a:latin typeface="Times New Roman" pitchFamily="34" charset="0"/>
+                <a:ea typeface="Times New Roman" pitchFamily="34" charset="-122"/>
+                <a:cs typeface="Times New Roman" pitchFamily="34" charset="-120"/>
+              </a:rPr>
+              <a:t>Quote values read from the graph, for example the share of people below 500 m.</a:t>
             </a:r>
             <a:endParaRPr lang="en-US" sz="4000" dirty="0"/>
           </a:p>
@@ -14854,7 +15756,7 @@
                 <a:ea typeface="Times New Roman" pitchFamily="34" charset="-122"/>
                 <a:cs typeface="Times New Roman" pitchFamily="34" charset="-120"/>
               </a:rPr>
-              <a:t>Explain why the Far North plains are crowded while the East Region is sparse.</a:t>
+              <a:t>State how population density changes as altitude increases.</a:t>
             </a:r>
             <a:endParaRPr lang="en-US" sz="4000" dirty="0"/>
           </a:p>
@@ -14972,48 +15874,9 @@
           </a:p>
         </p:txBody>
       </p:sp>
-      <p:sp>
-        <p:nvSpPr>
-          <p:cNvPr id="3" name="Text 1"/>
-          <p:cNvSpPr/>
-          <p:nvPr/>
-        </p:nvSpPr>
-        <p:spPr>
-          <a:xfrm>
-            <a:off x="457200" y="1005840"/>
-            <a:ext cx="11277295" cy="731520"/>
-          </a:xfrm>
-          <a:prstGeom prst="rect">
-            <a:avLst/>
-          </a:prstGeom>
-          <a:noFill/>
-          <a:ln/>
-        </p:spPr>
-        <p:txBody>
-          <a:bodyPr wrap="square" lIns="0" tIns="0" rIns="0" bIns="0" rtlCol="0" anchor="ctr"/>
-          <a:lstStyle/>
-          <a:p>
-            <a:pPr algn="ctr" indent="0" marL="0">
-              <a:buNone/>
-            </a:pPr>
-            <a:r>
-              <a:rPr lang="en-US" sz="3600" b="1" dirty="0">
-                <a:solidFill>
-                  <a:srgbClr val="990011"/>
-                </a:solidFill>
-                <a:latin typeface="Times New Roman" pitchFamily="34" charset="0"/>
-                <a:ea typeface="Times New Roman" pitchFamily="34" charset="-122"/>
-                <a:cs typeface="Times New Roman" pitchFamily="34" charset="-120"/>
-              </a:rPr>
-              <a:t>2. Explanation</a:t>
-            </a:r>
-            <a:endParaRPr lang="en-US" sz="3600" dirty="0"/>
-          </a:p>
-        </p:txBody>
-      </p:sp>
       <p:pic>
         <p:nvPicPr>
-          <p:cNvPr id="4" name="Image 0" descr="/home/claude/f4/img/v2/altitude_table_big.png">    </p:cNvPr>
+          <p:cNvPr id="3" name="Image 0" descr="/home/claude/f4/img/minesec_sheet.png">    </p:cNvPr>
           <p:cNvPicPr>
             <a:picLocks noChangeAspect="1"/>
           </p:cNvPicPr>
@@ -15027,8 +15890,8 @@
         </p:blipFill>
         <p:spPr>
           <a:xfrm>
-            <a:off x="629930" y="1783080"/>
-            <a:ext cx="10931835" cy="4270248"/>
+            <a:off x="0" y="658368"/>
+            <a:ext cx="5120640" cy="5833872"/>
           </a:xfrm>
           <a:prstGeom prst="rect">
             <a:avLst/>
@@ -15037,14 +15900,14 @@
       </p:pic>
       <p:sp>
         <p:nvSpPr>
-          <p:cNvPr id="5" name="Text 2"/>
+          <p:cNvPr id="4" name="Text 1"/>
           <p:cNvSpPr/>
           <p:nvPr/>
         </p:nvSpPr>
         <p:spPr>
           <a:xfrm>
-            <a:off x="457200" y="6089904"/>
-            <a:ext cx="11277295" cy="347472"/>
+            <a:off x="5349240" y="1005840"/>
+            <a:ext cx="6522415" cy="731520"/>
           </a:xfrm>
           <a:prstGeom prst="rect">
             <a:avLst/>
@@ -15053,24 +15916,85 @@
           <a:ln/>
         </p:spPr>
         <p:txBody>
-          <a:bodyPr wrap="square" lIns="0" tIns="0" rIns="0" bIns="0" rtlCol="0" anchor="ctr"/>
+          <a:bodyPr wrap="square" lIns="0" tIns="0" rIns="0" bIns="0" rtlCol="0" anchor="ctr">
+            <a:normAutofit/>
+          </a:bodyPr>
           <a:lstStyle/>
           <a:p>
             <a:pPr algn="ctr" indent="0" marL="0">
               <a:buNone/>
             </a:pPr>
             <a:r>
-              <a:rPr lang="en-US" sz="1800" i="1" dirty="0">
-                <a:solidFill>
-                  <a:srgbClr val="555555"/>
+              <a:rPr lang="en-US" sz="3600" b="1" dirty="0">
+                <a:solidFill>
+                  <a:srgbClr val="990011"/>
                 </a:solidFill>
                 <a:latin typeface="Times New Roman" pitchFamily="34" charset="0"/>
                 <a:ea typeface="Times New Roman" pitchFamily="34" charset="-122"/>
                 <a:cs typeface="Times New Roman" pitchFamily="34" charset="-120"/>
               </a:rPr>
-              <a:t>Illustration: altitude and density in Cameroon</a:t>
-            </a:r>
-            <a:endParaRPr lang="en-US" sz="1800" dirty="0"/>
+              <a:t>1. Reading the Graph (continued)</a:t>
+            </a:r>
+            <a:endParaRPr lang="en-US" sz="3600" dirty="0"/>
+          </a:p>
+        </p:txBody>
+      </p:sp>
+      <p:sp>
+        <p:nvSpPr>
+          <p:cNvPr id="5" name="Text 2"/>
+          <p:cNvSpPr/>
+          <p:nvPr/>
+        </p:nvSpPr>
+        <p:spPr>
+          <a:xfrm>
+            <a:off x="5349240" y="1783080"/>
+            <a:ext cx="6522415" cy="4663440"/>
+          </a:xfrm>
+          <a:prstGeom prst="rect">
+            <a:avLst/>
+          </a:prstGeom>
+          <a:noFill/>
+          <a:ln/>
+        </p:spPr>
+        <p:txBody>
+          <a:bodyPr wrap="square" lIns="0" tIns="0" rIns="0" bIns="0" rtlCol="0" anchor="t"/>
+          <a:lstStyle/>
+          <a:p>
+            <a:pPr algn="l" indent="0" marL="0">
+              <a:spcAft>
+                <a:spcPts val="800"/>
+              </a:spcAft>
+              <a:buNone/>
+            </a:pPr>
+            <a:r>
+              <a:rPr lang="en-US" sz="4000" b="1" dirty="0">
+                <a:solidFill>
+                  <a:srgbClr val="111111"/>
+                </a:solidFill>
+                <a:latin typeface="Times New Roman" pitchFamily="34" charset="0"/>
+                <a:ea typeface="Times New Roman" pitchFamily="34" charset="-122"/>
+                <a:cs typeface="Times New Roman" pitchFamily="34" charset="-120"/>
+              </a:rPr>
+              <a:t>Peaks and declines: </a:t>
+            </a:r>
+            <a:pPr algn="l" indent="0" marL="0">
+              <a:spcAft>
+                <a:spcPts val="800"/>
+              </a:spcAft>
+              <a:buNone/>
+            </a:pPr>
+            <a:r>
+              <a:rPr lang="en-US" sz="4000" dirty="0">
+                <a:solidFill>
+                  <a:srgbClr val="111111"/>
+                </a:solidFill>
+                <a:latin typeface="Times New Roman" pitchFamily="34" charset="0"/>
+                <a:ea typeface="Times New Roman" pitchFamily="34" charset="-122"/>
+                <a:cs typeface="Times New Roman" pitchFamily="34" charset="-120"/>
+              </a:rPr>
+              <a:t>Then identify where density rises or falls sharply, and explain why.</a:t>
+            </a:r>
+            <a:endParaRPr lang="en-US" sz="4000" dirty="0"/>
           </a:p>
         </p:txBody>
       </p:sp>
@@ -15180,15 +16104,135 @@
                 <a:ea typeface="Calibri" pitchFamily="34" charset="-122"/>
                 <a:cs typeface="Calibri" pitchFamily="34" charset="-120"/>
               </a:rPr>
-              <a:t>FORMATIVE EVALUATION</a:t>
+              <a:t>BOARD SUMMARY</a:t>
             </a:r>
             <a:endParaRPr lang="en-US" sz="1400" dirty="0"/>
+          </a:p>
+        </p:txBody>
+      </p:sp>
+      <p:sp>
+        <p:nvSpPr>
+          <p:cNvPr id="3" name="Text 1"/>
+          <p:cNvSpPr/>
+          <p:nvPr/>
+        </p:nvSpPr>
+        <p:spPr>
+          <a:xfrm>
+            <a:off x="365760" y="1005840"/>
+            <a:ext cx="11460175" cy="731520"/>
+          </a:xfrm>
+          <a:prstGeom prst="rect">
+            <a:avLst/>
+          </a:prstGeom>
+          <a:noFill/>
+          <a:ln/>
+        </p:spPr>
+        <p:txBody>
+          <a:bodyPr wrap="square" lIns="0" tIns="0" rIns="0" bIns="0" rtlCol="0" anchor="ctr">
+            <a:normAutofit/>
+          </a:bodyPr>
+          <a:lstStyle/>
+          <a:p>
+            <a:pPr algn="ctr" indent="0" marL="0">
+              <a:buNone/>
+            </a:pPr>
+            <a:r>
+              <a:rPr lang="en-US" sz="3600" b="1" dirty="0">
+                <a:solidFill>
+                  <a:srgbClr val="990011"/>
+                </a:solidFill>
+                <a:latin typeface="Times New Roman" pitchFamily="34" charset="0"/>
+                <a:ea typeface="Times New Roman" pitchFamily="34" charset="-122"/>
+                <a:cs typeface="Times New Roman" pitchFamily="34" charset="-120"/>
+              </a:rPr>
+              <a:t>2. The General Pattern</a:t>
+            </a:r>
+            <a:endParaRPr lang="en-US" sz="3600" dirty="0"/>
+          </a:p>
+        </p:txBody>
+      </p:sp>
+      <p:sp>
+        <p:nvSpPr>
+          <p:cNvPr id="4" name="Text 2"/>
+          <p:cNvSpPr/>
+          <p:nvPr/>
+        </p:nvSpPr>
+        <p:spPr>
+          <a:xfrm>
+            <a:off x="365760" y="1783080"/>
+            <a:ext cx="4846320" cy="4617720"/>
+          </a:xfrm>
+          <a:prstGeom prst="rect">
+            <a:avLst/>
+          </a:prstGeom>
+          <a:noFill/>
+          <a:ln/>
+        </p:spPr>
+        <p:txBody>
+          <a:bodyPr wrap="square" lIns="0" tIns="0" rIns="0" bIns="0" rtlCol="0" anchor="t"/>
+          <a:lstStyle/>
+          <a:p>
+            <a:pPr algn="l" indent="0" marL="0">
+              <a:spcAft>
+                <a:spcPts val="800"/>
+              </a:spcAft>
+              <a:buNone/>
+            </a:pPr>
+            <a:r>
+              <a:rPr lang="en-US" sz="2800" i="1" dirty="0">
+                <a:solidFill>
+                  <a:srgbClr val="111111"/>
+                </a:solidFill>
+                <a:latin typeface="Times New Roman" pitchFamily="34" charset="0"/>
+                <a:ea typeface="Times New Roman" pitchFamily="34" charset="-122"/>
+                <a:cs typeface="Times New Roman" pitchFamily="34" charset="-120"/>
+              </a:rPr>
+              <a:t>The general pattern of density with altitude is the following:</a:t>
+            </a:r>
+            <a:endParaRPr lang="en-US" sz="2800" dirty="0"/>
+          </a:p>
+          <a:p>
+            <a:pPr algn="l" indent="0" marL="0">
+              <a:spcAft>
+                <a:spcPts val="800"/>
+              </a:spcAft>
+              <a:buNone/>
+            </a:pPr>
+            <a:r>
+              <a:rPr lang="en-US" sz="2800" b="1" dirty="0">
+                <a:solidFill>
+                  <a:srgbClr val="111111"/>
+                </a:solidFill>
+                <a:latin typeface="Times New Roman" pitchFamily="34" charset="0"/>
+                <a:ea typeface="Times New Roman" pitchFamily="34" charset="-122"/>
+                <a:cs typeface="Times New Roman" pitchFamily="34" charset="-120"/>
+              </a:rPr>
+              <a:t>Low altitudes (0–500 m): </a:t>
+            </a:r>
+            <a:pPr algn="l" indent="0" marL="0">
+              <a:spcAft>
+                <a:spcPts val="800"/>
+              </a:spcAft>
+              <a:buNone/>
+            </a:pPr>
+            <a:r>
+              <a:rPr lang="en-US" sz="2800" dirty="0">
+                <a:solidFill>
+                  <a:srgbClr val="111111"/>
+                </a:solidFill>
+                <a:latin typeface="Times New Roman" pitchFamily="34" charset="0"/>
+                <a:ea typeface="Times New Roman" pitchFamily="34" charset="-122"/>
+                <a:cs typeface="Times New Roman" pitchFamily="34" charset="-120"/>
+              </a:rPr>
+              <a:t>They are very densely populated thanks to fertile plains, water, easy transport and big cities, as in the Nile delta and Bangladesh.</a:t>
+            </a:r>
+            <a:endParaRPr lang="en-US" sz="2800" dirty="0"/>
           </a:p>
         </p:txBody>
       </p:sp>
       <p:pic>
         <p:nvPicPr>
-          <p:cNvPr id="3" name="Image 0" descr="/home/claude/f4/img/minesec_sheet.png">    </p:cNvPr>
+          <p:cNvPr id="5" name="Image 0" descr="/home/claude/f4/img/v2/f4_ricefield.jpg">    </p:cNvPr>
           <p:cNvPicPr>
             <a:picLocks noChangeAspect="1"/>
           </p:cNvPicPr>
@@ -15202,8 +16246,8 @@
         </p:blipFill>
         <p:spPr>
           <a:xfrm>
-            <a:off x="0" y="658368"/>
-            <a:ext cx="5120640" cy="5833872"/>
+            <a:off x="5349240" y="2071212"/>
+            <a:ext cx="6659575" cy="3693983"/>
           </a:xfrm>
           <a:prstGeom prst="rect">
             <a:avLst/>
@@ -15212,14 +16256,14 @@
       </p:pic>
       <p:sp>
         <p:nvSpPr>
-          <p:cNvPr id="4" name="Text 1"/>
+          <p:cNvPr id="6" name="Text 3"/>
           <p:cNvSpPr/>
           <p:nvPr/>
         </p:nvSpPr>
         <p:spPr>
           <a:xfrm>
-            <a:off x="5349240" y="1005840"/>
-            <a:ext cx="6522415" cy="731520"/>
+            <a:off x="5349240" y="6089904"/>
+            <a:ext cx="6659575" cy="347472"/>
           </a:xfrm>
           <a:prstGeom prst="rect">
             <a:avLst/>
@@ -15228,68 +16272,24 @@
           <a:ln/>
         </p:spPr>
         <p:txBody>
-          <a:bodyPr wrap="square" lIns="0" tIns="0" rIns="0" bIns="0" rtlCol="0" anchor="ctr">
-            <a:normAutofit/>
-          </a:bodyPr>
+          <a:bodyPr wrap="square" lIns="0" tIns="0" rIns="0" bIns="0" rtlCol="0" anchor="ctr"/>
           <a:lstStyle/>
           <a:p>
             <a:pPr algn="ctr" indent="0" marL="0">
               <a:buNone/>
             </a:pPr>
             <a:r>
-              <a:rPr lang="en-US" sz="3600" b="1" dirty="0">
-                <a:solidFill>
-                  <a:srgbClr val="990011"/>
+              <a:rPr lang="en-US" sz="1600" i="1" dirty="0">
+                <a:solidFill>
+                  <a:srgbClr val="555555"/>
                 </a:solidFill>
                 <a:latin typeface="Times New Roman" pitchFamily="34" charset="0"/>
                 <a:ea typeface="Times New Roman" pitchFamily="34" charset="-122"/>
                 <a:cs typeface="Times New Roman" pitchFamily="34" charset="-120"/>
               </a:rPr>
-              <a:t>Evaluation 1</a:t>
-            </a:r>
-            <a:endParaRPr lang="en-US" sz="3600" dirty="0"/>
-          </a:p>
-        </p:txBody>
-      </p:sp>
-      <p:sp>
-        <p:nvSpPr>
-          <p:cNvPr id="5" name="Text 2"/>
-          <p:cNvSpPr/>
-          <p:nvPr/>
-        </p:nvSpPr>
-        <p:spPr>
-          <a:xfrm>
-            <a:off x="5349240" y="1783080"/>
-            <a:ext cx="6522415" cy="4663440"/>
-          </a:xfrm>
-          <a:prstGeom prst="rect">
-            <a:avLst/>
-          </a:prstGeom>
-          <a:noFill/>
-          <a:ln/>
-        </p:spPr>
-        <p:txBody>
-          <a:bodyPr wrap="square" lIns="0" tIns="0" rIns="0" bIns="0" rtlCol="0" anchor="t"/>
-          <a:lstStyle/>
-          <a:p>
-            <a:pPr algn="l" indent="0" marL="0">
-              <a:spcAft>
-                <a:spcPts val="800"/>
-              </a:spcAft>
-              <a:buNone/>
-            </a:pPr>
-            <a:r>
-              <a:rPr lang="en-US" sz="4000" dirty="0">
-                <a:solidFill>
-                  <a:srgbClr val="111111"/>
-                </a:solidFill>
-                <a:latin typeface="Times New Roman" pitchFamily="34" charset="0"/>
-                <a:ea typeface="Times New Roman" pitchFamily="34" charset="-122"/>
-                <a:cs typeface="Times New Roman" pitchFamily="34" charset="-120"/>
-              </a:rPr>
-              <a:t>Describe the tropical pattern of population with altitude.</a:t>
-            </a:r>
-            <a:endParaRPr lang="en-US" sz="4000" dirty="0"/>
+              <a:t>Illustration: a fertile lowland</a:t>
+            </a:r>
+            <a:endParaRPr lang="en-US" sz="1600" dirty="0"/>
           </a:p>
         </p:txBody>
       </p:sp>
@@ -15399,7 +16399,7 @@
                 <a:ea typeface="Calibri" pitchFamily="34" charset="-122"/>
                 <a:cs typeface="Calibri" pitchFamily="34" charset="-120"/>
               </a:rPr>
-              <a:t>FORMATIVE EVALUATION</a:t>
+              <a:t>BOARD SUMMARY</a:t>
             </a:r>
             <a:endParaRPr lang="en-US" sz="1400" dirty="0"/>
           </a:p>
@@ -15464,7 +16464,7 @@
                 <a:ea typeface="Times New Roman" pitchFamily="34" charset="-122"/>
                 <a:cs typeface="Times New Roman" pitchFamily="34" charset="-120"/>
               </a:rPr>
-              <a:t>Expected Answer</a:t>
+              <a:t>2. The General Pattern</a:t>
             </a:r>
             <a:endParaRPr lang="en-US" sz="3600" dirty="0"/>
           </a:p>
@@ -15498,7 +16498,7 @@
               <a:buNone/>
             </a:pPr>
             <a:r>
-              <a:rPr lang="en-US" sz="4000" dirty="0">
+              <a:rPr lang="en-US" sz="4000" b="1" dirty="0">
                 <a:solidFill>
                   <a:srgbClr val="111111"/>
                 </a:solidFill>
@@ -15506,7 +16506,24 @@
                 <a:ea typeface="Times New Roman" pitchFamily="34" charset="-122"/>
                 <a:cs typeface="Times New Roman" pitchFamily="34" charset="-120"/>
               </a:rPr>
-              <a:t>Many people live at 1,000–3,000 m; highlands are crowded.</a:t>
+              <a:t>Medium altitudes (500–2,000 m): </a:t>
+            </a:r>
+            <a:pPr algn="l" indent="0" marL="0">
+              <a:spcAft>
+                <a:spcPts val="800"/>
+              </a:spcAft>
+              <a:buNone/>
+            </a:pPr>
+            <a:r>
+              <a:rPr lang="en-US" sz="4000" dirty="0">
+                <a:solidFill>
+                  <a:srgbClr val="111111"/>
+                </a:solidFill>
+                <a:latin typeface="Times New Roman" pitchFamily="34" charset="0"/>
+                <a:ea typeface="Times New Roman" pitchFamily="34" charset="-122"/>
+                <a:cs typeface="Times New Roman" pitchFamily="34" charset="-120"/>
+              </a:rPr>
+              <a:t>Densities vary: fertile plateaux are well populated, but steep slopes discourage settlement.</a:t>
             </a:r>
             <a:endParaRPr lang="en-US" sz="4000" dirty="0"/>
           </a:p>
@@ -15618,15 +16635,115 @@
                 <a:ea typeface="Calibri" pitchFamily="34" charset="-122"/>
                 <a:cs typeface="Calibri" pitchFamily="34" charset="-120"/>
               </a:rPr>
-              <a:t>FORMATIVE EVALUATION</a:t>
+              <a:t>BOARD SUMMARY</a:t>
             </a:r>
             <a:endParaRPr lang="en-US" sz="1400" dirty="0"/>
+          </a:p>
+        </p:txBody>
+      </p:sp>
+      <p:sp>
+        <p:nvSpPr>
+          <p:cNvPr id="3" name="Text 1"/>
+          <p:cNvSpPr/>
+          <p:nvPr/>
+        </p:nvSpPr>
+        <p:spPr>
+          <a:xfrm>
+            <a:off x="365760" y="1005840"/>
+            <a:ext cx="11460175" cy="731520"/>
+          </a:xfrm>
+          <a:prstGeom prst="rect">
+            <a:avLst/>
+          </a:prstGeom>
+          <a:noFill/>
+          <a:ln/>
+        </p:spPr>
+        <p:txBody>
+          <a:bodyPr wrap="square" lIns="0" tIns="0" rIns="0" bIns="0" rtlCol="0" anchor="ctr">
+            <a:normAutofit/>
+          </a:bodyPr>
+          <a:lstStyle/>
+          <a:p>
+            <a:pPr algn="ctr" indent="0" marL="0">
+              <a:buNone/>
+            </a:pPr>
+            <a:r>
+              <a:rPr lang="en-US" sz="3600" b="1" dirty="0">
+                <a:solidFill>
+                  <a:srgbClr val="990011"/>
+                </a:solidFill>
+                <a:latin typeface="Times New Roman" pitchFamily="34" charset="0"/>
+                <a:ea typeface="Times New Roman" pitchFamily="34" charset="-122"/>
+                <a:cs typeface="Times New Roman" pitchFamily="34" charset="-120"/>
+              </a:rPr>
+              <a:t>2. The General Pattern</a:t>
+            </a:r>
+            <a:endParaRPr lang="en-US" sz="3600" dirty="0"/>
+          </a:p>
+        </p:txBody>
+      </p:sp>
+      <p:sp>
+        <p:nvSpPr>
+          <p:cNvPr id="4" name="Text 2"/>
+          <p:cNvSpPr/>
+          <p:nvPr/>
+        </p:nvSpPr>
+        <p:spPr>
+          <a:xfrm>
+            <a:off x="365760" y="1783080"/>
+            <a:ext cx="4846320" cy="4617720"/>
+          </a:xfrm>
+          <a:prstGeom prst="rect">
+            <a:avLst/>
+          </a:prstGeom>
+          <a:noFill/>
+          <a:ln/>
+        </p:spPr>
+        <p:txBody>
+          <a:bodyPr wrap="square" lIns="0" tIns="0" rIns="0" bIns="0" rtlCol="0" anchor="t"/>
+          <a:lstStyle/>
+          <a:p>
+            <a:pPr algn="l" indent="0" marL="0">
+              <a:spcAft>
+                <a:spcPts val="800"/>
+              </a:spcAft>
+              <a:buNone/>
+            </a:pPr>
+            <a:r>
+              <a:rPr lang="en-US" sz="3600" b="1" dirty="0">
+                <a:solidFill>
+                  <a:srgbClr val="111111"/>
+                </a:solidFill>
+                <a:latin typeface="Times New Roman" pitchFamily="34" charset="0"/>
+                <a:ea typeface="Times New Roman" pitchFamily="34" charset="-122"/>
+                <a:cs typeface="Times New Roman" pitchFamily="34" charset="-120"/>
+              </a:rPr>
+              <a:t>High altitudes (above 2,000 m): </a:t>
+            </a:r>
+            <a:pPr algn="l" indent="0" marL="0">
+              <a:spcAft>
+                <a:spcPts val="800"/>
+              </a:spcAft>
+              <a:buNone/>
+            </a:pPr>
+            <a:r>
+              <a:rPr lang="en-US" sz="3600" dirty="0">
+                <a:solidFill>
+                  <a:srgbClr val="111111"/>
+                </a:solidFill>
+                <a:latin typeface="Times New Roman" pitchFamily="34" charset="0"/>
+                <a:ea typeface="Times New Roman" pitchFamily="34" charset="-122"/>
+                <a:cs typeface="Times New Roman" pitchFamily="34" charset="-120"/>
+              </a:rPr>
+              <a:t>Densities are very low because of cold, lack of oxygen, steep slopes and poor soils, as in the Himalayas.</a:t>
+            </a:r>
+            <a:endParaRPr lang="en-US" sz="3600" dirty="0"/>
           </a:p>
         </p:txBody>
       </p:sp>
       <p:pic>
         <p:nvPicPr>
-          <p:cNvPr id="3" name="Image 0" descr="/home/claude/f4/img/minesec_sheet.png">    </p:cNvPr>
+          <p:cNvPr id="5" name="Image 0" descr="/home/claude/f4/img/v2/lsa_himalaya.jpg">    </p:cNvPr>
           <p:cNvPicPr>
             <a:picLocks noChangeAspect="1"/>
           </p:cNvPicPr>
@@ -15640,8 +16757,8 @@
         </p:blipFill>
         <p:spPr>
           <a:xfrm>
-            <a:off x="0" y="658368"/>
-            <a:ext cx="5120640" cy="5833872"/>
+            <a:off x="5349240" y="2071212"/>
+            <a:ext cx="6659575" cy="3693983"/>
           </a:xfrm>
           <a:prstGeom prst="rect">
             <a:avLst/>
@@ -15650,14 +16767,14 @@
       </p:pic>
       <p:sp>
         <p:nvSpPr>
-          <p:cNvPr id="4" name="Text 1"/>
+          <p:cNvPr id="6" name="Text 3"/>
           <p:cNvSpPr/>
           <p:nvPr/>
         </p:nvSpPr>
         <p:spPr>
           <a:xfrm>
-            <a:off x="5349240" y="1005840"/>
-            <a:ext cx="6522415" cy="731520"/>
+            <a:off x="5349240" y="6089904"/>
+            <a:ext cx="6659575" cy="347472"/>
           </a:xfrm>
           <a:prstGeom prst="rect">
             <a:avLst/>
@@ -15666,68 +16783,24 @@
           <a:ln/>
         </p:spPr>
         <p:txBody>
-          <a:bodyPr wrap="square" lIns="0" tIns="0" rIns="0" bIns="0" rtlCol="0" anchor="ctr">
-            <a:normAutofit/>
-          </a:bodyPr>
+          <a:bodyPr wrap="square" lIns="0" tIns="0" rIns="0" bIns="0" rtlCol="0" anchor="ctr"/>
           <a:lstStyle/>
           <a:p>
             <a:pPr algn="ctr" indent="0" marL="0">
               <a:buNone/>
             </a:pPr>
             <a:r>
-              <a:rPr lang="en-US" sz="3600" b="1" dirty="0">
-                <a:solidFill>
-                  <a:srgbClr val="990011"/>
+              <a:rPr lang="en-US" sz="1600" i="1" dirty="0">
+                <a:solidFill>
+                  <a:srgbClr val="555555"/>
                 </a:solidFill>
                 <a:latin typeface="Times New Roman" pitchFamily="34" charset="0"/>
                 <a:ea typeface="Times New Roman" pitchFamily="34" charset="-122"/>
                 <a:cs typeface="Times New Roman" pitchFamily="34" charset="-120"/>
               </a:rPr>
-              <a:t>Evaluation 2</a:t>
-            </a:r>
-            <a:endParaRPr lang="en-US" sz="3600" dirty="0"/>
-          </a:p>
-        </p:txBody>
-      </p:sp>
-      <p:sp>
-        <p:nvSpPr>
-          <p:cNvPr id="5" name="Text 2"/>
-          <p:cNvSpPr/>
-          <p:nvPr/>
-        </p:nvSpPr>
-        <p:spPr>
-          <a:xfrm>
-            <a:off x="5349240" y="1783080"/>
-            <a:ext cx="6522415" cy="4663440"/>
-          </a:xfrm>
-          <a:prstGeom prst="rect">
-            <a:avLst/>
-          </a:prstGeom>
-          <a:noFill/>
-          <a:ln/>
-        </p:spPr>
-        <p:txBody>
-          <a:bodyPr wrap="square" lIns="0" tIns="0" rIns="0" bIns="0" rtlCol="0" anchor="t"/>
-          <a:lstStyle/>
-          <a:p>
-            <a:pPr algn="l" indent="0" marL="0">
-              <a:spcAft>
-                <a:spcPts val="800"/>
-              </a:spcAft>
-              <a:buNone/>
-            </a:pPr>
-            <a:r>
-              <a:rPr lang="en-US" sz="4000" dirty="0">
-                <a:solidFill>
-                  <a:srgbClr val="111111"/>
-                </a:solidFill>
-                <a:latin typeface="Times New Roman" pitchFamily="34" charset="0"/>
-                <a:ea typeface="Times New Roman" pitchFamily="34" charset="-122"/>
-                <a:cs typeface="Times New Roman" pitchFamily="34" charset="-120"/>
-              </a:rPr>
-              <a:t>Why are lowlands preferred in temperate lands?</a:t>
-            </a:r>
-            <a:endParaRPr lang="en-US" sz="4000" dirty="0"/>
+              <a:t>Illustration: high mountains</a:t>
+            </a:r>
+            <a:endParaRPr lang="en-US" sz="1600" dirty="0"/>
           </a:p>
         </p:txBody>
       </p:sp>
@@ -15837,7 +16910,7 @@
                 <a:ea typeface="Calibri" pitchFamily="34" charset="-122"/>
                 <a:cs typeface="Calibri" pitchFamily="34" charset="-120"/>
               </a:rPr>
-              <a:t>FORMATIVE EVALUATION</a:t>
+              <a:t>BOARD SUMMARY</a:t>
             </a:r>
             <a:endParaRPr lang="en-US" sz="1400" dirty="0"/>
           </a:p>
@@ -15902,7 +16975,7 @@
                 <a:ea typeface="Times New Roman" pitchFamily="34" charset="-122"/>
                 <a:cs typeface="Times New Roman" pitchFamily="34" charset="-120"/>
               </a:rPr>
-              <a:t>Expected Answer</a:t>
+              <a:t>2. The General Pattern</a:t>
             </a:r>
             <a:endParaRPr lang="en-US" sz="3600" dirty="0"/>
           </a:p>
@@ -15936,7 +17009,7 @@
               <a:buNone/>
             </a:pPr>
             <a:r>
-              <a:rPr lang="en-US" sz="4000" dirty="0">
+              <a:rPr lang="en-US" sz="4000" b="1" dirty="0">
                 <a:solidFill>
                   <a:srgbClr val="111111"/>
                 </a:solidFill>
@@ -15944,7 +17017,24 @@
                 <a:ea typeface="Times New Roman" pitchFamily="34" charset="-122"/>
                 <a:cs typeface="Times New Roman" pitchFamily="34" charset="-120"/>
               </a:rPr>
-              <a:t>They are warmer, fertile and easy to use for transport and industry.</a:t>
+              <a:t>Sharp decline above 3,000 m: </a:t>
+            </a:r>
+            <a:pPr algn="l" indent="0" marL="0">
+              <a:spcAft>
+                <a:spcPts val="800"/>
+              </a:spcAft>
+              <a:buNone/>
+            </a:pPr>
+            <a:r>
+              <a:rPr lang="en-US" sz="4000" dirty="0">
+                <a:solidFill>
+                  <a:srgbClr val="111111"/>
+                </a:solidFill>
+                <a:latin typeface="Times New Roman" pitchFamily="34" charset="0"/>
+                <a:ea typeface="Times New Roman" pitchFamily="34" charset="-122"/>
+                <a:cs typeface="Times New Roman" pitchFamily="34" charset="-120"/>
+              </a:rPr>
+              <a:t>Settlements become scattered, and activities are limited to herding and tourism.</a:t>
             </a:r>
             <a:endParaRPr lang="en-US" sz="4000" dirty="0"/>
           </a:p>
@@ -16056,15 +17146,135 @@
                 <a:ea typeface="Calibri" pitchFamily="34" charset="-122"/>
                 <a:cs typeface="Calibri" pitchFamily="34" charset="-120"/>
               </a:rPr>
-              <a:t>REMEDIATION</a:t>
+              <a:t>BOARD SUMMARY</a:t>
             </a:r>
             <a:endParaRPr lang="en-US" sz="1400" dirty="0"/>
+          </a:p>
+        </p:txBody>
+      </p:sp>
+      <p:sp>
+        <p:nvSpPr>
+          <p:cNvPr id="3" name="Text 1"/>
+          <p:cNvSpPr/>
+          <p:nvPr/>
+        </p:nvSpPr>
+        <p:spPr>
+          <a:xfrm>
+            <a:off x="365760" y="1005840"/>
+            <a:ext cx="11460175" cy="731520"/>
+          </a:xfrm>
+          <a:prstGeom prst="rect">
+            <a:avLst/>
+          </a:prstGeom>
+          <a:noFill/>
+          <a:ln/>
+        </p:spPr>
+        <p:txBody>
+          <a:bodyPr wrap="square" lIns="0" tIns="0" rIns="0" bIns="0" rtlCol="0" anchor="ctr">
+            <a:normAutofit/>
+          </a:bodyPr>
+          <a:lstStyle/>
+          <a:p>
+            <a:pPr algn="ctr" indent="0" marL="0">
+              <a:buNone/>
+            </a:pPr>
+            <a:r>
+              <a:rPr lang="en-US" sz="3600" b="1" dirty="0">
+                <a:solidFill>
+                  <a:srgbClr val="990011"/>
+                </a:solidFill>
+                <a:latin typeface="Times New Roman" pitchFamily="34" charset="0"/>
+                <a:ea typeface="Times New Roman" pitchFamily="34" charset="-122"/>
+                <a:cs typeface="Times New Roman" pitchFamily="34" charset="-120"/>
+              </a:rPr>
+              <a:t>3. Exceptions and Special Cases</a:t>
+            </a:r>
+            <a:endParaRPr lang="en-US" sz="3600" dirty="0"/>
+          </a:p>
+        </p:txBody>
+      </p:sp>
+      <p:sp>
+        <p:nvSpPr>
+          <p:cNvPr id="4" name="Text 2"/>
+          <p:cNvSpPr/>
+          <p:nvPr/>
+        </p:nvSpPr>
+        <p:spPr>
+          <a:xfrm>
+            <a:off x="365760" y="1783080"/>
+            <a:ext cx="4846320" cy="4617720"/>
+          </a:xfrm>
+          <a:prstGeom prst="rect">
+            <a:avLst/>
+          </a:prstGeom>
+          <a:noFill/>
+          <a:ln/>
+        </p:spPr>
+        <p:txBody>
+          <a:bodyPr wrap="square" lIns="0" tIns="0" rIns="0" bIns="0" rtlCol="0" anchor="t"/>
+          <a:lstStyle/>
+          <a:p>
+            <a:pPr algn="l" indent="0" marL="0">
+              <a:spcAft>
+                <a:spcPts val="800"/>
+              </a:spcAft>
+              <a:buNone/>
+            </a:pPr>
+            <a:r>
+              <a:rPr lang="en-US" sz="2800" i="1" dirty="0">
+                <a:solidFill>
+                  <a:srgbClr val="111111"/>
+                </a:solidFill>
+                <a:latin typeface="Times New Roman" pitchFamily="34" charset="0"/>
+                <a:ea typeface="Times New Roman" pitchFamily="34" charset="-122"/>
+                <a:cs typeface="Times New Roman" pitchFamily="34" charset="-120"/>
+              </a:rPr>
+              <a:t>The exceptions to the general pattern are the following:</a:t>
+            </a:r>
+            <a:endParaRPr lang="en-US" sz="2800" dirty="0"/>
+          </a:p>
+          <a:p>
+            <a:pPr algn="l" indent="0" marL="0">
+              <a:spcAft>
+                <a:spcPts val="800"/>
+              </a:spcAft>
+              <a:buNone/>
+            </a:pPr>
+            <a:r>
+              <a:rPr lang="en-US" sz="2800" b="1" dirty="0">
+                <a:solidFill>
+                  <a:srgbClr val="111111"/>
+                </a:solidFill>
+                <a:latin typeface="Times New Roman" pitchFamily="34" charset="0"/>
+                <a:ea typeface="Times New Roman" pitchFamily="34" charset="-122"/>
+                <a:cs typeface="Times New Roman" pitchFamily="34" charset="-120"/>
+              </a:rPr>
+              <a:t>Tropical highlands: </a:t>
+            </a:r>
+            <a:pPr algn="l" indent="0" marL="0">
+              <a:spcAft>
+                <a:spcPts val="800"/>
+              </a:spcAft>
+              <a:buNone/>
+            </a:pPr>
+            <a:r>
+              <a:rPr lang="en-US" sz="2800" dirty="0">
+                <a:solidFill>
+                  <a:srgbClr val="111111"/>
+                </a:solidFill>
+                <a:latin typeface="Times New Roman" pitchFamily="34" charset="0"/>
+                <a:ea typeface="Times New Roman" pitchFamily="34" charset="-122"/>
+                <a:cs typeface="Times New Roman" pitchFamily="34" charset="-120"/>
+              </a:rPr>
+              <a:t>In the tropics, highlands are cooler and free of some diseases, so the Ethiopian Highlands and the Western Highlands of Cameroon are densely populated.</a:t>
+            </a:r>
+            <a:endParaRPr lang="en-US" sz="2800" dirty="0"/>
           </a:p>
         </p:txBody>
       </p:sp>
       <p:pic>
         <p:nvPicPr>
-          <p:cNvPr id="3" name="Image 0" descr="/home/claude/f4/img/minesec_sheet.png">    </p:cNvPr>
+          <p:cNvPr id="5" name="Image 0" descr="/home/claude/f4/img/v2/altitude_table_big.png">    </p:cNvPr>
           <p:cNvPicPr>
             <a:picLocks noChangeAspect="1"/>
           </p:cNvPicPr>
@@ -16078,8 +17288,8 @@
         </p:blipFill>
         <p:spPr>
           <a:xfrm>
-            <a:off x="0" y="658368"/>
-            <a:ext cx="2468880" cy="5833872"/>
+            <a:off x="5349240" y="2617506"/>
+            <a:ext cx="6659575" cy="2601397"/>
           </a:xfrm>
           <a:prstGeom prst="rect">
             <a:avLst/>
@@ -16088,14 +17298,14 @@
       </p:pic>
       <p:sp>
         <p:nvSpPr>
-          <p:cNvPr id="4" name="Text 1"/>
+          <p:cNvPr id="6" name="Text 3"/>
           <p:cNvSpPr/>
           <p:nvPr/>
         </p:nvSpPr>
         <p:spPr>
           <a:xfrm>
-            <a:off x="2697480" y="1005840"/>
-            <a:ext cx="9174175" cy="731520"/>
+            <a:off x="5349240" y="6089904"/>
+            <a:ext cx="6659575" cy="347472"/>
           </a:xfrm>
           <a:prstGeom prst="rect">
             <a:avLst/>
@@ -16104,134 +17314,24 @@
           <a:ln/>
         </p:spPr>
         <p:txBody>
-          <a:bodyPr wrap="square" lIns="0" tIns="0" rIns="0" bIns="0" rtlCol="0" anchor="ctr">
-            <a:normAutofit/>
-          </a:bodyPr>
+          <a:bodyPr wrap="square" lIns="0" tIns="0" rIns="0" bIns="0" rtlCol="0" anchor="ctr"/>
           <a:lstStyle/>
           <a:p>
             <a:pPr algn="ctr" indent="0" marL="0">
               <a:buNone/>
             </a:pPr>
             <a:r>
-              <a:rPr lang="en-US" sz="3600" b="1" dirty="0">
-                <a:solidFill>
-                  <a:srgbClr val="990011"/>
+              <a:rPr lang="en-US" sz="1600" i="1" dirty="0">
+                <a:solidFill>
+                  <a:srgbClr val="555555"/>
                 </a:solidFill>
                 <a:latin typeface="Times New Roman" pitchFamily="34" charset="0"/>
                 <a:ea typeface="Times New Roman" pitchFamily="34" charset="-122"/>
                 <a:cs typeface="Times New Roman" pitchFamily="34" charset="-120"/>
               </a:rPr>
-              <a:t>Remediation</a:t>
-            </a:r>
-            <a:endParaRPr lang="en-US" sz="3600" dirty="0"/>
-          </a:p>
-        </p:txBody>
-      </p:sp>
-      <p:sp>
-        <p:nvSpPr>
-          <p:cNvPr id="5" name="Text 2"/>
-          <p:cNvSpPr/>
-          <p:nvPr/>
-        </p:nvSpPr>
-        <p:spPr>
-          <a:xfrm>
-            <a:off x="2697480" y="1783080"/>
-            <a:ext cx="9174175" cy="4663440"/>
-          </a:xfrm>
-          <a:prstGeom prst="rect">
-            <a:avLst/>
-          </a:prstGeom>
-          <a:noFill/>
-          <a:ln/>
-        </p:spPr>
-        <p:txBody>
-          <a:bodyPr wrap="square" lIns="0" tIns="0" rIns="0" bIns="0" rtlCol="0" anchor="t"/>
-          <a:lstStyle/>
-          <a:p>
-            <a:pPr algn="l" indent="0" marL="0">
-              <a:spcAft>
-                <a:spcPts val="800"/>
-              </a:spcAft>
-              <a:buNone/>
-            </a:pPr>
-            <a:r>
-              <a:rPr lang="en-US" sz="4000" b="1" dirty="0">
-                <a:solidFill>
-                  <a:srgbClr val="111111"/>
-                </a:solidFill>
-                <a:latin typeface="Times New Roman" pitchFamily="34" charset="0"/>
-                <a:ea typeface="Times New Roman" pitchFamily="34" charset="-122"/>
-                <a:cs typeface="Times New Roman" pitchFamily="34" charset="-120"/>
-              </a:rPr>
-              <a:t>Fill in the blanks:</a:t>
-            </a:r>
-            <a:endParaRPr lang="en-US" sz="4000" dirty="0"/>
-          </a:p>
-          <a:p>
-            <a:pPr algn="l" marL="342900" indent="-342900">
-              <a:spcAft>
-                <a:spcPts val="800"/>
-              </a:spcAft>
-              <a:buSzPct val="100000"/>
-              <a:buFont typeface="+mj-lt"/>
-              <a:buAutoNum type="arabicPeriod" startAt="1"/>
-            </a:pPr>
-            <a:r>
-              <a:rPr lang="en-US" sz="4000" dirty="0">
-                <a:solidFill>
-                  <a:srgbClr val="111111"/>
-                </a:solidFill>
-                <a:latin typeface="Times New Roman" pitchFamily="34" charset="0"/>
-                <a:ea typeface="Times New Roman" pitchFamily="34" charset="-122"/>
-                <a:cs typeface="Times New Roman" pitchFamily="34" charset="-120"/>
-              </a:rPr>
-              <a:t>In Europe most people live below ______ m.</a:t>
-            </a:r>
-            <a:endParaRPr lang="en-US" sz="4000" dirty="0"/>
-          </a:p>
-          <a:p>
-            <a:pPr algn="l" marL="342900" indent="-342900">
-              <a:spcAft>
-                <a:spcPts val="800"/>
-              </a:spcAft>
-              <a:buSzPct val="100000"/>
-              <a:buFont typeface="+mj-lt"/>
-              <a:buAutoNum type="arabicPeriod" startAt="1"/>
-            </a:pPr>
-            <a:r>
-              <a:rPr lang="en-US" sz="4000" dirty="0">
-                <a:solidFill>
-                  <a:srgbClr val="111111"/>
-                </a:solidFill>
-                <a:latin typeface="Times New Roman" pitchFamily="34" charset="0"/>
-                <a:ea typeface="Times New Roman" pitchFamily="34" charset="-122"/>
-                <a:cs typeface="Times New Roman" pitchFamily="34" charset="-120"/>
-              </a:rPr>
-              <a:t>La Paz lies in the ______ Mountains.</a:t>
-            </a:r>
-            <a:endParaRPr lang="en-US" sz="4000" dirty="0"/>
-          </a:p>
-          <a:p>
-            <a:pPr algn="l" marL="342900" indent="-342900">
-              <a:spcAft>
-                <a:spcPts val="800"/>
-              </a:spcAft>
-              <a:buSzPct val="100000"/>
-              <a:buFont typeface="+mj-lt"/>
-              <a:buAutoNum type="arabicPeriod" startAt="1"/>
-            </a:pPr>
-            <a:r>
-              <a:rPr lang="en-US" sz="4000" dirty="0">
-                <a:solidFill>
-                  <a:srgbClr val="111111"/>
-                </a:solidFill>
-                <a:latin typeface="Times New Roman" pitchFamily="34" charset="0"/>
-                <a:ea typeface="Times New Roman" pitchFamily="34" charset="-122"/>
-                <a:cs typeface="Times New Roman" pitchFamily="34" charset="-120"/>
-              </a:rPr>
-              <a:t>Highlands in the tropics are cooler and ______.</a:t>
-            </a:r>
-            <a:endParaRPr lang="en-US" sz="4000" dirty="0"/>
+              <a:t>Illustration: altitude and density in Cameroon</a:t>
+            </a:r>
+            <a:endParaRPr lang="en-US" sz="1600" dirty="0"/>
           </a:p>
         </p:txBody>
       </p:sp>
@@ -16341,15 +17441,115 @@
                 <a:ea typeface="Calibri" pitchFamily="34" charset="-122"/>
                 <a:cs typeface="Calibri" pitchFamily="34" charset="-120"/>
               </a:rPr>
-              <a:t>HOMEWORK</a:t>
+              <a:t>BOARD SUMMARY</a:t>
             </a:r>
             <a:endParaRPr lang="en-US" sz="1400" dirty="0"/>
+          </a:p>
+        </p:txBody>
+      </p:sp>
+      <p:sp>
+        <p:nvSpPr>
+          <p:cNvPr id="3" name="Text 1"/>
+          <p:cNvSpPr/>
+          <p:nvPr/>
+        </p:nvSpPr>
+        <p:spPr>
+          <a:xfrm>
+            <a:off x="365760" y="1005840"/>
+            <a:ext cx="11460175" cy="731520"/>
+          </a:xfrm>
+          <a:prstGeom prst="rect">
+            <a:avLst/>
+          </a:prstGeom>
+          <a:noFill/>
+          <a:ln/>
+        </p:spPr>
+        <p:txBody>
+          <a:bodyPr wrap="square" lIns="0" tIns="0" rIns="0" bIns="0" rtlCol="0" anchor="ctr">
+            <a:normAutofit/>
+          </a:bodyPr>
+          <a:lstStyle/>
+          <a:p>
+            <a:pPr algn="ctr" indent="0" marL="0">
+              <a:buNone/>
+            </a:pPr>
+            <a:r>
+              <a:rPr lang="en-US" sz="3600" b="1" dirty="0">
+                <a:solidFill>
+                  <a:srgbClr val="990011"/>
+                </a:solidFill>
+                <a:latin typeface="Times New Roman" pitchFamily="34" charset="0"/>
+                <a:ea typeface="Times New Roman" pitchFamily="34" charset="-122"/>
+                <a:cs typeface="Times New Roman" pitchFamily="34" charset="-120"/>
+              </a:rPr>
+              <a:t>3. Exceptions and Special Cases</a:t>
+            </a:r>
+            <a:endParaRPr lang="en-US" sz="3600" dirty="0"/>
+          </a:p>
+        </p:txBody>
+      </p:sp>
+      <p:sp>
+        <p:nvSpPr>
+          <p:cNvPr id="4" name="Text 2"/>
+          <p:cNvSpPr/>
+          <p:nvPr/>
+        </p:nvSpPr>
+        <p:spPr>
+          <a:xfrm>
+            <a:off x="365760" y="1783080"/>
+            <a:ext cx="4846320" cy="4617720"/>
+          </a:xfrm>
+          <a:prstGeom prst="rect">
+            <a:avLst/>
+          </a:prstGeom>
+          <a:noFill/>
+          <a:ln/>
+        </p:spPr>
+        <p:txBody>
+          <a:bodyPr wrap="square" lIns="0" tIns="0" rIns="0" bIns="0" rtlCol="0" anchor="t"/>
+          <a:lstStyle/>
+          <a:p>
+            <a:pPr algn="l" indent="0" marL="0">
+              <a:spcAft>
+                <a:spcPts val="800"/>
+              </a:spcAft>
+              <a:buNone/>
+            </a:pPr>
+            <a:r>
+              <a:rPr lang="en-US" sz="3600" b="1" dirty="0">
+                <a:solidFill>
+                  <a:srgbClr val="111111"/>
+                </a:solidFill>
+                <a:latin typeface="Times New Roman" pitchFamily="34" charset="0"/>
+                <a:ea typeface="Times New Roman" pitchFamily="34" charset="-122"/>
+                <a:cs typeface="Times New Roman" pitchFamily="34" charset="-120"/>
+              </a:rPr>
+              <a:t>Example of Cameroon: </a:t>
+            </a:r>
+            <a:pPr algn="l" indent="0" marL="0">
+              <a:spcAft>
+                <a:spcPts val="800"/>
+              </a:spcAft>
+              <a:buNone/>
+            </a:pPr>
+            <a:r>
+              <a:rPr lang="en-US" sz="3600" dirty="0">
+                <a:solidFill>
+                  <a:srgbClr val="111111"/>
+                </a:solidFill>
+                <a:latin typeface="Times New Roman" pitchFamily="34" charset="0"/>
+                <a:ea typeface="Times New Roman" pitchFamily="34" charset="-122"/>
+                <a:cs typeface="Times New Roman" pitchFamily="34" charset="-120"/>
+              </a:rPr>
+              <a:t>Bamenda (about 1,600 m) and Dschang (about 1,400 m) have dense populations and a mild climate of about 20 °C.</a:t>
+            </a:r>
+            <a:endParaRPr lang="en-US" sz="3600" dirty="0"/>
           </a:p>
         </p:txBody>
       </p:sp>
       <p:pic>
         <p:nvPicPr>
-          <p:cNvPr id="3" name="Image 0" descr="/home/claude/f4/img/minesec_sheet.png">    </p:cNvPr>
+          <p:cNvPr id="5" name="Image 0" descr="/home/claude/f4/img/v2/usa_bamenda.jpg">    </p:cNvPr>
           <p:cNvPicPr>
             <a:picLocks noChangeAspect="1"/>
           </p:cNvPicPr>
@@ -16363,8 +17563,8 @@
         </p:blipFill>
         <p:spPr>
           <a:xfrm>
-            <a:off x="0" y="658368"/>
-            <a:ext cx="5120640" cy="5833872"/>
+            <a:off x="5349240" y="2071212"/>
+            <a:ext cx="6659575" cy="3693983"/>
           </a:xfrm>
           <a:prstGeom prst="rect">
             <a:avLst/>
@@ -16373,14 +17573,14 @@
       </p:pic>
       <p:sp>
         <p:nvSpPr>
-          <p:cNvPr id="4" name="Text 1"/>
+          <p:cNvPr id="6" name="Text 3"/>
           <p:cNvSpPr/>
           <p:nvPr/>
         </p:nvSpPr>
         <p:spPr>
           <a:xfrm>
-            <a:off x="5349240" y="1005840"/>
-            <a:ext cx="6522415" cy="731520"/>
+            <a:off x="5349240" y="6089904"/>
+            <a:ext cx="6659575" cy="347472"/>
           </a:xfrm>
           <a:prstGeom prst="rect">
             <a:avLst/>
@@ -16389,68 +17589,24 @@
           <a:ln/>
         </p:spPr>
         <p:txBody>
-          <a:bodyPr wrap="square" lIns="0" tIns="0" rIns="0" bIns="0" rtlCol="0" anchor="ctr">
-            <a:normAutofit/>
-          </a:bodyPr>
+          <a:bodyPr wrap="square" lIns="0" tIns="0" rIns="0" bIns="0" rtlCol="0" anchor="ctr"/>
           <a:lstStyle/>
           <a:p>
             <a:pPr algn="ctr" indent="0" marL="0">
               <a:buNone/>
             </a:pPr>
             <a:r>
-              <a:rPr lang="en-US" sz="3600" b="1" dirty="0">
-                <a:solidFill>
-                  <a:srgbClr val="990011"/>
+              <a:rPr lang="en-US" sz="1600" i="1" dirty="0">
+                <a:solidFill>
+                  <a:srgbClr val="555555"/>
                 </a:solidFill>
                 <a:latin typeface="Times New Roman" pitchFamily="34" charset="0"/>
                 <a:ea typeface="Times New Roman" pitchFamily="34" charset="-122"/>
                 <a:cs typeface="Times New Roman" pitchFamily="34" charset="-120"/>
               </a:rPr>
-              <a:t>Homework</a:t>
-            </a:r>
-            <a:endParaRPr lang="en-US" sz="3600" dirty="0"/>
-          </a:p>
-        </p:txBody>
-      </p:sp>
-      <p:sp>
-        <p:nvSpPr>
-          <p:cNvPr id="5" name="Text 2"/>
-          <p:cNvSpPr/>
-          <p:nvPr/>
-        </p:nvSpPr>
-        <p:spPr>
-          <a:xfrm>
-            <a:off x="5349240" y="1783080"/>
-            <a:ext cx="6522415" cy="4663440"/>
-          </a:xfrm>
-          <a:prstGeom prst="rect">
-            <a:avLst/>
-          </a:prstGeom>
-          <a:noFill/>
-          <a:ln/>
-        </p:spPr>
-        <p:txBody>
-          <a:bodyPr wrap="square" lIns="0" tIns="0" rIns="0" bIns="0" rtlCol="0" anchor="t"/>
-          <a:lstStyle/>
-          <a:p>
-            <a:pPr algn="l" indent="0" marL="0">
-              <a:spcAft>
-                <a:spcPts val="800"/>
-              </a:spcAft>
-              <a:buNone/>
-            </a:pPr>
-            <a:r>
-              <a:rPr lang="en-US" sz="4000" dirty="0">
-                <a:solidFill>
-                  <a:srgbClr val="111111"/>
-                </a:solidFill>
-                <a:latin typeface="Times New Roman" pitchFamily="34" charset="0"/>
-                <a:ea typeface="Times New Roman" pitchFamily="34" charset="-122"/>
-                <a:cs typeface="Times New Roman" pitchFamily="34" charset="-120"/>
-              </a:rPr>
-              <a:t>Draw a bar graph of population by altitude from the table and write three sentences about it.</a:t>
-            </a:r>
-            <a:endParaRPr lang="en-US" sz="4000" dirty="0"/>
+              <a:t>Illustration: the Bamenda Highlands</a:t>
+            </a:r>
+            <a:endParaRPr lang="en-US" sz="1600" dirty="0"/>
           </a:p>
         </p:txBody>
       </p:sp>
@@ -16560,15 +17716,115 @@
                 <a:ea typeface="Calibri" pitchFamily="34" charset="-122"/>
                 <a:cs typeface="Calibri" pitchFamily="34" charset="-120"/>
               </a:rPr>
-              <a:t>NEXT LESSON</a:t>
+              <a:t>BOARD SUMMARY</a:t>
             </a:r>
             <a:endParaRPr lang="en-US" sz="1400" dirty="0"/>
+          </a:p>
+        </p:txBody>
+      </p:sp>
+      <p:sp>
+        <p:nvSpPr>
+          <p:cNvPr id="3" name="Text 1"/>
+          <p:cNvSpPr/>
+          <p:nvPr/>
+        </p:nvSpPr>
+        <p:spPr>
+          <a:xfrm>
+            <a:off x="365760" y="1005840"/>
+            <a:ext cx="11460175" cy="731520"/>
+          </a:xfrm>
+          <a:prstGeom prst="rect">
+            <a:avLst/>
+          </a:prstGeom>
+          <a:noFill/>
+          <a:ln/>
+        </p:spPr>
+        <p:txBody>
+          <a:bodyPr wrap="square" lIns="0" tIns="0" rIns="0" bIns="0" rtlCol="0" anchor="ctr">
+            <a:normAutofit/>
+          </a:bodyPr>
+          <a:lstStyle/>
+          <a:p>
+            <a:pPr algn="ctr" indent="0" marL="0">
+              <a:buNone/>
+            </a:pPr>
+            <a:r>
+              <a:rPr lang="en-US" sz="3600" b="1" dirty="0">
+                <a:solidFill>
+                  <a:srgbClr val="990011"/>
+                </a:solidFill>
+                <a:latin typeface="Times New Roman" pitchFamily="34" charset="0"/>
+                <a:ea typeface="Times New Roman" pitchFamily="34" charset="-122"/>
+                <a:cs typeface="Times New Roman" pitchFamily="34" charset="-120"/>
+              </a:rPr>
+              <a:t>3. Exceptions and Special Cases</a:t>
+            </a:r>
+            <a:endParaRPr lang="en-US" sz="3600" dirty="0"/>
+          </a:p>
+        </p:txBody>
+      </p:sp>
+      <p:sp>
+        <p:nvSpPr>
+          <p:cNvPr id="4" name="Text 2"/>
+          <p:cNvSpPr/>
+          <p:nvPr/>
+        </p:nvSpPr>
+        <p:spPr>
+          <a:xfrm>
+            <a:off x="365760" y="1783080"/>
+            <a:ext cx="4846320" cy="4617720"/>
+          </a:xfrm>
+          <a:prstGeom prst="rect">
+            <a:avLst/>
+          </a:prstGeom>
+          <a:noFill/>
+          <a:ln/>
+        </p:spPr>
+        <p:txBody>
+          <a:bodyPr wrap="square" lIns="0" tIns="0" rIns="0" bIns="0" rtlCol="0" anchor="t"/>
+          <a:lstStyle/>
+          <a:p>
+            <a:pPr algn="l" indent="0" marL="0">
+              <a:spcAft>
+                <a:spcPts val="800"/>
+              </a:spcAft>
+              <a:buNone/>
+            </a:pPr>
+            <a:r>
+              <a:rPr lang="en-US" sz="3600" b="1" dirty="0">
+                <a:solidFill>
+                  <a:srgbClr val="111111"/>
+                </a:solidFill>
+                <a:latin typeface="Times New Roman" pitchFamily="34" charset="0"/>
+                <a:ea typeface="Times New Roman" pitchFamily="34" charset="-122"/>
+                <a:cs typeface="Times New Roman" pitchFamily="34" charset="-120"/>
+              </a:rPr>
+              <a:t>Plantation highlands: </a:t>
+            </a:r>
+            <a:pPr algn="l" indent="0" marL="0">
+              <a:spcAft>
+                <a:spcPts val="800"/>
+              </a:spcAft>
+              <a:buNone/>
+            </a:pPr>
+            <a:r>
+              <a:rPr lang="en-US" sz="3600" dirty="0">
+                <a:solidFill>
+                  <a:srgbClr val="111111"/>
+                </a:solidFill>
+                <a:latin typeface="Times New Roman" pitchFamily="34" charset="0"/>
+                <a:ea typeface="Times New Roman" pitchFamily="34" charset="-122"/>
+                <a:cs typeface="Times New Roman" pitchFamily="34" charset="-120"/>
+              </a:rPr>
+              <a:t>Mid-altitude areas with tea and coffee plantations keep high densities, as in Kenya and the Western Highlands.</a:t>
+            </a:r>
+            <a:endParaRPr lang="en-US" sz="3600" dirty="0"/>
           </a:p>
         </p:txBody>
       </p:sp>
       <p:pic>
         <p:nvPicPr>
-          <p:cNvPr id="3" name="Image 0" descr="/home/claude/f4/img/minesec_sheet.png">    </p:cNvPr>
+          <p:cNvPr id="5" name="Image 0" descr="/home/claude/f4/img/v2/f2t_tea_highlands.jpg">    </p:cNvPr>
           <p:cNvPicPr>
             <a:picLocks noChangeAspect="1"/>
           </p:cNvPicPr>
@@ -16582,8 +17838,8 @@
         </p:blipFill>
         <p:spPr>
           <a:xfrm>
-            <a:off x="0" y="658368"/>
-            <a:ext cx="5120640" cy="5833872"/>
+            <a:off x="5349240" y="2451667"/>
+            <a:ext cx="6659575" cy="2933075"/>
           </a:xfrm>
           <a:prstGeom prst="rect">
             <a:avLst/>
@@ -16592,14 +17848,14 @@
       </p:pic>
       <p:sp>
         <p:nvSpPr>
-          <p:cNvPr id="4" name="Text 1"/>
+          <p:cNvPr id="6" name="Text 3"/>
           <p:cNvSpPr/>
           <p:nvPr/>
         </p:nvSpPr>
         <p:spPr>
           <a:xfrm>
-            <a:off x="5349240" y="1005840"/>
-            <a:ext cx="6522415" cy="731520"/>
+            <a:off x="5349240" y="6089904"/>
+            <a:ext cx="6659575" cy="347472"/>
           </a:xfrm>
           <a:prstGeom prst="rect">
             <a:avLst/>
@@ -16608,88 +17864,24 @@
           <a:ln/>
         </p:spPr>
         <p:txBody>
-          <a:bodyPr wrap="square" lIns="0" tIns="0" rIns="0" bIns="0" rtlCol="0" anchor="ctr">
-            <a:normAutofit/>
-          </a:bodyPr>
+          <a:bodyPr wrap="square" lIns="0" tIns="0" rIns="0" bIns="0" rtlCol="0" anchor="ctr"/>
           <a:lstStyle/>
           <a:p>
             <a:pPr algn="ctr" indent="0" marL="0">
               <a:buNone/>
             </a:pPr>
             <a:r>
-              <a:rPr lang="en-US" sz="3600" b="1" dirty="0">
-                <a:solidFill>
-                  <a:srgbClr val="990011"/>
+              <a:rPr lang="en-US" sz="1600" i="1" dirty="0">
+                <a:solidFill>
+                  <a:srgbClr val="555555"/>
                 </a:solidFill>
                 <a:latin typeface="Times New Roman" pitchFamily="34" charset="0"/>
                 <a:ea typeface="Times New Roman" pitchFamily="34" charset="-122"/>
                 <a:cs typeface="Times New Roman" pitchFamily="34" charset="-120"/>
               </a:rPr>
-              <a:t>Next Lesson</a:t>
-            </a:r>
-            <a:endParaRPr lang="en-US" sz="3600" dirty="0"/>
-          </a:p>
-        </p:txBody>
-      </p:sp>
-      <p:sp>
-        <p:nvSpPr>
-          <p:cNvPr id="5" name="Text 2"/>
-          <p:cNvSpPr/>
-          <p:nvPr/>
-        </p:nvSpPr>
-        <p:spPr>
-          <a:xfrm>
-            <a:off x="5349240" y="1783080"/>
-            <a:ext cx="6522415" cy="4663440"/>
-          </a:xfrm>
-          <a:prstGeom prst="rect">
-            <a:avLst/>
-          </a:prstGeom>
-          <a:noFill/>
-          <a:ln/>
-        </p:spPr>
-        <p:txBody>
-          <a:bodyPr wrap="square" lIns="0" tIns="0" rIns="0" bIns="0" rtlCol="0" anchor="ctr"/>
-          <a:lstStyle/>
-          <a:p>
-            <a:pPr algn="ctr" indent="0" marL="0">
-              <a:spcAft>
-                <a:spcPts val="800"/>
-              </a:spcAft>
-              <a:buNone/>
-            </a:pPr>
-            <a:r>
-              <a:rPr lang="en-US" sz="4000" b="1" dirty="0">
-                <a:solidFill>
-                  <a:srgbClr val="111111"/>
-                </a:solidFill>
-                <a:latin typeface="Times New Roman" pitchFamily="34" charset="0"/>
-                <a:ea typeface="Times New Roman" pitchFamily="34" charset="-122"/>
-                <a:cs typeface="Times New Roman" pitchFamily="34" charset="-120"/>
-              </a:rPr>
-              <a:t>Our next lesson will be on:</a:t>
-            </a:r>
-            <a:endParaRPr lang="en-US" sz="4000" dirty="0"/>
-          </a:p>
-          <a:p>
-            <a:pPr algn="ctr" indent="0" marL="0">
-              <a:spcAft>
-                <a:spcPts val="800"/>
-              </a:spcAft>
-              <a:buNone/>
-            </a:pPr>
-            <a:r>
-              <a:rPr lang="en-US" sz="4000" b="1" dirty="0">
-                <a:solidFill>
-                  <a:srgbClr val="990011"/>
-                </a:solidFill>
-                <a:latin typeface="Times New Roman" pitchFamily="34" charset="0"/>
-                <a:ea typeface="Times New Roman" pitchFamily="34" charset="-122"/>
-                <a:cs typeface="Times New Roman" pitchFamily="34" charset="-120"/>
-              </a:rPr>
-              <a:t>Lesson 4: Modifications of Population Distribution</a:t>
-            </a:r>
-            <a:endParaRPr lang="en-US" sz="4000" dirty="0"/>
+              <a:t>Illustration: tea on highlands</a:t>
+            </a:r>
+            <a:endParaRPr lang="en-US" sz="1600" dirty="0"/>
           </a:p>
         </p:txBody>
       </p:sp>
@@ -16799,6 +17991,2119 @@
                 <a:ea typeface="Calibri" pitchFamily="34" charset="-122"/>
                 <a:cs typeface="Calibri" pitchFamily="34" charset="-120"/>
               </a:rPr>
+              <a:t>BOARD SUMMARY</a:t>
+            </a:r>
+            <a:endParaRPr lang="en-US" sz="1400" dirty="0"/>
+          </a:p>
+        </p:txBody>
+      </p:sp>
+      <p:sp>
+        <p:nvSpPr>
+          <p:cNvPr id="3" name="Text 1"/>
+          <p:cNvSpPr/>
+          <p:nvPr/>
+        </p:nvSpPr>
+        <p:spPr>
+          <a:xfrm>
+            <a:off x="365760" y="1005840"/>
+            <a:ext cx="11460175" cy="731520"/>
+          </a:xfrm>
+          <a:prstGeom prst="rect">
+            <a:avLst/>
+          </a:prstGeom>
+          <a:noFill/>
+          <a:ln/>
+        </p:spPr>
+        <p:txBody>
+          <a:bodyPr wrap="square" lIns="0" tIns="0" rIns="0" bIns="0" rtlCol="0" anchor="ctr">
+            <a:normAutofit/>
+          </a:bodyPr>
+          <a:lstStyle/>
+          <a:p>
+            <a:pPr algn="ctr" indent="0" marL="0">
+              <a:buNone/>
+            </a:pPr>
+            <a:r>
+              <a:rPr lang="en-US" sz="3600" b="1" dirty="0">
+                <a:solidFill>
+                  <a:srgbClr val="990011"/>
+                </a:solidFill>
+                <a:latin typeface="Times New Roman" pitchFamily="34" charset="0"/>
+                <a:ea typeface="Times New Roman" pitchFamily="34" charset="-122"/>
+                <a:cs typeface="Times New Roman" pitchFamily="34" charset="-120"/>
+              </a:rPr>
+              <a:t>3. Exceptions and Special Cases</a:t>
+            </a:r>
+            <a:endParaRPr lang="en-US" sz="3600" dirty="0"/>
+          </a:p>
+        </p:txBody>
+      </p:sp>
+      <p:sp>
+        <p:nvSpPr>
+          <p:cNvPr id="4" name="Text 2"/>
+          <p:cNvSpPr/>
+          <p:nvPr/>
+        </p:nvSpPr>
+        <p:spPr>
+          <a:xfrm>
+            <a:off x="365760" y="1783080"/>
+            <a:ext cx="4846320" cy="4617720"/>
+          </a:xfrm>
+          <a:prstGeom prst="rect">
+            <a:avLst/>
+          </a:prstGeom>
+          <a:noFill/>
+          <a:ln/>
+        </p:spPr>
+        <p:txBody>
+          <a:bodyPr wrap="square" lIns="0" tIns="0" rIns="0" bIns="0" rtlCol="0" anchor="t"/>
+          <a:lstStyle/>
+          <a:p>
+            <a:pPr algn="l" indent="0" marL="0">
+              <a:spcAft>
+                <a:spcPts val="800"/>
+              </a:spcAft>
+              <a:buNone/>
+            </a:pPr>
+            <a:r>
+              <a:rPr lang="en-US" sz="3600" b="1" dirty="0">
+                <a:solidFill>
+                  <a:srgbClr val="111111"/>
+                </a:solidFill>
+                <a:latin typeface="Times New Roman" pitchFamily="34" charset="0"/>
+                <a:ea typeface="Times New Roman" pitchFamily="34" charset="-122"/>
+                <a:cs typeface="Times New Roman" pitchFamily="34" charset="-120"/>
+              </a:rPr>
+              <a:t>High capital cities: </a:t>
+            </a:r>
+            <a:pPr algn="l" indent="0" marL="0">
+              <a:spcAft>
+                <a:spcPts val="800"/>
+              </a:spcAft>
+              <a:buNone/>
+            </a:pPr>
+            <a:r>
+              <a:rPr lang="en-US" sz="3600" dirty="0">
+                <a:solidFill>
+                  <a:srgbClr val="111111"/>
+                </a:solidFill>
+                <a:latin typeface="Times New Roman" pitchFamily="34" charset="0"/>
+                <a:ea typeface="Times New Roman" pitchFamily="34" charset="-122"/>
+                <a:cs typeface="Times New Roman" pitchFamily="34" charset="-120"/>
+              </a:rPr>
+              <a:t>La Paz (Bolivia), at about 3,600 m, is large because it is the seat of government, and Quito (Ecuador) is a capital at about 2,850 m.</a:t>
+            </a:r>
+            <a:endParaRPr lang="en-US" sz="3600" dirty="0"/>
+          </a:p>
+        </p:txBody>
+      </p:sp>
+      <p:pic>
+        <p:nvPicPr>
+          <p:cNvPr id="5" name="Image 0" descr="/home/claude/f4/img/v2/usa_lapaz.jpg">    </p:cNvPr>
+          <p:cNvPicPr>
+            <a:picLocks noChangeAspect="1"/>
+          </p:cNvPicPr>
+          <p:nvPr/>
+        </p:nvPicPr>
+        <p:blipFill>
+          <a:blip r:embed="rId1"/>
+          <a:stretch>
+            <a:fillRect/>
+          </a:stretch>
+        </p:blipFill>
+        <p:spPr>
+          <a:xfrm>
+            <a:off x="5349240" y="2071212"/>
+            <a:ext cx="6659575" cy="3693983"/>
+          </a:xfrm>
+          <a:prstGeom prst="rect">
+            <a:avLst/>
+          </a:prstGeom>
+        </p:spPr>
+      </p:pic>
+      <p:sp>
+        <p:nvSpPr>
+          <p:cNvPr id="6" name="Text 3"/>
+          <p:cNvSpPr/>
+          <p:nvPr/>
+        </p:nvSpPr>
+        <p:spPr>
+          <a:xfrm>
+            <a:off x="5349240" y="6089904"/>
+            <a:ext cx="6659575" cy="347472"/>
+          </a:xfrm>
+          <a:prstGeom prst="rect">
+            <a:avLst/>
+          </a:prstGeom>
+          <a:noFill/>
+          <a:ln/>
+        </p:spPr>
+        <p:txBody>
+          <a:bodyPr wrap="square" lIns="0" tIns="0" rIns="0" bIns="0" rtlCol="0" anchor="ctr"/>
+          <a:lstStyle/>
+          <a:p>
+            <a:pPr algn="ctr" indent="0" marL="0">
+              <a:buNone/>
+            </a:pPr>
+            <a:r>
+              <a:rPr lang="en-US" sz="1600" i="1" dirty="0">
+                <a:solidFill>
+                  <a:srgbClr val="555555"/>
+                </a:solidFill>
+                <a:latin typeface="Times New Roman" pitchFamily="34" charset="0"/>
+                <a:ea typeface="Times New Roman" pitchFamily="34" charset="-122"/>
+                <a:cs typeface="Times New Roman" pitchFamily="34" charset="-120"/>
+              </a:rPr>
+              <a:t>Illustration: La Paz</a:t>
+            </a:r>
+            <a:endParaRPr lang="en-US" sz="1600" dirty="0"/>
+          </a:p>
+        </p:txBody>
+      </p:sp>
+      <p:sp>
+        <p:nvSpPr>
+          <p:cNvPr id="25" name="Slide Number Placeholder 0"/>
+          <p:cNvSpPr>
+            <a:spLocks noGrp="1"/>
+          </p:cNvSpPr>
+          <p:nvPr>
+            <p:ph type="sldNum" sz="quarter" idx="4294967295"/>
+          </p:nvPr>
+        </p:nvSpPr>
+        <p:spPr>
+          <a:xfrm>
+            <a:off x="27432" y="91440"/>
+            <a:ext cx="585216" cy="475488"/>
+          </a:xfrm>
+          <a:prstGeom prst="rect">
+            <a:avLst/>
+          </a:prstGeom>
+          <a:extLst>
+            <a:ext uri="{C572A759-6A51-4108-AA02-DFA0A04FC94B}">
+              <ma14:wrappingTextBoxFlag xmlns:ma14="http://schemas.microsoft.com/office/mac/drawingml/2011/main" val="0"/>
+            </a:ext>
+          </a:extLst>
+        </p:spPr>
+        <p:txBody>
+          <a:bodyPr/>
+          <a:lstStyle>
+            <a:lvl1pPr>
+              <a:defRPr sz="2000">
+                <a:solidFill>
+                  <a:srgbClr val="FFFFFF"/>
+                </a:solidFill>
+                <a:latin typeface="Calibri"/>
+                <a:ea typeface="Calibri"/>
+                <a:cs typeface="Calibri"/>
+              </a:defRPr>
+            </a:lvl1pPr>
+          </a:lstStyle>
+          <a:p>
+            <a:pPr algn="ctr"/>
+            <a:fld id="{F7021451-1387-4CA6-816F-3879F97B5CBC}" type="slidenum">
+              <a:rPr b="1" lang="en-US"/>
+              <a:t>48</a:t>
+            </a:fld>
+            <a:endParaRPr lang="en-US"/>
+          </a:p>
+        </p:txBody>
+      </p:sp>
+    </p:spTree>
+  </p:cSld>
+  <p:clrMapOvr>
+    <a:masterClrMapping/>
+  </p:clrMapOvr>
+</p:sld>
+</file>
+
+<file path=ppt/slides/slide49.xml><?xml version="1.0" encoding="utf-8"?>
+<p:sld xmlns:a="http://schemas.openxmlformats.org/drawingml/2006/main" xmlns:r="http://schemas.openxmlformats.org/officeDocument/2006/relationships" xmlns:p="http://schemas.openxmlformats.org/presentationml/2006/main">
+  <p:cSld name="Slide 49">
+    <p:spTree>
+      <p:nvGrpSpPr>
+        <p:cNvPr id="1" name=""/>
+        <p:cNvGrpSpPr/>
+        <p:nvPr/>
+      </p:nvGrpSpPr>
+      <p:grpSpPr>
+        <a:xfrm>
+          <a:off x="0" y="0"/>
+          <a:ext cx="0" cy="0"/>
+          <a:chOff x="0" y="0"/>
+          <a:chExt cx="0" cy="0"/>
+        </a:xfrm>
+      </p:grpSpPr>
+      <p:sp>
+        <p:nvSpPr>
+          <p:cNvPr id="2" name="Text 0"/>
+          <p:cNvSpPr/>
+          <p:nvPr/>
+        </p:nvSpPr>
+        <p:spPr>
+          <a:xfrm>
+            <a:off x="457200" y="713232"/>
+            <a:ext cx="11368735" cy="274320"/>
+          </a:xfrm>
+          <a:prstGeom prst="rect">
+            <a:avLst/>
+          </a:prstGeom>
+          <a:noFill/>
+          <a:ln/>
+        </p:spPr>
+        <p:txBody>
+          <a:bodyPr wrap="square" lIns="0" tIns="0" rIns="0" bIns="0" rtlCol="0" anchor="ctr"/>
+          <a:lstStyle/>
+          <a:p>
+            <a:pPr algn="r" indent="0" marL="0">
+              <a:buNone/>
+            </a:pPr>
+            <a:r>
+              <a:rPr lang="en-US" sz="1400" b="1" dirty="0">
+                <a:solidFill>
+                  <a:srgbClr val="1C3F6E"/>
+                </a:solidFill>
+                <a:latin typeface="Calibri" pitchFamily="34" charset="0"/>
+                <a:ea typeface="Calibri" pitchFamily="34" charset="-122"/>
+                <a:cs typeface="Calibri" pitchFamily="34" charset="-120"/>
+              </a:rPr>
+              <a:t>FORMATIVE EVALUATION</a:t>
+            </a:r>
+            <a:endParaRPr lang="en-US" sz="1400" dirty="0"/>
+          </a:p>
+        </p:txBody>
+      </p:sp>
+      <p:pic>
+        <p:nvPicPr>
+          <p:cNvPr id="3" name="Image 0" descr="/home/claude/f4/img/minesec_sheet.png">    </p:cNvPr>
+          <p:cNvPicPr>
+            <a:picLocks noChangeAspect="1"/>
+          </p:cNvPicPr>
+          <p:nvPr/>
+        </p:nvPicPr>
+        <p:blipFill>
+          <a:blip r:embed="rId1"/>
+          <a:stretch>
+            <a:fillRect/>
+          </a:stretch>
+        </p:blipFill>
+        <p:spPr>
+          <a:xfrm>
+            <a:off x="0" y="658368"/>
+            <a:ext cx="5120640" cy="5833872"/>
+          </a:xfrm>
+          <a:prstGeom prst="rect">
+            <a:avLst/>
+          </a:prstGeom>
+        </p:spPr>
+      </p:pic>
+      <p:sp>
+        <p:nvSpPr>
+          <p:cNvPr id="4" name="Text 1"/>
+          <p:cNvSpPr/>
+          <p:nvPr/>
+        </p:nvSpPr>
+        <p:spPr>
+          <a:xfrm>
+            <a:off x="5349240" y="1005840"/>
+            <a:ext cx="6522415" cy="731520"/>
+          </a:xfrm>
+          <a:prstGeom prst="rect">
+            <a:avLst/>
+          </a:prstGeom>
+          <a:noFill/>
+          <a:ln/>
+        </p:spPr>
+        <p:txBody>
+          <a:bodyPr wrap="square" lIns="0" tIns="0" rIns="0" bIns="0" rtlCol="0" anchor="ctr">
+            <a:normAutofit/>
+          </a:bodyPr>
+          <a:lstStyle/>
+          <a:p>
+            <a:pPr algn="ctr" indent="0" marL="0">
+              <a:buNone/>
+            </a:pPr>
+            <a:r>
+              <a:rPr lang="en-US" sz="3600" b="1" dirty="0">
+                <a:solidFill>
+                  <a:srgbClr val="990011"/>
+                </a:solidFill>
+                <a:latin typeface="Times New Roman" pitchFamily="34" charset="0"/>
+                <a:ea typeface="Times New Roman" pitchFamily="34" charset="-122"/>
+                <a:cs typeface="Times New Roman" pitchFamily="34" charset="-120"/>
+              </a:rPr>
+              <a:t>Evaluation 1</a:t>
+            </a:r>
+            <a:endParaRPr lang="en-US" sz="3600" dirty="0"/>
+          </a:p>
+        </p:txBody>
+      </p:sp>
+      <p:sp>
+        <p:nvSpPr>
+          <p:cNvPr id="5" name="Text 2"/>
+          <p:cNvSpPr/>
+          <p:nvPr/>
+        </p:nvSpPr>
+        <p:spPr>
+          <a:xfrm>
+            <a:off x="5349240" y="1783080"/>
+            <a:ext cx="6522415" cy="4663440"/>
+          </a:xfrm>
+          <a:prstGeom prst="rect">
+            <a:avLst/>
+          </a:prstGeom>
+          <a:noFill/>
+          <a:ln/>
+        </p:spPr>
+        <p:txBody>
+          <a:bodyPr wrap="square" lIns="0" tIns="0" rIns="0" bIns="0" rtlCol="0" anchor="t"/>
+          <a:lstStyle/>
+          <a:p>
+            <a:pPr algn="l" indent="0" marL="0">
+              <a:spcAft>
+                <a:spcPts val="800"/>
+              </a:spcAft>
+              <a:buNone/>
+            </a:pPr>
+            <a:r>
+              <a:rPr lang="en-US" sz="4000" dirty="0">
+                <a:solidFill>
+                  <a:srgbClr val="111111"/>
+                </a:solidFill>
+                <a:latin typeface="Times New Roman" pitchFamily="34" charset="0"/>
+                <a:ea typeface="Times New Roman" pitchFamily="34" charset="-122"/>
+                <a:cs typeface="Times New Roman" pitchFamily="34" charset="-120"/>
+              </a:rPr>
+              <a:t>Why do low-altitude areas generally support high densities?</a:t>
+            </a:r>
+            <a:endParaRPr lang="en-US" sz="4000" dirty="0"/>
+          </a:p>
+        </p:txBody>
+      </p:sp>
+      <p:sp>
+        <p:nvSpPr>
+          <p:cNvPr id="25" name="Slide Number Placeholder 0"/>
+          <p:cNvSpPr>
+            <a:spLocks noGrp="1"/>
+          </p:cNvSpPr>
+          <p:nvPr>
+            <p:ph type="sldNum" sz="quarter" idx="4294967295"/>
+          </p:nvPr>
+        </p:nvSpPr>
+        <p:spPr>
+          <a:xfrm>
+            <a:off x="27432" y="91440"/>
+            <a:ext cx="585216" cy="475488"/>
+          </a:xfrm>
+          <a:prstGeom prst="rect">
+            <a:avLst/>
+          </a:prstGeom>
+          <a:extLst>
+            <a:ext uri="{C572A759-6A51-4108-AA02-DFA0A04FC94B}">
+              <ma14:wrappingTextBoxFlag xmlns:ma14="http://schemas.microsoft.com/office/mac/drawingml/2011/main" val="0"/>
+            </a:ext>
+          </a:extLst>
+        </p:spPr>
+        <p:txBody>
+          <a:bodyPr/>
+          <a:lstStyle>
+            <a:lvl1pPr>
+              <a:defRPr sz="2000">
+                <a:solidFill>
+                  <a:srgbClr val="FFFFFF"/>
+                </a:solidFill>
+                <a:latin typeface="Calibri"/>
+                <a:ea typeface="Calibri"/>
+                <a:cs typeface="Calibri"/>
+              </a:defRPr>
+            </a:lvl1pPr>
+          </a:lstStyle>
+          <a:p>
+            <a:pPr algn="ctr"/>
+            <a:fld id="{F7021451-1387-4CA6-816F-3879F97B5CBC}" type="slidenum">
+              <a:rPr b="1" lang="en-US"/>
+              <a:t>49</a:t>
+            </a:fld>
+            <a:endParaRPr lang="en-US"/>
+          </a:p>
+        </p:txBody>
+      </p:sp>
+    </p:spTree>
+  </p:cSld>
+  <p:clrMapOvr>
+    <a:masterClrMapping/>
+  </p:clrMapOvr>
+</p:sld>
+</file>
+
+<file path=ppt/slides/slide5.xml><?xml version="1.0" encoding="utf-8"?>
+<p:sld xmlns:a="http://schemas.openxmlformats.org/drawingml/2006/main" xmlns:r="http://schemas.openxmlformats.org/officeDocument/2006/relationships" xmlns:p="http://schemas.openxmlformats.org/presentationml/2006/main">
+  <p:cSld name="Slide 5">
+    <p:spTree>
+      <p:nvGrpSpPr>
+        <p:cNvPr id="1" name=""/>
+        <p:cNvGrpSpPr/>
+        <p:nvPr/>
+      </p:nvGrpSpPr>
+      <p:grpSpPr>
+        <a:xfrm>
+          <a:off x="0" y="0"/>
+          <a:ext cx="0" cy="0"/>
+          <a:chOff x="0" y="0"/>
+          <a:chExt cx="0" cy="0"/>
+        </a:xfrm>
+      </p:grpSpPr>
+      <p:sp>
+        <p:nvSpPr>
+          <p:cNvPr id="2" name="Text 0"/>
+          <p:cNvSpPr/>
+          <p:nvPr/>
+        </p:nvSpPr>
+        <p:spPr>
+          <a:xfrm>
+            <a:off x="457200" y="713232"/>
+            <a:ext cx="11368735" cy="274320"/>
+          </a:xfrm>
+          <a:prstGeom prst="rect">
+            <a:avLst/>
+          </a:prstGeom>
+          <a:noFill/>
+          <a:ln/>
+        </p:spPr>
+        <p:txBody>
+          <a:bodyPr wrap="square" lIns="0" tIns="0" rIns="0" bIns="0" rtlCol="0" anchor="ctr"/>
+          <a:lstStyle/>
+          <a:p>
+            <a:pPr algn="r" indent="0" marL="0">
+              <a:buNone/>
+            </a:pPr>
+            <a:r>
+              <a:rPr lang="en-US" sz="1400" b="1" dirty="0">
+                <a:solidFill>
+                  <a:srgbClr val="1C3F6E"/>
+                </a:solidFill>
+                <a:latin typeface="Calibri" pitchFamily="34" charset="0"/>
+                <a:ea typeface="Calibri" pitchFamily="34" charset="-122"/>
+                <a:cs typeface="Calibri" pitchFamily="34" charset="-120"/>
+              </a:rPr>
+              <a:t>HOMEWORK CORRECTION</a:t>
+            </a:r>
+            <a:endParaRPr lang="en-US" sz="1400" dirty="0"/>
+          </a:p>
+        </p:txBody>
+      </p:sp>
+      <p:pic>
+        <p:nvPicPr>
+          <p:cNvPr id="3" name="Image 0" descr="/home/claude/f4/img/minesec_sheet.png">    </p:cNvPr>
+          <p:cNvPicPr>
+            <a:picLocks noChangeAspect="1"/>
+          </p:cNvPicPr>
+          <p:nvPr/>
+        </p:nvPicPr>
+        <p:blipFill>
+          <a:blip r:embed="rId1"/>
+          <a:stretch>
+            <a:fillRect/>
+          </a:stretch>
+        </p:blipFill>
+        <p:spPr>
+          <a:xfrm>
+            <a:off x="0" y="658368"/>
+            <a:ext cx="5120640" cy="5833872"/>
+          </a:xfrm>
+          <a:prstGeom prst="rect">
+            <a:avLst/>
+          </a:prstGeom>
+        </p:spPr>
+      </p:pic>
+      <p:sp>
+        <p:nvSpPr>
+          <p:cNvPr id="4" name="Text 1"/>
+          <p:cNvSpPr/>
+          <p:nvPr/>
+        </p:nvSpPr>
+        <p:spPr>
+          <a:xfrm>
+            <a:off x="5349240" y="1005840"/>
+            <a:ext cx="6522415" cy="731520"/>
+          </a:xfrm>
+          <a:prstGeom prst="rect">
+            <a:avLst/>
+          </a:prstGeom>
+          <a:noFill/>
+          <a:ln/>
+        </p:spPr>
+        <p:txBody>
+          <a:bodyPr wrap="square" lIns="0" tIns="0" rIns="0" bIns="0" rtlCol="0" anchor="ctr">
+            <a:normAutofit/>
+          </a:bodyPr>
+          <a:lstStyle/>
+          <a:p>
+            <a:pPr algn="ctr" indent="0" marL="0">
+              <a:buNone/>
+            </a:pPr>
+            <a:r>
+              <a:rPr lang="en-US" sz="3600" b="1" dirty="0">
+                <a:solidFill>
+                  <a:srgbClr val="990011"/>
+                </a:solidFill>
+                <a:latin typeface="Times New Roman" pitchFamily="34" charset="0"/>
+                <a:ea typeface="Times New Roman" pitchFamily="34" charset="-122"/>
+                <a:cs typeface="Times New Roman" pitchFamily="34" charset="-120"/>
+              </a:rPr>
+              <a:t>Correction: Possible Answer</a:t>
+            </a:r>
+            <a:endParaRPr lang="en-US" sz="3600" dirty="0"/>
+          </a:p>
+        </p:txBody>
+      </p:sp>
+      <p:sp>
+        <p:nvSpPr>
+          <p:cNvPr id="5" name="Text 2"/>
+          <p:cNvSpPr/>
+          <p:nvPr/>
+        </p:nvSpPr>
+        <p:spPr>
+          <a:xfrm>
+            <a:off x="5349240" y="1783080"/>
+            <a:ext cx="6522415" cy="4663440"/>
+          </a:xfrm>
+          <a:prstGeom prst="rect">
+            <a:avLst/>
+          </a:prstGeom>
+          <a:noFill/>
+          <a:ln/>
+        </p:spPr>
+        <p:txBody>
+          <a:bodyPr wrap="square" lIns="0" tIns="0" rIns="0" bIns="0" rtlCol="0" anchor="t"/>
+          <a:lstStyle/>
+          <a:p>
+            <a:pPr algn="l" indent="0" marL="0">
+              <a:spcAft>
+                <a:spcPts val="800"/>
+              </a:spcAft>
+              <a:buNone/>
+            </a:pPr>
+            <a:r>
+              <a:rPr lang="en-US" sz="4000" dirty="0">
+                <a:solidFill>
+                  <a:srgbClr val="111111"/>
+                </a:solidFill>
+                <a:latin typeface="Times New Roman" pitchFamily="34" charset="0"/>
+                <a:ea typeface="Times New Roman" pitchFamily="34" charset="-122"/>
+                <a:cs typeface="Times New Roman" pitchFamily="34" charset="-120"/>
+              </a:rPr>
+              <a:t>In general, population density decreases as altitude increases, except in some tropical highlands.</a:t>
+            </a:r>
+            <a:endParaRPr lang="en-US" sz="4000" dirty="0"/>
+          </a:p>
+        </p:txBody>
+      </p:sp>
+      <p:sp>
+        <p:nvSpPr>
+          <p:cNvPr id="25" name="Slide Number Placeholder 0"/>
+          <p:cNvSpPr>
+            <a:spLocks noGrp="1"/>
+          </p:cNvSpPr>
+          <p:nvPr>
+            <p:ph type="sldNum" sz="quarter" idx="4294967295"/>
+          </p:nvPr>
+        </p:nvSpPr>
+        <p:spPr>
+          <a:xfrm>
+            <a:off x="27432" y="91440"/>
+            <a:ext cx="585216" cy="475488"/>
+          </a:xfrm>
+          <a:prstGeom prst="rect">
+            <a:avLst/>
+          </a:prstGeom>
+          <a:extLst>
+            <a:ext uri="{C572A759-6A51-4108-AA02-DFA0A04FC94B}">
+              <ma14:wrappingTextBoxFlag xmlns:ma14="http://schemas.microsoft.com/office/mac/drawingml/2011/main" val="0"/>
+            </a:ext>
+          </a:extLst>
+        </p:spPr>
+        <p:txBody>
+          <a:bodyPr/>
+          <a:lstStyle>
+            <a:lvl1pPr>
+              <a:defRPr sz="2000">
+                <a:solidFill>
+                  <a:srgbClr val="FFFFFF"/>
+                </a:solidFill>
+                <a:latin typeface="Calibri"/>
+                <a:ea typeface="Calibri"/>
+                <a:cs typeface="Calibri"/>
+              </a:defRPr>
+            </a:lvl1pPr>
+          </a:lstStyle>
+          <a:p>
+            <a:pPr algn="ctr"/>
+            <a:fld id="{F7021451-1387-4CA6-816F-3879F97B5CBC}" type="slidenum">
+              <a:rPr b="1" lang="en-US"/>
+              <a:t>5</a:t>
+            </a:fld>
+            <a:endParaRPr lang="en-US"/>
+          </a:p>
+        </p:txBody>
+      </p:sp>
+    </p:spTree>
+  </p:cSld>
+  <p:clrMapOvr>
+    <a:masterClrMapping/>
+  </p:clrMapOvr>
+</p:sld>
+</file>
+
+<file path=ppt/slides/slide50.xml><?xml version="1.0" encoding="utf-8"?>
+<p:sld xmlns:a="http://schemas.openxmlformats.org/drawingml/2006/main" xmlns:r="http://schemas.openxmlformats.org/officeDocument/2006/relationships" xmlns:p="http://schemas.openxmlformats.org/presentationml/2006/main">
+  <p:cSld name="Slide 50">
+    <p:spTree>
+      <p:nvGrpSpPr>
+        <p:cNvPr id="1" name=""/>
+        <p:cNvGrpSpPr/>
+        <p:nvPr/>
+      </p:nvGrpSpPr>
+      <p:grpSpPr>
+        <a:xfrm>
+          <a:off x="0" y="0"/>
+          <a:ext cx="0" cy="0"/>
+          <a:chOff x="0" y="0"/>
+          <a:chExt cx="0" cy="0"/>
+        </a:xfrm>
+      </p:grpSpPr>
+      <p:sp>
+        <p:nvSpPr>
+          <p:cNvPr id="2" name="Text 0"/>
+          <p:cNvSpPr/>
+          <p:nvPr/>
+        </p:nvSpPr>
+        <p:spPr>
+          <a:xfrm>
+            <a:off x="457200" y="713232"/>
+            <a:ext cx="11368735" cy="274320"/>
+          </a:xfrm>
+          <a:prstGeom prst="rect">
+            <a:avLst/>
+          </a:prstGeom>
+          <a:noFill/>
+          <a:ln/>
+        </p:spPr>
+        <p:txBody>
+          <a:bodyPr wrap="square" lIns="0" tIns="0" rIns="0" bIns="0" rtlCol="0" anchor="ctr"/>
+          <a:lstStyle/>
+          <a:p>
+            <a:pPr algn="r" indent="0" marL="0">
+              <a:buNone/>
+            </a:pPr>
+            <a:r>
+              <a:rPr lang="en-US" sz="1400" b="1" dirty="0">
+                <a:solidFill>
+                  <a:srgbClr val="1C3F6E"/>
+                </a:solidFill>
+                <a:latin typeface="Calibri" pitchFamily="34" charset="0"/>
+                <a:ea typeface="Calibri" pitchFamily="34" charset="-122"/>
+                <a:cs typeface="Calibri" pitchFamily="34" charset="-120"/>
+              </a:rPr>
+              <a:t>FORMATIVE EVALUATION</a:t>
+            </a:r>
+            <a:endParaRPr lang="en-US" sz="1400" dirty="0"/>
+          </a:p>
+        </p:txBody>
+      </p:sp>
+      <p:pic>
+        <p:nvPicPr>
+          <p:cNvPr id="3" name="Image 0" descr="/home/claude/f4/img/minesec_sheet.png">    </p:cNvPr>
+          <p:cNvPicPr>
+            <a:picLocks noChangeAspect="1"/>
+          </p:cNvPicPr>
+          <p:nvPr/>
+        </p:nvPicPr>
+        <p:blipFill>
+          <a:blip r:embed="rId1"/>
+          <a:stretch>
+            <a:fillRect/>
+          </a:stretch>
+        </p:blipFill>
+        <p:spPr>
+          <a:xfrm>
+            <a:off x="0" y="658368"/>
+            <a:ext cx="5120640" cy="5833872"/>
+          </a:xfrm>
+          <a:prstGeom prst="rect">
+            <a:avLst/>
+          </a:prstGeom>
+        </p:spPr>
+      </p:pic>
+      <p:sp>
+        <p:nvSpPr>
+          <p:cNvPr id="4" name="Text 1"/>
+          <p:cNvSpPr/>
+          <p:nvPr/>
+        </p:nvSpPr>
+        <p:spPr>
+          <a:xfrm>
+            <a:off x="5349240" y="1005840"/>
+            <a:ext cx="6522415" cy="731520"/>
+          </a:xfrm>
+          <a:prstGeom prst="rect">
+            <a:avLst/>
+          </a:prstGeom>
+          <a:noFill/>
+          <a:ln/>
+        </p:spPr>
+        <p:txBody>
+          <a:bodyPr wrap="square" lIns="0" tIns="0" rIns="0" bIns="0" rtlCol="0" anchor="ctr">
+            <a:normAutofit/>
+          </a:bodyPr>
+          <a:lstStyle/>
+          <a:p>
+            <a:pPr algn="ctr" indent="0" marL="0">
+              <a:buNone/>
+            </a:pPr>
+            <a:r>
+              <a:rPr lang="en-US" sz="3600" b="1" dirty="0">
+                <a:solidFill>
+                  <a:srgbClr val="990011"/>
+                </a:solidFill>
+                <a:latin typeface="Times New Roman" pitchFamily="34" charset="0"/>
+                <a:ea typeface="Times New Roman" pitchFamily="34" charset="-122"/>
+                <a:cs typeface="Times New Roman" pitchFamily="34" charset="-120"/>
+              </a:rPr>
+              <a:t>Expected Answer</a:t>
+            </a:r>
+            <a:endParaRPr lang="en-US" sz="3600" dirty="0"/>
+          </a:p>
+        </p:txBody>
+      </p:sp>
+      <p:sp>
+        <p:nvSpPr>
+          <p:cNvPr id="5" name="Text 2"/>
+          <p:cNvSpPr/>
+          <p:nvPr/>
+        </p:nvSpPr>
+        <p:spPr>
+          <a:xfrm>
+            <a:off x="5349240" y="1783080"/>
+            <a:ext cx="6522415" cy="4663440"/>
+          </a:xfrm>
+          <a:prstGeom prst="rect">
+            <a:avLst/>
+          </a:prstGeom>
+          <a:noFill/>
+          <a:ln/>
+        </p:spPr>
+        <p:txBody>
+          <a:bodyPr wrap="square" lIns="0" tIns="0" rIns="0" bIns="0" rtlCol="0" anchor="t"/>
+          <a:lstStyle/>
+          <a:p>
+            <a:pPr algn="l" indent="0" marL="0">
+              <a:spcAft>
+                <a:spcPts val="800"/>
+              </a:spcAft>
+              <a:buNone/>
+            </a:pPr>
+            <a:r>
+              <a:rPr lang="en-US" sz="4000" dirty="0">
+                <a:solidFill>
+                  <a:srgbClr val="111111"/>
+                </a:solidFill>
+                <a:latin typeface="Times New Roman" pitchFamily="34" charset="0"/>
+                <a:ea typeface="Times New Roman" pitchFamily="34" charset="-122"/>
+                <a:cs typeface="Times New Roman" pitchFamily="34" charset="-120"/>
+              </a:rPr>
+              <a:t>They have fertile plains, water, a warm climate, easy transport and large towns.</a:t>
+            </a:r>
+            <a:endParaRPr lang="en-US" sz="4000" dirty="0"/>
+          </a:p>
+        </p:txBody>
+      </p:sp>
+      <p:sp>
+        <p:nvSpPr>
+          <p:cNvPr id="25" name="Slide Number Placeholder 0"/>
+          <p:cNvSpPr>
+            <a:spLocks noGrp="1"/>
+          </p:cNvSpPr>
+          <p:nvPr>
+            <p:ph type="sldNum" sz="quarter" idx="4294967295"/>
+          </p:nvPr>
+        </p:nvSpPr>
+        <p:spPr>
+          <a:xfrm>
+            <a:off x="27432" y="91440"/>
+            <a:ext cx="585216" cy="475488"/>
+          </a:xfrm>
+          <a:prstGeom prst="rect">
+            <a:avLst/>
+          </a:prstGeom>
+          <a:extLst>
+            <a:ext uri="{C572A759-6A51-4108-AA02-DFA0A04FC94B}">
+              <ma14:wrappingTextBoxFlag xmlns:ma14="http://schemas.microsoft.com/office/mac/drawingml/2011/main" val="0"/>
+            </a:ext>
+          </a:extLst>
+        </p:spPr>
+        <p:txBody>
+          <a:bodyPr/>
+          <a:lstStyle>
+            <a:lvl1pPr>
+              <a:defRPr sz="2000">
+                <a:solidFill>
+                  <a:srgbClr val="FFFFFF"/>
+                </a:solidFill>
+                <a:latin typeface="Calibri"/>
+                <a:ea typeface="Calibri"/>
+                <a:cs typeface="Calibri"/>
+              </a:defRPr>
+            </a:lvl1pPr>
+          </a:lstStyle>
+          <a:p>
+            <a:pPr algn="ctr"/>
+            <a:fld id="{F7021451-1387-4CA6-816F-3879F97B5CBC}" type="slidenum">
+              <a:rPr b="1" lang="en-US"/>
+              <a:t>50</a:t>
+            </a:fld>
+            <a:endParaRPr lang="en-US"/>
+          </a:p>
+        </p:txBody>
+      </p:sp>
+    </p:spTree>
+  </p:cSld>
+  <p:clrMapOvr>
+    <a:masterClrMapping/>
+  </p:clrMapOvr>
+</p:sld>
+</file>
+
+<file path=ppt/slides/slide51.xml><?xml version="1.0" encoding="utf-8"?>
+<p:sld xmlns:a="http://schemas.openxmlformats.org/drawingml/2006/main" xmlns:r="http://schemas.openxmlformats.org/officeDocument/2006/relationships" xmlns:p="http://schemas.openxmlformats.org/presentationml/2006/main">
+  <p:cSld name="Slide 51">
+    <p:spTree>
+      <p:nvGrpSpPr>
+        <p:cNvPr id="1" name=""/>
+        <p:cNvGrpSpPr/>
+        <p:nvPr/>
+      </p:nvGrpSpPr>
+      <p:grpSpPr>
+        <a:xfrm>
+          <a:off x="0" y="0"/>
+          <a:ext cx="0" cy="0"/>
+          <a:chOff x="0" y="0"/>
+          <a:chExt cx="0" cy="0"/>
+        </a:xfrm>
+      </p:grpSpPr>
+      <p:sp>
+        <p:nvSpPr>
+          <p:cNvPr id="2" name="Text 0"/>
+          <p:cNvSpPr/>
+          <p:nvPr/>
+        </p:nvSpPr>
+        <p:spPr>
+          <a:xfrm>
+            <a:off x="457200" y="713232"/>
+            <a:ext cx="11368735" cy="274320"/>
+          </a:xfrm>
+          <a:prstGeom prst="rect">
+            <a:avLst/>
+          </a:prstGeom>
+          <a:noFill/>
+          <a:ln/>
+        </p:spPr>
+        <p:txBody>
+          <a:bodyPr wrap="square" lIns="0" tIns="0" rIns="0" bIns="0" rtlCol="0" anchor="ctr"/>
+          <a:lstStyle/>
+          <a:p>
+            <a:pPr algn="r" indent="0" marL="0">
+              <a:buNone/>
+            </a:pPr>
+            <a:r>
+              <a:rPr lang="en-US" sz="1400" b="1" dirty="0">
+                <a:solidFill>
+                  <a:srgbClr val="1C3F6E"/>
+                </a:solidFill>
+                <a:latin typeface="Calibri" pitchFamily="34" charset="0"/>
+                <a:ea typeface="Calibri" pitchFamily="34" charset="-122"/>
+                <a:cs typeface="Calibri" pitchFamily="34" charset="-120"/>
+              </a:rPr>
+              <a:t>FORMATIVE EVALUATION</a:t>
+            </a:r>
+            <a:endParaRPr lang="en-US" sz="1400" dirty="0"/>
+          </a:p>
+        </p:txBody>
+      </p:sp>
+      <p:pic>
+        <p:nvPicPr>
+          <p:cNvPr id="3" name="Image 0" descr="/home/claude/f4/img/minesec_sheet.png">    </p:cNvPr>
+          <p:cNvPicPr>
+            <a:picLocks noChangeAspect="1"/>
+          </p:cNvPicPr>
+          <p:nvPr/>
+        </p:nvPicPr>
+        <p:blipFill>
+          <a:blip r:embed="rId1"/>
+          <a:stretch>
+            <a:fillRect/>
+          </a:stretch>
+        </p:blipFill>
+        <p:spPr>
+          <a:xfrm>
+            <a:off x="0" y="658368"/>
+            <a:ext cx="5120640" cy="5833872"/>
+          </a:xfrm>
+          <a:prstGeom prst="rect">
+            <a:avLst/>
+          </a:prstGeom>
+        </p:spPr>
+      </p:pic>
+      <p:sp>
+        <p:nvSpPr>
+          <p:cNvPr id="4" name="Text 1"/>
+          <p:cNvSpPr/>
+          <p:nvPr/>
+        </p:nvSpPr>
+        <p:spPr>
+          <a:xfrm>
+            <a:off x="5349240" y="1005840"/>
+            <a:ext cx="6522415" cy="731520"/>
+          </a:xfrm>
+          <a:prstGeom prst="rect">
+            <a:avLst/>
+          </a:prstGeom>
+          <a:noFill/>
+          <a:ln/>
+        </p:spPr>
+        <p:txBody>
+          <a:bodyPr wrap="square" lIns="0" tIns="0" rIns="0" bIns="0" rtlCol="0" anchor="ctr">
+            <a:normAutofit/>
+          </a:bodyPr>
+          <a:lstStyle/>
+          <a:p>
+            <a:pPr algn="ctr" indent="0" marL="0">
+              <a:buNone/>
+            </a:pPr>
+            <a:r>
+              <a:rPr lang="en-US" sz="3600" b="1" dirty="0">
+                <a:solidFill>
+                  <a:srgbClr val="990011"/>
+                </a:solidFill>
+                <a:latin typeface="Times New Roman" pitchFamily="34" charset="0"/>
+                <a:ea typeface="Times New Roman" pitchFamily="34" charset="-122"/>
+                <a:cs typeface="Times New Roman" pitchFamily="34" charset="-120"/>
+              </a:rPr>
+              <a:t>Evaluation 2</a:t>
+            </a:r>
+            <a:endParaRPr lang="en-US" sz="3600" dirty="0"/>
+          </a:p>
+        </p:txBody>
+      </p:sp>
+      <p:sp>
+        <p:nvSpPr>
+          <p:cNvPr id="5" name="Text 2"/>
+          <p:cNvSpPr/>
+          <p:nvPr/>
+        </p:nvSpPr>
+        <p:spPr>
+          <a:xfrm>
+            <a:off x="5349240" y="1783080"/>
+            <a:ext cx="6522415" cy="4663440"/>
+          </a:xfrm>
+          <a:prstGeom prst="rect">
+            <a:avLst/>
+          </a:prstGeom>
+          <a:noFill/>
+          <a:ln/>
+        </p:spPr>
+        <p:txBody>
+          <a:bodyPr wrap="square" lIns="0" tIns="0" rIns="0" bIns="0" rtlCol="0" anchor="t"/>
+          <a:lstStyle/>
+          <a:p>
+            <a:pPr algn="l" indent="0" marL="0">
+              <a:spcAft>
+                <a:spcPts val="800"/>
+              </a:spcAft>
+              <a:buNone/>
+            </a:pPr>
+            <a:r>
+              <a:rPr lang="en-US" sz="4000" dirty="0">
+                <a:solidFill>
+                  <a:srgbClr val="111111"/>
+                </a:solidFill>
+                <a:latin typeface="Times New Roman" pitchFamily="34" charset="0"/>
+                <a:ea typeface="Times New Roman" pitchFamily="34" charset="-122"/>
+                <a:cs typeface="Times New Roman" pitchFamily="34" charset="-120"/>
+              </a:rPr>
+              <a:t>Give one high-altitude area with a large population and explain why.</a:t>
+            </a:r>
+            <a:endParaRPr lang="en-US" sz="4000" dirty="0"/>
+          </a:p>
+        </p:txBody>
+      </p:sp>
+      <p:sp>
+        <p:nvSpPr>
+          <p:cNvPr id="25" name="Slide Number Placeholder 0"/>
+          <p:cNvSpPr>
+            <a:spLocks noGrp="1"/>
+          </p:cNvSpPr>
+          <p:nvPr>
+            <p:ph type="sldNum" sz="quarter" idx="4294967295"/>
+          </p:nvPr>
+        </p:nvSpPr>
+        <p:spPr>
+          <a:xfrm>
+            <a:off x="27432" y="91440"/>
+            <a:ext cx="585216" cy="475488"/>
+          </a:xfrm>
+          <a:prstGeom prst="rect">
+            <a:avLst/>
+          </a:prstGeom>
+          <a:extLst>
+            <a:ext uri="{C572A759-6A51-4108-AA02-DFA0A04FC94B}">
+              <ma14:wrappingTextBoxFlag xmlns:ma14="http://schemas.microsoft.com/office/mac/drawingml/2011/main" val="0"/>
+            </a:ext>
+          </a:extLst>
+        </p:spPr>
+        <p:txBody>
+          <a:bodyPr/>
+          <a:lstStyle>
+            <a:lvl1pPr>
+              <a:defRPr sz="2000">
+                <a:solidFill>
+                  <a:srgbClr val="FFFFFF"/>
+                </a:solidFill>
+                <a:latin typeface="Calibri"/>
+                <a:ea typeface="Calibri"/>
+                <a:cs typeface="Calibri"/>
+              </a:defRPr>
+            </a:lvl1pPr>
+          </a:lstStyle>
+          <a:p>
+            <a:pPr algn="ctr"/>
+            <a:fld id="{F7021451-1387-4CA6-816F-3879F97B5CBC}" type="slidenum">
+              <a:rPr b="1" lang="en-US"/>
+              <a:t>51</a:t>
+            </a:fld>
+            <a:endParaRPr lang="en-US"/>
+          </a:p>
+        </p:txBody>
+      </p:sp>
+    </p:spTree>
+  </p:cSld>
+  <p:clrMapOvr>
+    <a:masterClrMapping/>
+  </p:clrMapOvr>
+</p:sld>
+</file>
+
+<file path=ppt/slides/slide52.xml><?xml version="1.0" encoding="utf-8"?>
+<p:sld xmlns:a="http://schemas.openxmlformats.org/drawingml/2006/main" xmlns:r="http://schemas.openxmlformats.org/officeDocument/2006/relationships" xmlns:p="http://schemas.openxmlformats.org/presentationml/2006/main">
+  <p:cSld name="Slide 52">
+    <p:spTree>
+      <p:nvGrpSpPr>
+        <p:cNvPr id="1" name=""/>
+        <p:cNvGrpSpPr/>
+        <p:nvPr/>
+      </p:nvGrpSpPr>
+      <p:grpSpPr>
+        <a:xfrm>
+          <a:off x="0" y="0"/>
+          <a:ext cx="0" cy="0"/>
+          <a:chOff x="0" y="0"/>
+          <a:chExt cx="0" cy="0"/>
+        </a:xfrm>
+      </p:grpSpPr>
+      <p:sp>
+        <p:nvSpPr>
+          <p:cNvPr id="2" name="Text 0"/>
+          <p:cNvSpPr/>
+          <p:nvPr/>
+        </p:nvSpPr>
+        <p:spPr>
+          <a:xfrm>
+            <a:off x="457200" y="713232"/>
+            <a:ext cx="11368735" cy="274320"/>
+          </a:xfrm>
+          <a:prstGeom prst="rect">
+            <a:avLst/>
+          </a:prstGeom>
+          <a:noFill/>
+          <a:ln/>
+        </p:spPr>
+        <p:txBody>
+          <a:bodyPr wrap="square" lIns="0" tIns="0" rIns="0" bIns="0" rtlCol="0" anchor="ctr"/>
+          <a:lstStyle/>
+          <a:p>
+            <a:pPr algn="r" indent="0" marL="0">
+              <a:buNone/>
+            </a:pPr>
+            <a:r>
+              <a:rPr lang="en-US" sz="1400" b="1" dirty="0">
+                <a:solidFill>
+                  <a:srgbClr val="1C3F6E"/>
+                </a:solidFill>
+                <a:latin typeface="Calibri" pitchFamily="34" charset="0"/>
+                <a:ea typeface="Calibri" pitchFamily="34" charset="-122"/>
+                <a:cs typeface="Calibri" pitchFamily="34" charset="-120"/>
+              </a:rPr>
+              <a:t>FORMATIVE EVALUATION</a:t>
+            </a:r>
+            <a:endParaRPr lang="en-US" sz="1400" dirty="0"/>
+          </a:p>
+        </p:txBody>
+      </p:sp>
+      <p:pic>
+        <p:nvPicPr>
+          <p:cNvPr id="3" name="Image 0" descr="/home/claude/f4/img/minesec_sheet.png">    </p:cNvPr>
+          <p:cNvPicPr>
+            <a:picLocks noChangeAspect="1"/>
+          </p:cNvPicPr>
+          <p:nvPr/>
+        </p:nvPicPr>
+        <p:blipFill>
+          <a:blip r:embed="rId1"/>
+          <a:stretch>
+            <a:fillRect/>
+          </a:stretch>
+        </p:blipFill>
+        <p:spPr>
+          <a:xfrm>
+            <a:off x="0" y="658368"/>
+            <a:ext cx="5120640" cy="5833872"/>
+          </a:xfrm>
+          <a:prstGeom prst="rect">
+            <a:avLst/>
+          </a:prstGeom>
+        </p:spPr>
+      </p:pic>
+      <p:sp>
+        <p:nvSpPr>
+          <p:cNvPr id="4" name="Text 1"/>
+          <p:cNvSpPr/>
+          <p:nvPr/>
+        </p:nvSpPr>
+        <p:spPr>
+          <a:xfrm>
+            <a:off x="5349240" y="1005840"/>
+            <a:ext cx="6522415" cy="731520"/>
+          </a:xfrm>
+          <a:prstGeom prst="rect">
+            <a:avLst/>
+          </a:prstGeom>
+          <a:noFill/>
+          <a:ln/>
+        </p:spPr>
+        <p:txBody>
+          <a:bodyPr wrap="square" lIns="0" tIns="0" rIns="0" bIns="0" rtlCol="0" anchor="ctr">
+            <a:normAutofit/>
+          </a:bodyPr>
+          <a:lstStyle/>
+          <a:p>
+            <a:pPr algn="ctr" indent="0" marL="0">
+              <a:buNone/>
+            </a:pPr>
+            <a:r>
+              <a:rPr lang="en-US" sz="3600" b="1" dirty="0">
+                <a:solidFill>
+                  <a:srgbClr val="990011"/>
+                </a:solidFill>
+                <a:latin typeface="Times New Roman" pitchFamily="34" charset="0"/>
+                <a:ea typeface="Times New Roman" pitchFamily="34" charset="-122"/>
+                <a:cs typeface="Times New Roman" pitchFamily="34" charset="-120"/>
+              </a:rPr>
+              <a:t>Expected Answer</a:t>
+            </a:r>
+            <a:endParaRPr lang="en-US" sz="3600" dirty="0"/>
+          </a:p>
+        </p:txBody>
+      </p:sp>
+      <p:sp>
+        <p:nvSpPr>
+          <p:cNvPr id="5" name="Text 2"/>
+          <p:cNvSpPr/>
+          <p:nvPr/>
+        </p:nvSpPr>
+        <p:spPr>
+          <a:xfrm>
+            <a:off x="5349240" y="1783080"/>
+            <a:ext cx="6522415" cy="4663440"/>
+          </a:xfrm>
+          <a:prstGeom prst="rect">
+            <a:avLst/>
+          </a:prstGeom>
+          <a:noFill/>
+          <a:ln/>
+        </p:spPr>
+        <p:txBody>
+          <a:bodyPr wrap="square" lIns="0" tIns="0" rIns="0" bIns="0" rtlCol="0" anchor="t"/>
+          <a:lstStyle/>
+          <a:p>
+            <a:pPr algn="l" indent="0" marL="0">
+              <a:spcAft>
+                <a:spcPts val="800"/>
+              </a:spcAft>
+              <a:buNone/>
+            </a:pPr>
+            <a:r>
+              <a:rPr lang="en-US" sz="4000" dirty="0">
+                <a:solidFill>
+                  <a:srgbClr val="111111"/>
+                </a:solidFill>
+                <a:latin typeface="Times New Roman" pitchFamily="34" charset="0"/>
+                <a:ea typeface="Times New Roman" pitchFamily="34" charset="-122"/>
+                <a:cs typeface="Times New Roman" pitchFamily="34" charset="-120"/>
+              </a:rPr>
+              <a:t>La Paz (about 3,600 m), the seat of government of Bolivia; or the Ethiopian Highlands, cooler and healthier than the lowlands.</a:t>
+            </a:r>
+            <a:endParaRPr lang="en-US" sz="4000" dirty="0"/>
+          </a:p>
+        </p:txBody>
+      </p:sp>
+      <p:sp>
+        <p:nvSpPr>
+          <p:cNvPr id="25" name="Slide Number Placeholder 0"/>
+          <p:cNvSpPr>
+            <a:spLocks noGrp="1"/>
+          </p:cNvSpPr>
+          <p:nvPr>
+            <p:ph type="sldNum" sz="quarter" idx="4294967295"/>
+          </p:nvPr>
+        </p:nvSpPr>
+        <p:spPr>
+          <a:xfrm>
+            <a:off x="27432" y="91440"/>
+            <a:ext cx="585216" cy="475488"/>
+          </a:xfrm>
+          <a:prstGeom prst="rect">
+            <a:avLst/>
+          </a:prstGeom>
+          <a:extLst>
+            <a:ext uri="{C572A759-6A51-4108-AA02-DFA0A04FC94B}">
+              <ma14:wrappingTextBoxFlag xmlns:ma14="http://schemas.microsoft.com/office/mac/drawingml/2011/main" val="0"/>
+            </a:ext>
+          </a:extLst>
+        </p:spPr>
+        <p:txBody>
+          <a:bodyPr/>
+          <a:lstStyle>
+            <a:lvl1pPr>
+              <a:defRPr sz="2000">
+                <a:solidFill>
+                  <a:srgbClr val="FFFFFF"/>
+                </a:solidFill>
+                <a:latin typeface="Calibri"/>
+                <a:ea typeface="Calibri"/>
+                <a:cs typeface="Calibri"/>
+              </a:defRPr>
+            </a:lvl1pPr>
+          </a:lstStyle>
+          <a:p>
+            <a:pPr algn="ctr"/>
+            <a:fld id="{F7021451-1387-4CA6-816F-3879F97B5CBC}" type="slidenum">
+              <a:rPr b="1" lang="en-US"/>
+              <a:t>52</a:t>
+            </a:fld>
+            <a:endParaRPr lang="en-US"/>
+          </a:p>
+        </p:txBody>
+      </p:sp>
+    </p:spTree>
+  </p:cSld>
+  <p:clrMapOvr>
+    <a:masterClrMapping/>
+  </p:clrMapOvr>
+</p:sld>
+</file>
+
+<file path=ppt/slides/slide53.xml><?xml version="1.0" encoding="utf-8"?>
+<p:sld xmlns:a="http://schemas.openxmlformats.org/drawingml/2006/main" xmlns:r="http://schemas.openxmlformats.org/officeDocument/2006/relationships" xmlns:p="http://schemas.openxmlformats.org/presentationml/2006/main">
+  <p:cSld name="Slide 53">
+    <p:spTree>
+      <p:nvGrpSpPr>
+        <p:cNvPr id="1" name=""/>
+        <p:cNvGrpSpPr/>
+        <p:nvPr/>
+      </p:nvGrpSpPr>
+      <p:grpSpPr>
+        <a:xfrm>
+          <a:off x="0" y="0"/>
+          <a:ext cx="0" cy="0"/>
+          <a:chOff x="0" y="0"/>
+          <a:chExt cx="0" cy="0"/>
+        </a:xfrm>
+      </p:grpSpPr>
+      <p:sp>
+        <p:nvSpPr>
+          <p:cNvPr id="2" name="Text 0"/>
+          <p:cNvSpPr/>
+          <p:nvPr/>
+        </p:nvSpPr>
+        <p:spPr>
+          <a:xfrm>
+            <a:off x="457200" y="713232"/>
+            <a:ext cx="11368735" cy="274320"/>
+          </a:xfrm>
+          <a:prstGeom prst="rect">
+            <a:avLst/>
+          </a:prstGeom>
+          <a:noFill/>
+          <a:ln/>
+        </p:spPr>
+        <p:txBody>
+          <a:bodyPr wrap="square" lIns="0" tIns="0" rIns="0" bIns="0" rtlCol="0" anchor="ctr"/>
+          <a:lstStyle/>
+          <a:p>
+            <a:pPr algn="r" indent="0" marL="0">
+              <a:buNone/>
+            </a:pPr>
+            <a:r>
+              <a:rPr lang="en-US" sz="1400" b="1" dirty="0">
+                <a:solidFill>
+                  <a:srgbClr val="1C3F6E"/>
+                </a:solidFill>
+                <a:latin typeface="Calibri" pitchFamily="34" charset="0"/>
+                <a:ea typeface="Calibri" pitchFamily="34" charset="-122"/>
+                <a:cs typeface="Calibri" pitchFamily="34" charset="-120"/>
+              </a:rPr>
+              <a:t>REMEDIATION</a:t>
+            </a:r>
+            <a:endParaRPr lang="en-US" sz="1400" dirty="0"/>
+          </a:p>
+        </p:txBody>
+      </p:sp>
+      <p:pic>
+        <p:nvPicPr>
+          <p:cNvPr id="3" name="Image 0" descr="/home/claude/f4/img/minesec_sheet.png">    </p:cNvPr>
+          <p:cNvPicPr>
+            <a:picLocks noChangeAspect="1"/>
+          </p:cNvPicPr>
+          <p:nvPr/>
+        </p:nvPicPr>
+        <p:blipFill>
+          <a:blip r:embed="rId1"/>
+          <a:stretch>
+            <a:fillRect/>
+          </a:stretch>
+        </p:blipFill>
+        <p:spPr>
+          <a:xfrm>
+            <a:off x="0" y="658368"/>
+            <a:ext cx="2468880" cy="5833872"/>
+          </a:xfrm>
+          <a:prstGeom prst="rect">
+            <a:avLst/>
+          </a:prstGeom>
+        </p:spPr>
+      </p:pic>
+      <p:sp>
+        <p:nvSpPr>
+          <p:cNvPr id="4" name="Text 1"/>
+          <p:cNvSpPr/>
+          <p:nvPr/>
+        </p:nvSpPr>
+        <p:spPr>
+          <a:xfrm>
+            <a:off x="2697480" y="1005840"/>
+            <a:ext cx="9174175" cy="731520"/>
+          </a:xfrm>
+          <a:prstGeom prst="rect">
+            <a:avLst/>
+          </a:prstGeom>
+          <a:noFill/>
+          <a:ln/>
+        </p:spPr>
+        <p:txBody>
+          <a:bodyPr wrap="square" lIns="0" tIns="0" rIns="0" bIns="0" rtlCol="0" anchor="ctr">
+            <a:normAutofit/>
+          </a:bodyPr>
+          <a:lstStyle/>
+          <a:p>
+            <a:pPr algn="ctr" indent="0" marL="0">
+              <a:buNone/>
+            </a:pPr>
+            <a:r>
+              <a:rPr lang="en-US" sz="3600" b="1" dirty="0">
+                <a:solidFill>
+                  <a:srgbClr val="990011"/>
+                </a:solidFill>
+                <a:latin typeface="Times New Roman" pitchFamily="34" charset="0"/>
+                <a:ea typeface="Times New Roman" pitchFamily="34" charset="-122"/>
+                <a:cs typeface="Times New Roman" pitchFamily="34" charset="-120"/>
+              </a:rPr>
+              <a:t>Remediation</a:t>
+            </a:r>
+            <a:endParaRPr lang="en-US" sz="3600" dirty="0"/>
+          </a:p>
+        </p:txBody>
+      </p:sp>
+      <p:sp>
+        <p:nvSpPr>
+          <p:cNvPr id="5" name="Text 2"/>
+          <p:cNvSpPr/>
+          <p:nvPr/>
+        </p:nvSpPr>
+        <p:spPr>
+          <a:xfrm>
+            <a:off x="2697480" y="1783080"/>
+            <a:ext cx="9174175" cy="4663440"/>
+          </a:xfrm>
+          <a:prstGeom prst="rect">
+            <a:avLst/>
+          </a:prstGeom>
+          <a:noFill/>
+          <a:ln/>
+        </p:spPr>
+        <p:txBody>
+          <a:bodyPr wrap="square" lIns="0" tIns="0" rIns="0" bIns="0" rtlCol="0" anchor="t"/>
+          <a:lstStyle/>
+          <a:p>
+            <a:pPr algn="l" indent="0" marL="0">
+              <a:spcAft>
+                <a:spcPts val="800"/>
+              </a:spcAft>
+              <a:buNone/>
+            </a:pPr>
+            <a:r>
+              <a:rPr lang="en-US" sz="4000" b="1" dirty="0">
+                <a:solidFill>
+                  <a:srgbClr val="111111"/>
+                </a:solidFill>
+                <a:latin typeface="Times New Roman" pitchFamily="34" charset="0"/>
+                <a:ea typeface="Times New Roman" pitchFamily="34" charset="-122"/>
+                <a:cs typeface="Times New Roman" pitchFamily="34" charset="-120"/>
+              </a:rPr>
+              <a:t>Fill in the blanks:</a:t>
+            </a:r>
+            <a:endParaRPr lang="en-US" sz="4000" dirty="0"/>
+          </a:p>
+          <a:p>
+            <a:pPr algn="l" marL="342900" indent="-342900">
+              <a:spcAft>
+                <a:spcPts val="800"/>
+              </a:spcAft>
+              <a:buSzPct val="100000"/>
+              <a:buFont typeface="+mj-lt"/>
+              <a:buAutoNum type="arabicPeriod" startAt="1"/>
+            </a:pPr>
+            <a:r>
+              <a:rPr lang="en-US" sz="4000" dirty="0">
+                <a:solidFill>
+                  <a:srgbClr val="111111"/>
+                </a:solidFill>
+                <a:latin typeface="Times New Roman" pitchFamily="34" charset="0"/>
+                <a:ea typeface="Times New Roman" pitchFamily="34" charset="-122"/>
+                <a:cs typeface="Times New Roman" pitchFamily="34" charset="-120"/>
+              </a:rPr>
+              <a:t>In general, density ______ as altitude rises.</a:t>
+            </a:r>
+            <a:endParaRPr lang="en-US" sz="4000" dirty="0"/>
+          </a:p>
+          <a:p>
+            <a:pPr algn="l" marL="342900" indent="-342900">
+              <a:spcAft>
+                <a:spcPts val="800"/>
+              </a:spcAft>
+              <a:buSzPct val="100000"/>
+              <a:buFont typeface="+mj-lt"/>
+              <a:buAutoNum type="arabicPeriod" startAt="1"/>
+            </a:pPr>
+            <a:r>
+              <a:rPr lang="en-US" sz="4000" dirty="0">
+                <a:solidFill>
+                  <a:srgbClr val="111111"/>
+                </a:solidFill>
+                <a:latin typeface="Times New Roman" pitchFamily="34" charset="0"/>
+                <a:ea typeface="Times New Roman" pitchFamily="34" charset="-122"/>
+                <a:cs typeface="Times New Roman" pitchFamily="34" charset="-120"/>
+              </a:rPr>
+              <a:t>Tropical highlands are densely populated because they are ______.</a:t>
+            </a:r>
+            <a:endParaRPr lang="en-US" sz="4000" dirty="0"/>
+          </a:p>
+          <a:p>
+            <a:pPr algn="l" marL="342900" indent="-342900">
+              <a:spcAft>
+                <a:spcPts val="800"/>
+              </a:spcAft>
+              <a:buSzPct val="100000"/>
+              <a:buFont typeface="+mj-lt"/>
+              <a:buAutoNum type="arabicPeriod" startAt="1"/>
+            </a:pPr>
+            <a:r>
+              <a:rPr lang="en-US" sz="4000" dirty="0">
+                <a:solidFill>
+                  <a:srgbClr val="111111"/>
+                </a:solidFill>
+                <a:latin typeface="Times New Roman" pitchFamily="34" charset="0"/>
+                <a:ea typeface="Times New Roman" pitchFamily="34" charset="-122"/>
+                <a:cs typeface="Times New Roman" pitchFamily="34" charset="-120"/>
+              </a:rPr>
+              <a:t>La Paz is at about ______ m.</a:t>
+            </a:r>
+            <a:endParaRPr lang="en-US" sz="4000" dirty="0"/>
+          </a:p>
+        </p:txBody>
+      </p:sp>
+      <p:sp>
+        <p:nvSpPr>
+          <p:cNvPr id="25" name="Slide Number Placeholder 0"/>
+          <p:cNvSpPr>
+            <a:spLocks noGrp="1"/>
+          </p:cNvSpPr>
+          <p:nvPr>
+            <p:ph type="sldNum" sz="quarter" idx="4294967295"/>
+          </p:nvPr>
+        </p:nvSpPr>
+        <p:spPr>
+          <a:xfrm>
+            <a:off x="27432" y="91440"/>
+            <a:ext cx="585216" cy="475488"/>
+          </a:xfrm>
+          <a:prstGeom prst="rect">
+            <a:avLst/>
+          </a:prstGeom>
+          <a:extLst>
+            <a:ext uri="{C572A759-6A51-4108-AA02-DFA0A04FC94B}">
+              <ma14:wrappingTextBoxFlag xmlns:ma14="http://schemas.microsoft.com/office/mac/drawingml/2011/main" val="0"/>
+            </a:ext>
+          </a:extLst>
+        </p:spPr>
+        <p:txBody>
+          <a:bodyPr/>
+          <a:lstStyle>
+            <a:lvl1pPr>
+              <a:defRPr sz="2000">
+                <a:solidFill>
+                  <a:srgbClr val="FFFFFF"/>
+                </a:solidFill>
+                <a:latin typeface="Calibri"/>
+                <a:ea typeface="Calibri"/>
+                <a:cs typeface="Calibri"/>
+              </a:defRPr>
+            </a:lvl1pPr>
+          </a:lstStyle>
+          <a:p>
+            <a:pPr algn="ctr"/>
+            <a:fld id="{F7021451-1387-4CA6-816F-3879F97B5CBC}" type="slidenum">
+              <a:rPr b="1" lang="en-US"/>
+              <a:t>53</a:t>
+            </a:fld>
+            <a:endParaRPr lang="en-US"/>
+          </a:p>
+        </p:txBody>
+      </p:sp>
+    </p:spTree>
+  </p:cSld>
+  <p:clrMapOvr>
+    <a:masterClrMapping/>
+  </p:clrMapOvr>
+</p:sld>
+</file>
+
+<file path=ppt/slides/slide54.xml><?xml version="1.0" encoding="utf-8"?>
+<p:sld xmlns:a="http://schemas.openxmlformats.org/drawingml/2006/main" xmlns:r="http://schemas.openxmlformats.org/officeDocument/2006/relationships" xmlns:p="http://schemas.openxmlformats.org/presentationml/2006/main">
+  <p:cSld name="Slide 54">
+    <p:spTree>
+      <p:nvGrpSpPr>
+        <p:cNvPr id="1" name=""/>
+        <p:cNvGrpSpPr/>
+        <p:nvPr/>
+      </p:nvGrpSpPr>
+      <p:grpSpPr>
+        <a:xfrm>
+          <a:off x="0" y="0"/>
+          <a:ext cx="0" cy="0"/>
+          <a:chOff x="0" y="0"/>
+          <a:chExt cx="0" cy="0"/>
+        </a:xfrm>
+      </p:grpSpPr>
+      <p:sp>
+        <p:nvSpPr>
+          <p:cNvPr id="2" name="Text 0"/>
+          <p:cNvSpPr/>
+          <p:nvPr/>
+        </p:nvSpPr>
+        <p:spPr>
+          <a:xfrm>
+            <a:off x="457200" y="713232"/>
+            <a:ext cx="11368735" cy="274320"/>
+          </a:xfrm>
+          <a:prstGeom prst="rect">
+            <a:avLst/>
+          </a:prstGeom>
+          <a:noFill/>
+          <a:ln/>
+        </p:spPr>
+        <p:txBody>
+          <a:bodyPr wrap="square" lIns="0" tIns="0" rIns="0" bIns="0" rtlCol="0" anchor="ctr"/>
+          <a:lstStyle/>
+          <a:p>
+            <a:pPr algn="r" indent="0" marL="0">
+              <a:buNone/>
+            </a:pPr>
+            <a:r>
+              <a:rPr lang="en-US" sz="1400" b="1" dirty="0">
+                <a:solidFill>
+                  <a:srgbClr val="1C3F6E"/>
+                </a:solidFill>
+                <a:latin typeface="Calibri" pitchFamily="34" charset="0"/>
+                <a:ea typeface="Calibri" pitchFamily="34" charset="-122"/>
+                <a:cs typeface="Calibri" pitchFamily="34" charset="-120"/>
+              </a:rPr>
+              <a:t>HOMEWORK</a:t>
+            </a:r>
+            <a:endParaRPr lang="en-US" sz="1400" dirty="0"/>
+          </a:p>
+        </p:txBody>
+      </p:sp>
+      <p:pic>
+        <p:nvPicPr>
+          <p:cNvPr id="3" name="Image 0" descr="/home/claude/f4/img/minesec_sheet.png">    </p:cNvPr>
+          <p:cNvPicPr>
+            <a:picLocks noChangeAspect="1"/>
+          </p:cNvPicPr>
+          <p:nvPr/>
+        </p:nvPicPr>
+        <p:blipFill>
+          <a:blip r:embed="rId1"/>
+          <a:stretch>
+            <a:fillRect/>
+          </a:stretch>
+        </p:blipFill>
+        <p:spPr>
+          <a:xfrm>
+            <a:off x="0" y="658368"/>
+            <a:ext cx="5120640" cy="5833872"/>
+          </a:xfrm>
+          <a:prstGeom prst="rect">
+            <a:avLst/>
+          </a:prstGeom>
+        </p:spPr>
+      </p:pic>
+      <p:sp>
+        <p:nvSpPr>
+          <p:cNvPr id="4" name="Text 1"/>
+          <p:cNvSpPr/>
+          <p:nvPr/>
+        </p:nvSpPr>
+        <p:spPr>
+          <a:xfrm>
+            <a:off x="5349240" y="1005840"/>
+            <a:ext cx="6522415" cy="731520"/>
+          </a:xfrm>
+          <a:prstGeom prst="rect">
+            <a:avLst/>
+          </a:prstGeom>
+          <a:noFill/>
+          <a:ln/>
+        </p:spPr>
+        <p:txBody>
+          <a:bodyPr wrap="square" lIns="0" tIns="0" rIns="0" bIns="0" rtlCol="0" anchor="ctr">
+            <a:normAutofit/>
+          </a:bodyPr>
+          <a:lstStyle/>
+          <a:p>
+            <a:pPr algn="ctr" indent="0" marL="0">
+              <a:buNone/>
+            </a:pPr>
+            <a:r>
+              <a:rPr lang="en-US" sz="3600" b="1" dirty="0">
+                <a:solidFill>
+                  <a:srgbClr val="990011"/>
+                </a:solidFill>
+                <a:latin typeface="Times New Roman" pitchFamily="34" charset="0"/>
+                <a:ea typeface="Times New Roman" pitchFamily="34" charset="-122"/>
+                <a:cs typeface="Times New Roman" pitchFamily="34" charset="-120"/>
+              </a:rPr>
+              <a:t>Homework</a:t>
+            </a:r>
+            <a:endParaRPr lang="en-US" sz="3600" dirty="0"/>
+          </a:p>
+        </p:txBody>
+      </p:sp>
+      <p:sp>
+        <p:nvSpPr>
+          <p:cNvPr id="5" name="Text 2"/>
+          <p:cNvSpPr/>
+          <p:nvPr/>
+        </p:nvSpPr>
+        <p:spPr>
+          <a:xfrm>
+            <a:off x="5349240" y="1783080"/>
+            <a:ext cx="6522415" cy="4663440"/>
+          </a:xfrm>
+          <a:prstGeom prst="rect">
+            <a:avLst/>
+          </a:prstGeom>
+          <a:noFill/>
+          <a:ln/>
+        </p:spPr>
+        <p:txBody>
+          <a:bodyPr wrap="square" lIns="0" tIns="0" rIns="0" bIns="0" rtlCol="0" anchor="t"/>
+          <a:lstStyle/>
+          <a:p>
+            <a:pPr algn="l" indent="0" marL="0">
+              <a:spcAft>
+                <a:spcPts val="800"/>
+              </a:spcAft>
+              <a:buNone/>
+            </a:pPr>
+            <a:r>
+              <a:rPr lang="en-US" sz="4000" dirty="0">
+                <a:solidFill>
+                  <a:srgbClr val="111111"/>
+                </a:solidFill>
+                <a:latin typeface="Times New Roman" pitchFamily="34" charset="0"/>
+                <a:ea typeface="Times New Roman" pitchFamily="34" charset="-122"/>
+                <a:cs typeface="Times New Roman" pitchFamily="34" charset="-120"/>
+              </a:rPr>
+              <a:t>Name one push factor of rural-urban migration in Cameroon.</a:t>
+            </a:r>
+            <a:endParaRPr lang="en-US" sz="4000" dirty="0"/>
+          </a:p>
+        </p:txBody>
+      </p:sp>
+      <p:sp>
+        <p:nvSpPr>
+          <p:cNvPr id="25" name="Slide Number Placeholder 0"/>
+          <p:cNvSpPr>
+            <a:spLocks noGrp="1"/>
+          </p:cNvSpPr>
+          <p:nvPr>
+            <p:ph type="sldNum" sz="quarter" idx="4294967295"/>
+          </p:nvPr>
+        </p:nvSpPr>
+        <p:spPr>
+          <a:xfrm>
+            <a:off x="27432" y="91440"/>
+            <a:ext cx="585216" cy="475488"/>
+          </a:xfrm>
+          <a:prstGeom prst="rect">
+            <a:avLst/>
+          </a:prstGeom>
+          <a:extLst>
+            <a:ext uri="{C572A759-6A51-4108-AA02-DFA0A04FC94B}">
+              <ma14:wrappingTextBoxFlag xmlns:ma14="http://schemas.microsoft.com/office/mac/drawingml/2011/main" val="0"/>
+            </a:ext>
+          </a:extLst>
+        </p:spPr>
+        <p:txBody>
+          <a:bodyPr/>
+          <a:lstStyle>
+            <a:lvl1pPr>
+              <a:defRPr sz="2000">
+                <a:solidFill>
+                  <a:srgbClr val="FFFFFF"/>
+                </a:solidFill>
+                <a:latin typeface="Calibri"/>
+                <a:ea typeface="Calibri"/>
+                <a:cs typeface="Calibri"/>
+              </a:defRPr>
+            </a:lvl1pPr>
+          </a:lstStyle>
+          <a:p>
+            <a:pPr algn="ctr"/>
+            <a:fld id="{F7021451-1387-4CA6-816F-3879F97B5CBC}" type="slidenum">
+              <a:rPr b="1" lang="en-US"/>
+              <a:t>54</a:t>
+            </a:fld>
+            <a:endParaRPr lang="en-US"/>
+          </a:p>
+        </p:txBody>
+      </p:sp>
+    </p:spTree>
+  </p:cSld>
+  <p:clrMapOvr>
+    <a:masterClrMapping/>
+  </p:clrMapOvr>
+</p:sld>
+</file>
+
+<file path=ppt/slides/slide55.xml><?xml version="1.0" encoding="utf-8"?>
+<p:sld xmlns:a="http://schemas.openxmlformats.org/drawingml/2006/main" xmlns:r="http://schemas.openxmlformats.org/officeDocument/2006/relationships" xmlns:p="http://schemas.openxmlformats.org/presentationml/2006/main">
+  <p:cSld name="Slide 55">
+    <p:spTree>
+      <p:nvGrpSpPr>
+        <p:cNvPr id="1" name=""/>
+        <p:cNvGrpSpPr/>
+        <p:nvPr/>
+      </p:nvGrpSpPr>
+      <p:grpSpPr>
+        <a:xfrm>
+          <a:off x="0" y="0"/>
+          <a:ext cx="0" cy="0"/>
+          <a:chOff x="0" y="0"/>
+          <a:chExt cx="0" cy="0"/>
+        </a:xfrm>
+      </p:grpSpPr>
+      <p:sp>
+        <p:nvSpPr>
+          <p:cNvPr id="2" name="Text 0"/>
+          <p:cNvSpPr/>
+          <p:nvPr/>
+        </p:nvSpPr>
+        <p:spPr>
+          <a:xfrm>
+            <a:off x="457200" y="713232"/>
+            <a:ext cx="11368735" cy="274320"/>
+          </a:xfrm>
+          <a:prstGeom prst="rect">
+            <a:avLst/>
+          </a:prstGeom>
+          <a:noFill/>
+          <a:ln/>
+        </p:spPr>
+        <p:txBody>
+          <a:bodyPr wrap="square" lIns="0" tIns="0" rIns="0" bIns="0" rtlCol="0" anchor="ctr"/>
+          <a:lstStyle/>
+          <a:p>
+            <a:pPr algn="r" indent="0" marL="0">
+              <a:buNone/>
+            </a:pPr>
+            <a:r>
+              <a:rPr lang="en-US" sz="1400" b="1" dirty="0">
+                <a:solidFill>
+                  <a:srgbClr val="1C3F6E"/>
+                </a:solidFill>
+                <a:latin typeface="Calibri" pitchFamily="34" charset="0"/>
+                <a:ea typeface="Calibri" pitchFamily="34" charset="-122"/>
+                <a:cs typeface="Calibri" pitchFamily="34" charset="-120"/>
+              </a:rPr>
+              <a:t>NEXT LESSON</a:t>
+            </a:r>
+            <a:endParaRPr lang="en-US" sz="1400" dirty="0"/>
+          </a:p>
+        </p:txBody>
+      </p:sp>
+      <p:pic>
+        <p:nvPicPr>
+          <p:cNvPr id="3" name="Image 0" descr="/home/claude/f4/img/minesec_sheet.png">    </p:cNvPr>
+          <p:cNvPicPr>
+            <a:picLocks noChangeAspect="1"/>
+          </p:cNvPicPr>
+          <p:nvPr/>
+        </p:nvPicPr>
+        <p:blipFill>
+          <a:blip r:embed="rId1"/>
+          <a:stretch>
+            <a:fillRect/>
+          </a:stretch>
+        </p:blipFill>
+        <p:spPr>
+          <a:xfrm>
+            <a:off x="0" y="658368"/>
+            <a:ext cx="5120640" cy="5833872"/>
+          </a:xfrm>
+          <a:prstGeom prst="rect">
+            <a:avLst/>
+          </a:prstGeom>
+        </p:spPr>
+      </p:pic>
+      <p:sp>
+        <p:nvSpPr>
+          <p:cNvPr id="4" name="Text 1"/>
+          <p:cNvSpPr/>
+          <p:nvPr/>
+        </p:nvSpPr>
+        <p:spPr>
+          <a:xfrm>
+            <a:off x="5349240" y="1005840"/>
+            <a:ext cx="6522415" cy="731520"/>
+          </a:xfrm>
+          <a:prstGeom prst="rect">
+            <a:avLst/>
+          </a:prstGeom>
+          <a:noFill/>
+          <a:ln/>
+        </p:spPr>
+        <p:txBody>
+          <a:bodyPr wrap="square" lIns="0" tIns="0" rIns="0" bIns="0" rtlCol="0" anchor="ctr">
+            <a:normAutofit/>
+          </a:bodyPr>
+          <a:lstStyle/>
+          <a:p>
+            <a:pPr algn="ctr" indent="0" marL="0">
+              <a:buNone/>
+            </a:pPr>
+            <a:r>
+              <a:rPr lang="en-US" sz="3600" b="1" dirty="0">
+                <a:solidFill>
+                  <a:srgbClr val="990011"/>
+                </a:solidFill>
+                <a:latin typeface="Times New Roman" pitchFamily="34" charset="0"/>
+                <a:ea typeface="Times New Roman" pitchFamily="34" charset="-122"/>
+                <a:cs typeface="Times New Roman" pitchFamily="34" charset="-120"/>
+              </a:rPr>
+              <a:t>Next Lesson</a:t>
+            </a:r>
+            <a:endParaRPr lang="en-US" sz="3600" dirty="0"/>
+          </a:p>
+        </p:txBody>
+      </p:sp>
+      <p:sp>
+        <p:nvSpPr>
+          <p:cNvPr id="5" name="Text 2"/>
+          <p:cNvSpPr/>
+          <p:nvPr/>
+        </p:nvSpPr>
+        <p:spPr>
+          <a:xfrm>
+            <a:off x="5349240" y="1783080"/>
+            <a:ext cx="6522415" cy="4663440"/>
+          </a:xfrm>
+          <a:prstGeom prst="rect">
+            <a:avLst/>
+          </a:prstGeom>
+          <a:noFill/>
+          <a:ln/>
+        </p:spPr>
+        <p:txBody>
+          <a:bodyPr wrap="square" lIns="0" tIns="0" rIns="0" bIns="0" rtlCol="0" anchor="ctr"/>
+          <a:lstStyle/>
+          <a:p>
+            <a:pPr algn="ctr" indent="0" marL="0">
+              <a:spcAft>
+                <a:spcPts val="800"/>
+              </a:spcAft>
+              <a:buNone/>
+            </a:pPr>
+            <a:r>
+              <a:rPr lang="en-US" sz="4000" b="1" dirty="0">
+                <a:solidFill>
+                  <a:srgbClr val="111111"/>
+                </a:solidFill>
+                <a:latin typeface="Times New Roman" pitchFamily="34" charset="0"/>
+                <a:ea typeface="Times New Roman" pitchFamily="34" charset="-122"/>
+                <a:cs typeface="Times New Roman" pitchFamily="34" charset="-120"/>
+              </a:rPr>
+              <a:t>Our next lesson will be on:</a:t>
+            </a:r>
+            <a:endParaRPr lang="en-US" sz="4000" dirty="0"/>
+          </a:p>
+          <a:p>
+            <a:pPr algn="ctr" indent="0" marL="0">
+              <a:spcAft>
+                <a:spcPts val="800"/>
+              </a:spcAft>
+              <a:buNone/>
+            </a:pPr>
+            <a:r>
+              <a:rPr lang="en-US" sz="4000" b="1" dirty="0">
+                <a:solidFill>
+                  <a:srgbClr val="990011"/>
+                </a:solidFill>
+                <a:latin typeface="Times New Roman" pitchFamily="34" charset="0"/>
+                <a:ea typeface="Times New Roman" pitchFamily="34" charset="-122"/>
+                <a:cs typeface="Times New Roman" pitchFamily="34" charset="-120"/>
+              </a:rPr>
+              <a:t>Lesson 4: Modifications of Population Distribution</a:t>
+            </a:r>
+            <a:endParaRPr lang="en-US" sz="4000" dirty="0"/>
+          </a:p>
+        </p:txBody>
+      </p:sp>
+      <p:sp>
+        <p:nvSpPr>
+          <p:cNvPr id="25" name="Slide Number Placeholder 0"/>
+          <p:cNvSpPr>
+            <a:spLocks noGrp="1"/>
+          </p:cNvSpPr>
+          <p:nvPr>
+            <p:ph type="sldNum" sz="quarter" idx="4294967295"/>
+          </p:nvPr>
+        </p:nvSpPr>
+        <p:spPr>
+          <a:xfrm>
+            <a:off x="27432" y="91440"/>
+            <a:ext cx="585216" cy="475488"/>
+          </a:xfrm>
+          <a:prstGeom prst="rect">
+            <a:avLst/>
+          </a:prstGeom>
+          <a:extLst>
+            <a:ext uri="{C572A759-6A51-4108-AA02-DFA0A04FC94B}">
+              <ma14:wrappingTextBoxFlag xmlns:ma14="http://schemas.microsoft.com/office/mac/drawingml/2011/main" val="0"/>
+            </a:ext>
+          </a:extLst>
+        </p:spPr>
+        <p:txBody>
+          <a:bodyPr/>
+          <a:lstStyle>
+            <a:lvl1pPr>
+              <a:defRPr sz="2000">
+                <a:solidFill>
+                  <a:srgbClr val="FFFFFF"/>
+                </a:solidFill>
+                <a:latin typeface="Calibri"/>
+                <a:ea typeface="Calibri"/>
+                <a:cs typeface="Calibri"/>
+              </a:defRPr>
+            </a:lvl1pPr>
+          </a:lstStyle>
+          <a:p>
+            <a:pPr algn="ctr"/>
+            <a:fld id="{F7021451-1387-4CA6-816F-3879F97B5CBC}" type="slidenum">
+              <a:rPr b="1" lang="en-US"/>
+              <a:t>55</a:t>
+            </a:fld>
+            <a:endParaRPr lang="en-US"/>
+          </a:p>
+        </p:txBody>
+      </p:sp>
+    </p:spTree>
+  </p:cSld>
+  <p:clrMapOvr>
+    <a:masterClrMapping/>
+  </p:clrMapOvr>
+</p:sld>
+</file>
+
+<file path=ppt/slides/slide56.xml><?xml version="1.0" encoding="utf-8"?>
+<p:sld xmlns:a="http://schemas.openxmlformats.org/drawingml/2006/main" xmlns:r="http://schemas.openxmlformats.org/officeDocument/2006/relationships" xmlns:p="http://schemas.openxmlformats.org/presentationml/2006/main">
+  <p:cSld name="Slide 56">
+    <p:spTree>
+      <p:nvGrpSpPr>
+        <p:cNvPr id="1" name=""/>
+        <p:cNvGrpSpPr/>
+        <p:nvPr/>
+      </p:nvGrpSpPr>
+      <p:grpSpPr>
+        <a:xfrm>
+          <a:off x="0" y="0"/>
+          <a:ext cx="0" cy="0"/>
+          <a:chOff x="0" y="0"/>
+          <a:chExt cx="0" cy="0"/>
+        </a:xfrm>
+      </p:grpSpPr>
+      <p:sp>
+        <p:nvSpPr>
+          <p:cNvPr id="2" name="Text 0"/>
+          <p:cNvSpPr/>
+          <p:nvPr/>
+        </p:nvSpPr>
+        <p:spPr>
+          <a:xfrm>
+            <a:off x="457200" y="713232"/>
+            <a:ext cx="11368735" cy="274320"/>
+          </a:xfrm>
+          <a:prstGeom prst="rect">
+            <a:avLst/>
+          </a:prstGeom>
+          <a:noFill/>
+          <a:ln/>
+        </p:spPr>
+        <p:txBody>
+          <a:bodyPr wrap="square" lIns="0" tIns="0" rIns="0" bIns="0" rtlCol="0" anchor="ctr"/>
+          <a:lstStyle/>
+          <a:p>
+            <a:pPr algn="r" indent="0" marL="0">
+              <a:buNone/>
+            </a:pPr>
+            <a:r>
+              <a:rPr lang="en-US" sz="1400" b="1" dirty="0">
+                <a:solidFill>
+                  <a:srgbClr val="1C3F6E"/>
+                </a:solidFill>
+                <a:latin typeface="Calibri" pitchFamily="34" charset="0"/>
+                <a:ea typeface="Calibri" pitchFamily="34" charset="-122"/>
+                <a:cs typeface="Calibri" pitchFamily="34" charset="-120"/>
+              </a:rPr>
               <a:t>BILINGUAL GAME</a:t>
             </a:r>
             <a:endParaRPr lang="en-US" sz="1400" dirty="0"/>
@@ -16846,7 +20151,7 @@
       </p:sp>
       <p:graphicFrame>
         <p:nvGraphicFramePr>
-          <p:cNvPr id="49" name="Table 0"/>
+          <p:cNvPr id="57" name="Table 0"/>
           <p:cNvGraphicFramePr>
             <a:graphicFrameLocks noGrp="1"/>
           </p:cNvGraphicFramePr>
@@ -17302,6 +20607,282 @@
                           <a:ea typeface="Calibri" pitchFamily="34" charset="-122"/>
                           <a:cs typeface="Calibri" pitchFamily="34" charset="-120"/>
                         </a:rPr>
+                        <a:t>Trend</a:t>
+                      </a:r>
+                      <a:endParaRPr lang="en-US" sz="2200" dirty="0">
+                        <a:latin typeface="Calibri" charset="0"/>
+                        <a:ea typeface="Calibri" charset="0"/>
+                        <a:cs typeface="Calibri" charset="0"/>
+                      </a:endParaRPr>
+                    </a:p>
+                  </a:txBody>
+                  <a:tcPr marL="73152" marR="73152" marT="73152" marB="73152" anchor="ctr">
+                    <a:lnL w="12700" cap="flat" cmpd="sng" algn="ctr">
+                      <a:solidFill>
+                        <a:srgbClr val="BBBBBB"/>
+                      </a:solidFill>
+                      <a:prstDash val="solid"/>
+                      <a:round/>
+                      <a:headEnd type="none" w="med" len="med"/>
+                      <a:tailEnd type="none" w="med" len="med"/>
+                    </a:lnL>
+                    <a:lnR w="12700" cap="flat" cmpd="sng" algn="ctr">
+                      <a:solidFill>
+                        <a:srgbClr val="BBBBBB"/>
+                      </a:solidFill>
+                      <a:prstDash val="solid"/>
+                      <a:round/>
+                      <a:headEnd type="none" w="med" len="med"/>
+                      <a:tailEnd type="none" w="med" len="med"/>
+                    </a:lnR>
+                    <a:lnT w="12700" cap="flat" cmpd="sng" algn="ctr">
+                      <a:solidFill>
+                        <a:srgbClr val="BBBBBB"/>
+                      </a:solidFill>
+                      <a:prstDash val="solid"/>
+                      <a:round/>
+                      <a:headEnd type="none" w="med" len="med"/>
+                      <a:tailEnd type="none" w="med" len="med"/>
+                    </a:lnT>
+                    <a:lnB w="12700" cap="flat" cmpd="sng" algn="ctr">
+                      <a:solidFill>
+                        <a:srgbClr val="BBBBBB"/>
+                      </a:solidFill>
+                      <a:prstDash val="solid"/>
+                      <a:round/>
+                      <a:headEnd type="none" w="med" len="med"/>
+                      <a:tailEnd type="none" w="med" len="med"/>
+                    </a:lnB>
+                    <a:solidFill>
+                      <a:srgbClr val="FFFFFF"/>
+                    </a:solidFill>
+                  </a:tcPr>
+                </a:tc>
+                <a:tc>
+                  <a:txBody>
+                    <a:bodyPr/>
+                    <a:lstStyle/>
+                    <a:p>
+                      <a:pPr algn="ctr" indent="0" marL="0">
+                        <a:buNone/>
+                      </a:pPr>
+                      <a:r>
+                        <a:rPr lang="en-US" sz="2200" dirty="0">
+                          <a:solidFill>
+                            <a:srgbClr val="111111"/>
+                          </a:solidFill>
+                          <a:latin typeface="Calibri" pitchFamily="34" charset="0"/>
+                          <a:ea typeface="Calibri" pitchFamily="34" charset="-122"/>
+                          <a:cs typeface="Calibri" pitchFamily="34" charset="-120"/>
+                        </a:rPr>
+                        <a:t>La tendance</a:t>
+                      </a:r>
+                      <a:endParaRPr lang="en-US" sz="2200" dirty="0">
+                        <a:latin typeface="Calibri" charset="0"/>
+                        <a:ea typeface="Calibri" charset="0"/>
+                        <a:cs typeface="Calibri" charset="0"/>
+                      </a:endParaRPr>
+                    </a:p>
+                  </a:txBody>
+                  <a:tcPr marL="73152" marR="73152" marT="73152" marB="73152" anchor="ctr">
+                    <a:lnL w="12700" cap="flat" cmpd="sng" algn="ctr">
+                      <a:solidFill>
+                        <a:srgbClr val="BBBBBB"/>
+                      </a:solidFill>
+                      <a:prstDash val="solid"/>
+                      <a:round/>
+                      <a:headEnd type="none" w="med" len="med"/>
+                      <a:tailEnd type="none" w="med" len="med"/>
+                    </a:lnL>
+                    <a:lnR w="12700" cap="flat" cmpd="sng" algn="ctr">
+                      <a:solidFill>
+                        <a:srgbClr val="BBBBBB"/>
+                      </a:solidFill>
+                      <a:prstDash val="solid"/>
+                      <a:round/>
+                      <a:headEnd type="none" w="med" len="med"/>
+                      <a:tailEnd type="none" w="med" len="med"/>
+                    </a:lnR>
+                    <a:lnT w="12700" cap="flat" cmpd="sng" algn="ctr">
+                      <a:solidFill>
+                        <a:srgbClr val="BBBBBB"/>
+                      </a:solidFill>
+                      <a:prstDash val="solid"/>
+                      <a:round/>
+                      <a:headEnd type="none" w="med" len="med"/>
+                      <a:tailEnd type="none" w="med" len="med"/>
+                    </a:lnT>
+                    <a:lnB w="12700" cap="flat" cmpd="sng" algn="ctr">
+                      <a:solidFill>
+                        <a:srgbClr val="BBBBBB"/>
+                      </a:solidFill>
+                      <a:prstDash val="solid"/>
+                      <a:round/>
+                      <a:headEnd type="none" w="med" len="med"/>
+                      <a:tailEnd type="none" w="med" len="med"/>
+                    </a:lnB>
+                    <a:solidFill>
+                      <a:srgbClr val="FFFFFF"/>
+                    </a:solidFill>
+                  </a:tcPr>
+                </a:tc>
+              </a:tr>
+              <a:tr h="0">
+                <a:tc>
+                  <a:txBody>
+                    <a:bodyPr/>
+                    <a:lstStyle/>
+                    <a:p>
+                      <a:pPr algn="ctr" indent="0" marL="0">
+                        <a:buNone/>
+                      </a:pPr>
+                      <a:r>
+                        <a:rPr lang="en-US" sz="2200" dirty="0">
+                          <a:solidFill>
+                            <a:srgbClr val="111111"/>
+                          </a:solidFill>
+                          <a:latin typeface="Calibri" pitchFamily="34" charset="0"/>
+                          <a:ea typeface="Calibri" pitchFamily="34" charset="-122"/>
+                          <a:cs typeface="Calibri" pitchFamily="34" charset="-120"/>
+                        </a:rPr>
+                        <a:t>Peak</a:t>
+                      </a:r>
+                      <a:endParaRPr lang="en-US" sz="2200" dirty="0">
+                        <a:latin typeface="Calibri" charset="0"/>
+                        <a:ea typeface="Calibri" charset="0"/>
+                        <a:cs typeface="Calibri" charset="0"/>
+                      </a:endParaRPr>
+                    </a:p>
+                  </a:txBody>
+                  <a:tcPr marL="73152" marR="73152" marT="73152" marB="73152" anchor="ctr">
+                    <a:lnL w="12700" cap="flat" cmpd="sng" algn="ctr">
+                      <a:solidFill>
+                        <a:srgbClr val="BBBBBB"/>
+                      </a:solidFill>
+                      <a:prstDash val="solid"/>
+                      <a:round/>
+                      <a:headEnd type="none" w="med" len="med"/>
+                      <a:tailEnd type="none" w="med" len="med"/>
+                    </a:lnL>
+                    <a:lnR w="12700" cap="flat" cmpd="sng" algn="ctr">
+                      <a:solidFill>
+                        <a:srgbClr val="BBBBBB"/>
+                      </a:solidFill>
+                      <a:prstDash val="solid"/>
+                      <a:round/>
+                      <a:headEnd type="none" w="med" len="med"/>
+                      <a:tailEnd type="none" w="med" len="med"/>
+                    </a:lnR>
+                    <a:lnT w="12700" cap="flat" cmpd="sng" algn="ctr">
+                      <a:solidFill>
+                        <a:srgbClr val="BBBBBB"/>
+                      </a:solidFill>
+                      <a:prstDash val="solid"/>
+                      <a:round/>
+                      <a:headEnd type="none" w="med" len="med"/>
+                      <a:tailEnd type="none" w="med" len="med"/>
+                    </a:lnT>
+                    <a:lnB w="12700" cap="flat" cmpd="sng" algn="ctr">
+                      <a:solidFill>
+                        <a:srgbClr val="BBBBBB"/>
+                      </a:solidFill>
+                      <a:prstDash val="solid"/>
+                      <a:round/>
+                      <a:headEnd type="none" w="med" len="med"/>
+                      <a:tailEnd type="none" w="med" len="med"/>
+                    </a:lnB>
+                    <a:solidFill>
+                      <a:srgbClr val="F2F4F8"/>
+                    </a:solidFill>
+                  </a:tcPr>
+                </a:tc>
+                <a:tc>
+                  <a:txBody>
+                    <a:bodyPr/>
+                    <a:lstStyle/>
+                    <a:p>
+                      <a:pPr algn="ctr" indent="0" marL="0">
+                        <a:buNone/>
+                      </a:pPr>
+                      <a:r>
+                        <a:rPr lang="en-US" sz="2200" dirty="0">
+                          <a:solidFill>
+                            <a:srgbClr val="111111"/>
+                          </a:solidFill>
+                          <a:latin typeface="Calibri" pitchFamily="34" charset="0"/>
+                          <a:ea typeface="Calibri" pitchFamily="34" charset="-122"/>
+                          <a:cs typeface="Calibri" pitchFamily="34" charset="-120"/>
+                        </a:rPr>
+                        <a:t>Le pic</a:t>
+                      </a:r>
+                      <a:endParaRPr lang="en-US" sz="2200" dirty="0">
+                        <a:latin typeface="Calibri" charset="0"/>
+                        <a:ea typeface="Calibri" charset="0"/>
+                        <a:cs typeface="Calibri" charset="0"/>
+                      </a:endParaRPr>
+                    </a:p>
+                  </a:txBody>
+                  <a:tcPr marL="73152" marR="73152" marT="73152" marB="73152" anchor="ctr">
+                    <a:lnL w="12700" cap="flat" cmpd="sng" algn="ctr">
+                      <a:solidFill>
+                        <a:srgbClr val="BBBBBB"/>
+                      </a:solidFill>
+                      <a:prstDash val="solid"/>
+                      <a:round/>
+                      <a:headEnd type="none" w="med" len="med"/>
+                      <a:tailEnd type="none" w="med" len="med"/>
+                    </a:lnL>
+                    <a:lnR w="12700" cap="flat" cmpd="sng" algn="ctr">
+                      <a:solidFill>
+                        <a:srgbClr val="BBBBBB"/>
+                      </a:solidFill>
+                      <a:prstDash val="solid"/>
+                      <a:round/>
+                      <a:headEnd type="none" w="med" len="med"/>
+                      <a:tailEnd type="none" w="med" len="med"/>
+                    </a:lnR>
+                    <a:lnT w="12700" cap="flat" cmpd="sng" algn="ctr">
+                      <a:solidFill>
+                        <a:srgbClr val="BBBBBB"/>
+                      </a:solidFill>
+                      <a:prstDash val="solid"/>
+                      <a:round/>
+                      <a:headEnd type="none" w="med" len="med"/>
+                      <a:tailEnd type="none" w="med" len="med"/>
+                    </a:lnT>
+                    <a:lnB w="12700" cap="flat" cmpd="sng" algn="ctr">
+                      <a:solidFill>
+                        <a:srgbClr val="BBBBBB"/>
+                      </a:solidFill>
+                      <a:prstDash val="solid"/>
+                      <a:round/>
+                      <a:headEnd type="none" w="med" len="med"/>
+                      <a:tailEnd type="none" w="med" len="med"/>
+                    </a:lnB>
+                    <a:solidFill>
+                      <a:srgbClr val="F2F4F8"/>
+                    </a:solidFill>
+                  </a:tcPr>
+                </a:tc>
+              </a:tr>
+              <a:tr h="0">
+                <a:tc>
+                  <a:txBody>
+                    <a:bodyPr/>
+                    <a:lstStyle/>
+                    <a:p>
+                      <a:pPr algn="ctr" indent="0" marL="0">
+                        <a:buNone/>
+                      </a:pPr>
+                      <a:r>
+                        <a:rPr lang="en-US" sz="2200" dirty="0">
+                          <a:solidFill>
+                            <a:srgbClr val="111111"/>
+                          </a:solidFill>
+                          <a:latin typeface="Calibri" pitchFamily="34" charset="0"/>
+                          <a:ea typeface="Calibri" pitchFamily="34" charset="-122"/>
+                          <a:cs typeface="Calibri" pitchFamily="34" charset="-120"/>
+                        </a:rPr>
                         <a:t>Highland</a:t>
                       </a:r>
                       <a:endParaRPr lang="en-US" sz="2200" dirty="0">
@@ -17370,7 +20951,7 @@
                           <a:ea typeface="Calibri" pitchFamily="34" charset="-122"/>
                           <a:cs typeface="Calibri" pitchFamily="34" charset="-120"/>
                         </a:rPr>
-                        <a:t>Le haut plateau</a:t>
+                        <a:t>La haute terre</a:t>
                       </a:r>
                       <a:endParaRPr lang="en-US" sz="2200" dirty="0">
                         <a:latin typeface="Calibri" charset="0"/>
@@ -17508,283 +21089,7 @@
                           <a:ea typeface="Calibri" pitchFamily="34" charset="-122"/>
                           <a:cs typeface="Calibri" pitchFamily="34" charset="-120"/>
                         </a:rPr>
-                        <a:t>La plaine</a:t>
-                      </a:r>
-                      <a:endParaRPr lang="en-US" sz="2200" dirty="0">
-                        <a:latin typeface="Calibri" charset="0"/>
-                        <a:ea typeface="Calibri" charset="0"/>
-                        <a:cs typeface="Calibri" charset="0"/>
-                      </a:endParaRPr>
-                    </a:p>
-                  </a:txBody>
-                  <a:tcPr marL="73152" marR="73152" marT="73152" marB="73152" anchor="ctr">
-                    <a:lnL w="12700" cap="flat" cmpd="sng" algn="ctr">
-                      <a:solidFill>
-                        <a:srgbClr val="BBBBBB"/>
-                      </a:solidFill>
-                      <a:prstDash val="solid"/>
-                      <a:round/>
-                      <a:headEnd type="none" w="med" len="med"/>
-                      <a:tailEnd type="none" w="med" len="med"/>
-                    </a:lnL>
-                    <a:lnR w="12700" cap="flat" cmpd="sng" algn="ctr">
-                      <a:solidFill>
-                        <a:srgbClr val="BBBBBB"/>
-                      </a:solidFill>
-                      <a:prstDash val="solid"/>
-                      <a:round/>
-                      <a:headEnd type="none" w="med" len="med"/>
-                      <a:tailEnd type="none" w="med" len="med"/>
-                    </a:lnR>
-                    <a:lnT w="12700" cap="flat" cmpd="sng" algn="ctr">
-                      <a:solidFill>
-                        <a:srgbClr val="BBBBBB"/>
-                      </a:solidFill>
-                      <a:prstDash val="solid"/>
-                      <a:round/>
-                      <a:headEnd type="none" w="med" len="med"/>
-                      <a:tailEnd type="none" w="med" len="med"/>
-                    </a:lnT>
-                    <a:lnB w="12700" cap="flat" cmpd="sng" algn="ctr">
-                      <a:solidFill>
-                        <a:srgbClr val="BBBBBB"/>
-                      </a:solidFill>
-                      <a:prstDash val="solid"/>
-                      <a:round/>
-                      <a:headEnd type="none" w="med" len="med"/>
-                      <a:tailEnd type="none" w="med" len="med"/>
-                    </a:lnB>
-                    <a:solidFill>
-                      <a:srgbClr val="F2F4F8"/>
-                    </a:solidFill>
-                  </a:tcPr>
-                </a:tc>
-              </a:tr>
-              <a:tr h="0">
-                <a:tc>
-                  <a:txBody>
-                    <a:bodyPr/>
-                    <a:lstStyle/>
-                    <a:p>
-                      <a:pPr algn="ctr" indent="0" marL="0">
-                        <a:buNone/>
-                      </a:pPr>
-                      <a:r>
-                        <a:rPr lang="en-US" sz="2200" dirty="0">
-                          <a:solidFill>
-                            <a:srgbClr val="111111"/>
-                          </a:solidFill>
-                          <a:latin typeface="Calibri" pitchFamily="34" charset="0"/>
-                          <a:ea typeface="Calibri" pitchFamily="34" charset="-122"/>
-                          <a:cs typeface="Calibri" pitchFamily="34" charset="-120"/>
-                        </a:rPr>
-                        <a:t>Malaria</a:t>
-                      </a:r>
-                      <a:endParaRPr lang="en-US" sz="2200" dirty="0">
-                        <a:latin typeface="Calibri" charset="0"/>
-                        <a:ea typeface="Calibri" charset="0"/>
-                        <a:cs typeface="Calibri" charset="0"/>
-                      </a:endParaRPr>
-                    </a:p>
-                  </a:txBody>
-                  <a:tcPr marL="73152" marR="73152" marT="73152" marB="73152" anchor="ctr">
-                    <a:lnL w="12700" cap="flat" cmpd="sng" algn="ctr">
-                      <a:solidFill>
-                        <a:srgbClr val="BBBBBB"/>
-                      </a:solidFill>
-                      <a:prstDash val="solid"/>
-                      <a:round/>
-                      <a:headEnd type="none" w="med" len="med"/>
-                      <a:tailEnd type="none" w="med" len="med"/>
-                    </a:lnL>
-                    <a:lnR w="12700" cap="flat" cmpd="sng" algn="ctr">
-                      <a:solidFill>
-                        <a:srgbClr val="BBBBBB"/>
-                      </a:solidFill>
-                      <a:prstDash val="solid"/>
-                      <a:round/>
-                      <a:headEnd type="none" w="med" len="med"/>
-                      <a:tailEnd type="none" w="med" len="med"/>
-                    </a:lnR>
-                    <a:lnT w="12700" cap="flat" cmpd="sng" algn="ctr">
-                      <a:solidFill>
-                        <a:srgbClr val="BBBBBB"/>
-                      </a:solidFill>
-                      <a:prstDash val="solid"/>
-                      <a:round/>
-                      <a:headEnd type="none" w="med" len="med"/>
-                      <a:tailEnd type="none" w="med" len="med"/>
-                    </a:lnT>
-                    <a:lnB w="12700" cap="flat" cmpd="sng" algn="ctr">
-                      <a:solidFill>
-                        <a:srgbClr val="BBBBBB"/>
-                      </a:solidFill>
-                      <a:prstDash val="solid"/>
-                      <a:round/>
-                      <a:headEnd type="none" w="med" len="med"/>
-                      <a:tailEnd type="none" w="med" len="med"/>
-                    </a:lnB>
-                    <a:solidFill>
-                      <a:srgbClr val="FFFFFF"/>
-                    </a:solidFill>
-                  </a:tcPr>
-                </a:tc>
-                <a:tc>
-                  <a:txBody>
-                    <a:bodyPr/>
-                    <a:lstStyle/>
-                    <a:p>
-                      <a:pPr algn="ctr" indent="0" marL="0">
-                        <a:buNone/>
-                      </a:pPr>
-                      <a:r>
-                        <a:rPr lang="en-US" sz="2200" dirty="0">
-                          <a:solidFill>
-                            <a:srgbClr val="111111"/>
-                          </a:solidFill>
-                          <a:latin typeface="Calibri" pitchFamily="34" charset="0"/>
-                          <a:ea typeface="Calibri" pitchFamily="34" charset="-122"/>
-                          <a:cs typeface="Calibri" pitchFamily="34" charset="-120"/>
-                        </a:rPr>
-                        <a:t>Le paludisme</a:t>
-                      </a:r>
-                      <a:endParaRPr lang="en-US" sz="2200" dirty="0">
-                        <a:latin typeface="Calibri" charset="0"/>
-                        <a:ea typeface="Calibri" charset="0"/>
-                        <a:cs typeface="Calibri" charset="0"/>
-                      </a:endParaRPr>
-                    </a:p>
-                  </a:txBody>
-                  <a:tcPr marL="73152" marR="73152" marT="73152" marB="73152" anchor="ctr">
-                    <a:lnL w="12700" cap="flat" cmpd="sng" algn="ctr">
-                      <a:solidFill>
-                        <a:srgbClr val="BBBBBB"/>
-                      </a:solidFill>
-                      <a:prstDash val="solid"/>
-                      <a:round/>
-                      <a:headEnd type="none" w="med" len="med"/>
-                      <a:tailEnd type="none" w="med" len="med"/>
-                    </a:lnL>
-                    <a:lnR w="12700" cap="flat" cmpd="sng" algn="ctr">
-                      <a:solidFill>
-                        <a:srgbClr val="BBBBBB"/>
-                      </a:solidFill>
-                      <a:prstDash val="solid"/>
-                      <a:round/>
-                      <a:headEnd type="none" w="med" len="med"/>
-                      <a:tailEnd type="none" w="med" len="med"/>
-                    </a:lnR>
-                    <a:lnT w="12700" cap="flat" cmpd="sng" algn="ctr">
-                      <a:solidFill>
-                        <a:srgbClr val="BBBBBB"/>
-                      </a:solidFill>
-                      <a:prstDash val="solid"/>
-                      <a:round/>
-                      <a:headEnd type="none" w="med" len="med"/>
-                      <a:tailEnd type="none" w="med" len="med"/>
-                    </a:lnT>
-                    <a:lnB w="12700" cap="flat" cmpd="sng" algn="ctr">
-                      <a:solidFill>
-                        <a:srgbClr val="BBBBBB"/>
-                      </a:solidFill>
-                      <a:prstDash val="solid"/>
-                      <a:round/>
-                      <a:headEnd type="none" w="med" len="med"/>
-                      <a:tailEnd type="none" w="med" len="med"/>
-                    </a:lnB>
-                    <a:solidFill>
-                      <a:srgbClr val="FFFFFF"/>
-                    </a:solidFill>
-                  </a:tcPr>
-                </a:tc>
-              </a:tr>
-              <a:tr h="0">
-                <a:tc>
-                  <a:txBody>
-                    <a:bodyPr/>
-                    <a:lstStyle/>
-                    <a:p>
-                      <a:pPr algn="ctr" indent="0" marL="0">
-                        <a:buNone/>
-                      </a:pPr>
-                      <a:r>
-                        <a:rPr lang="en-US" sz="2200" dirty="0">
-                          <a:solidFill>
-                            <a:srgbClr val="111111"/>
-                          </a:solidFill>
-                          <a:latin typeface="Calibri" pitchFamily="34" charset="0"/>
-                          <a:ea typeface="Calibri" pitchFamily="34" charset="-122"/>
-                          <a:cs typeface="Calibri" pitchFamily="34" charset="-120"/>
-                        </a:rPr>
-                        <a:t>Share</a:t>
-                      </a:r>
-                      <a:endParaRPr lang="en-US" sz="2200" dirty="0">
-                        <a:latin typeface="Calibri" charset="0"/>
-                        <a:ea typeface="Calibri" charset="0"/>
-                        <a:cs typeface="Calibri" charset="0"/>
-                      </a:endParaRPr>
-                    </a:p>
-                  </a:txBody>
-                  <a:tcPr marL="73152" marR="73152" marT="73152" marB="73152" anchor="ctr">
-                    <a:lnL w="12700" cap="flat" cmpd="sng" algn="ctr">
-                      <a:solidFill>
-                        <a:srgbClr val="BBBBBB"/>
-                      </a:solidFill>
-                      <a:prstDash val="solid"/>
-                      <a:round/>
-                      <a:headEnd type="none" w="med" len="med"/>
-                      <a:tailEnd type="none" w="med" len="med"/>
-                    </a:lnL>
-                    <a:lnR w="12700" cap="flat" cmpd="sng" algn="ctr">
-                      <a:solidFill>
-                        <a:srgbClr val="BBBBBB"/>
-                      </a:solidFill>
-                      <a:prstDash val="solid"/>
-                      <a:round/>
-                      <a:headEnd type="none" w="med" len="med"/>
-                      <a:tailEnd type="none" w="med" len="med"/>
-                    </a:lnR>
-                    <a:lnT w="12700" cap="flat" cmpd="sng" algn="ctr">
-                      <a:solidFill>
-                        <a:srgbClr val="BBBBBB"/>
-                      </a:solidFill>
-                      <a:prstDash val="solid"/>
-                      <a:round/>
-                      <a:headEnd type="none" w="med" len="med"/>
-                      <a:tailEnd type="none" w="med" len="med"/>
-                    </a:lnT>
-                    <a:lnB w="12700" cap="flat" cmpd="sng" algn="ctr">
-                      <a:solidFill>
-                        <a:srgbClr val="BBBBBB"/>
-                      </a:solidFill>
-                      <a:prstDash val="solid"/>
-                      <a:round/>
-                      <a:headEnd type="none" w="med" len="med"/>
-                      <a:tailEnd type="none" w="med" len="med"/>
-                    </a:lnB>
-                    <a:solidFill>
-                      <a:srgbClr val="F2F4F8"/>
-                    </a:solidFill>
-                  </a:tcPr>
-                </a:tc>
-                <a:tc>
-                  <a:txBody>
-                    <a:bodyPr/>
-                    <a:lstStyle/>
-                    <a:p>
-                      <a:pPr algn="ctr" indent="0" marL="0">
-                        <a:buNone/>
-                      </a:pPr>
-                      <a:r>
-                        <a:rPr lang="en-US" sz="2200" dirty="0">
-                          <a:solidFill>
-                            <a:srgbClr val="111111"/>
-                          </a:solidFill>
-                          <a:latin typeface="Calibri" pitchFamily="34" charset="0"/>
-                          <a:ea typeface="Calibri" pitchFamily="34" charset="-122"/>
-                          <a:cs typeface="Calibri" pitchFamily="34" charset="-120"/>
-                        </a:rPr>
-                        <a:t>La part</a:t>
+                        <a:t>La basse terre</a:t>
                       </a:r>
                       <a:endParaRPr lang="en-US" sz="2200" dirty="0">
                         <a:latin typeface="Calibri" charset="0"/>
@@ -17882,7 +21187,7 @@
             <a:pPr algn="ctr"/>
             <a:fld id="{F7021451-1387-4CA6-816F-3879F97B5CBC}" type="slidenum">
               <a:rPr b="1" lang="en-US"/>
-              <a:t>48</a:t>
+              <a:t>56</a:t>
             </a:fld>
             <a:endParaRPr lang="en-US"/>
           </a:p>
@@ -17896,9 +21201,9 @@
 </p:sld>
 </file>
 
-<file path=ppt/slides/slide49.xml><?xml version="1.0" encoding="utf-8"?>
+<file path=ppt/slides/slide57.xml><?xml version="1.0" encoding="utf-8"?>
 <p:sld xmlns:a="http://schemas.openxmlformats.org/drawingml/2006/main" xmlns:r="http://schemas.openxmlformats.org/officeDocument/2006/relationships" xmlns:p="http://schemas.openxmlformats.org/presentationml/2006/main">
-  <p:cSld name="Slide 49">
+  <p:cSld name="Slide 57">
     <p:spTree>
       <p:nvGrpSpPr>
         <p:cNvPr id="1" name=""/>
@@ -17993,7 +21298,7 @@
       </p:sp>
       <p:graphicFrame>
         <p:nvGraphicFramePr>
-          <p:cNvPr id="50" name="Table 0"/>
+          <p:cNvPr id="58" name="Table 0"/>
           <p:cNvGraphicFramePr>
             <a:graphicFrameLocks noGrp="1"/>
           </p:cNvGraphicFramePr>
@@ -18379,7 +21684,7 @@
                           <a:ea typeface="Calibri" pitchFamily="34" charset="-122"/>
                           <a:cs typeface="Calibri" pitchFamily="34" charset="-120"/>
                         </a:rPr>
-                        <a:t>Read a graph of population by altitude. Compare tropical and temperate patterns. Explain the differences.</a:t>
+                        <a:t>Read a graph of population by altitude. Describe the general trend of population with altitude. Explain peaks and declines of density. Explain the exceptions in tropical highlands.</a:t>
                       </a:r>
                       <a:endParaRPr lang="en-US" sz="1600" dirty="0">
                         <a:latin typeface="Calibri" charset="0"/>
@@ -18517,7 +21822,7 @@
                           <a:ea typeface="Calibri" pitchFamily="34" charset="-122"/>
                           <a:cs typeface="Calibri" pitchFamily="34" charset="-120"/>
                         </a:rPr>
-                        <a:t>Learners are able to read and explain graphs of population by altitude.</a:t>
+                        <a:t>Learners are able to read, describe and explain a graph of population distribution with altitude.</a:t>
                       </a:r>
                       <a:endParaRPr lang="en-US" sz="1600" dirty="0">
                         <a:latin typeface="Calibri" charset="0"/>
@@ -18615,7 +21920,7 @@
             <a:pPr algn="ctr"/>
             <a:fld id="{F7021451-1387-4CA6-816F-3879F97B5CBC}" type="slidenum">
               <a:rPr b="1" lang="en-US"/>
-              <a:t>49</a:t>
+              <a:t>57</a:t>
             </a:fld>
             <a:endParaRPr lang="en-US"/>
           </a:p>
@@ -18629,9 +21934,9 @@
 </p:sld>
 </file>
 
-<file path=ppt/slides/slide5.xml><?xml version="1.0" encoding="utf-8"?>
+<file path=ppt/slides/slide58.xml><?xml version="1.0" encoding="utf-8"?>
 <p:sld xmlns:a="http://schemas.openxmlformats.org/drawingml/2006/main" xmlns:r="http://schemas.openxmlformats.org/officeDocument/2006/relationships" xmlns:p="http://schemas.openxmlformats.org/presentationml/2006/main">
-  <p:cSld name="Slide 5">
+  <p:cSld name="Slide 58">
     <p:spTree>
       <p:nvGrpSpPr>
         <p:cNvPr id="1" name=""/>
@@ -18679,225 +21984,6 @@
                 <a:ea typeface="Calibri" pitchFamily="34" charset="-122"/>
                 <a:cs typeface="Calibri" pitchFamily="34" charset="-120"/>
               </a:rPr>
-              <a:t>HOMEWORK CORRECTION</a:t>
-            </a:r>
-            <a:endParaRPr lang="en-US" sz="1400" dirty="0"/>
-          </a:p>
-        </p:txBody>
-      </p:sp>
-      <p:pic>
-        <p:nvPicPr>
-          <p:cNvPr id="3" name="Image 0" descr="/home/claude/f4/img/minesec_sheet.png">    </p:cNvPr>
-          <p:cNvPicPr>
-            <a:picLocks noChangeAspect="1"/>
-          </p:cNvPicPr>
-          <p:nvPr/>
-        </p:nvPicPr>
-        <p:blipFill>
-          <a:blip r:embed="rId1"/>
-          <a:stretch>
-            <a:fillRect/>
-          </a:stretch>
-        </p:blipFill>
-        <p:spPr>
-          <a:xfrm>
-            <a:off x="0" y="658368"/>
-            <a:ext cx="3840480" cy="5833872"/>
-          </a:xfrm>
-          <a:prstGeom prst="rect">
-            <a:avLst/>
-          </a:prstGeom>
-        </p:spPr>
-      </p:pic>
-      <p:sp>
-        <p:nvSpPr>
-          <p:cNvPr id="4" name="Text 1"/>
-          <p:cNvSpPr/>
-          <p:nvPr/>
-        </p:nvSpPr>
-        <p:spPr>
-          <a:xfrm>
-            <a:off x="4069080" y="1005840"/>
-            <a:ext cx="7802575" cy="731520"/>
-          </a:xfrm>
-          <a:prstGeom prst="rect">
-            <a:avLst/>
-          </a:prstGeom>
-          <a:noFill/>
-          <a:ln/>
-        </p:spPr>
-        <p:txBody>
-          <a:bodyPr wrap="square" lIns="0" tIns="0" rIns="0" bIns="0" rtlCol="0" anchor="ctr">
-            <a:normAutofit/>
-          </a:bodyPr>
-          <a:lstStyle/>
-          <a:p>
-            <a:pPr algn="ctr" indent="0" marL="0">
-              <a:buNone/>
-            </a:pPr>
-            <a:r>
-              <a:rPr lang="en-US" sz="3600" b="1" dirty="0">
-                <a:solidFill>
-                  <a:srgbClr val="990011"/>
-                </a:solidFill>
-                <a:latin typeface="Times New Roman" pitchFamily="34" charset="0"/>
-                <a:ea typeface="Times New Roman" pitchFamily="34" charset="-122"/>
-                <a:cs typeface="Times New Roman" pitchFamily="34" charset="-120"/>
-              </a:rPr>
-              <a:t>Correction: Possible Answer</a:t>
-            </a:r>
-            <a:endParaRPr lang="en-US" sz="3600" dirty="0"/>
-          </a:p>
-        </p:txBody>
-      </p:sp>
-      <p:sp>
-        <p:nvSpPr>
-          <p:cNvPr id="5" name="Text 2"/>
-          <p:cNvSpPr/>
-          <p:nvPr/>
-        </p:nvSpPr>
-        <p:spPr>
-          <a:xfrm>
-            <a:off x="4069080" y="1783080"/>
-            <a:ext cx="7802575" cy="4663440"/>
-          </a:xfrm>
-          <a:prstGeom prst="rect">
-            <a:avLst/>
-          </a:prstGeom>
-          <a:noFill/>
-          <a:ln/>
-        </p:spPr>
-        <p:txBody>
-          <a:bodyPr wrap="square" lIns="0" tIns="0" rIns="0" bIns="0" rtlCol="0" anchor="t"/>
-          <a:lstStyle/>
-          <a:p>
-            <a:pPr algn="l" indent="0" marL="0">
-              <a:spcAft>
-                <a:spcPts val="800"/>
-              </a:spcAft>
-              <a:buNone/>
-            </a:pPr>
-            <a:r>
-              <a:rPr lang="en-US" sz="4000" dirty="0">
-                <a:solidFill>
-                  <a:srgbClr val="111111"/>
-                </a:solidFill>
-                <a:latin typeface="Times New Roman" pitchFamily="34" charset="0"/>
-                <a:ea typeface="Times New Roman" pitchFamily="34" charset="-122"/>
-                <a:cs typeface="Times New Roman" pitchFamily="34" charset="-120"/>
-              </a:rPr>
-              <a:t>The Far North plains are crowded because of fertile black soils, flat land, old settlement history and refuge in the Mandara Mountains. The East is sparse because of dense forest, poor soils, disease and poor roads.</a:t>
-            </a:r>
-            <a:endParaRPr lang="en-US" sz="4000" dirty="0"/>
-          </a:p>
-        </p:txBody>
-      </p:sp>
-      <p:sp>
-        <p:nvSpPr>
-          <p:cNvPr id="25" name="Slide Number Placeholder 0"/>
-          <p:cNvSpPr>
-            <a:spLocks noGrp="1"/>
-          </p:cNvSpPr>
-          <p:nvPr>
-            <p:ph type="sldNum" sz="quarter" idx="4294967295"/>
-          </p:nvPr>
-        </p:nvSpPr>
-        <p:spPr>
-          <a:xfrm>
-            <a:off x="27432" y="91440"/>
-            <a:ext cx="585216" cy="475488"/>
-          </a:xfrm>
-          <a:prstGeom prst="rect">
-            <a:avLst/>
-          </a:prstGeom>
-          <a:extLst>
-            <a:ext uri="{C572A759-6A51-4108-AA02-DFA0A04FC94B}">
-              <ma14:wrappingTextBoxFlag xmlns:ma14="http://schemas.microsoft.com/office/mac/drawingml/2011/main" val="0"/>
-            </a:ext>
-          </a:extLst>
-        </p:spPr>
-        <p:txBody>
-          <a:bodyPr/>
-          <a:lstStyle>
-            <a:lvl1pPr>
-              <a:defRPr sz="2000">
-                <a:solidFill>
-                  <a:srgbClr val="FFFFFF"/>
-                </a:solidFill>
-                <a:latin typeface="Calibri"/>
-                <a:ea typeface="Calibri"/>
-                <a:cs typeface="Calibri"/>
-              </a:defRPr>
-            </a:lvl1pPr>
-          </a:lstStyle>
-          <a:p>
-            <a:pPr algn="ctr"/>
-            <a:fld id="{F7021451-1387-4CA6-816F-3879F97B5CBC}" type="slidenum">
-              <a:rPr b="1" lang="en-US"/>
-              <a:t>5</a:t>
-            </a:fld>
-            <a:endParaRPr lang="en-US"/>
-          </a:p>
-        </p:txBody>
-      </p:sp>
-    </p:spTree>
-  </p:cSld>
-  <p:clrMapOvr>
-    <a:masterClrMapping/>
-  </p:clrMapOvr>
-</p:sld>
-</file>
-
-<file path=ppt/slides/slide50.xml><?xml version="1.0" encoding="utf-8"?>
-<p:sld xmlns:a="http://schemas.openxmlformats.org/drawingml/2006/main" xmlns:r="http://schemas.openxmlformats.org/officeDocument/2006/relationships" xmlns:p="http://schemas.openxmlformats.org/presentationml/2006/main">
-  <p:cSld name="Slide 50">
-    <p:spTree>
-      <p:nvGrpSpPr>
-        <p:cNvPr id="1" name=""/>
-        <p:cNvGrpSpPr/>
-        <p:nvPr/>
-      </p:nvGrpSpPr>
-      <p:grpSpPr>
-        <a:xfrm>
-          <a:off x="0" y="0"/>
-          <a:ext cx="0" cy="0"/>
-          <a:chOff x="0" y="0"/>
-          <a:chExt cx="0" cy="0"/>
-        </a:xfrm>
-      </p:grpSpPr>
-      <p:sp>
-        <p:nvSpPr>
-          <p:cNvPr id="2" name="Text 0"/>
-          <p:cNvSpPr/>
-          <p:nvPr/>
-        </p:nvSpPr>
-        <p:spPr>
-          <a:xfrm>
-            <a:off x="457200" y="713232"/>
-            <a:ext cx="11368735" cy="274320"/>
-          </a:xfrm>
-          <a:prstGeom prst="rect">
-            <a:avLst/>
-          </a:prstGeom>
-          <a:noFill/>
-          <a:ln/>
-        </p:spPr>
-        <p:txBody>
-          <a:bodyPr wrap="square" lIns="0" tIns="0" rIns="0" bIns="0" rtlCol="0" anchor="ctr"/>
-          <a:lstStyle/>
-          <a:p>
-            <a:pPr algn="r" indent="0" marL="0">
-              <a:buNone/>
-            </a:pPr>
-            <a:r>
-              <a:rPr lang="en-US" sz="1400" b="1" dirty="0">
-                <a:solidFill>
-                  <a:srgbClr val="1C3F6E"/>
-                </a:solidFill>
-                <a:latin typeface="Calibri" pitchFamily="34" charset="0"/>
-                <a:ea typeface="Calibri" pitchFamily="34" charset="-122"/>
-                <a:cs typeface="Calibri" pitchFamily="34" charset="-120"/>
-              </a:rPr>
               <a:t>LOGBOOK</a:t>
             </a:r>
             <a:endParaRPr lang="en-US" sz="1400" dirty="0"/>
@@ -18945,7 +22031,7 @@
       </p:sp>
       <p:graphicFrame>
         <p:nvGraphicFramePr>
-          <p:cNvPr id="51" name="Table 0"/>
+          <p:cNvPr id="59" name="Table 0"/>
           <p:cNvGraphicFramePr>
             <a:graphicFrameLocks noGrp="1"/>
           </p:cNvGraphicFramePr>
@@ -19055,7 +22141,7 @@
                           <a:ea typeface="Calibri" pitchFamily="34" charset="-122"/>
                           <a:cs typeface="Calibri" pitchFamily="34" charset="-120"/>
                         </a:rPr>
-                        <a:t>DEFINITIONS; Analysis of the Graph; Explanation.</a:t>
+                        <a:t>DEFINITIONS; Reading the Graph; The General Pattern; Exceptions and Special Cases.</a:t>
                       </a:r>
                       <a:endParaRPr lang="en-US" sz="1600" dirty="0">
                         <a:latin typeface="Calibri" charset="0"/>
@@ -19331,7 +22417,7 @@
                           <a:ea typeface="Calibri" pitchFamily="34" charset="-122"/>
                           <a:cs typeface="Calibri" pitchFamily="34" charset="-120"/>
                         </a:rPr>
-                        <a:t>Draw a bar graph of population by altitude from the table and write three sentences about it.</a:t>
+                        <a:t>Name one push factor of rural-urban migration in Cameroon.</a:t>
                       </a:r>
                       <a:endParaRPr lang="en-US" sz="1600" dirty="0">
                         <a:latin typeface="Calibri" charset="0"/>
@@ -19705,7 +22791,7 @@
             <a:pPr algn="ctr"/>
             <a:fld id="{F7021451-1387-4CA6-816F-3879F97B5CBC}" type="slidenum">
               <a:rPr b="1" lang="en-US"/>
-              <a:t>50</a:t>
+              <a:t>58</a:t>
             </a:fld>
             <a:endParaRPr lang="en-US"/>
           </a:p>
@@ -19719,9 +22805,9 @@
 </p:sld>
 </file>
 
-<file path=ppt/slides/slide51.xml><?xml version="1.0" encoding="utf-8"?>
+<file path=ppt/slides/slide59.xml><?xml version="1.0" encoding="utf-8"?>
 <p:sld xmlns:a="http://schemas.openxmlformats.org/drawingml/2006/main" xmlns:r="http://schemas.openxmlformats.org/officeDocument/2006/relationships" xmlns:p="http://schemas.openxmlformats.org/presentationml/2006/main">
-  <p:cSld name="Slide 51">
+  <p:cSld name="Slide 59">
     <p:spTree>
       <p:nvGrpSpPr>
         <p:cNvPr id="1" name=""/>
@@ -19898,7 +22984,7 @@
                 <a:ea typeface="Calibri" pitchFamily="34" charset="-122"/>
                 <a:cs typeface="Calibri" pitchFamily="34" charset="-120"/>
               </a:rPr>
-              <a:t>Without the projector (Activity 1): read the bars one by one.</a:t>
+              <a:t>Without the projector (Activity 1): draw the bars from a table.</a:t>
             </a:r>
             <a:endParaRPr lang="en-US" sz="2000" dirty="0"/>
           </a:p>
@@ -19919,7 +23005,7 @@
                 <a:ea typeface="Calibri" pitchFamily="34" charset="-122"/>
                 <a:cs typeface="Calibri" pitchFamily="34" charset="-120"/>
               </a:rPr>
-              <a:t>Without the projector (Activity 2): compare the Alps and the plains.</a:t>
+              <a:t>Without the projector (Activity 2): describe the summit of Mount Cameroon.</a:t>
             </a:r>
             <a:endParaRPr lang="en-US" sz="2000" dirty="0"/>
           </a:p>
@@ -19940,7 +23026,7 @@
                 <a:ea typeface="Calibri" pitchFamily="34" charset="-122"/>
                 <a:cs typeface="Calibri" pitchFamily="34" charset="-120"/>
               </a:rPr>
-              <a:t>Without the projector (Activity 3): find La Paz on the map.</a:t>
+              <a:t>Without the projector (Activity 3): write the table on the board.</a:t>
             </a:r>
             <a:endParaRPr lang="en-US" sz="2000" dirty="0"/>
           </a:p>
@@ -19961,7 +23047,7 @@
                 <a:ea typeface="Calibri" pitchFamily="34" charset="-122"/>
                 <a:cs typeface="Calibri" pitchFamily="34" charset="-120"/>
               </a:rPr>
-              <a:t>Without the projector (Activity 4): compare with Douala.</a:t>
+              <a:t>Without the projector (Activity 4): locate Bolivia on a map.</a:t>
             </a:r>
             <a:endParaRPr lang="en-US" sz="2000" dirty="0"/>
           </a:p>
@@ -19982,7 +23068,7 @@
                 <a:ea typeface="Calibri" pitchFamily="34" charset="-122"/>
                 <a:cs typeface="Calibri" pitchFamily="34" charset="-120"/>
               </a:rPr>
-              <a:t>Without the projector (Activity 5): write the reasons.</a:t>
+              <a:t>Without the projector (Activity 5): name crops of the Western Highlands.</a:t>
             </a:r>
             <a:endParaRPr lang="en-US" sz="2000" dirty="0"/>
           </a:p>
@@ -20030,311 +23116,7 @@
             <a:pPr algn="ctr"/>
             <a:fld id="{F7021451-1387-4CA6-816F-3879F97B5CBC}" type="slidenum">
               <a:rPr b="1" lang="en-US"/>
-              <a:t>51</a:t>
-            </a:fld>
-            <a:endParaRPr lang="en-US"/>
-          </a:p>
-        </p:txBody>
-      </p:sp>
-    </p:spTree>
-  </p:cSld>
-  <p:clrMapOvr>
-    <a:masterClrMapping/>
-  </p:clrMapOvr>
-</p:sld>
-</file>
-
-<file path=ppt/slides/slide52.xml><?xml version="1.0" encoding="utf-8"?>
-<p:sld xmlns:a="http://schemas.openxmlformats.org/drawingml/2006/main" xmlns:r="http://schemas.openxmlformats.org/officeDocument/2006/relationships" xmlns:p="http://schemas.openxmlformats.org/presentationml/2006/main">
-  <p:cSld name="Slide 52">
-    <p:spTree>
-      <p:nvGrpSpPr>
-        <p:cNvPr id="1" name=""/>
-        <p:cNvGrpSpPr/>
-        <p:nvPr/>
-      </p:nvGrpSpPr>
-      <p:grpSpPr>
-        <a:xfrm>
-          <a:off x="0" y="0"/>
-          <a:ext cx="0" cy="0"/>
-          <a:chOff x="0" y="0"/>
-          <a:chExt cx="0" cy="0"/>
-        </a:xfrm>
-      </p:grpSpPr>
-      <p:sp>
-        <p:nvSpPr>
-          <p:cNvPr id="2" name="Text 0"/>
-          <p:cNvSpPr/>
-          <p:nvPr/>
-        </p:nvSpPr>
-        <p:spPr>
-          <a:xfrm>
-            <a:off x="457200" y="713232"/>
-            <a:ext cx="11368735" cy="274320"/>
-          </a:xfrm>
-          <a:prstGeom prst="rect">
-            <a:avLst/>
-          </a:prstGeom>
-          <a:noFill/>
-          <a:ln/>
-        </p:spPr>
-        <p:txBody>
-          <a:bodyPr wrap="square" lIns="0" tIns="0" rIns="0" bIns="0" rtlCol="0" anchor="ctr"/>
-          <a:lstStyle/>
-          <a:p>
-            <a:pPr algn="r" indent="0" marL="0">
-              <a:buNone/>
-            </a:pPr>
-            <a:r>
-              <a:rPr lang="en-US" sz="1400" b="1" dirty="0">
-                <a:solidFill>
-                  <a:srgbClr val="1C3F6E"/>
-                </a:solidFill>
-                <a:latin typeface="Calibri" pitchFamily="34" charset="0"/>
-                <a:ea typeface="Calibri" pitchFamily="34" charset="-122"/>
-                <a:cs typeface="Calibri" pitchFamily="34" charset="-120"/>
-              </a:rPr>
-              <a:t>REFERENCES</a:t>
-            </a:r>
-            <a:endParaRPr lang="en-US" sz="1400" dirty="0"/>
-          </a:p>
-        </p:txBody>
-      </p:sp>
-      <p:pic>
-        <p:nvPicPr>
-          <p:cNvPr id="3" name="Image 0" descr="/home/claude/f4/img/minesec_sheet.png">    </p:cNvPr>
-          <p:cNvPicPr>
-            <a:picLocks noChangeAspect="1"/>
-          </p:cNvPicPr>
-          <p:nvPr/>
-        </p:nvPicPr>
-        <p:blipFill>
-          <a:blip r:embed="rId1"/>
-          <a:stretch>
-            <a:fillRect/>
-          </a:stretch>
-        </p:blipFill>
-        <p:spPr>
-          <a:xfrm>
-            <a:off x="0" y="658368"/>
-            <a:ext cx="5120640" cy="5833872"/>
-          </a:xfrm>
-          <a:prstGeom prst="rect">
-            <a:avLst/>
-          </a:prstGeom>
-        </p:spPr>
-      </p:pic>
-      <p:sp>
-        <p:nvSpPr>
-          <p:cNvPr id="4" name="Text 1"/>
-          <p:cNvSpPr/>
-          <p:nvPr/>
-        </p:nvSpPr>
-        <p:spPr>
-          <a:xfrm>
-            <a:off x="5349240" y="1005840"/>
-            <a:ext cx="6522415" cy="731520"/>
-          </a:xfrm>
-          <a:prstGeom prst="rect">
-            <a:avLst/>
-          </a:prstGeom>
-          <a:noFill/>
-          <a:ln/>
-        </p:spPr>
-        <p:txBody>
-          <a:bodyPr wrap="square" lIns="0" tIns="0" rIns="0" bIns="0" rtlCol="0" anchor="ctr">
-            <a:normAutofit/>
-          </a:bodyPr>
-          <a:lstStyle/>
-          <a:p>
-            <a:pPr algn="ctr" indent="0" marL="0">
-              <a:buNone/>
-            </a:pPr>
-            <a:r>
-              <a:rPr lang="en-US" sz="3600" b="1" dirty="0">
-                <a:solidFill>
-                  <a:srgbClr val="990011"/>
-                </a:solidFill>
-                <a:latin typeface="Times New Roman" pitchFamily="34" charset="0"/>
-                <a:ea typeface="Times New Roman" pitchFamily="34" charset="-122"/>
-                <a:cs typeface="Times New Roman" pitchFamily="34" charset="-120"/>
-              </a:rPr>
-              <a:t>References</a:t>
-            </a:r>
-            <a:endParaRPr lang="en-US" sz="3600" dirty="0"/>
-          </a:p>
-        </p:txBody>
-      </p:sp>
-      <p:sp>
-        <p:nvSpPr>
-          <p:cNvPr id="5" name="Text 2"/>
-          <p:cNvSpPr/>
-          <p:nvPr/>
-        </p:nvSpPr>
-        <p:spPr>
-          <a:xfrm>
-            <a:off x="5349240" y="1783080"/>
-            <a:ext cx="6522415" cy="4663440"/>
-          </a:xfrm>
-          <a:prstGeom prst="rect">
-            <a:avLst/>
-          </a:prstGeom>
-          <a:noFill/>
-          <a:ln/>
-        </p:spPr>
-        <p:txBody>
-          <a:bodyPr wrap="square" lIns="0" tIns="0" rIns="0" bIns="0" rtlCol="0" anchor="t"/>
-          <a:lstStyle/>
-          <a:p>
-            <a:pPr algn="l" marL="342900" indent="-342900">
-              <a:spcAft>
-                <a:spcPts val="800"/>
-              </a:spcAft>
-              <a:buSzPct val="100000"/>
-              <a:buChar char="•"/>
-            </a:pPr>
-            <a:r>
-              <a:rPr lang="en-US" sz="1800" dirty="0">
-                <a:solidFill>
-                  <a:srgbClr val="111111"/>
-                </a:solidFill>
-                <a:latin typeface="Calibri" pitchFamily="34" charset="0"/>
-                <a:ea typeface="Calibri" pitchFamily="34" charset="-122"/>
-                <a:cs typeface="Calibri" pitchFamily="34" charset="-120"/>
-              </a:rPr>
-              <a:t>National Geography Syllabus, MINESEC/IGE/IP-SS, 2019 — Module 4 (Population Geography).</a:t>
-            </a:r>
-            <a:endParaRPr lang="en-US" sz="1800" dirty="0"/>
-          </a:p>
-          <a:p>
-            <a:pPr algn="l" marL="342900" indent="-342900">
-              <a:spcAft>
-                <a:spcPts val="800"/>
-              </a:spcAft>
-              <a:buSzPct val="100000"/>
-              <a:buChar char="•"/>
-            </a:pPr>
-            <a:r>
-              <a:rPr lang="en-US" sz="1800" dirty="0">
-                <a:solidFill>
-                  <a:srgbClr val="111111"/>
-                </a:solidFill>
-                <a:latin typeface="Calibri" pitchFamily="34" charset="0"/>
-                <a:ea typeface="Calibri" pitchFamily="34" charset="-122"/>
-                <a:cs typeface="Calibri" pitchFamily="34" charset="-120"/>
-              </a:rPr>
-              <a:t>Photo, Activity 2: “View of the Himalaya Mountain Range” by NASA Johnson, CC BY-NC 2.0, via nasa (https://www.flickr.com/photos/29988733@N04/10678470543)</a:t>
-            </a:r>
-            <a:endParaRPr lang="en-US" sz="1800" dirty="0"/>
-          </a:p>
-          <a:p>
-            <a:pPr algn="l" marL="342900" indent="-342900">
-              <a:spcAft>
-                <a:spcPts val="800"/>
-              </a:spcAft>
-              <a:buSzPct val="100000"/>
-              <a:buChar char="•"/>
-            </a:pPr>
-            <a:r>
-              <a:rPr lang="en-US" sz="1800" dirty="0">
-                <a:solidFill>
-                  <a:srgbClr val="111111"/>
-                </a:solidFill>
-                <a:latin typeface="Calibri" pitchFamily="34" charset="0"/>
-                <a:ea typeface="Calibri" pitchFamily="34" charset="-122"/>
-                <a:cs typeface="Calibri" pitchFamily="34" charset="-120"/>
-              </a:rPr>
-              <a:t>Photo, Activity 3: “La Paz” by cliff.hellis, CC BY-NC-ND 2.0, via Flickr (https://www.flickr.com/photos/30099537@N02/6348597083)</a:t>
-            </a:r>
-            <a:endParaRPr lang="en-US" sz="1800" dirty="0"/>
-          </a:p>
-          <a:p>
-            <a:pPr algn="l" marL="342900" indent="-342900">
-              <a:spcAft>
-                <a:spcPts val="800"/>
-              </a:spcAft>
-              <a:buSzPct val="100000"/>
-              <a:buChar char="•"/>
-            </a:pPr>
-            <a:r>
-              <a:rPr lang="en-US" sz="1800" dirty="0">
-                <a:solidFill>
-                  <a:srgbClr val="111111"/>
-                </a:solidFill>
-                <a:latin typeface="Calibri" pitchFamily="34" charset="0"/>
-                <a:ea typeface="Calibri" pitchFamily="34" charset="-122"/>
-                <a:cs typeface="Calibri" pitchFamily="34" charset="-120"/>
-              </a:rPr>
-              <a:t>Photo, Activity 5: “Carlo in the tea” by luigig, CC BY 2.0, via Flickr (https://www.flickr.com/photos/51035803402@N01/3175986747)</a:t>
-            </a:r>
-            <a:endParaRPr lang="en-US" sz="1800" dirty="0"/>
-          </a:p>
-          <a:p>
-            <a:pPr algn="l" marL="342900" indent="-342900">
-              <a:spcAft>
-                <a:spcPts val="800"/>
-              </a:spcAft>
-              <a:buSzPct val="100000"/>
-              <a:buChar char="•"/>
-            </a:pPr>
-            <a:r>
-              <a:rPr lang="en-US" sz="1800" dirty="0">
-                <a:solidFill>
-                  <a:srgbClr val="111111"/>
-                </a:solidFill>
-                <a:latin typeface="Calibri" pitchFamily="34" charset="0"/>
-                <a:ea typeface="Calibri" pitchFamily="34" charset="-122"/>
-                <a:cs typeface="Calibri" pitchFamily="34" charset="-120"/>
-              </a:rPr>
-              <a:t>Diagrams and animations: drawn for this lesson (Geography Department).</a:t>
-            </a:r>
-            <a:endParaRPr lang="en-US" sz="1800" dirty="0"/>
-          </a:p>
-        </p:txBody>
-      </p:sp>
-      <p:sp>
-        <p:nvSpPr>
-          <p:cNvPr id="25" name="Slide Number Placeholder 0"/>
-          <p:cNvSpPr>
-            <a:spLocks noGrp="1"/>
-          </p:cNvSpPr>
-          <p:nvPr>
-            <p:ph type="sldNum" sz="quarter" idx="4294967295"/>
-          </p:nvPr>
-        </p:nvSpPr>
-        <p:spPr>
-          <a:xfrm>
-            <a:off x="27432" y="91440"/>
-            <a:ext cx="585216" cy="475488"/>
-          </a:xfrm>
-          <a:prstGeom prst="rect">
-            <a:avLst/>
-          </a:prstGeom>
-          <a:extLst>
-            <a:ext uri="{C572A759-6A51-4108-AA02-DFA0A04FC94B}">
-              <ma14:wrappingTextBoxFlag xmlns:ma14="http://schemas.microsoft.com/office/mac/drawingml/2011/main" val="0"/>
-            </a:ext>
-          </a:extLst>
-        </p:spPr>
-        <p:txBody>
-          <a:bodyPr/>
-          <a:lstStyle>
-            <a:lvl1pPr>
-              <a:defRPr sz="2000">
-                <a:solidFill>
-                  <a:srgbClr val="FFFFFF"/>
-                </a:solidFill>
-                <a:latin typeface="Calibri"/>
-                <a:ea typeface="Calibri"/>
-                <a:cs typeface="Calibri"/>
-              </a:defRPr>
-            </a:lvl1pPr>
-          </a:lstStyle>
-          <a:p>
-            <a:pPr algn="ctr"/>
-            <a:fld id="{F7021451-1387-4CA6-816F-3879F97B5CBC}" type="slidenum">
-              <a:rPr b="1" lang="en-US"/>
-              <a:t>52</a:t>
+              <a:t>59</a:t>
             </a:fld>
             <a:endParaRPr lang="en-US"/>
           </a:p>
@@ -20679,6 +23461,593 @@
 </p:sld>
 </file>
 
+<file path=ppt/slides/slide60.xml><?xml version="1.0" encoding="utf-8"?>
+<p:sld xmlns:a="http://schemas.openxmlformats.org/drawingml/2006/main" xmlns:r="http://schemas.openxmlformats.org/officeDocument/2006/relationships" xmlns:p="http://schemas.openxmlformats.org/presentationml/2006/main">
+  <p:cSld name="Slide 60">
+    <p:spTree>
+      <p:nvGrpSpPr>
+        <p:cNvPr id="1" name=""/>
+        <p:cNvGrpSpPr/>
+        <p:nvPr/>
+      </p:nvGrpSpPr>
+      <p:grpSpPr>
+        <a:xfrm>
+          <a:off x="0" y="0"/>
+          <a:ext cx="0" cy="0"/>
+          <a:chOff x="0" y="0"/>
+          <a:chExt cx="0" cy="0"/>
+        </a:xfrm>
+      </p:grpSpPr>
+      <p:sp>
+        <p:nvSpPr>
+          <p:cNvPr id="2" name="Text 0"/>
+          <p:cNvSpPr/>
+          <p:nvPr/>
+        </p:nvSpPr>
+        <p:spPr>
+          <a:xfrm>
+            <a:off x="457200" y="713232"/>
+            <a:ext cx="11368735" cy="274320"/>
+          </a:xfrm>
+          <a:prstGeom prst="rect">
+            <a:avLst/>
+          </a:prstGeom>
+          <a:noFill/>
+          <a:ln/>
+        </p:spPr>
+        <p:txBody>
+          <a:bodyPr wrap="square" lIns="0" tIns="0" rIns="0" bIns="0" rtlCol="0" anchor="ctr"/>
+          <a:lstStyle/>
+          <a:p>
+            <a:pPr algn="r" indent="0" marL="0">
+              <a:buNone/>
+            </a:pPr>
+            <a:r>
+              <a:rPr lang="en-US" sz="1400" b="1" dirty="0">
+                <a:solidFill>
+                  <a:srgbClr val="1C3F6E"/>
+                </a:solidFill>
+                <a:latin typeface="Calibri" pitchFamily="34" charset="0"/>
+                <a:ea typeface="Calibri" pitchFamily="34" charset="-122"/>
+                <a:cs typeface="Calibri" pitchFamily="34" charset="-120"/>
+              </a:rPr>
+              <a:t>REFERENCES</a:t>
+            </a:r>
+            <a:endParaRPr lang="en-US" sz="1400" dirty="0"/>
+          </a:p>
+        </p:txBody>
+      </p:sp>
+      <p:pic>
+        <p:nvPicPr>
+          <p:cNvPr id="3" name="Image 0" descr="/home/claude/f4/img/minesec_sheet.png">    </p:cNvPr>
+          <p:cNvPicPr>
+            <a:picLocks noChangeAspect="1"/>
+          </p:cNvPicPr>
+          <p:nvPr/>
+        </p:nvPicPr>
+        <p:blipFill>
+          <a:blip r:embed="rId1"/>
+          <a:stretch>
+            <a:fillRect/>
+          </a:stretch>
+        </p:blipFill>
+        <p:spPr>
+          <a:xfrm>
+            <a:off x="0" y="658368"/>
+            <a:ext cx="2468880" cy="5833872"/>
+          </a:xfrm>
+          <a:prstGeom prst="rect">
+            <a:avLst/>
+          </a:prstGeom>
+        </p:spPr>
+      </p:pic>
+      <p:sp>
+        <p:nvSpPr>
+          <p:cNvPr id="4" name="Text 1"/>
+          <p:cNvSpPr/>
+          <p:nvPr/>
+        </p:nvSpPr>
+        <p:spPr>
+          <a:xfrm>
+            <a:off x="2697480" y="1005840"/>
+            <a:ext cx="9174175" cy="731520"/>
+          </a:xfrm>
+          <a:prstGeom prst="rect">
+            <a:avLst/>
+          </a:prstGeom>
+          <a:noFill/>
+          <a:ln/>
+        </p:spPr>
+        <p:txBody>
+          <a:bodyPr wrap="square" lIns="0" tIns="0" rIns="0" bIns="0" rtlCol="0" anchor="ctr">
+            <a:normAutofit/>
+          </a:bodyPr>
+          <a:lstStyle/>
+          <a:p>
+            <a:pPr algn="ctr" indent="0" marL="0">
+              <a:buNone/>
+            </a:pPr>
+            <a:r>
+              <a:rPr lang="en-US" sz="3600" b="1" dirty="0">
+                <a:solidFill>
+                  <a:srgbClr val="990011"/>
+                </a:solidFill>
+                <a:latin typeface="Times New Roman" pitchFamily="34" charset="0"/>
+                <a:ea typeface="Times New Roman" pitchFamily="34" charset="-122"/>
+                <a:cs typeface="Times New Roman" pitchFamily="34" charset="-120"/>
+              </a:rPr>
+              <a:t>References</a:t>
+            </a:r>
+            <a:endParaRPr lang="en-US" sz="3600" dirty="0"/>
+          </a:p>
+        </p:txBody>
+      </p:sp>
+      <p:sp>
+        <p:nvSpPr>
+          <p:cNvPr id="5" name="Text 2"/>
+          <p:cNvSpPr/>
+          <p:nvPr/>
+        </p:nvSpPr>
+        <p:spPr>
+          <a:xfrm>
+            <a:off x="2697480" y="1783080"/>
+            <a:ext cx="9174175" cy="4663440"/>
+          </a:xfrm>
+          <a:prstGeom prst="rect">
+            <a:avLst/>
+          </a:prstGeom>
+          <a:noFill/>
+          <a:ln/>
+        </p:spPr>
+        <p:txBody>
+          <a:bodyPr wrap="square" lIns="0" tIns="0" rIns="0" bIns="0" rtlCol="0" anchor="t"/>
+          <a:lstStyle/>
+          <a:p>
+            <a:pPr algn="l" marL="342900" indent="-342900">
+              <a:spcAft>
+                <a:spcPts val="800"/>
+              </a:spcAft>
+              <a:buSzPct val="100000"/>
+              <a:buChar char="•"/>
+            </a:pPr>
+            <a:r>
+              <a:rPr lang="en-US" sz="1800" dirty="0">
+                <a:solidFill>
+                  <a:srgbClr val="111111"/>
+                </a:solidFill>
+                <a:latin typeface="Calibri" pitchFamily="34" charset="0"/>
+                <a:ea typeface="Calibri" pitchFamily="34" charset="-122"/>
+                <a:cs typeface="Calibri" pitchFamily="34" charset="-120"/>
+              </a:rPr>
+              <a:t>Geography Syllabus for Sixth Forms (Lower and Upper Sixth), MINESEC, 2019 — Module 4 (Population Geography).</a:t>
+            </a:r>
+            <a:endParaRPr lang="en-US" sz="1800" dirty="0"/>
+          </a:p>
+          <a:p>
+            <a:pPr algn="l" marL="342900" indent="-342900">
+              <a:spcAft>
+                <a:spcPts val="800"/>
+              </a:spcAft>
+              <a:buSzPct val="100000"/>
+              <a:buChar char="•"/>
+            </a:pPr>
+            <a:r>
+              <a:rPr lang="en-US" sz="1800" dirty="0">
+                <a:solidFill>
+                  <a:srgbClr val="111111"/>
+                </a:solidFill>
+                <a:latin typeface="Calibri" pitchFamily="34" charset="0"/>
+                <a:ea typeface="Calibri" pitchFamily="34" charset="-122"/>
+                <a:cs typeface="Calibri" pitchFamily="34" charset="-120"/>
+              </a:rPr>
+              <a:t>Teacher's course notes: Mr KAMDEM E., Population Geography (USA), GBHS Garoua, 2026.</a:t>
+            </a:r>
+            <a:endParaRPr lang="en-US" sz="1800" dirty="0"/>
+          </a:p>
+          <a:p>
+            <a:pPr algn="l" marL="342900" indent="-342900">
+              <a:spcAft>
+                <a:spcPts val="800"/>
+              </a:spcAft>
+              <a:buSzPct val="100000"/>
+              <a:buChar char="•"/>
+            </a:pPr>
+            <a:r>
+              <a:rPr lang="en-US" sz="1800" dirty="0">
+                <a:solidFill>
+                  <a:srgbClr val="111111"/>
+                </a:solidFill>
+                <a:latin typeface="Calibri" pitchFamily="34" charset="0"/>
+                <a:ea typeface="Calibri" pitchFamily="34" charset="-122"/>
+                <a:cs typeface="Calibri" pitchFamily="34" charset="-120"/>
+              </a:rPr>
+              <a:t>United Nations, World Population Prospects 2024.</a:t>
+            </a:r>
+            <a:endParaRPr lang="en-US" sz="1800" dirty="0"/>
+          </a:p>
+          <a:p>
+            <a:pPr algn="l" marL="342900" indent="-342900">
+              <a:spcAft>
+                <a:spcPts val="800"/>
+              </a:spcAft>
+              <a:buSzPct val="100000"/>
+              <a:buChar char="•"/>
+            </a:pPr>
+            <a:r>
+              <a:rPr lang="en-US" sz="1800" dirty="0">
+                <a:solidFill>
+                  <a:srgbClr val="111111"/>
+                </a:solidFill>
+                <a:latin typeface="Calibri" pitchFamily="34" charset="0"/>
+                <a:ea typeface="Calibri" pitchFamily="34" charset="-122"/>
+                <a:cs typeface="Calibri" pitchFamily="34" charset="-120"/>
+              </a:rPr>
+              <a:t>Photo, Activity 2: “View of the Himalaya Mountain Range” by NASA Johnson, CC BY-NC 2.0, via nasa (https://www.flickr.com/photos/29988733@N04/10678470543)</a:t>
+            </a:r>
+            <a:endParaRPr lang="en-US" sz="1800" dirty="0"/>
+          </a:p>
+          <a:p>
+            <a:pPr algn="l" marL="342900" indent="-342900">
+              <a:spcAft>
+                <a:spcPts val="800"/>
+              </a:spcAft>
+              <a:buSzPct val="100000"/>
+              <a:buChar char="•"/>
+            </a:pPr>
+            <a:r>
+              <a:rPr lang="en-US" sz="1800" dirty="0">
+                <a:solidFill>
+                  <a:srgbClr val="111111"/>
+                </a:solidFill>
+                <a:latin typeface="Calibri" pitchFamily="34" charset="0"/>
+                <a:ea typeface="Calibri" pitchFamily="34" charset="-122"/>
+                <a:cs typeface="Calibri" pitchFamily="34" charset="-120"/>
+              </a:rPr>
+              <a:t>Photo, Activity 4: “La Paz” by cliff.hellis, CC BY-NC-ND 2.0, via Flickr (https://www.flickr.com/photos/30099537@N02/6348597083)</a:t>
+            </a:r>
+            <a:endParaRPr lang="en-US" sz="1800" dirty="0"/>
+          </a:p>
+          <a:p>
+            <a:pPr algn="l" marL="342900" indent="-342900">
+              <a:spcAft>
+                <a:spcPts val="800"/>
+              </a:spcAft>
+              <a:buSzPct val="100000"/>
+              <a:buChar char="•"/>
+            </a:pPr>
+            <a:r>
+              <a:rPr lang="en-US" sz="1800" dirty="0">
+                <a:solidFill>
+                  <a:srgbClr val="111111"/>
+                </a:solidFill>
+                <a:latin typeface="Calibri" pitchFamily="34" charset="0"/>
+                <a:ea typeface="Calibri" pitchFamily="34" charset="-122"/>
+                <a:cs typeface="Calibri" pitchFamily="34" charset="-120"/>
+              </a:rPr>
+              <a:t>Photo, Activity 5: “Carlo in the tea” by luigig, CC BY 2.0, via Flickr (https://www.flickr.com/photos/51035803402@N01/3175986747)</a:t>
+            </a:r>
+            <a:endParaRPr lang="en-US" sz="1800" dirty="0"/>
+          </a:p>
+          <a:p>
+            <a:pPr algn="l" marL="342900" indent="-342900">
+              <a:spcAft>
+                <a:spcPts val="800"/>
+              </a:spcAft>
+              <a:buSzPct val="100000"/>
+              <a:buChar char="•"/>
+            </a:pPr>
+            <a:r>
+              <a:rPr lang="en-US" sz="1800" dirty="0">
+                <a:solidFill>
+                  <a:srgbClr val="111111"/>
+                </a:solidFill>
+                <a:latin typeface="Calibri" pitchFamily="34" charset="0"/>
+                <a:ea typeface="Calibri" pitchFamily="34" charset="-122"/>
+                <a:cs typeface="Calibri" pitchFamily="34" charset="-120"/>
+              </a:rPr>
+              <a:t>Photo, board summary (Low altitudes (0–500 m)): “A woman harvesting rice, Barotse floodplain, Zambia. Photo by Georgina” by WorldFish, CC BY-NC-ND 2.0, via Flickr (https://www.flickr.com/photos/61545321@N06/7848727138)</a:t>
+            </a:r>
+            <a:endParaRPr lang="en-US" sz="1800" dirty="0"/>
+          </a:p>
+        </p:txBody>
+      </p:sp>
+      <p:sp>
+        <p:nvSpPr>
+          <p:cNvPr id="25" name="Slide Number Placeholder 0"/>
+          <p:cNvSpPr>
+            <a:spLocks noGrp="1"/>
+          </p:cNvSpPr>
+          <p:nvPr>
+            <p:ph type="sldNum" sz="quarter" idx="4294967295"/>
+          </p:nvPr>
+        </p:nvSpPr>
+        <p:spPr>
+          <a:xfrm>
+            <a:off x="27432" y="91440"/>
+            <a:ext cx="585216" cy="475488"/>
+          </a:xfrm>
+          <a:prstGeom prst="rect">
+            <a:avLst/>
+          </a:prstGeom>
+          <a:extLst>
+            <a:ext uri="{C572A759-6A51-4108-AA02-DFA0A04FC94B}">
+              <ma14:wrappingTextBoxFlag xmlns:ma14="http://schemas.microsoft.com/office/mac/drawingml/2011/main" val="0"/>
+            </a:ext>
+          </a:extLst>
+        </p:spPr>
+        <p:txBody>
+          <a:bodyPr/>
+          <a:lstStyle>
+            <a:lvl1pPr>
+              <a:defRPr sz="2000">
+                <a:solidFill>
+                  <a:srgbClr val="FFFFFF"/>
+                </a:solidFill>
+                <a:latin typeface="Calibri"/>
+                <a:ea typeface="Calibri"/>
+                <a:cs typeface="Calibri"/>
+              </a:defRPr>
+            </a:lvl1pPr>
+          </a:lstStyle>
+          <a:p>
+            <a:pPr algn="ctr"/>
+            <a:fld id="{F7021451-1387-4CA6-816F-3879F97B5CBC}" type="slidenum">
+              <a:rPr b="1" lang="en-US"/>
+              <a:t>60</a:t>
+            </a:fld>
+            <a:endParaRPr lang="en-US"/>
+          </a:p>
+        </p:txBody>
+      </p:sp>
+    </p:spTree>
+  </p:cSld>
+  <p:clrMapOvr>
+    <a:masterClrMapping/>
+  </p:clrMapOvr>
+</p:sld>
+</file>
+
+<file path=ppt/slides/slide61.xml><?xml version="1.0" encoding="utf-8"?>
+<p:sld xmlns:a="http://schemas.openxmlformats.org/drawingml/2006/main" xmlns:r="http://schemas.openxmlformats.org/officeDocument/2006/relationships" xmlns:p="http://schemas.openxmlformats.org/presentationml/2006/main">
+  <p:cSld name="Slide 61">
+    <p:spTree>
+      <p:nvGrpSpPr>
+        <p:cNvPr id="1" name=""/>
+        <p:cNvGrpSpPr/>
+        <p:nvPr/>
+      </p:nvGrpSpPr>
+      <p:grpSpPr>
+        <a:xfrm>
+          <a:off x="0" y="0"/>
+          <a:ext cx="0" cy="0"/>
+          <a:chOff x="0" y="0"/>
+          <a:chExt cx="0" cy="0"/>
+        </a:xfrm>
+      </p:grpSpPr>
+      <p:sp>
+        <p:nvSpPr>
+          <p:cNvPr id="2" name="Text 0"/>
+          <p:cNvSpPr/>
+          <p:nvPr/>
+        </p:nvSpPr>
+        <p:spPr>
+          <a:xfrm>
+            <a:off x="457200" y="713232"/>
+            <a:ext cx="11368735" cy="274320"/>
+          </a:xfrm>
+          <a:prstGeom prst="rect">
+            <a:avLst/>
+          </a:prstGeom>
+          <a:noFill/>
+          <a:ln/>
+        </p:spPr>
+        <p:txBody>
+          <a:bodyPr wrap="square" lIns="0" tIns="0" rIns="0" bIns="0" rtlCol="0" anchor="ctr"/>
+          <a:lstStyle/>
+          <a:p>
+            <a:pPr algn="r" indent="0" marL="0">
+              <a:buNone/>
+            </a:pPr>
+            <a:r>
+              <a:rPr lang="en-US" sz="1400" b="1" dirty="0">
+                <a:solidFill>
+                  <a:srgbClr val="1C3F6E"/>
+                </a:solidFill>
+                <a:latin typeface="Calibri" pitchFamily="34" charset="0"/>
+                <a:ea typeface="Calibri" pitchFamily="34" charset="-122"/>
+                <a:cs typeface="Calibri" pitchFamily="34" charset="-120"/>
+              </a:rPr>
+              <a:t>REFERENCES</a:t>
+            </a:r>
+            <a:endParaRPr lang="en-US" sz="1400" dirty="0"/>
+          </a:p>
+        </p:txBody>
+      </p:sp>
+      <p:pic>
+        <p:nvPicPr>
+          <p:cNvPr id="3" name="Image 0" descr="/home/claude/f4/img/minesec_sheet.png">    </p:cNvPr>
+          <p:cNvPicPr>
+            <a:picLocks noChangeAspect="1"/>
+          </p:cNvPicPr>
+          <p:nvPr/>
+        </p:nvPicPr>
+        <p:blipFill>
+          <a:blip r:embed="rId1"/>
+          <a:stretch>
+            <a:fillRect/>
+          </a:stretch>
+        </p:blipFill>
+        <p:spPr>
+          <a:xfrm>
+            <a:off x="0" y="658368"/>
+            <a:ext cx="5120640" cy="5833872"/>
+          </a:xfrm>
+          <a:prstGeom prst="rect">
+            <a:avLst/>
+          </a:prstGeom>
+        </p:spPr>
+      </p:pic>
+      <p:sp>
+        <p:nvSpPr>
+          <p:cNvPr id="4" name="Text 1"/>
+          <p:cNvSpPr/>
+          <p:nvPr/>
+        </p:nvSpPr>
+        <p:spPr>
+          <a:xfrm>
+            <a:off x="5349240" y="1005840"/>
+            <a:ext cx="6522415" cy="731520"/>
+          </a:xfrm>
+          <a:prstGeom prst="rect">
+            <a:avLst/>
+          </a:prstGeom>
+          <a:noFill/>
+          <a:ln/>
+        </p:spPr>
+        <p:txBody>
+          <a:bodyPr wrap="square" lIns="0" tIns="0" rIns="0" bIns="0" rtlCol="0" anchor="ctr">
+            <a:normAutofit/>
+          </a:bodyPr>
+          <a:lstStyle/>
+          <a:p>
+            <a:pPr algn="ctr" indent="0" marL="0">
+              <a:buNone/>
+            </a:pPr>
+            <a:r>
+              <a:rPr lang="en-US" sz="3600" b="1" dirty="0">
+                <a:solidFill>
+                  <a:srgbClr val="990011"/>
+                </a:solidFill>
+                <a:latin typeface="Times New Roman" pitchFamily="34" charset="0"/>
+                <a:ea typeface="Times New Roman" pitchFamily="34" charset="-122"/>
+                <a:cs typeface="Times New Roman" pitchFamily="34" charset="-120"/>
+              </a:rPr>
+              <a:t>References (continued)</a:t>
+            </a:r>
+            <a:endParaRPr lang="en-US" sz="3600" dirty="0"/>
+          </a:p>
+        </p:txBody>
+      </p:sp>
+      <p:sp>
+        <p:nvSpPr>
+          <p:cNvPr id="5" name="Text 2"/>
+          <p:cNvSpPr/>
+          <p:nvPr/>
+        </p:nvSpPr>
+        <p:spPr>
+          <a:xfrm>
+            <a:off x="5349240" y="1783080"/>
+            <a:ext cx="6522415" cy="4663440"/>
+          </a:xfrm>
+          <a:prstGeom prst="rect">
+            <a:avLst/>
+          </a:prstGeom>
+          <a:noFill/>
+          <a:ln/>
+        </p:spPr>
+        <p:txBody>
+          <a:bodyPr wrap="square" lIns="0" tIns="0" rIns="0" bIns="0" rtlCol="0" anchor="t"/>
+          <a:lstStyle/>
+          <a:p>
+            <a:pPr algn="l" marL="342900" indent="-342900">
+              <a:spcAft>
+                <a:spcPts val="800"/>
+              </a:spcAft>
+              <a:buSzPct val="100000"/>
+              <a:buChar char="•"/>
+            </a:pPr>
+            <a:r>
+              <a:rPr lang="en-US" sz="1800" dirty="0">
+                <a:solidFill>
+                  <a:srgbClr val="111111"/>
+                </a:solidFill>
+                <a:latin typeface="Calibri" pitchFamily="34" charset="0"/>
+                <a:ea typeface="Calibri" pitchFamily="34" charset="-122"/>
+                <a:cs typeface="Calibri" pitchFamily="34" charset="-120"/>
+              </a:rPr>
+              <a:t>Photo, board summary (Example of Cameroon): “Bamenda, Cameroon” by jbdodane, CC BY-NC 2.0, via Flickr (https://www.flickr.com/photos/27998473@N02/11293877215)</a:t>
+            </a:r>
+            <a:endParaRPr lang="en-US" sz="1800" dirty="0"/>
+          </a:p>
+          <a:p>
+            <a:pPr algn="l" marL="342900" indent="-342900">
+              <a:spcAft>
+                <a:spcPts val="800"/>
+              </a:spcAft>
+              <a:buSzPct val="100000"/>
+              <a:buChar char="•"/>
+            </a:pPr>
+            <a:r>
+              <a:rPr lang="en-US" sz="1800" dirty="0">
+                <a:solidFill>
+                  <a:srgbClr val="111111"/>
+                </a:solidFill>
+                <a:latin typeface="Calibri" pitchFamily="34" charset="0"/>
+                <a:ea typeface="Calibri" pitchFamily="34" charset="-122"/>
+                <a:cs typeface="Calibri" pitchFamily="34" charset="-120"/>
+              </a:rPr>
+              <a:t>Diagrams and animations: drawn for this lesson (Geography Department).</a:t>
+            </a:r>
+            <a:endParaRPr lang="en-US" sz="1800" dirty="0"/>
+          </a:p>
+        </p:txBody>
+      </p:sp>
+      <p:sp>
+        <p:nvSpPr>
+          <p:cNvPr id="25" name="Slide Number Placeholder 0"/>
+          <p:cNvSpPr>
+            <a:spLocks noGrp="1"/>
+          </p:cNvSpPr>
+          <p:nvPr>
+            <p:ph type="sldNum" sz="quarter" idx="4294967295"/>
+          </p:nvPr>
+        </p:nvSpPr>
+        <p:spPr>
+          <a:xfrm>
+            <a:off x="27432" y="91440"/>
+            <a:ext cx="585216" cy="475488"/>
+          </a:xfrm>
+          <a:prstGeom prst="rect">
+            <a:avLst/>
+          </a:prstGeom>
+          <a:extLst>
+            <a:ext uri="{C572A759-6A51-4108-AA02-DFA0A04FC94B}">
+              <ma14:wrappingTextBoxFlag xmlns:ma14="http://schemas.microsoft.com/office/mac/drawingml/2011/main" val="0"/>
+            </a:ext>
+          </a:extLst>
+        </p:spPr>
+        <p:txBody>
+          <a:bodyPr/>
+          <a:lstStyle>
+            <a:lvl1pPr>
+              <a:defRPr sz="2000">
+                <a:solidFill>
+                  <a:srgbClr val="FFFFFF"/>
+                </a:solidFill>
+                <a:latin typeface="Calibri"/>
+                <a:ea typeface="Calibri"/>
+                <a:cs typeface="Calibri"/>
+              </a:defRPr>
+            </a:lvl1pPr>
+          </a:lstStyle>
+          <a:p>
+            <a:pPr algn="ctr"/>
+            <a:fld id="{F7021451-1387-4CA6-816F-3879F97B5CBC}" type="slidenum">
+              <a:rPr b="1" lang="en-US"/>
+              <a:t>61</a:t>
+            </a:fld>
+            <a:endParaRPr lang="en-US"/>
+          </a:p>
+        </p:txBody>
+      </p:sp>
+    </p:spTree>
+  </p:cSld>
+  <p:clrMapOvr>
+    <a:masterClrMapping/>
+  </p:clrMapOvr>
+</p:sld>
+</file>
+
 <file path=ppt/slides/slide7.xml><?xml version="1.0" encoding="utf-8"?>
 <p:sld xmlns:a="http://schemas.openxmlformats.org/drawingml/2006/main" xmlns:r="http://schemas.openxmlformats.org/officeDocument/2006/relationships" xmlns:p="http://schemas.openxmlformats.org/presentationml/2006/main">
   <p:cSld name="Slide 7">
@@ -20880,7 +24249,7 @@
                 <a:ea typeface="Times New Roman" pitchFamily="34" charset="-122"/>
                 <a:cs typeface="Times New Roman" pitchFamily="34" charset="-120"/>
               </a:rPr>
-              <a:t>Compare tropical and temperate patterns.</a:t>
+              <a:t>Describe the general trend of population with altitude.</a:t>
             </a:r>
             <a:endParaRPr lang="en-US" sz="4000" dirty="0"/>
           </a:p>
@@ -20902,7 +24271,7 @@
                 <a:ea typeface="Times New Roman" pitchFamily="34" charset="-122"/>
                 <a:cs typeface="Times New Roman" pitchFamily="34" charset="-120"/>
               </a:rPr>
-              <a:t>Explain the differences.</a:t>
+              <a:t>Explain peaks and declines of density.</a:t>
             </a:r>
             <a:endParaRPr lang="en-US" sz="4000" dirty="0"/>
           </a:p>
@@ -21014,7 +24383,7 @@
                 <a:ea typeface="Calibri" pitchFamily="34" charset="-122"/>
                 <a:cs typeface="Calibri" pitchFamily="34" charset="-120"/>
               </a:rPr>
-              <a:t>PREVIOUS KNOWLEDGE</a:t>
+              <a:t>OBJECTIVES</a:t>
             </a:r>
             <a:endParaRPr lang="en-US" sz="1400" dirty="0"/>
           </a:p>
@@ -21079,7 +24448,7 @@
                 <a:ea typeface="Times New Roman" pitchFamily="34" charset="-122"/>
                 <a:cs typeface="Times New Roman" pitchFamily="34" charset="-120"/>
               </a:rPr>
-              <a:t>Previous Knowledge</a:t>
+              <a:t>Objectives (continued)</a:t>
             </a:r>
             <a:endParaRPr lang="en-US" sz="3600" dirty="0"/>
           </a:p>
@@ -21111,7 +24480,8 @@
                 <a:spcPts val="800"/>
               </a:spcAft>
               <a:buSzPct val="100000"/>
-              <a:buChar char="•"/>
+              <a:buFont typeface="+mj-lt"/>
+              <a:buAutoNum type="arabicPeriod" startAt="1"/>
             </a:pPr>
             <a:r>
               <a:rPr lang="en-US" sz="4000" dirty="0">
@@ -21122,28 +24492,7 @@
                 <a:ea typeface="Times New Roman" pitchFamily="34" charset="-122"/>
                 <a:cs typeface="Times New Roman" pitchFamily="34" charset="-120"/>
               </a:rPr>
-              <a:t>Temperature falls with altitude.</a:t>
-            </a:r>
-            <a:endParaRPr lang="en-US" sz="4000" dirty="0"/>
-          </a:p>
-          <a:p>
-            <a:pPr algn="l" marL="342900" indent="-342900">
-              <a:spcAft>
-                <a:spcPts val="800"/>
-              </a:spcAft>
-              <a:buSzPct val="100000"/>
-              <a:buChar char="•"/>
-            </a:pPr>
-            <a:r>
-              <a:rPr lang="en-US" sz="4000" dirty="0">
-                <a:solidFill>
-                  <a:srgbClr val="111111"/>
-                </a:solidFill>
-                <a:latin typeface="Times New Roman" pitchFamily="34" charset="0"/>
-                <a:ea typeface="Times New Roman" pitchFamily="34" charset="-122"/>
-                <a:cs typeface="Times New Roman" pitchFamily="34" charset="-120"/>
-              </a:rPr>
-              <a:t>Cool highlands in the tropics can be crowded.</a:t>
+              <a:t>Explain the exceptions in tropical highlands.</a:t>
             </a:r>
             <a:endParaRPr lang="en-US" sz="4000" dirty="0"/>
           </a:p>
@@ -21255,7 +24604,7 @@
                 <a:ea typeface="Calibri" pitchFamily="34" charset="-122"/>
                 <a:cs typeface="Calibri" pitchFamily="34" charset="-120"/>
               </a:rPr>
-              <a:t>REAL-LIFE SITUATION</a:t>
+              <a:t>PREVIOUS KNOWLEDGE</a:t>
             </a:r>
             <a:endParaRPr lang="en-US" sz="1400" dirty="0"/>
           </a:p>
@@ -21320,7 +24669,7 @@
                 <a:ea typeface="Times New Roman" pitchFamily="34" charset="-122"/>
                 <a:cs typeface="Times New Roman" pitchFamily="34" charset="-120"/>
               </a:rPr>
-              <a:t>Situation in Real Life</a:t>
+              <a:t>Previous Knowledge</a:t>
             </a:r>
             <a:endParaRPr lang="en-US" sz="3600" dirty="0"/>
           </a:p>
@@ -21347,11 +24696,12 @@
           <a:bodyPr wrap="square" lIns="0" tIns="0" rIns="0" bIns="0" rtlCol="0" anchor="t"/>
           <a:lstStyle/>
           <a:p>
-            <a:pPr algn="l" indent="0" marL="0">
+            <a:pPr algn="l" marL="342900" indent="-342900">
               <a:spcAft>
                 <a:spcPts val="800"/>
               </a:spcAft>
-              <a:buNone/>
+              <a:buSzPct val="100000"/>
+              <a:buChar char="•"/>
             </a:pPr>
             <a:r>
               <a:rPr lang="en-US" sz="4000" dirty="0">
@@ -21362,7 +24712,49 @@
                 <a:ea typeface="Times New Roman" pitchFamily="34" charset="-122"/>
                 <a:cs typeface="Times New Roman" pitchFamily="34" charset="-120"/>
               </a:rPr>
-              <a:t>A graph in the textbook shows that in Europe most people live below 500 m, but in Bolivia and Ethiopia many people live above 2,000 m. Learners must explain this difference.</a:t>
+              <a:t>Density generally falls with altitude.</a:t>
+            </a:r>
+            <a:endParaRPr lang="en-US" sz="4000" dirty="0"/>
+          </a:p>
+          <a:p>
+            <a:pPr algn="l" marL="342900" indent="-342900">
+              <a:spcAft>
+                <a:spcPts val="800"/>
+              </a:spcAft>
+              <a:buSzPct val="100000"/>
+              <a:buChar char="•"/>
+            </a:pPr>
+            <a:r>
+              <a:rPr lang="en-US" sz="4000" dirty="0">
+                <a:solidFill>
+                  <a:srgbClr val="111111"/>
+                </a:solidFill>
+                <a:latin typeface="Times New Roman" pitchFamily="34" charset="0"/>
+                <a:ea typeface="Times New Roman" pitchFamily="34" charset="-122"/>
+                <a:cs typeface="Times New Roman" pitchFamily="34" charset="-120"/>
+              </a:rPr>
+              <a:t>Temperature falls by about 0.6 °C every 100 m.</a:t>
+            </a:r>
+            <a:endParaRPr lang="en-US" sz="4000" dirty="0"/>
+          </a:p>
+          <a:p>
+            <a:pPr algn="l" marL="342900" indent="-342900">
+              <a:spcAft>
+                <a:spcPts val="800"/>
+              </a:spcAft>
+              <a:buSzPct val="100000"/>
+              <a:buChar char="•"/>
+            </a:pPr>
+            <a:r>
+              <a:rPr lang="en-US" sz="4000" dirty="0">
+                <a:solidFill>
+                  <a:srgbClr val="111111"/>
+                </a:solidFill>
+                <a:latin typeface="Times New Roman" pitchFamily="34" charset="0"/>
+                <a:ea typeface="Times New Roman" pitchFamily="34" charset="-122"/>
+                <a:cs typeface="Times New Roman" pitchFamily="34" charset="-120"/>
+              </a:rPr>
+              <a:t>The Bamenda Highlands are densely populated.</a:t>
             </a:r>
             <a:endParaRPr lang="en-US" sz="4000" dirty="0"/>
           </a:p>

--- a/lecons/USA/Population Geography/05_USA_POP_PW02_Population_Distribution_and_Altitude.pptx
+++ b/lecons/USA/Population Geography/05_USA_POP_PW02_Population_Distribution_and_Altitude.pptx
@@ -64,11 +64,9 @@
     <p:sldId id="312" r:id="rId58"/>
     <p:sldId id="313" r:id="rId59"/>
     <p:sldId id="314" r:id="rId60"/>
-    <p:sldId id="315" r:id="rId61"/>
-    <p:sldId id="316" r:id="rId62"/>
   </p:sldIdLst>
   <p:notesMasterIdLst>
-    <p:notesMasterId r:id="rId63"/>
+    <p:notesMasterId r:id="rId61"/>
   </p:notesMasterIdLst>
   <p:sldSz cx="12192000" cy="6858000"/>
   <p:notesSz cx="6858000" cy="12192000"/>
@@ -3290,7 +3288,7 @@
           <a:p>
             <a:r>
               <a:rPr lang="en-US" dirty="0"/>
-              <a:t>Let us copy Reading the Graph. A graph of population and altitude is read with the following steps. Copy the point on Axes on the left, then draw the diagram on the right: population by altitude. Give it a title and label it clearly.</a:t>
+              <a:t>Let us copy Reading the Graph. A graph of population and altitude is read in the following steps. Copy the point on Axes on the left, then draw the diagram on the right: population and altitude. Give it a title and label it clearly.</a:t>
             </a:r>
             <a:endParaRPr lang="en-US" dirty="0"/>
           </a:p>
@@ -3378,7 +3376,7 @@
           <a:p>
             <a:r>
               <a:rPr lang="en-US" dirty="0"/>
-              <a:t>We continue with Reading the Graph. On this slide we have General trend and Figures. Write each point on a new line, with the key term first, and explain it in your own words when we revise. When you finish, we go to the next slide.</a:t>
+              <a:t>We continue with Reading the Graph. Copy the point on General trend and figures: write the key term first, then its explanation.</a:t>
             </a:r>
             <a:endParaRPr lang="en-US" dirty="0"/>
           </a:p>
@@ -3554,7 +3552,7 @@
           <a:p>
             <a:r>
               <a:rPr lang="en-US" dirty="0"/>
-              <a:t>We continue with Reading the Graph. On this slide we have Peaks and declines. Write each point on a new line, with the key term first, and explain it in your own words when we revise.</a:t>
+              <a:t>We continue with Reading the Graph. Copy the point on Peaks and declines: write the key term first, then its explanation.</a:t>
             </a:r>
             <a:endParaRPr lang="en-US" dirty="0"/>
           </a:p>
@@ -3642,7 +3640,7 @@
           <a:p>
             <a:r>
               <a:rPr lang="en-US" dirty="0"/>
-              <a:t>Let us copy The General Pattern. The general pattern of density with altitude is the following. Copy the point on Low altitudes (0–500 m) on the left, then draw the diagram on the right: a fertile lowland. Give it a title and label it clearly.</a:t>
+              <a:t>Let us copy The General Pattern. Density generally changes with altitude as follows. Copy the point on Low altitudes (0 to 500 m) on the left, then draw the diagram on the right: a fertile lowland. Give it a title and label it clearly.</a:t>
             </a:r>
             <a:endParaRPr lang="en-US" dirty="0"/>
           </a:p>
@@ -3730,7 +3728,7 @@
           <a:p>
             <a:r>
               <a:rPr lang="en-US" dirty="0"/>
-              <a:t>We continue with The General Pattern. On this slide we have Medium altitudes (500–2,000 m). Write each point on a new line, with the key term first, and explain it in your own words when we revise.</a:t>
+              <a:t>We continue with The General Pattern. Copy the point on Medium altitudes (500 to 2,000 m): write the key term first, then its explanation.</a:t>
             </a:r>
             <a:endParaRPr lang="en-US" dirty="0"/>
           </a:p>
@@ -3818,7 +3816,7 @@
           <a:p>
             <a:r>
               <a:rPr lang="en-US" dirty="0"/>
-              <a:t>Copy the point on High altitudes (above 2,000 m) on the left, then draw the diagram on the right: high mountains. Give it a title and label it clearly.</a:t>
+              <a:t>Copy the point on High altitudes (above 2,000 m) on the left, then draw the diagram on the right: the Himalayas. Give it a title and label it clearly.</a:t>
             </a:r>
             <a:endParaRPr lang="en-US" dirty="0"/>
           </a:p>
@@ -3906,7 +3904,7 @@
           <a:p>
             <a:r>
               <a:rPr lang="en-US" dirty="0"/>
-              <a:t>We continue with The General Pattern. On this slide we have Sharp decline above 3,000 m. Write each point on a new line, with the key term first, and explain it in your own words when we revise.</a:t>
+              <a:t>Let us copy Exceptions and Special Cases. The general pattern has the following exceptions. Copy the point on Tropical highlands on the left, then draw the diagram on the right: altitude and density. Give it a title and label it clearly.</a:t>
             </a:r>
             <a:endParaRPr lang="en-US" dirty="0"/>
           </a:p>
@@ -3994,7 +3992,7 @@
           <a:p>
             <a:r>
               <a:rPr lang="en-US" dirty="0"/>
-              <a:t>Let us copy Exceptions and Special Cases. The exceptions to the general pattern are the following. Copy the point on Tropical highlands on the left, then draw the diagram on the right: altitude and density in Cameroon. Give it a title and label it clearly.</a:t>
+              <a:t>Copy the point on Plantation highlands on the left, then draw the diagram on the right: tea on the highlands. Give it a title and label it clearly.</a:t>
             </a:r>
             <a:endParaRPr lang="en-US" dirty="0"/>
           </a:p>
@@ -4082,7 +4080,7 @@
           <a:p>
             <a:r>
               <a:rPr lang="en-US" dirty="0"/>
-              <a:t>Copy the point on Example of Cameroon on the left, then draw the diagram on the right: the Bamenda Highlands. Give it a title and label it clearly.</a:t>
+              <a:t>Copy the point on High capital cities on the left, then draw the diagram on the right: la Paz. Give it a title and label it clearly.</a:t>
             </a:r>
             <a:endParaRPr lang="en-US" dirty="0"/>
           </a:p>
@@ -4170,7 +4168,7 @@
           <a:p>
             <a:r>
               <a:rPr lang="en-US" dirty="0"/>
-              <a:t>Copy the point on Plantation highlands on the left, then draw the diagram on the right: tea on highlands. Give it a title and label it clearly.</a:t>
+              <a:t>Now let us check what you have understood. Question 1: Why do low-altitude areas generally support high densities? Answer in your exercise book.</a:t>
             </a:r>
             <a:endParaRPr lang="en-US" dirty="0"/>
           </a:p>
@@ -4258,7 +4256,7 @@
           <a:p>
             <a:r>
               <a:rPr lang="en-US" dirty="0"/>
-              <a:t>Copy the point on High capital cities on the left, then draw the diagram on the right: la Paz. Give it a title and label it clearly.</a:t>
+              <a:t>The expected answer is: they have fertile plains, water, a warm climate, easy transport and large towns. If you got it right, well done.</a:t>
             </a:r>
             <a:endParaRPr lang="en-US" dirty="0"/>
           </a:p>
@@ -4346,7 +4344,7 @@
           <a:p>
             <a:r>
               <a:rPr lang="en-US" dirty="0"/>
-              <a:t>Now let us check what you have understood. Question 1: Why do low-altitude areas generally support high densities? Answer in your exercise book.</a:t>
+              <a:t>Now let us check what you have understood. Question 2: Give one high-altitude area with a large population and explain why. Answer in your exercise book.</a:t>
             </a:r>
             <a:endParaRPr lang="en-US" dirty="0"/>
           </a:p>
@@ -4522,7 +4520,7 @@
           <a:p>
             <a:r>
               <a:rPr lang="en-US" dirty="0"/>
-              <a:t>The expected answer is: they have fertile plains, water, a warm climate, easy transport and large towns. If you got it right, well done.</a:t>
+              <a:t>The expected answer is: la Paz (about 3,600 m), the seat of government of Bolivia; or the Ethiopian Highlands, cooler and healthier than the lowlands. If you got it right, well done.</a:t>
             </a:r>
             <a:endParaRPr lang="en-US" dirty="0"/>
           </a:p>
@@ -4610,7 +4608,7 @@
           <a:p>
             <a:r>
               <a:rPr lang="en-US" dirty="0"/>
-              <a:t>Now let us check what you have understood. Question 2: Give one high-altitude area with a large population and explain why. Answer in your exercise book.</a:t>
+              <a:t>For those who need more practice, fill in the blanks in your exercise book. The answers are: number 1, decreases (falls); number 2, cooler (healthier); number 3, 3,600.</a:t>
             </a:r>
             <a:endParaRPr lang="en-US" dirty="0"/>
           </a:p>
@@ -4698,7 +4696,7 @@
           <a:p>
             <a:r>
               <a:rPr lang="en-US" dirty="0"/>
-              <a:t>The expected answer is: la Paz (about 3,600 m), the seat of government of Bolivia; or the Ethiopian Highlands, cooler and healthier than the lowlands. If you got it right, well done.</a:t>
+              <a:t>For your homework: Name one push factor of rural-urban migration in Cameroon. We shall correct it at the beginning of our next lesson.</a:t>
             </a:r>
             <a:endParaRPr lang="en-US" dirty="0"/>
           </a:p>
@@ -4786,7 +4784,7 @@
           <a:p>
             <a:r>
               <a:rPr lang="en-US" dirty="0"/>
-              <a:t>For those who need more practice, fill in the blanks in your exercise book. The answers are: number 1, decreases (falls); number 2, cooler (healthier); number 3, 3,600.</a:t>
+              <a:t>Our next lesson will be on Lesson 4: Modifications of Population Distribution. Thank you for your attention, and see you next time.</a:t>
             </a:r>
             <a:endParaRPr lang="en-US" dirty="0"/>
           </a:p>
@@ -4874,7 +4872,7 @@
           <a:p>
             <a:r>
               <a:rPr lang="en-US" dirty="0"/>
-              <a:t>For your homework: Name one push factor of rural-urban migration in Cameroon. We shall correct it at the beginning of our next lesson.</a:t>
+              <a:t>Let us play the bilingual game. I say a word in English, and you give me the French word. Then we do the reverse.</a:t>
             </a:r>
             <a:endParaRPr lang="en-US" dirty="0"/>
           </a:p>
@@ -4962,7 +4960,7 @@
           <a:p>
             <a:r>
               <a:rPr lang="en-US" dirty="0"/>
-              <a:t>Our next lesson will be on Lesson 4: Modifications of Population Distribution. Thank you for your attention, and see you next time.</a:t>
+              <a:t>I record this information in the official logbook of the class after the lesson.</a:t>
             </a:r>
             <a:endParaRPr lang="en-US" dirty="0"/>
           </a:p>
@@ -5050,7 +5048,7 @@
           <a:p>
             <a:r>
               <a:rPr lang="en-US" dirty="0"/>
-              <a:t>Let us play the bilingual game. I say a word in English, and you give me the French word. Then we do the reverse.</a:t>
+              <a:t>I complete the second page of the logbook: the matter taught, the evaluation, the homework and the attendance.</a:t>
             </a:r>
             <a:endParaRPr lang="en-US" dirty="0"/>
           </a:p>
@@ -5138,7 +5136,7 @@
           <a:p>
             <a:r>
               <a:rPr lang="en-US" dirty="0"/>
-              <a:t>I record this information in the official logbook of the class after the lesson.</a:t>
+              <a:t>This slide is for me, the teacher: it gives the timing of the lesson and what to do if the projector is not available.</a:t>
             </a:r>
             <a:endParaRPr lang="en-US" dirty="0"/>
           </a:p>
@@ -5226,7 +5224,7 @@
           <a:p>
             <a:r>
               <a:rPr lang="en-US" dirty="0"/>
-              <a:t>I complete the second page of the logbook: the matter taught, the evaluation, the homework and the attendance.</a:t>
+              <a:t>Take your time to copy this part; we will continue together.</a:t>
             </a:r>
             <a:endParaRPr lang="en-US" dirty="0"/>
           </a:p>
@@ -5314,7 +5312,7 @@
           <a:p>
             <a:r>
               <a:rPr lang="en-US" dirty="0"/>
-              <a:t>This slide is for me, the teacher: it gives the timing of the lesson and what to do if the projector is not available.</a:t>
+              <a:t>These are the references and picture credits used to prepare this lesson.</a:t>
             </a:r>
             <a:endParaRPr lang="en-US" dirty="0"/>
           </a:p>
@@ -5426,182 +5424,6 @@
             <a:fld id="{F7021451-1387-4CA6-816F-3879F97B5CBC}" type="slidenum">
               <a:rPr lang="en-US"/>
               <a:t>6</a:t>
-            </a:fld>
-            <a:endParaRPr lang="en-US"/>
-          </a:p>
-        </p:txBody>
-      </p:sp>
-    </p:spTree>
-    <p:extLst>
-      <p:ext uri="{BB962C8B-B14F-4D97-AF65-F5344CB8AC3E}">
-        <p14:creationId xmlns:p14="http://schemas.microsoft.com/office/powerpoint/2010/main" val="1024086991"/>
-      </p:ext>
-    </p:extLst>
-  </p:cSld>
-  <p:clrMapOvr>
-    <a:masterClrMapping/>
-  </p:clrMapOvr>
-</p:notes>
-</file>
-
-<file path=ppt/notesSlides/notesSlide60.xml><?xml version="1.0" encoding="utf-8"?>
-<p:notes xmlns:a="http://schemas.openxmlformats.org/drawingml/2006/main" xmlns:r="http://schemas.openxmlformats.org/officeDocument/2006/relationships" xmlns:p="http://schemas.openxmlformats.org/presentationml/2006/main">
-  <p:cSld>
-    <p:spTree>
-      <p:nvGrpSpPr>
-        <p:cNvPr id="1" name=""/>
-        <p:cNvGrpSpPr/>
-        <p:nvPr/>
-      </p:nvGrpSpPr>
-      <p:grpSpPr>
-        <a:xfrm>
-          <a:off x="0" y="0"/>
-          <a:ext cx="0" cy="0"/>
-          <a:chOff x="0" y="0"/>
-          <a:chExt cx="0" cy="0"/>
-        </a:xfrm>
-      </p:grpSpPr>
-      <p:sp>
-        <p:nvSpPr>
-          <p:cNvPr id="2" name="Slide Image Placeholder 1"/>
-          <p:cNvSpPr>
-            <a:spLocks noGrp="1" noRot="1" noChangeAspect="1"/>
-          </p:cNvSpPr>
-          <p:nvPr>
-            <p:ph type="sldImg"/>
-          </p:nvPr>
-        </p:nvSpPr>
-        <p:spPr/>
-      </p:sp>
-      <p:sp>
-        <p:nvSpPr>
-          <p:cNvPr id="3" name="Notes Placeholder 2"/>
-          <p:cNvSpPr>
-            <a:spLocks noGrp="1"/>
-          </p:cNvSpPr>
-          <p:nvPr>
-            <p:ph type="body" idx="1"/>
-          </p:nvPr>
-        </p:nvSpPr>
-        <p:spPr/>
-        <p:txBody>
-          <a:bodyPr/>
-          <a:lstStyle/>
-          <a:p>
-            <a:r>
-              <a:rPr lang="en-US" dirty="0"/>
-              <a:t>Take your time to copy this part; we will continue together.</a:t>
-            </a:r>
-            <a:endParaRPr lang="en-US" dirty="0"/>
-          </a:p>
-        </p:txBody>
-      </p:sp>
-      <p:sp>
-        <p:nvSpPr>
-          <p:cNvPr id="4" name="Slide Number Placeholder 3"/>
-          <p:cNvSpPr>
-            <a:spLocks noGrp="1"/>
-          </p:cNvSpPr>
-          <p:nvPr>
-            <p:ph type="sldNum" sz="quarter" idx="10"/>
-          </p:nvPr>
-        </p:nvSpPr>
-        <p:spPr/>
-        <p:txBody>
-          <a:bodyPr/>
-          <a:lstStyle/>
-          <a:p>
-            <a:fld id="{F7021451-1387-4CA6-816F-3879F97B5CBC}" type="slidenum">
-              <a:rPr lang="en-US"/>
-              <a:t>60</a:t>
-            </a:fld>
-            <a:endParaRPr lang="en-US"/>
-          </a:p>
-        </p:txBody>
-      </p:sp>
-    </p:spTree>
-    <p:extLst>
-      <p:ext uri="{BB962C8B-B14F-4D97-AF65-F5344CB8AC3E}">
-        <p14:creationId xmlns:p14="http://schemas.microsoft.com/office/powerpoint/2010/main" val="1024086991"/>
-      </p:ext>
-    </p:extLst>
-  </p:cSld>
-  <p:clrMapOvr>
-    <a:masterClrMapping/>
-  </p:clrMapOvr>
-</p:notes>
-</file>
-
-<file path=ppt/notesSlides/notesSlide61.xml><?xml version="1.0" encoding="utf-8"?>
-<p:notes xmlns:a="http://schemas.openxmlformats.org/drawingml/2006/main" xmlns:r="http://schemas.openxmlformats.org/officeDocument/2006/relationships" xmlns:p="http://schemas.openxmlformats.org/presentationml/2006/main">
-  <p:cSld>
-    <p:spTree>
-      <p:nvGrpSpPr>
-        <p:cNvPr id="1" name=""/>
-        <p:cNvGrpSpPr/>
-        <p:nvPr/>
-      </p:nvGrpSpPr>
-      <p:grpSpPr>
-        <a:xfrm>
-          <a:off x="0" y="0"/>
-          <a:ext cx="0" cy="0"/>
-          <a:chOff x="0" y="0"/>
-          <a:chExt cx="0" cy="0"/>
-        </a:xfrm>
-      </p:grpSpPr>
-      <p:sp>
-        <p:nvSpPr>
-          <p:cNvPr id="2" name="Slide Image Placeholder 1"/>
-          <p:cNvSpPr>
-            <a:spLocks noGrp="1" noRot="1" noChangeAspect="1"/>
-          </p:cNvSpPr>
-          <p:nvPr>
-            <p:ph type="sldImg"/>
-          </p:nvPr>
-        </p:nvSpPr>
-        <p:spPr/>
-      </p:sp>
-      <p:sp>
-        <p:nvSpPr>
-          <p:cNvPr id="3" name="Notes Placeholder 2"/>
-          <p:cNvSpPr>
-            <a:spLocks noGrp="1"/>
-          </p:cNvSpPr>
-          <p:nvPr>
-            <p:ph type="body" idx="1"/>
-          </p:nvPr>
-        </p:nvSpPr>
-        <p:spPr/>
-        <p:txBody>
-          <a:bodyPr/>
-          <a:lstStyle/>
-          <a:p>
-            <a:r>
-              <a:rPr lang="en-US" dirty="0"/>
-              <a:t>These are the references and picture credits used to prepare this lesson.</a:t>
-            </a:r>
-            <a:endParaRPr lang="en-US" dirty="0"/>
-          </a:p>
-        </p:txBody>
-      </p:sp>
-      <p:sp>
-        <p:nvSpPr>
-          <p:cNvPr id="4" name="Slide Number Placeholder 3"/>
-          <p:cNvSpPr>
-            <a:spLocks noGrp="1"/>
-          </p:cNvSpPr>
-          <p:nvPr>
-            <p:ph type="sldNum" sz="quarter" idx="10"/>
-          </p:nvPr>
-        </p:nvSpPr>
-        <p:spPr/>
-        <p:txBody>
-          <a:bodyPr/>
-          <a:lstStyle/>
-          <a:p>
-            <a:fld id="{F7021451-1387-4CA6-816F-3879F97B5CBC}" type="slidenum">
-              <a:rPr lang="en-US"/>
-              <a:t>61</a:t>
             </a:fld>
             <a:endParaRPr lang="en-US"/>
           </a:p>
@@ -15117,7 +14939,7 @@
         <p:spPr>
           <a:xfrm>
             <a:off x="365760" y="1783080"/>
-            <a:ext cx="4846320" cy="4617720"/>
+            <a:ext cx="6035040" cy="4617720"/>
           </a:xfrm>
           <a:prstGeom prst="rect">
             <a:avLst/>
@@ -15136,7 +14958,7 @@
               <a:buNone/>
             </a:pPr>
             <a:r>
-              <a:rPr lang="en-US" sz="3200" i="1" dirty="0">
+              <a:rPr lang="en-US" sz="3000" i="1" dirty="0">
                 <a:solidFill>
                   <a:srgbClr val="111111"/>
                 </a:solidFill>
@@ -15144,9 +14966,9 @@
                 <a:ea typeface="Times New Roman" pitchFamily="34" charset="-122"/>
                 <a:cs typeface="Times New Roman" pitchFamily="34" charset="-120"/>
               </a:rPr>
-              <a:t>A graph of population and altitude is read with the following steps:</a:t>
-            </a:r>
-            <a:endParaRPr lang="en-US" sz="3200" dirty="0"/>
+              <a:t>A graph of population and altitude is read in the following steps:</a:t>
+            </a:r>
+            <a:endParaRPr lang="en-US" sz="3000" dirty="0"/>
           </a:p>
           <a:p>
             <a:pPr algn="l" indent="0" marL="0">
@@ -15156,7 +14978,7 @@
               <a:buNone/>
             </a:pPr>
             <a:r>
-              <a:rPr lang="en-US" sz="3200" b="1" dirty="0">
+              <a:rPr lang="en-US" sz="3000" b="1" dirty="0">
                 <a:solidFill>
                   <a:srgbClr val="111111"/>
                 </a:solidFill>
@@ -15173,7 +14995,7 @@
               <a:buNone/>
             </a:pPr>
             <a:r>
-              <a:rPr lang="en-US" sz="3200" dirty="0">
+              <a:rPr lang="en-US" sz="3000" dirty="0">
                 <a:solidFill>
                   <a:srgbClr val="111111"/>
                 </a:solidFill>
@@ -15181,9 +15003,9 @@
                 <a:ea typeface="Times New Roman" pitchFamily="34" charset="-122"/>
                 <a:cs typeface="Times New Roman" pitchFamily="34" charset="-120"/>
               </a:rPr>
-              <a:t>Altitude (in metres) is on the horizontal axis and population density (or % of population) on the vertical axis.</a:t>
-            </a:r>
-            <a:endParaRPr lang="en-US" sz="3200" dirty="0"/>
+              <a:t>Altitude in metres is on the horizontal axis, and population density or the percentage of population is on the vertical axis. Read the title and the units before describing the graph.</a:t>
+            </a:r>
+            <a:endParaRPr lang="en-US" sz="3000" dirty="0"/>
           </a:p>
         </p:txBody>
       </p:sp>
@@ -15203,8 +15025,8 @@
         </p:blipFill>
         <p:spPr>
           <a:xfrm>
-            <a:off x="5349240" y="2461422"/>
-            <a:ext cx="6659575" cy="2913564"/>
+            <a:off x="6537960" y="2721454"/>
+            <a:ext cx="5470855" cy="2393499"/>
           </a:xfrm>
           <a:prstGeom prst="rect">
             <a:avLst/>
@@ -15219,8 +15041,8 @@
         </p:nvSpPr>
         <p:spPr>
           <a:xfrm>
-            <a:off x="5349240" y="6089904"/>
-            <a:ext cx="6659575" cy="347472"/>
+            <a:off x="6537960" y="6089904"/>
+            <a:ext cx="5470855" cy="347472"/>
           </a:xfrm>
           <a:prstGeom prst="rect">
             <a:avLst/>
@@ -15244,7 +15066,7 @@
                 <a:ea typeface="Times New Roman" pitchFamily="34" charset="-122"/>
                 <a:cs typeface="Times New Roman" pitchFamily="34" charset="-120"/>
               </a:rPr>
-              <a:t>Illustration: population by altitude</a:t>
+              <a:t>Illustration: population and altitude</a:t>
             </a:r>
             <a:endParaRPr lang="en-US" sz="1600" dirty="0"/>
           </a:p>
@@ -15463,7 +15285,7 @@
                 <a:ea typeface="Times New Roman" pitchFamily="34" charset="-122"/>
                 <a:cs typeface="Times New Roman" pitchFamily="34" charset="-120"/>
               </a:rPr>
-              <a:t>General trend: </a:t>
+              <a:t>General trend and figures: </a:t>
             </a:r>
             <a:pPr algn="l" indent="0" marL="0">
               <a:spcAft>
@@ -15480,44 +15302,7 @@
                 <a:ea typeface="Times New Roman" pitchFamily="34" charset="-122"/>
                 <a:cs typeface="Times New Roman" pitchFamily="34" charset="-120"/>
               </a:rPr>
-              <a:t>First describe the overall direction: in most regions, density falls as altitude rises.</a:t>
-            </a:r>
-            <a:endParaRPr lang="en-US" sz="4000" dirty="0"/>
-          </a:p>
-          <a:p>
-            <a:pPr algn="l" indent="0" marL="0">
-              <a:spcAft>
-                <a:spcPts val="800"/>
-              </a:spcAft>
-              <a:buNone/>
-            </a:pPr>
-            <a:r>
-              <a:rPr lang="en-US" sz="4000" b="1" dirty="0">
-                <a:solidFill>
-                  <a:srgbClr val="111111"/>
-                </a:solidFill>
-                <a:latin typeface="Times New Roman" pitchFamily="34" charset="0"/>
-                <a:ea typeface="Times New Roman" pitchFamily="34" charset="-122"/>
-                <a:cs typeface="Times New Roman" pitchFamily="34" charset="-120"/>
-              </a:rPr>
-              <a:t>Figures: </a:t>
-            </a:r>
-            <a:pPr algn="l" indent="0" marL="0">
-              <a:spcAft>
-                <a:spcPts val="800"/>
-              </a:spcAft>
-              <a:buNone/>
-            </a:pPr>
-            <a:r>
-              <a:rPr lang="en-US" sz="4000" dirty="0">
-                <a:solidFill>
-                  <a:srgbClr val="111111"/>
-                </a:solidFill>
-                <a:latin typeface="Times New Roman" pitchFamily="34" charset="0"/>
-                <a:ea typeface="Times New Roman" pitchFamily="34" charset="-122"/>
-                <a:cs typeface="Times New Roman" pitchFamily="34" charset="-120"/>
-              </a:rPr>
-              <a:t>Quote values read from the graph, for example the share of people below 500 m.</a:t>
+              <a:t>First describe the overall direction: in most regions, density falls as altitude rises. Support the description with values read from the graph, such as the share of people below 500 m.</a:t>
             </a:r>
             <a:endParaRPr lang="en-US" sz="4000" dirty="0"/>
           </a:p>
@@ -15933,7 +15718,7 @@
                 <a:ea typeface="Times New Roman" pitchFamily="34" charset="-122"/>
                 <a:cs typeface="Times New Roman" pitchFamily="34" charset="-120"/>
               </a:rPr>
-              <a:t>1. Reading the Graph (continued)</a:t>
+              <a:t>1. Reading the Graph</a:t>
             </a:r>
             <a:endParaRPr lang="en-US" sz="3600" dirty="0"/>
           </a:p>
@@ -15992,7 +15777,7 @@
                 <a:ea typeface="Times New Roman" pitchFamily="34" charset="-122"/>
                 <a:cs typeface="Times New Roman" pitchFamily="34" charset="-120"/>
               </a:rPr>
-              <a:t>Then identify where density rises or falls sharply, and explain why.</a:t>
+              <a:t>Then identify where density rises or falls sharply. Finally, explain each change with physical and human factors.</a:t>
             </a:r>
             <a:endParaRPr lang="en-US" sz="4000" dirty="0"/>
           </a:p>
@@ -16160,7 +15945,7 @@
         <p:spPr>
           <a:xfrm>
             <a:off x="365760" y="1783080"/>
-            <a:ext cx="4846320" cy="4617720"/>
+            <a:ext cx="6035040" cy="4617720"/>
           </a:xfrm>
           <a:prstGeom prst="rect">
             <a:avLst/>
@@ -16179,7 +15964,7 @@
               <a:buNone/>
             </a:pPr>
             <a:r>
-              <a:rPr lang="en-US" sz="2800" i="1" dirty="0">
+              <a:rPr lang="en-US" sz="3400" i="1" dirty="0">
                 <a:solidFill>
                   <a:srgbClr val="111111"/>
                 </a:solidFill>
@@ -16187,9 +15972,9 @@
                 <a:ea typeface="Times New Roman" pitchFamily="34" charset="-122"/>
                 <a:cs typeface="Times New Roman" pitchFamily="34" charset="-120"/>
               </a:rPr>
-              <a:t>The general pattern of density with altitude is the following:</a:t>
-            </a:r>
-            <a:endParaRPr lang="en-US" sz="2800" dirty="0"/>
+              <a:t>Density generally changes with altitude as follows:</a:t>
+            </a:r>
+            <a:endParaRPr lang="en-US" sz="3400" dirty="0"/>
           </a:p>
           <a:p>
             <a:pPr algn="l" indent="0" marL="0">
@@ -16199,7 +15984,7 @@
               <a:buNone/>
             </a:pPr>
             <a:r>
-              <a:rPr lang="en-US" sz="2800" b="1" dirty="0">
+              <a:rPr lang="en-US" sz="3400" b="1" dirty="0">
                 <a:solidFill>
                   <a:srgbClr val="111111"/>
                 </a:solidFill>
@@ -16207,7 +15992,7 @@
                 <a:ea typeface="Times New Roman" pitchFamily="34" charset="-122"/>
                 <a:cs typeface="Times New Roman" pitchFamily="34" charset="-120"/>
               </a:rPr>
-              <a:t>Low altitudes (0–500 m): </a:t>
+              <a:t>Low altitudes (0 to 500 m): </a:t>
             </a:r>
             <a:pPr algn="l" indent="0" marL="0">
               <a:spcAft>
@@ -16216,7 +16001,7 @@
               <a:buNone/>
             </a:pPr>
             <a:r>
-              <a:rPr lang="en-US" sz="2800" dirty="0">
+              <a:rPr lang="en-US" sz="3400" dirty="0">
                 <a:solidFill>
                   <a:srgbClr val="111111"/>
                 </a:solidFill>
@@ -16224,9 +16009,9 @@
                 <a:ea typeface="Times New Roman" pitchFamily="34" charset="-122"/>
                 <a:cs typeface="Times New Roman" pitchFamily="34" charset="-120"/>
               </a:rPr>
-              <a:t>They are very densely populated thanks to fertile plains, water, easy transport and big cities, as in the Nile delta and Bangladesh.</a:t>
-            </a:r>
-            <a:endParaRPr lang="en-US" sz="2800" dirty="0"/>
+              <a:t>They are very densely populated because of fertile plains, water, easy transport and big cities. The Nile delta and Bangladesh are examples.</a:t>
+            </a:r>
+            <a:endParaRPr lang="en-US" sz="3400" dirty="0"/>
           </a:p>
         </p:txBody>
       </p:sp>
@@ -16246,8 +16031,8 @@
         </p:blipFill>
         <p:spPr>
           <a:xfrm>
-            <a:off x="5349240" y="2071212"/>
-            <a:ext cx="6659575" cy="3693983"/>
+            <a:off x="6537960" y="2400897"/>
+            <a:ext cx="5470855" cy="3034615"/>
           </a:xfrm>
           <a:prstGeom prst="rect">
             <a:avLst/>
@@ -16262,8 +16047,8 @@
         </p:nvSpPr>
         <p:spPr>
           <a:xfrm>
-            <a:off x="5349240" y="6089904"/>
-            <a:ext cx="6659575" cy="347472"/>
+            <a:off x="6537960" y="6089904"/>
+            <a:ext cx="5470855" cy="347472"/>
           </a:xfrm>
           <a:prstGeom prst="rect">
             <a:avLst/>
@@ -16506,7 +16291,7 @@
                 <a:ea typeface="Times New Roman" pitchFamily="34" charset="-122"/>
                 <a:cs typeface="Times New Roman" pitchFamily="34" charset="-120"/>
               </a:rPr>
-              <a:t>Medium altitudes (500–2,000 m): </a:t>
+              <a:t>Medium altitudes (500 to 2,000 m): </a:t>
             </a:r>
             <a:pPr algn="l" indent="0" marL="0">
               <a:spcAft>
@@ -16523,7 +16308,7 @@
                 <a:ea typeface="Times New Roman" pitchFamily="34" charset="-122"/>
                 <a:cs typeface="Times New Roman" pitchFamily="34" charset="-120"/>
               </a:rPr>
-              <a:t>Densities vary: fertile plateaux are well populated, but steep slopes discourage settlement.</a:t>
+              <a:t>Densities vary a lot at these heights. Fertile plateaux are well populated, but steep slopes discourage settlement.</a:t>
             </a:r>
             <a:endParaRPr lang="en-US" sz="4000" dirty="0"/>
           </a:p>
@@ -16691,7 +16476,7 @@
         <p:spPr>
           <a:xfrm>
             <a:off x="365760" y="1783080"/>
-            <a:ext cx="4846320" cy="4617720"/>
+            <a:ext cx="6035040" cy="4617720"/>
           </a:xfrm>
           <a:prstGeom prst="rect">
             <a:avLst/>
@@ -16710,7 +16495,7 @@
               <a:buNone/>
             </a:pPr>
             <a:r>
-              <a:rPr lang="en-US" sz="3600" b="1" dirty="0">
+              <a:rPr lang="en-US" sz="3400" b="1" dirty="0">
                 <a:solidFill>
                   <a:srgbClr val="111111"/>
                 </a:solidFill>
@@ -16727,7 +16512,7 @@
               <a:buNone/>
             </a:pPr>
             <a:r>
-              <a:rPr lang="en-US" sz="3600" dirty="0">
+              <a:rPr lang="en-US" sz="3400" dirty="0">
                 <a:solidFill>
                   <a:srgbClr val="111111"/>
                 </a:solidFill>
@@ -16735,9 +16520,9 @@
                 <a:ea typeface="Times New Roman" pitchFamily="34" charset="-122"/>
                 <a:cs typeface="Times New Roman" pitchFamily="34" charset="-120"/>
               </a:rPr>
-              <a:t>Densities are very low because of cold, lack of oxygen, steep slopes and poor soils, as in the Himalayas.</a:t>
-            </a:r>
-            <a:endParaRPr lang="en-US" sz="3600" dirty="0"/>
+              <a:t>Densities are very low because of cold, lack of oxygen, steep slopes and poor soils, as in the Himalayas. Above 3,000 m, settlements become scattered and activities are limited to herding and tourism.</a:t>
+            </a:r>
+            <a:endParaRPr lang="en-US" sz="3400" dirty="0"/>
           </a:p>
         </p:txBody>
       </p:sp>
@@ -16757,8 +16542,8 @@
         </p:blipFill>
         <p:spPr>
           <a:xfrm>
-            <a:off x="5349240" y="2071212"/>
-            <a:ext cx="6659575" cy="3693983"/>
+            <a:off x="6537960" y="2400897"/>
+            <a:ext cx="5470855" cy="3034615"/>
           </a:xfrm>
           <a:prstGeom prst="rect">
             <a:avLst/>
@@ -16773,8 +16558,8 @@
         </p:nvSpPr>
         <p:spPr>
           <a:xfrm>
-            <a:off x="5349240" y="6089904"/>
-            <a:ext cx="6659575" cy="347472"/>
+            <a:off x="6537960" y="6089904"/>
+            <a:ext cx="5470855" cy="347472"/>
           </a:xfrm>
           <a:prstGeom prst="rect">
             <a:avLst/>
@@ -16798,7 +16583,7 @@
                 <a:ea typeface="Times New Roman" pitchFamily="34" charset="-122"/>
                 <a:cs typeface="Times New Roman" pitchFamily="34" charset="-120"/>
               </a:rPr>
-              <a:t>Illustration: high mountains</a:t>
+              <a:t>Illustration: the Himalayas</a:t>
             </a:r>
             <a:endParaRPr lang="en-US" sz="1600" dirty="0"/>
           </a:p>
@@ -16916,9 +16701,129 @@
           </a:p>
         </p:txBody>
       </p:sp>
+      <p:sp>
+        <p:nvSpPr>
+          <p:cNvPr id="3" name="Text 1"/>
+          <p:cNvSpPr/>
+          <p:nvPr/>
+        </p:nvSpPr>
+        <p:spPr>
+          <a:xfrm>
+            <a:off x="365760" y="1005840"/>
+            <a:ext cx="11460175" cy="731520"/>
+          </a:xfrm>
+          <a:prstGeom prst="rect">
+            <a:avLst/>
+          </a:prstGeom>
+          <a:noFill/>
+          <a:ln/>
+        </p:spPr>
+        <p:txBody>
+          <a:bodyPr wrap="square" lIns="0" tIns="0" rIns="0" bIns="0" rtlCol="0" anchor="ctr">
+            <a:normAutofit/>
+          </a:bodyPr>
+          <a:lstStyle/>
+          <a:p>
+            <a:pPr algn="ctr" indent="0" marL="0">
+              <a:buNone/>
+            </a:pPr>
+            <a:r>
+              <a:rPr lang="en-US" sz="3600" b="1" dirty="0">
+                <a:solidFill>
+                  <a:srgbClr val="990011"/>
+                </a:solidFill>
+                <a:latin typeface="Times New Roman" pitchFamily="34" charset="0"/>
+                <a:ea typeface="Times New Roman" pitchFamily="34" charset="-122"/>
+                <a:cs typeface="Times New Roman" pitchFamily="34" charset="-120"/>
+              </a:rPr>
+              <a:t>3. Exceptions and Special Cases</a:t>
+            </a:r>
+            <a:endParaRPr lang="en-US" sz="3600" dirty="0"/>
+          </a:p>
+        </p:txBody>
+      </p:sp>
+      <p:sp>
+        <p:nvSpPr>
+          <p:cNvPr id="4" name="Text 2"/>
+          <p:cNvSpPr/>
+          <p:nvPr/>
+        </p:nvSpPr>
+        <p:spPr>
+          <a:xfrm>
+            <a:off x="365760" y="1783080"/>
+            <a:ext cx="6035040" cy="4617720"/>
+          </a:xfrm>
+          <a:prstGeom prst="rect">
+            <a:avLst/>
+          </a:prstGeom>
+          <a:noFill/>
+          <a:ln/>
+        </p:spPr>
+        <p:txBody>
+          <a:bodyPr wrap="square" lIns="0" tIns="0" rIns="0" bIns="0" rtlCol="0" anchor="t"/>
+          <a:lstStyle/>
+          <a:p>
+            <a:pPr algn="l" indent="0" marL="0">
+              <a:spcAft>
+                <a:spcPts val="800"/>
+              </a:spcAft>
+              <a:buNone/>
+            </a:pPr>
+            <a:r>
+              <a:rPr lang="en-US" sz="3000" i="1" dirty="0">
+                <a:solidFill>
+                  <a:srgbClr val="111111"/>
+                </a:solidFill>
+                <a:latin typeface="Times New Roman" pitchFamily="34" charset="0"/>
+                <a:ea typeface="Times New Roman" pitchFamily="34" charset="-122"/>
+                <a:cs typeface="Times New Roman" pitchFamily="34" charset="-120"/>
+              </a:rPr>
+              <a:t>The general pattern has the following exceptions:</a:t>
+            </a:r>
+            <a:endParaRPr lang="en-US" sz="3000" dirty="0"/>
+          </a:p>
+          <a:p>
+            <a:pPr algn="l" indent="0" marL="0">
+              <a:spcAft>
+                <a:spcPts val="800"/>
+              </a:spcAft>
+              <a:buNone/>
+            </a:pPr>
+            <a:r>
+              <a:rPr lang="en-US" sz="3000" b="1" dirty="0">
+                <a:solidFill>
+                  <a:srgbClr val="111111"/>
+                </a:solidFill>
+                <a:latin typeface="Times New Roman" pitchFamily="34" charset="0"/>
+                <a:ea typeface="Times New Roman" pitchFamily="34" charset="-122"/>
+                <a:cs typeface="Times New Roman" pitchFamily="34" charset="-120"/>
+              </a:rPr>
+              <a:t>Tropical highlands: </a:t>
+            </a:r>
+            <a:pPr algn="l" indent="0" marL="0">
+              <a:spcAft>
+                <a:spcPts val="800"/>
+              </a:spcAft>
+              <a:buNone/>
+            </a:pPr>
+            <a:r>
+              <a:rPr lang="en-US" sz="3000" dirty="0">
+                <a:solidFill>
+                  <a:srgbClr val="111111"/>
+                </a:solidFill>
+                <a:latin typeface="Times New Roman" pitchFamily="34" charset="0"/>
+                <a:ea typeface="Times New Roman" pitchFamily="34" charset="-122"/>
+                <a:cs typeface="Times New Roman" pitchFamily="34" charset="-120"/>
+              </a:rPr>
+              <a:t>In the tropics, highlands are cooler and free of some diseases such as malaria, so they attract people. Bamenda (about 1,600 m) and Dschang (about 1,400 m) have dense populations and a mild climate of about 20 °C.</a:t>
+            </a:r>
+            <a:endParaRPr lang="en-US" sz="3000" dirty="0"/>
+          </a:p>
+        </p:txBody>
+      </p:sp>
       <p:pic>
         <p:nvPicPr>
-          <p:cNvPr id="3" name="Image 0" descr="/home/claude/f4/img/minesec_sheet.png">    </p:cNvPr>
+          <p:cNvPr id="5" name="Image 0" descr="/home/claude/f4/img/v2/altitude_table_big.png">    </p:cNvPr>
           <p:cNvPicPr>
             <a:picLocks noChangeAspect="1"/>
           </p:cNvPicPr>
@@ -16932,8 +16837,8 @@
         </p:blipFill>
         <p:spPr>
           <a:xfrm>
-            <a:off x="0" y="658368"/>
-            <a:ext cx="5120640" cy="5833872"/>
+            <a:off x="6537960" y="2849678"/>
+            <a:ext cx="5470855" cy="2137053"/>
           </a:xfrm>
           <a:prstGeom prst="rect">
             <a:avLst/>
@@ -16942,14 +16847,14 @@
       </p:pic>
       <p:sp>
         <p:nvSpPr>
-          <p:cNvPr id="4" name="Text 1"/>
+          <p:cNvPr id="6" name="Text 3"/>
           <p:cNvSpPr/>
           <p:nvPr/>
         </p:nvSpPr>
         <p:spPr>
           <a:xfrm>
-            <a:off x="5349240" y="1005840"/>
-            <a:ext cx="6522415" cy="731520"/>
+            <a:off x="6537960" y="6089904"/>
+            <a:ext cx="5470855" cy="347472"/>
           </a:xfrm>
           <a:prstGeom prst="rect">
             <a:avLst/>
@@ -16958,85 +16863,24 @@
           <a:ln/>
         </p:spPr>
         <p:txBody>
-          <a:bodyPr wrap="square" lIns="0" tIns="0" rIns="0" bIns="0" rtlCol="0" anchor="ctr">
-            <a:normAutofit/>
-          </a:bodyPr>
+          <a:bodyPr wrap="square" lIns="0" tIns="0" rIns="0" bIns="0" rtlCol="0" anchor="ctr"/>
           <a:lstStyle/>
           <a:p>
             <a:pPr algn="ctr" indent="0" marL="0">
               <a:buNone/>
             </a:pPr>
             <a:r>
-              <a:rPr lang="en-US" sz="3600" b="1" dirty="0">
-                <a:solidFill>
-                  <a:srgbClr val="990011"/>
+              <a:rPr lang="en-US" sz="1600" i="1" dirty="0">
+                <a:solidFill>
+                  <a:srgbClr val="555555"/>
                 </a:solidFill>
                 <a:latin typeface="Times New Roman" pitchFamily="34" charset="0"/>
                 <a:ea typeface="Times New Roman" pitchFamily="34" charset="-122"/>
                 <a:cs typeface="Times New Roman" pitchFamily="34" charset="-120"/>
               </a:rPr>
-              <a:t>2. The General Pattern</a:t>
-            </a:r>
-            <a:endParaRPr lang="en-US" sz="3600" dirty="0"/>
-          </a:p>
-        </p:txBody>
-      </p:sp>
-      <p:sp>
-        <p:nvSpPr>
-          <p:cNvPr id="5" name="Text 2"/>
-          <p:cNvSpPr/>
-          <p:nvPr/>
-        </p:nvSpPr>
-        <p:spPr>
-          <a:xfrm>
-            <a:off x="5349240" y="1783080"/>
-            <a:ext cx="6522415" cy="4663440"/>
-          </a:xfrm>
-          <a:prstGeom prst="rect">
-            <a:avLst/>
-          </a:prstGeom>
-          <a:noFill/>
-          <a:ln/>
-        </p:spPr>
-        <p:txBody>
-          <a:bodyPr wrap="square" lIns="0" tIns="0" rIns="0" bIns="0" rtlCol="0" anchor="t"/>
-          <a:lstStyle/>
-          <a:p>
-            <a:pPr algn="l" indent="0" marL="0">
-              <a:spcAft>
-                <a:spcPts val="800"/>
-              </a:spcAft>
-              <a:buNone/>
-            </a:pPr>
-            <a:r>
-              <a:rPr lang="en-US" sz="4000" b="1" dirty="0">
-                <a:solidFill>
-                  <a:srgbClr val="111111"/>
-                </a:solidFill>
-                <a:latin typeface="Times New Roman" pitchFamily="34" charset="0"/>
-                <a:ea typeface="Times New Roman" pitchFamily="34" charset="-122"/>
-                <a:cs typeface="Times New Roman" pitchFamily="34" charset="-120"/>
-              </a:rPr>
-              <a:t>Sharp decline above 3,000 m: </a:t>
-            </a:r>
-            <a:pPr algn="l" indent="0" marL="0">
-              <a:spcAft>
-                <a:spcPts val="800"/>
-              </a:spcAft>
-              <a:buNone/>
-            </a:pPr>
-            <a:r>
-              <a:rPr lang="en-US" sz="4000" dirty="0">
-                <a:solidFill>
-                  <a:srgbClr val="111111"/>
-                </a:solidFill>
-                <a:latin typeface="Times New Roman" pitchFamily="34" charset="0"/>
-                <a:ea typeface="Times New Roman" pitchFamily="34" charset="-122"/>
-                <a:cs typeface="Times New Roman" pitchFamily="34" charset="-120"/>
-              </a:rPr>
-              <a:t>Settlements become scattered, and activities are limited to herding and tourism.</a:t>
-            </a:r>
-            <a:endParaRPr lang="en-US" sz="4000" dirty="0"/>
+              <a:t>Illustration: altitude and density</a:t>
+            </a:r>
+            <a:endParaRPr lang="en-US" sz="1600" dirty="0"/>
           </a:p>
         </p:txBody>
       </p:sp>
@@ -17202,7 +17046,7 @@
         <p:spPr>
           <a:xfrm>
             <a:off x="365760" y="1783080"/>
-            <a:ext cx="4846320" cy="4617720"/>
+            <a:ext cx="6035040" cy="4617720"/>
           </a:xfrm>
           <a:prstGeom prst="rect">
             <a:avLst/>
@@ -17221,7 +17065,7 @@
               <a:buNone/>
             </a:pPr>
             <a:r>
-              <a:rPr lang="en-US" sz="2800" i="1" dirty="0">
+              <a:rPr lang="en-US" sz="3600" b="1" dirty="0">
                 <a:solidFill>
                   <a:srgbClr val="111111"/>
                 </a:solidFill>
@@ -17229,11 +17073,8 @@
                 <a:ea typeface="Times New Roman" pitchFamily="34" charset="-122"/>
                 <a:cs typeface="Times New Roman" pitchFamily="34" charset="-120"/>
               </a:rPr>
-              <a:t>The exceptions to the general pattern are the following:</a:t>
-            </a:r>
-            <a:endParaRPr lang="en-US" sz="2800" dirty="0"/>
-          </a:p>
-          <a:p>
+              <a:t>Plantation highlands: </a:t>
+            </a:r>
             <a:pPr algn="l" indent="0" marL="0">
               <a:spcAft>
                 <a:spcPts val="800"/>
@@ -17241,7 +17082,7 @@
               <a:buNone/>
             </a:pPr>
             <a:r>
-              <a:rPr lang="en-US" sz="2800" b="1" dirty="0">
+              <a:rPr lang="en-US" sz="3600" dirty="0">
                 <a:solidFill>
                   <a:srgbClr val="111111"/>
                 </a:solidFill>
@@ -17249,32 +17090,15 @@
                 <a:ea typeface="Times New Roman" pitchFamily="34" charset="-122"/>
                 <a:cs typeface="Times New Roman" pitchFamily="34" charset="-120"/>
               </a:rPr>
-              <a:t>Tropical highlands: </a:t>
-            </a:r>
-            <a:pPr algn="l" indent="0" marL="0">
-              <a:spcAft>
-                <a:spcPts val="800"/>
-              </a:spcAft>
-              <a:buNone/>
-            </a:pPr>
-            <a:r>
-              <a:rPr lang="en-US" sz="2800" dirty="0">
-                <a:solidFill>
-                  <a:srgbClr val="111111"/>
-                </a:solidFill>
-                <a:latin typeface="Times New Roman" pitchFamily="34" charset="0"/>
-                <a:ea typeface="Times New Roman" pitchFamily="34" charset="-122"/>
-                <a:cs typeface="Times New Roman" pitchFamily="34" charset="-120"/>
-              </a:rPr>
-              <a:t>In the tropics, highlands are cooler and free of some diseases, so the Ethiopian Highlands and the Western Highlands of Cameroon are densely populated.</a:t>
-            </a:r>
-            <a:endParaRPr lang="en-US" sz="2800" dirty="0"/>
+              <a:t>Mid-altitude areas with tea and coffee plantations keep high densities, as in Kenya and the Western Highlands of Cameroon. The plantations need many workers.</a:t>
+            </a:r>
+            <a:endParaRPr lang="en-US" sz="3600" dirty="0"/>
           </a:p>
         </p:txBody>
       </p:sp>
       <p:pic>
         <p:nvPicPr>
-          <p:cNvPr id="5" name="Image 0" descr="/home/claude/f4/img/v2/altitude_table_big.png">    </p:cNvPr>
+          <p:cNvPr id="5" name="Image 0" descr="/home/claude/f4/img/v2/f2t_tea_highlands.jpg">    </p:cNvPr>
           <p:cNvPicPr>
             <a:picLocks noChangeAspect="1"/>
           </p:cNvPicPr>
@@ -17288,8 +17112,8 @@
         </p:blipFill>
         <p:spPr>
           <a:xfrm>
-            <a:off x="5349240" y="2617506"/>
-            <a:ext cx="6659575" cy="2601397"/>
+            <a:off x="6537960" y="2713440"/>
+            <a:ext cx="5470855" cy="2409527"/>
           </a:xfrm>
           <a:prstGeom prst="rect">
             <a:avLst/>
@@ -17304,8 +17128,8 @@
         </p:nvSpPr>
         <p:spPr>
           <a:xfrm>
-            <a:off x="5349240" y="6089904"/>
-            <a:ext cx="6659575" cy="347472"/>
+            <a:off x="6537960" y="6089904"/>
+            <a:ext cx="5470855" cy="347472"/>
           </a:xfrm>
           <a:prstGeom prst="rect">
             <a:avLst/>
@@ -17329,7 +17153,7 @@
                 <a:ea typeface="Times New Roman" pitchFamily="34" charset="-122"/>
                 <a:cs typeface="Times New Roman" pitchFamily="34" charset="-120"/>
               </a:rPr>
-              <a:t>Illustration: altitude and density in Cameroon</a:t>
+              <a:t>Illustration: tea on the highlands</a:t>
             </a:r>
             <a:endParaRPr lang="en-US" sz="1600" dirty="0"/>
           </a:p>
@@ -17497,7 +17321,7 @@
         <p:spPr>
           <a:xfrm>
             <a:off x="365760" y="1783080"/>
-            <a:ext cx="4846320" cy="4617720"/>
+            <a:ext cx="6035040" cy="4617720"/>
           </a:xfrm>
           <a:prstGeom prst="rect">
             <a:avLst/>
@@ -17524,7 +17348,7 @@
                 <a:ea typeface="Times New Roman" pitchFamily="34" charset="-122"/>
                 <a:cs typeface="Times New Roman" pitchFamily="34" charset="-120"/>
               </a:rPr>
-              <a:t>Example of Cameroon: </a:t>
+              <a:t>High capital cities: </a:t>
             </a:r>
             <a:pPr algn="l" indent="0" marL="0">
               <a:spcAft>
@@ -17541,7 +17365,7 @@
                 <a:ea typeface="Times New Roman" pitchFamily="34" charset="-122"/>
                 <a:cs typeface="Times New Roman" pitchFamily="34" charset="-120"/>
               </a:rPr>
-              <a:t>Bamenda (about 1,600 m) and Dschang (about 1,400 m) have dense populations and a mild climate of about 20 °C.</a:t>
+              <a:t>La Paz in Bolivia, at about 3,600 m, is large because it is the seat of government. Quito, the capital of Ecuador, lies at about 2,850 m.</a:t>
             </a:r>
             <a:endParaRPr lang="en-US" sz="3600" dirty="0"/>
           </a:p>
@@ -17549,7 +17373,7 @@
       </p:sp>
       <p:pic>
         <p:nvPicPr>
-          <p:cNvPr id="5" name="Image 0" descr="/home/claude/f4/img/v2/usa_bamenda.jpg">    </p:cNvPr>
+          <p:cNvPr id="5" name="Image 0" descr="/home/claude/f4/img/v2/usa_lapaz.jpg">    </p:cNvPr>
           <p:cNvPicPr>
             <a:picLocks noChangeAspect="1"/>
           </p:cNvPicPr>
@@ -17563,8 +17387,8 @@
         </p:blipFill>
         <p:spPr>
           <a:xfrm>
-            <a:off x="5349240" y="2071212"/>
-            <a:ext cx="6659575" cy="3693983"/>
+            <a:off x="6537960" y="2400897"/>
+            <a:ext cx="5470855" cy="3034615"/>
           </a:xfrm>
           <a:prstGeom prst="rect">
             <a:avLst/>
@@ -17579,8 +17403,8 @@
         </p:nvSpPr>
         <p:spPr>
           <a:xfrm>
-            <a:off x="5349240" y="6089904"/>
-            <a:ext cx="6659575" cy="347472"/>
+            <a:off x="6537960" y="6089904"/>
+            <a:ext cx="5470855" cy="347472"/>
           </a:xfrm>
           <a:prstGeom prst="rect">
             <a:avLst/>
@@ -17604,7 +17428,7 @@
                 <a:ea typeface="Times New Roman" pitchFamily="34" charset="-122"/>
                 <a:cs typeface="Times New Roman" pitchFamily="34" charset="-120"/>
               </a:rPr>
-              <a:t>Illustration: the Bamenda Highlands</a:t>
+              <a:t>Illustration: La Paz</a:t>
             </a:r>
             <a:endParaRPr lang="en-US" sz="1600" dirty="0"/>
           </a:p>
@@ -17716,115 +17540,15 @@
                 <a:ea typeface="Calibri" pitchFamily="34" charset="-122"/>
                 <a:cs typeface="Calibri" pitchFamily="34" charset="-120"/>
               </a:rPr>
-              <a:t>BOARD SUMMARY</a:t>
+              <a:t>FORMATIVE EVALUATION</a:t>
             </a:r>
             <a:endParaRPr lang="en-US" sz="1400" dirty="0"/>
-          </a:p>
-        </p:txBody>
-      </p:sp>
-      <p:sp>
-        <p:nvSpPr>
-          <p:cNvPr id="3" name="Text 1"/>
-          <p:cNvSpPr/>
-          <p:nvPr/>
-        </p:nvSpPr>
-        <p:spPr>
-          <a:xfrm>
-            <a:off x="365760" y="1005840"/>
-            <a:ext cx="11460175" cy="731520"/>
-          </a:xfrm>
-          <a:prstGeom prst="rect">
-            <a:avLst/>
-          </a:prstGeom>
-          <a:noFill/>
-          <a:ln/>
-        </p:spPr>
-        <p:txBody>
-          <a:bodyPr wrap="square" lIns="0" tIns="0" rIns="0" bIns="0" rtlCol="0" anchor="ctr">
-            <a:normAutofit/>
-          </a:bodyPr>
-          <a:lstStyle/>
-          <a:p>
-            <a:pPr algn="ctr" indent="0" marL="0">
-              <a:buNone/>
-            </a:pPr>
-            <a:r>
-              <a:rPr lang="en-US" sz="3600" b="1" dirty="0">
-                <a:solidFill>
-                  <a:srgbClr val="990011"/>
-                </a:solidFill>
-                <a:latin typeface="Times New Roman" pitchFamily="34" charset="0"/>
-                <a:ea typeface="Times New Roman" pitchFamily="34" charset="-122"/>
-                <a:cs typeface="Times New Roman" pitchFamily="34" charset="-120"/>
-              </a:rPr>
-              <a:t>3. Exceptions and Special Cases</a:t>
-            </a:r>
-            <a:endParaRPr lang="en-US" sz="3600" dirty="0"/>
-          </a:p>
-        </p:txBody>
-      </p:sp>
-      <p:sp>
-        <p:nvSpPr>
-          <p:cNvPr id="4" name="Text 2"/>
-          <p:cNvSpPr/>
-          <p:nvPr/>
-        </p:nvSpPr>
-        <p:spPr>
-          <a:xfrm>
-            <a:off x="365760" y="1783080"/>
-            <a:ext cx="4846320" cy="4617720"/>
-          </a:xfrm>
-          <a:prstGeom prst="rect">
-            <a:avLst/>
-          </a:prstGeom>
-          <a:noFill/>
-          <a:ln/>
-        </p:spPr>
-        <p:txBody>
-          <a:bodyPr wrap="square" lIns="0" tIns="0" rIns="0" bIns="0" rtlCol="0" anchor="t"/>
-          <a:lstStyle/>
-          <a:p>
-            <a:pPr algn="l" indent="0" marL="0">
-              <a:spcAft>
-                <a:spcPts val="800"/>
-              </a:spcAft>
-              <a:buNone/>
-            </a:pPr>
-            <a:r>
-              <a:rPr lang="en-US" sz="3600" b="1" dirty="0">
-                <a:solidFill>
-                  <a:srgbClr val="111111"/>
-                </a:solidFill>
-                <a:latin typeface="Times New Roman" pitchFamily="34" charset="0"/>
-                <a:ea typeface="Times New Roman" pitchFamily="34" charset="-122"/>
-                <a:cs typeface="Times New Roman" pitchFamily="34" charset="-120"/>
-              </a:rPr>
-              <a:t>Plantation highlands: </a:t>
-            </a:r>
-            <a:pPr algn="l" indent="0" marL="0">
-              <a:spcAft>
-                <a:spcPts val="800"/>
-              </a:spcAft>
-              <a:buNone/>
-            </a:pPr>
-            <a:r>
-              <a:rPr lang="en-US" sz="3600" dirty="0">
-                <a:solidFill>
-                  <a:srgbClr val="111111"/>
-                </a:solidFill>
-                <a:latin typeface="Times New Roman" pitchFamily="34" charset="0"/>
-                <a:ea typeface="Times New Roman" pitchFamily="34" charset="-122"/>
-                <a:cs typeface="Times New Roman" pitchFamily="34" charset="-120"/>
-              </a:rPr>
-              <a:t>Mid-altitude areas with tea and coffee plantations keep high densities, as in Kenya and the Western Highlands.</a:t>
-            </a:r>
-            <a:endParaRPr lang="en-US" sz="3600" dirty="0"/>
           </a:p>
         </p:txBody>
       </p:sp>
       <p:pic>
         <p:nvPicPr>
-          <p:cNvPr id="5" name="Image 0" descr="/home/claude/f4/img/v2/f2t_tea_highlands.jpg">    </p:cNvPr>
+          <p:cNvPr id="3" name="Image 0" descr="/home/claude/f4/img/minesec_sheet.png">    </p:cNvPr>
           <p:cNvPicPr>
             <a:picLocks noChangeAspect="1"/>
           </p:cNvPicPr>
@@ -17838,8 +17562,8 @@
         </p:blipFill>
         <p:spPr>
           <a:xfrm>
-            <a:off x="5349240" y="2451667"/>
-            <a:ext cx="6659575" cy="2933075"/>
+            <a:off x="0" y="658368"/>
+            <a:ext cx="5120640" cy="5833872"/>
           </a:xfrm>
           <a:prstGeom prst="rect">
             <a:avLst/>
@@ -17848,14 +17572,14 @@
       </p:pic>
       <p:sp>
         <p:nvSpPr>
-          <p:cNvPr id="6" name="Text 3"/>
+          <p:cNvPr id="4" name="Text 1"/>
           <p:cNvSpPr/>
           <p:nvPr/>
         </p:nvSpPr>
         <p:spPr>
           <a:xfrm>
-            <a:off x="5349240" y="6089904"/>
-            <a:ext cx="6659575" cy="347472"/>
+            <a:off x="5349240" y="1005840"/>
+            <a:ext cx="6522415" cy="731520"/>
           </a:xfrm>
           <a:prstGeom prst="rect">
             <a:avLst/>
@@ -17864,24 +17588,68 @@
           <a:ln/>
         </p:spPr>
         <p:txBody>
-          <a:bodyPr wrap="square" lIns="0" tIns="0" rIns="0" bIns="0" rtlCol="0" anchor="ctr"/>
+          <a:bodyPr wrap="square" lIns="0" tIns="0" rIns="0" bIns="0" rtlCol="0" anchor="ctr">
+            <a:normAutofit/>
+          </a:bodyPr>
           <a:lstStyle/>
           <a:p>
             <a:pPr algn="ctr" indent="0" marL="0">
               <a:buNone/>
             </a:pPr>
             <a:r>
-              <a:rPr lang="en-US" sz="1600" i="1" dirty="0">
-                <a:solidFill>
-                  <a:srgbClr val="555555"/>
+              <a:rPr lang="en-US" sz="3600" b="1" dirty="0">
+                <a:solidFill>
+                  <a:srgbClr val="990011"/>
                 </a:solidFill>
                 <a:latin typeface="Times New Roman" pitchFamily="34" charset="0"/>
                 <a:ea typeface="Times New Roman" pitchFamily="34" charset="-122"/>
                 <a:cs typeface="Times New Roman" pitchFamily="34" charset="-120"/>
               </a:rPr>
-              <a:t>Illustration: tea on highlands</a:t>
-            </a:r>
-            <a:endParaRPr lang="en-US" sz="1600" dirty="0"/>
+              <a:t>Evaluation 1</a:t>
+            </a:r>
+            <a:endParaRPr lang="en-US" sz="3600" dirty="0"/>
+          </a:p>
+        </p:txBody>
+      </p:sp>
+      <p:sp>
+        <p:nvSpPr>
+          <p:cNvPr id="5" name="Text 2"/>
+          <p:cNvSpPr/>
+          <p:nvPr/>
+        </p:nvSpPr>
+        <p:spPr>
+          <a:xfrm>
+            <a:off x="5349240" y="1783080"/>
+            <a:ext cx="6522415" cy="4663440"/>
+          </a:xfrm>
+          <a:prstGeom prst="rect">
+            <a:avLst/>
+          </a:prstGeom>
+          <a:noFill/>
+          <a:ln/>
+        </p:spPr>
+        <p:txBody>
+          <a:bodyPr wrap="square" lIns="0" tIns="0" rIns="0" bIns="0" rtlCol="0" anchor="t"/>
+          <a:lstStyle/>
+          <a:p>
+            <a:pPr algn="l" indent="0" marL="0">
+              <a:spcAft>
+                <a:spcPts val="800"/>
+              </a:spcAft>
+              <a:buNone/>
+            </a:pPr>
+            <a:r>
+              <a:rPr lang="en-US" sz="4000" dirty="0">
+                <a:solidFill>
+                  <a:srgbClr val="111111"/>
+                </a:solidFill>
+                <a:latin typeface="Times New Roman" pitchFamily="34" charset="0"/>
+                <a:ea typeface="Times New Roman" pitchFamily="34" charset="-122"/>
+                <a:cs typeface="Times New Roman" pitchFamily="34" charset="-120"/>
+              </a:rPr>
+              <a:t>Why do low-altitude areas generally support high densities?</a:t>
+            </a:r>
+            <a:endParaRPr lang="en-US" sz="4000" dirty="0"/>
           </a:p>
         </p:txBody>
       </p:sp>
@@ -17991,115 +17759,15 @@
                 <a:ea typeface="Calibri" pitchFamily="34" charset="-122"/>
                 <a:cs typeface="Calibri" pitchFamily="34" charset="-120"/>
               </a:rPr>
-              <a:t>BOARD SUMMARY</a:t>
+              <a:t>FORMATIVE EVALUATION</a:t>
             </a:r>
             <a:endParaRPr lang="en-US" sz="1400" dirty="0"/>
-          </a:p>
-        </p:txBody>
-      </p:sp>
-      <p:sp>
-        <p:nvSpPr>
-          <p:cNvPr id="3" name="Text 1"/>
-          <p:cNvSpPr/>
-          <p:nvPr/>
-        </p:nvSpPr>
-        <p:spPr>
-          <a:xfrm>
-            <a:off x="365760" y="1005840"/>
-            <a:ext cx="11460175" cy="731520"/>
-          </a:xfrm>
-          <a:prstGeom prst="rect">
-            <a:avLst/>
-          </a:prstGeom>
-          <a:noFill/>
-          <a:ln/>
-        </p:spPr>
-        <p:txBody>
-          <a:bodyPr wrap="square" lIns="0" tIns="0" rIns="0" bIns="0" rtlCol="0" anchor="ctr">
-            <a:normAutofit/>
-          </a:bodyPr>
-          <a:lstStyle/>
-          <a:p>
-            <a:pPr algn="ctr" indent="0" marL="0">
-              <a:buNone/>
-            </a:pPr>
-            <a:r>
-              <a:rPr lang="en-US" sz="3600" b="1" dirty="0">
-                <a:solidFill>
-                  <a:srgbClr val="990011"/>
-                </a:solidFill>
-                <a:latin typeface="Times New Roman" pitchFamily="34" charset="0"/>
-                <a:ea typeface="Times New Roman" pitchFamily="34" charset="-122"/>
-                <a:cs typeface="Times New Roman" pitchFamily="34" charset="-120"/>
-              </a:rPr>
-              <a:t>3. Exceptions and Special Cases</a:t>
-            </a:r>
-            <a:endParaRPr lang="en-US" sz="3600" dirty="0"/>
-          </a:p>
-        </p:txBody>
-      </p:sp>
-      <p:sp>
-        <p:nvSpPr>
-          <p:cNvPr id="4" name="Text 2"/>
-          <p:cNvSpPr/>
-          <p:nvPr/>
-        </p:nvSpPr>
-        <p:spPr>
-          <a:xfrm>
-            <a:off x="365760" y="1783080"/>
-            <a:ext cx="4846320" cy="4617720"/>
-          </a:xfrm>
-          <a:prstGeom prst="rect">
-            <a:avLst/>
-          </a:prstGeom>
-          <a:noFill/>
-          <a:ln/>
-        </p:spPr>
-        <p:txBody>
-          <a:bodyPr wrap="square" lIns="0" tIns="0" rIns="0" bIns="0" rtlCol="0" anchor="t"/>
-          <a:lstStyle/>
-          <a:p>
-            <a:pPr algn="l" indent="0" marL="0">
-              <a:spcAft>
-                <a:spcPts val="800"/>
-              </a:spcAft>
-              <a:buNone/>
-            </a:pPr>
-            <a:r>
-              <a:rPr lang="en-US" sz="3600" b="1" dirty="0">
-                <a:solidFill>
-                  <a:srgbClr val="111111"/>
-                </a:solidFill>
-                <a:latin typeface="Times New Roman" pitchFamily="34" charset="0"/>
-                <a:ea typeface="Times New Roman" pitchFamily="34" charset="-122"/>
-                <a:cs typeface="Times New Roman" pitchFamily="34" charset="-120"/>
-              </a:rPr>
-              <a:t>High capital cities: </a:t>
-            </a:r>
-            <a:pPr algn="l" indent="0" marL="0">
-              <a:spcAft>
-                <a:spcPts val="800"/>
-              </a:spcAft>
-              <a:buNone/>
-            </a:pPr>
-            <a:r>
-              <a:rPr lang="en-US" sz="3600" dirty="0">
-                <a:solidFill>
-                  <a:srgbClr val="111111"/>
-                </a:solidFill>
-                <a:latin typeface="Times New Roman" pitchFamily="34" charset="0"/>
-                <a:ea typeface="Times New Roman" pitchFamily="34" charset="-122"/>
-                <a:cs typeface="Times New Roman" pitchFamily="34" charset="-120"/>
-              </a:rPr>
-              <a:t>La Paz (Bolivia), at about 3,600 m, is large because it is the seat of government, and Quito (Ecuador) is a capital at about 2,850 m.</a:t>
-            </a:r>
-            <a:endParaRPr lang="en-US" sz="3600" dirty="0"/>
           </a:p>
         </p:txBody>
       </p:sp>
       <p:pic>
         <p:nvPicPr>
-          <p:cNvPr id="5" name="Image 0" descr="/home/claude/f4/img/v2/usa_lapaz.jpg">    </p:cNvPr>
+          <p:cNvPr id="3" name="Image 0" descr="/home/claude/f4/img/minesec_sheet.png">    </p:cNvPr>
           <p:cNvPicPr>
             <a:picLocks noChangeAspect="1"/>
           </p:cNvPicPr>
@@ -18113,8 +17781,8 @@
         </p:blipFill>
         <p:spPr>
           <a:xfrm>
-            <a:off x="5349240" y="2071212"/>
-            <a:ext cx="6659575" cy="3693983"/>
+            <a:off x="0" y="658368"/>
+            <a:ext cx="5120640" cy="5833872"/>
           </a:xfrm>
           <a:prstGeom prst="rect">
             <a:avLst/>
@@ -18123,14 +17791,14 @@
       </p:pic>
       <p:sp>
         <p:nvSpPr>
-          <p:cNvPr id="6" name="Text 3"/>
+          <p:cNvPr id="4" name="Text 1"/>
           <p:cNvSpPr/>
           <p:nvPr/>
         </p:nvSpPr>
         <p:spPr>
           <a:xfrm>
-            <a:off x="5349240" y="6089904"/>
-            <a:ext cx="6659575" cy="347472"/>
+            <a:off x="5349240" y="1005840"/>
+            <a:ext cx="6522415" cy="731520"/>
           </a:xfrm>
           <a:prstGeom prst="rect">
             <a:avLst/>
@@ -18139,24 +17807,68 @@
           <a:ln/>
         </p:spPr>
         <p:txBody>
-          <a:bodyPr wrap="square" lIns="0" tIns="0" rIns="0" bIns="0" rtlCol="0" anchor="ctr"/>
+          <a:bodyPr wrap="square" lIns="0" tIns="0" rIns="0" bIns="0" rtlCol="0" anchor="ctr">
+            <a:normAutofit/>
+          </a:bodyPr>
           <a:lstStyle/>
           <a:p>
             <a:pPr algn="ctr" indent="0" marL="0">
               <a:buNone/>
             </a:pPr>
             <a:r>
-              <a:rPr lang="en-US" sz="1600" i="1" dirty="0">
-                <a:solidFill>
-                  <a:srgbClr val="555555"/>
+              <a:rPr lang="en-US" sz="3600" b="1" dirty="0">
+                <a:solidFill>
+                  <a:srgbClr val="990011"/>
                 </a:solidFill>
                 <a:latin typeface="Times New Roman" pitchFamily="34" charset="0"/>
                 <a:ea typeface="Times New Roman" pitchFamily="34" charset="-122"/>
                 <a:cs typeface="Times New Roman" pitchFamily="34" charset="-120"/>
               </a:rPr>
-              <a:t>Illustration: La Paz</a:t>
-            </a:r>
-            <a:endParaRPr lang="en-US" sz="1600" dirty="0"/>
+              <a:t>Expected Answer</a:t>
+            </a:r>
+            <a:endParaRPr lang="en-US" sz="3600" dirty="0"/>
+          </a:p>
+        </p:txBody>
+      </p:sp>
+      <p:sp>
+        <p:nvSpPr>
+          <p:cNvPr id="5" name="Text 2"/>
+          <p:cNvSpPr/>
+          <p:nvPr/>
+        </p:nvSpPr>
+        <p:spPr>
+          <a:xfrm>
+            <a:off x="5349240" y="1783080"/>
+            <a:ext cx="6522415" cy="4663440"/>
+          </a:xfrm>
+          <a:prstGeom prst="rect">
+            <a:avLst/>
+          </a:prstGeom>
+          <a:noFill/>
+          <a:ln/>
+        </p:spPr>
+        <p:txBody>
+          <a:bodyPr wrap="square" lIns="0" tIns="0" rIns="0" bIns="0" rtlCol="0" anchor="t"/>
+          <a:lstStyle/>
+          <a:p>
+            <a:pPr algn="l" indent="0" marL="0">
+              <a:spcAft>
+                <a:spcPts val="800"/>
+              </a:spcAft>
+              <a:buNone/>
+            </a:pPr>
+            <a:r>
+              <a:rPr lang="en-US" sz="4000" dirty="0">
+                <a:solidFill>
+                  <a:srgbClr val="111111"/>
+                </a:solidFill>
+                <a:latin typeface="Times New Roman" pitchFamily="34" charset="0"/>
+                <a:ea typeface="Times New Roman" pitchFamily="34" charset="-122"/>
+                <a:cs typeface="Times New Roman" pitchFamily="34" charset="-120"/>
+              </a:rPr>
+              <a:t>They have fertile plains, water, a warm climate, easy transport and large towns.</a:t>
+            </a:r>
+            <a:endParaRPr lang="en-US" sz="4000" dirty="0"/>
           </a:p>
         </p:txBody>
       </p:sp>
@@ -18331,7 +18043,7 @@
                 <a:ea typeface="Times New Roman" pitchFamily="34" charset="-122"/>
                 <a:cs typeface="Times New Roman" pitchFamily="34" charset="-120"/>
               </a:rPr>
-              <a:t>Evaluation 1</a:t>
+              <a:t>Evaluation 2</a:t>
             </a:r>
             <a:endParaRPr lang="en-US" sz="3600" dirty="0"/>
           </a:p>
@@ -18373,7 +18085,7 @@
                 <a:ea typeface="Times New Roman" pitchFamily="34" charset="-122"/>
                 <a:cs typeface="Times New Roman" pitchFamily="34" charset="-120"/>
               </a:rPr>
-              <a:t>Why do low-altitude areas generally support high densities?</a:t>
+              <a:t>Give one high-altitude area with a large population and explain why.</a:t>
             </a:r>
             <a:endParaRPr lang="en-US" sz="4000" dirty="0"/>
           </a:p>
@@ -18811,7 +18523,7 @@
                 <a:ea typeface="Times New Roman" pitchFamily="34" charset="-122"/>
                 <a:cs typeface="Times New Roman" pitchFamily="34" charset="-120"/>
               </a:rPr>
-              <a:t>They have fertile plains, water, a warm climate, easy transport and large towns.</a:t>
+              <a:t>La Paz (about 3,600 m), the seat of government of Bolivia; or the Ethiopian Highlands, cooler and healthier than the lowlands.</a:t>
             </a:r>
             <a:endParaRPr lang="en-US" sz="4000" dirty="0"/>
           </a:p>
@@ -18923,7 +18635,7 @@
                 <a:ea typeface="Calibri" pitchFamily="34" charset="-122"/>
                 <a:cs typeface="Calibri" pitchFamily="34" charset="-120"/>
               </a:rPr>
-              <a:t>FORMATIVE EVALUATION</a:t>
+              <a:t>REMEDIATION</a:t>
             </a:r>
             <a:endParaRPr lang="en-US" sz="1400" dirty="0"/>
           </a:p>
@@ -18946,7 +18658,7 @@
         <p:spPr>
           <a:xfrm>
             <a:off x="0" y="658368"/>
-            <a:ext cx="5120640" cy="5833872"/>
+            <a:ext cx="2468880" cy="5833872"/>
           </a:xfrm>
           <a:prstGeom prst="rect">
             <a:avLst/>
@@ -18961,8 +18673,8 @@
         </p:nvSpPr>
         <p:spPr>
           <a:xfrm>
-            <a:off x="5349240" y="1005840"/>
-            <a:ext cx="6522415" cy="731520"/>
+            <a:off x="2697480" y="1005840"/>
+            <a:ext cx="9174175" cy="731520"/>
           </a:xfrm>
           <a:prstGeom prst="rect">
             <a:avLst/>
@@ -18988,7 +18700,7 @@
                 <a:ea typeface="Times New Roman" pitchFamily="34" charset="-122"/>
                 <a:cs typeface="Times New Roman" pitchFamily="34" charset="-120"/>
               </a:rPr>
-              <a:t>Evaluation 2</a:t>
+              <a:t>Remediation</a:t>
             </a:r>
             <a:endParaRPr lang="en-US" sz="3600" dirty="0"/>
           </a:p>
@@ -19002,8 +18714,8 @@
         </p:nvSpPr>
         <p:spPr>
           <a:xfrm>
-            <a:off x="5349240" y="1783080"/>
-            <a:ext cx="6522415" cy="4663440"/>
+            <a:off x="2697480" y="1783080"/>
+            <a:ext cx="9174175" cy="4663440"/>
           </a:xfrm>
           <a:prstGeom prst="rect">
             <a:avLst/>
@@ -19022,7 +18734,7 @@
               <a:buNone/>
             </a:pPr>
             <a:r>
-              <a:rPr lang="en-US" sz="4000" dirty="0">
+              <a:rPr lang="en-US" sz="4000" b="1" dirty="0">
                 <a:solidFill>
                   <a:srgbClr val="111111"/>
                 </a:solidFill>
@@ -19030,7 +18742,73 @@
                 <a:ea typeface="Times New Roman" pitchFamily="34" charset="-122"/>
                 <a:cs typeface="Times New Roman" pitchFamily="34" charset="-120"/>
               </a:rPr>
-              <a:t>Give one high-altitude area with a large population and explain why.</a:t>
+              <a:t>Fill in the blanks:</a:t>
+            </a:r>
+            <a:endParaRPr lang="en-US" sz="4000" dirty="0"/>
+          </a:p>
+          <a:p>
+            <a:pPr algn="l" marL="342900" indent="-342900">
+              <a:spcAft>
+                <a:spcPts val="800"/>
+              </a:spcAft>
+              <a:buSzPct val="100000"/>
+              <a:buFont typeface="+mj-lt"/>
+              <a:buAutoNum type="arabicPeriod" startAt="1"/>
+            </a:pPr>
+            <a:r>
+              <a:rPr lang="en-US" sz="4000" dirty="0">
+                <a:solidFill>
+                  <a:srgbClr val="111111"/>
+                </a:solidFill>
+                <a:latin typeface="Times New Roman" pitchFamily="34" charset="0"/>
+                <a:ea typeface="Times New Roman" pitchFamily="34" charset="-122"/>
+                <a:cs typeface="Times New Roman" pitchFamily="34" charset="-120"/>
+              </a:rPr>
+              <a:t>In general, density ______ as altitude rises.</a:t>
+            </a:r>
+            <a:endParaRPr lang="en-US" sz="4000" dirty="0"/>
+          </a:p>
+          <a:p>
+            <a:pPr algn="l" marL="342900" indent="-342900">
+              <a:spcAft>
+                <a:spcPts val="800"/>
+              </a:spcAft>
+              <a:buSzPct val="100000"/>
+              <a:buFont typeface="+mj-lt"/>
+              <a:buAutoNum type="arabicPeriod" startAt="1"/>
+            </a:pPr>
+            <a:r>
+              <a:rPr lang="en-US" sz="4000" dirty="0">
+                <a:solidFill>
+                  <a:srgbClr val="111111"/>
+                </a:solidFill>
+                <a:latin typeface="Times New Roman" pitchFamily="34" charset="0"/>
+                <a:ea typeface="Times New Roman" pitchFamily="34" charset="-122"/>
+                <a:cs typeface="Times New Roman" pitchFamily="34" charset="-120"/>
+              </a:rPr>
+              <a:t>Tropical highlands are densely populated because they are ______.</a:t>
+            </a:r>
+            <a:endParaRPr lang="en-US" sz="4000" dirty="0"/>
+          </a:p>
+          <a:p>
+            <a:pPr algn="l" marL="342900" indent="-342900">
+              <a:spcAft>
+                <a:spcPts val="800"/>
+              </a:spcAft>
+              <a:buSzPct val="100000"/>
+              <a:buFont typeface="+mj-lt"/>
+              <a:buAutoNum type="arabicPeriod" startAt="1"/>
+            </a:pPr>
+            <a:r>
+              <a:rPr lang="en-US" sz="4000" dirty="0">
+                <a:solidFill>
+                  <a:srgbClr val="111111"/>
+                </a:solidFill>
+                <a:latin typeface="Times New Roman" pitchFamily="34" charset="0"/>
+                <a:ea typeface="Times New Roman" pitchFamily="34" charset="-122"/>
+                <a:cs typeface="Times New Roman" pitchFamily="34" charset="-120"/>
+              </a:rPr>
+              <a:t>La Paz is at about ______ m.</a:t>
             </a:r>
             <a:endParaRPr lang="en-US" sz="4000" dirty="0"/>
           </a:p>
@@ -19142,7 +18920,7 @@
                 <a:ea typeface="Calibri" pitchFamily="34" charset="-122"/>
                 <a:cs typeface="Calibri" pitchFamily="34" charset="-120"/>
               </a:rPr>
-              <a:t>FORMATIVE EVALUATION</a:t>
+              <a:t>HOMEWORK</a:t>
             </a:r>
             <a:endParaRPr lang="en-US" sz="1400" dirty="0"/>
           </a:p>
@@ -19207,7 +18985,7 @@
                 <a:ea typeface="Times New Roman" pitchFamily="34" charset="-122"/>
                 <a:cs typeface="Times New Roman" pitchFamily="34" charset="-120"/>
               </a:rPr>
-              <a:t>Expected Answer</a:t>
+              <a:t>Homework</a:t>
             </a:r>
             <a:endParaRPr lang="en-US" sz="3600" dirty="0"/>
           </a:p>
@@ -19249,7 +19027,7 @@
                 <a:ea typeface="Times New Roman" pitchFamily="34" charset="-122"/>
                 <a:cs typeface="Times New Roman" pitchFamily="34" charset="-120"/>
               </a:rPr>
-              <a:t>La Paz (about 3,600 m), the seat of government of Bolivia; or the Ethiopian Highlands, cooler and healthier than the lowlands.</a:t>
+              <a:t>Name one push factor of rural-urban migration in Cameroon.</a:t>
             </a:r>
             <a:endParaRPr lang="en-US" sz="4000" dirty="0"/>
           </a:p>
@@ -19361,7 +19139,7 @@
                 <a:ea typeface="Calibri" pitchFamily="34" charset="-122"/>
                 <a:cs typeface="Calibri" pitchFamily="34" charset="-120"/>
               </a:rPr>
-              <a:t>REMEDIATION</a:t>
+              <a:t>NEXT LESSON</a:t>
             </a:r>
             <a:endParaRPr lang="en-US" sz="1400" dirty="0"/>
           </a:p>
@@ -19384,7 +19162,7 @@
         <p:spPr>
           <a:xfrm>
             <a:off x="0" y="658368"/>
-            <a:ext cx="2468880" cy="5833872"/>
+            <a:ext cx="5120640" cy="5833872"/>
           </a:xfrm>
           <a:prstGeom prst="rect">
             <a:avLst/>
@@ -19399,8 +19177,8 @@
         </p:nvSpPr>
         <p:spPr>
           <a:xfrm>
-            <a:off x="2697480" y="1005840"/>
-            <a:ext cx="9174175" cy="731520"/>
+            <a:off x="5349240" y="1005840"/>
+            <a:ext cx="6522415" cy="731520"/>
           </a:xfrm>
           <a:prstGeom prst="rect">
             <a:avLst/>
@@ -19426,7 +19204,7 @@
                 <a:ea typeface="Times New Roman" pitchFamily="34" charset="-122"/>
                 <a:cs typeface="Times New Roman" pitchFamily="34" charset="-120"/>
               </a:rPr>
-              <a:t>Remediation</a:t>
+              <a:t>Next Lesson</a:t>
             </a:r>
             <a:endParaRPr lang="en-US" sz="3600" dirty="0"/>
           </a:p>
@@ -19440,8 +19218,8 @@
         </p:nvSpPr>
         <p:spPr>
           <a:xfrm>
-            <a:off x="2697480" y="1783080"/>
-            <a:ext cx="9174175" cy="4663440"/>
+            <a:off x="5349240" y="1783080"/>
+            <a:ext cx="6522415" cy="4663440"/>
           </a:xfrm>
           <a:prstGeom prst="rect">
             <a:avLst/>
@@ -19450,10 +19228,10 @@
           <a:ln/>
         </p:spPr>
         <p:txBody>
-          <a:bodyPr wrap="square" lIns="0" tIns="0" rIns="0" bIns="0" rtlCol="0" anchor="t"/>
-          <a:lstStyle/>
-          <a:p>
-            <a:pPr algn="l" indent="0" marL="0">
+          <a:bodyPr wrap="square" lIns="0" tIns="0" rIns="0" bIns="0" rtlCol="0" anchor="ctr"/>
+          <a:lstStyle/>
+          <a:p>
+            <a:pPr algn="ctr" indent="0" marL="0">
               <a:spcAft>
                 <a:spcPts val="800"/>
               </a:spcAft>
@@ -19468,73 +19246,27 @@
                 <a:ea typeface="Times New Roman" pitchFamily="34" charset="-122"/>
                 <a:cs typeface="Times New Roman" pitchFamily="34" charset="-120"/>
               </a:rPr>
-              <a:t>Fill in the blanks:</a:t>
+              <a:t>Our next lesson will be on:</a:t>
             </a:r>
             <a:endParaRPr lang="en-US" sz="4000" dirty="0"/>
           </a:p>
           <a:p>
-            <a:pPr algn="l" marL="342900" indent="-342900">
+            <a:pPr algn="ctr" indent="0" marL="0">
               <a:spcAft>
                 <a:spcPts val="800"/>
               </a:spcAft>
-              <a:buSzPct val="100000"/>
-              <a:buFont typeface="+mj-lt"/>
-              <a:buAutoNum type="arabicPeriod" startAt="1"/>
+              <a:buNone/>
             </a:pPr>
             <a:r>
-              <a:rPr lang="en-US" sz="4000" dirty="0">
-                <a:solidFill>
-                  <a:srgbClr val="111111"/>
+              <a:rPr lang="en-US" sz="4000" b="1" dirty="0">
+                <a:solidFill>
+                  <a:srgbClr val="990011"/>
                 </a:solidFill>
                 <a:latin typeface="Times New Roman" pitchFamily="34" charset="0"/>
                 <a:ea typeface="Times New Roman" pitchFamily="34" charset="-122"/>
                 <a:cs typeface="Times New Roman" pitchFamily="34" charset="-120"/>
               </a:rPr>
-              <a:t>In general, density ______ as altitude rises.</a:t>
-            </a:r>
-            <a:endParaRPr lang="en-US" sz="4000" dirty="0"/>
-          </a:p>
-          <a:p>
-            <a:pPr algn="l" marL="342900" indent="-342900">
-              <a:spcAft>
-                <a:spcPts val="800"/>
-              </a:spcAft>
-              <a:buSzPct val="100000"/>
-              <a:buFont typeface="+mj-lt"/>
-              <a:buAutoNum type="arabicPeriod" startAt="1"/>
-            </a:pPr>
-            <a:r>
-              <a:rPr lang="en-US" sz="4000" dirty="0">
-                <a:solidFill>
-                  <a:srgbClr val="111111"/>
-                </a:solidFill>
-                <a:latin typeface="Times New Roman" pitchFamily="34" charset="0"/>
-                <a:ea typeface="Times New Roman" pitchFamily="34" charset="-122"/>
-                <a:cs typeface="Times New Roman" pitchFamily="34" charset="-120"/>
-              </a:rPr>
-              <a:t>Tropical highlands are densely populated because they are ______.</a:t>
-            </a:r>
-            <a:endParaRPr lang="en-US" sz="4000" dirty="0"/>
-          </a:p>
-          <a:p>
-            <a:pPr algn="l" marL="342900" indent="-342900">
-              <a:spcAft>
-                <a:spcPts val="800"/>
-              </a:spcAft>
-              <a:buSzPct val="100000"/>
-              <a:buFont typeface="+mj-lt"/>
-              <a:buAutoNum type="arabicPeriod" startAt="1"/>
-            </a:pPr>
-            <a:r>
-              <a:rPr lang="en-US" sz="4000" dirty="0">
-                <a:solidFill>
-                  <a:srgbClr val="111111"/>
-                </a:solidFill>
-                <a:latin typeface="Times New Roman" pitchFamily="34" charset="0"/>
-                <a:ea typeface="Times New Roman" pitchFamily="34" charset="-122"/>
-                <a:cs typeface="Times New Roman" pitchFamily="34" charset="-120"/>
-              </a:rPr>
-              <a:t>La Paz is at about ______ m.</a:t>
+              <a:t>Lesson 4: Modifications of Population Distribution</a:t>
             </a:r>
             <a:endParaRPr lang="en-US" sz="4000" dirty="0"/>
           </a:p>
@@ -19646,464 +19378,6 @@
                 <a:ea typeface="Calibri" pitchFamily="34" charset="-122"/>
                 <a:cs typeface="Calibri" pitchFamily="34" charset="-120"/>
               </a:rPr>
-              <a:t>HOMEWORK</a:t>
-            </a:r>
-            <a:endParaRPr lang="en-US" sz="1400" dirty="0"/>
-          </a:p>
-        </p:txBody>
-      </p:sp>
-      <p:pic>
-        <p:nvPicPr>
-          <p:cNvPr id="3" name="Image 0" descr="/home/claude/f4/img/minesec_sheet.png">    </p:cNvPr>
-          <p:cNvPicPr>
-            <a:picLocks noChangeAspect="1"/>
-          </p:cNvPicPr>
-          <p:nvPr/>
-        </p:nvPicPr>
-        <p:blipFill>
-          <a:blip r:embed="rId1"/>
-          <a:stretch>
-            <a:fillRect/>
-          </a:stretch>
-        </p:blipFill>
-        <p:spPr>
-          <a:xfrm>
-            <a:off x="0" y="658368"/>
-            <a:ext cx="5120640" cy="5833872"/>
-          </a:xfrm>
-          <a:prstGeom prst="rect">
-            <a:avLst/>
-          </a:prstGeom>
-        </p:spPr>
-      </p:pic>
-      <p:sp>
-        <p:nvSpPr>
-          <p:cNvPr id="4" name="Text 1"/>
-          <p:cNvSpPr/>
-          <p:nvPr/>
-        </p:nvSpPr>
-        <p:spPr>
-          <a:xfrm>
-            <a:off x="5349240" y="1005840"/>
-            <a:ext cx="6522415" cy="731520"/>
-          </a:xfrm>
-          <a:prstGeom prst="rect">
-            <a:avLst/>
-          </a:prstGeom>
-          <a:noFill/>
-          <a:ln/>
-        </p:spPr>
-        <p:txBody>
-          <a:bodyPr wrap="square" lIns="0" tIns="0" rIns="0" bIns="0" rtlCol="0" anchor="ctr">
-            <a:normAutofit/>
-          </a:bodyPr>
-          <a:lstStyle/>
-          <a:p>
-            <a:pPr algn="ctr" indent="0" marL="0">
-              <a:buNone/>
-            </a:pPr>
-            <a:r>
-              <a:rPr lang="en-US" sz="3600" b="1" dirty="0">
-                <a:solidFill>
-                  <a:srgbClr val="990011"/>
-                </a:solidFill>
-                <a:latin typeface="Times New Roman" pitchFamily="34" charset="0"/>
-                <a:ea typeface="Times New Roman" pitchFamily="34" charset="-122"/>
-                <a:cs typeface="Times New Roman" pitchFamily="34" charset="-120"/>
-              </a:rPr>
-              <a:t>Homework</a:t>
-            </a:r>
-            <a:endParaRPr lang="en-US" sz="3600" dirty="0"/>
-          </a:p>
-        </p:txBody>
-      </p:sp>
-      <p:sp>
-        <p:nvSpPr>
-          <p:cNvPr id="5" name="Text 2"/>
-          <p:cNvSpPr/>
-          <p:nvPr/>
-        </p:nvSpPr>
-        <p:spPr>
-          <a:xfrm>
-            <a:off x="5349240" y="1783080"/>
-            <a:ext cx="6522415" cy="4663440"/>
-          </a:xfrm>
-          <a:prstGeom prst="rect">
-            <a:avLst/>
-          </a:prstGeom>
-          <a:noFill/>
-          <a:ln/>
-        </p:spPr>
-        <p:txBody>
-          <a:bodyPr wrap="square" lIns="0" tIns="0" rIns="0" bIns="0" rtlCol="0" anchor="t"/>
-          <a:lstStyle/>
-          <a:p>
-            <a:pPr algn="l" indent="0" marL="0">
-              <a:spcAft>
-                <a:spcPts val="800"/>
-              </a:spcAft>
-              <a:buNone/>
-            </a:pPr>
-            <a:r>
-              <a:rPr lang="en-US" sz="4000" dirty="0">
-                <a:solidFill>
-                  <a:srgbClr val="111111"/>
-                </a:solidFill>
-                <a:latin typeface="Times New Roman" pitchFamily="34" charset="0"/>
-                <a:ea typeface="Times New Roman" pitchFamily="34" charset="-122"/>
-                <a:cs typeface="Times New Roman" pitchFamily="34" charset="-120"/>
-              </a:rPr>
-              <a:t>Name one push factor of rural-urban migration in Cameroon.</a:t>
-            </a:r>
-            <a:endParaRPr lang="en-US" sz="4000" dirty="0"/>
-          </a:p>
-        </p:txBody>
-      </p:sp>
-      <p:sp>
-        <p:nvSpPr>
-          <p:cNvPr id="25" name="Slide Number Placeholder 0"/>
-          <p:cNvSpPr>
-            <a:spLocks noGrp="1"/>
-          </p:cNvSpPr>
-          <p:nvPr>
-            <p:ph type="sldNum" sz="quarter" idx="4294967295"/>
-          </p:nvPr>
-        </p:nvSpPr>
-        <p:spPr>
-          <a:xfrm>
-            <a:off x="27432" y="91440"/>
-            <a:ext cx="585216" cy="475488"/>
-          </a:xfrm>
-          <a:prstGeom prst="rect">
-            <a:avLst/>
-          </a:prstGeom>
-          <a:extLst>
-            <a:ext uri="{C572A759-6A51-4108-AA02-DFA0A04FC94B}">
-              <ma14:wrappingTextBoxFlag xmlns:ma14="http://schemas.microsoft.com/office/mac/drawingml/2011/main" val="0"/>
-            </a:ext>
-          </a:extLst>
-        </p:spPr>
-        <p:txBody>
-          <a:bodyPr/>
-          <a:lstStyle>
-            <a:lvl1pPr>
-              <a:defRPr sz="2000">
-                <a:solidFill>
-                  <a:srgbClr val="FFFFFF"/>
-                </a:solidFill>
-                <a:latin typeface="Calibri"/>
-                <a:ea typeface="Calibri"/>
-                <a:cs typeface="Calibri"/>
-              </a:defRPr>
-            </a:lvl1pPr>
-          </a:lstStyle>
-          <a:p>
-            <a:pPr algn="ctr"/>
-            <a:fld id="{F7021451-1387-4CA6-816F-3879F97B5CBC}" type="slidenum">
-              <a:rPr b="1" lang="en-US"/>
-              <a:t>54</a:t>
-            </a:fld>
-            <a:endParaRPr lang="en-US"/>
-          </a:p>
-        </p:txBody>
-      </p:sp>
-    </p:spTree>
-  </p:cSld>
-  <p:clrMapOvr>
-    <a:masterClrMapping/>
-  </p:clrMapOvr>
-</p:sld>
-</file>
-
-<file path=ppt/slides/slide55.xml><?xml version="1.0" encoding="utf-8"?>
-<p:sld xmlns:a="http://schemas.openxmlformats.org/drawingml/2006/main" xmlns:r="http://schemas.openxmlformats.org/officeDocument/2006/relationships" xmlns:p="http://schemas.openxmlformats.org/presentationml/2006/main">
-  <p:cSld name="Slide 55">
-    <p:spTree>
-      <p:nvGrpSpPr>
-        <p:cNvPr id="1" name=""/>
-        <p:cNvGrpSpPr/>
-        <p:nvPr/>
-      </p:nvGrpSpPr>
-      <p:grpSpPr>
-        <a:xfrm>
-          <a:off x="0" y="0"/>
-          <a:ext cx="0" cy="0"/>
-          <a:chOff x="0" y="0"/>
-          <a:chExt cx="0" cy="0"/>
-        </a:xfrm>
-      </p:grpSpPr>
-      <p:sp>
-        <p:nvSpPr>
-          <p:cNvPr id="2" name="Text 0"/>
-          <p:cNvSpPr/>
-          <p:nvPr/>
-        </p:nvSpPr>
-        <p:spPr>
-          <a:xfrm>
-            <a:off x="457200" y="713232"/>
-            <a:ext cx="11368735" cy="274320"/>
-          </a:xfrm>
-          <a:prstGeom prst="rect">
-            <a:avLst/>
-          </a:prstGeom>
-          <a:noFill/>
-          <a:ln/>
-        </p:spPr>
-        <p:txBody>
-          <a:bodyPr wrap="square" lIns="0" tIns="0" rIns="0" bIns="0" rtlCol="0" anchor="ctr"/>
-          <a:lstStyle/>
-          <a:p>
-            <a:pPr algn="r" indent="0" marL="0">
-              <a:buNone/>
-            </a:pPr>
-            <a:r>
-              <a:rPr lang="en-US" sz="1400" b="1" dirty="0">
-                <a:solidFill>
-                  <a:srgbClr val="1C3F6E"/>
-                </a:solidFill>
-                <a:latin typeface="Calibri" pitchFamily="34" charset="0"/>
-                <a:ea typeface="Calibri" pitchFamily="34" charset="-122"/>
-                <a:cs typeface="Calibri" pitchFamily="34" charset="-120"/>
-              </a:rPr>
-              <a:t>NEXT LESSON</a:t>
-            </a:r>
-            <a:endParaRPr lang="en-US" sz="1400" dirty="0"/>
-          </a:p>
-        </p:txBody>
-      </p:sp>
-      <p:pic>
-        <p:nvPicPr>
-          <p:cNvPr id="3" name="Image 0" descr="/home/claude/f4/img/minesec_sheet.png">    </p:cNvPr>
-          <p:cNvPicPr>
-            <a:picLocks noChangeAspect="1"/>
-          </p:cNvPicPr>
-          <p:nvPr/>
-        </p:nvPicPr>
-        <p:blipFill>
-          <a:blip r:embed="rId1"/>
-          <a:stretch>
-            <a:fillRect/>
-          </a:stretch>
-        </p:blipFill>
-        <p:spPr>
-          <a:xfrm>
-            <a:off x="0" y="658368"/>
-            <a:ext cx="5120640" cy="5833872"/>
-          </a:xfrm>
-          <a:prstGeom prst="rect">
-            <a:avLst/>
-          </a:prstGeom>
-        </p:spPr>
-      </p:pic>
-      <p:sp>
-        <p:nvSpPr>
-          <p:cNvPr id="4" name="Text 1"/>
-          <p:cNvSpPr/>
-          <p:nvPr/>
-        </p:nvSpPr>
-        <p:spPr>
-          <a:xfrm>
-            <a:off x="5349240" y="1005840"/>
-            <a:ext cx="6522415" cy="731520"/>
-          </a:xfrm>
-          <a:prstGeom prst="rect">
-            <a:avLst/>
-          </a:prstGeom>
-          <a:noFill/>
-          <a:ln/>
-        </p:spPr>
-        <p:txBody>
-          <a:bodyPr wrap="square" lIns="0" tIns="0" rIns="0" bIns="0" rtlCol="0" anchor="ctr">
-            <a:normAutofit/>
-          </a:bodyPr>
-          <a:lstStyle/>
-          <a:p>
-            <a:pPr algn="ctr" indent="0" marL="0">
-              <a:buNone/>
-            </a:pPr>
-            <a:r>
-              <a:rPr lang="en-US" sz="3600" b="1" dirty="0">
-                <a:solidFill>
-                  <a:srgbClr val="990011"/>
-                </a:solidFill>
-                <a:latin typeface="Times New Roman" pitchFamily="34" charset="0"/>
-                <a:ea typeface="Times New Roman" pitchFamily="34" charset="-122"/>
-                <a:cs typeface="Times New Roman" pitchFamily="34" charset="-120"/>
-              </a:rPr>
-              <a:t>Next Lesson</a:t>
-            </a:r>
-            <a:endParaRPr lang="en-US" sz="3600" dirty="0"/>
-          </a:p>
-        </p:txBody>
-      </p:sp>
-      <p:sp>
-        <p:nvSpPr>
-          <p:cNvPr id="5" name="Text 2"/>
-          <p:cNvSpPr/>
-          <p:nvPr/>
-        </p:nvSpPr>
-        <p:spPr>
-          <a:xfrm>
-            <a:off x="5349240" y="1783080"/>
-            <a:ext cx="6522415" cy="4663440"/>
-          </a:xfrm>
-          <a:prstGeom prst="rect">
-            <a:avLst/>
-          </a:prstGeom>
-          <a:noFill/>
-          <a:ln/>
-        </p:spPr>
-        <p:txBody>
-          <a:bodyPr wrap="square" lIns="0" tIns="0" rIns="0" bIns="0" rtlCol="0" anchor="ctr"/>
-          <a:lstStyle/>
-          <a:p>
-            <a:pPr algn="ctr" indent="0" marL="0">
-              <a:spcAft>
-                <a:spcPts val="800"/>
-              </a:spcAft>
-              <a:buNone/>
-            </a:pPr>
-            <a:r>
-              <a:rPr lang="en-US" sz="4000" b="1" dirty="0">
-                <a:solidFill>
-                  <a:srgbClr val="111111"/>
-                </a:solidFill>
-                <a:latin typeface="Times New Roman" pitchFamily="34" charset="0"/>
-                <a:ea typeface="Times New Roman" pitchFamily="34" charset="-122"/>
-                <a:cs typeface="Times New Roman" pitchFamily="34" charset="-120"/>
-              </a:rPr>
-              <a:t>Our next lesson will be on:</a:t>
-            </a:r>
-            <a:endParaRPr lang="en-US" sz="4000" dirty="0"/>
-          </a:p>
-          <a:p>
-            <a:pPr algn="ctr" indent="0" marL="0">
-              <a:spcAft>
-                <a:spcPts val="800"/>
-              </a:spcAft>
-              <a:buNone/>
-            </a:pPr>
-            <a:r>
-              <a:rPr lang="en-US" sz="4000" b="1" dirty="0">
-                <a:solidFill>
-                  <a:srgbClr val="990011"/>
-                </a:solidFill>
-                <a:latin typeface="Times New Roman" pitchFamily="34" charset="0"/>
-                <a:ea typeface="Times New Roman" pitchFamily="34" charset="-122"/>
-                <a:cs typeface="Times New Roman" pitchFamily="34" charset="-120"/>
-              </a:rPr>
-              <a:t>Lesson 4: Modifications of Population Distribution</a:t>
-            </a:r>
-            <a:endParaRPr lang="en-US" sz="4000" dirty="0"/>
-          </a:p>
-        </p:txBody>
-      </p:sp>
-      <p:sp>
-        <p:nvSpPr>
-          <p:cNvPr id="25" name="Slide Number Placeholder 0"/>
-          <p:cNvSpPr>
-            <a:spLocks noGrp="1"/>
-          </p:cNvSpPr>
-          <p:nvPr>
-            <p:ph type="sldNum" sz="quarter" idx="4294967295"/>
-          </p:nvPr>
-        </p:nvSpPr>
-        <p:spPr>
-          <a:xfrm>
-            <a:off x="27432" y="91440"/>
-            <a:ext cx="585216" cy="475488"/>
-          </a:xfrm>
-          <a:prstGeom prst="rect">
-            <a:avLst/>
-          </a:prstGeom>
-          <a:extLst>
-            <a:ext uri="{C572A759-6A51-4108-AA02-DFA0A04FC94B}">
-              <ma14:wrappingTextBoxFlag xmlns:ma14="http://schemas.microsoft.com/office/mac/drawingml/2011/main" val="0"/>
-            </a:ext>
-          </a:extLst>
-        </p:spPr>
-        <p:txBody>
-          <a:bodyPr/>
-          <a:lstStyle>
-            <a:lvl1pPr>
-              <a:defRPr sz="2000">
-                <a:solidFill>
-                  <a:srgbClr val="FFFFFF"/>
-                </a:solidFill>
-                <a:latin typeface="Calibri"/>
-                <a:ea typeface="Calibri"/>
-                <a:cs typeface="Calibri"/>
-              </a:defRPr>
-            </a:lvl1pPr>
-          </a:lstStyle>
-          <a:p>
-            <a:pPr algn="ctr"/>
-            <a:fld id="{F7021451-1387-4CA6-816F-3879F97B5CBC}" type="slidenum">
-              <a:rPr b="1" lang="en-US"/>
-              <a:t>55</a:t>
-            </a:fld>
-            <a:endParaRPr lang="en-US"/>
-          </a:p>
-        </p:txBody>
-      </p:sp>
-    </p:spTree>
-  </p:cSld>
-  <p:clrMapOvr>
-    <a:masterClrMapping/>
-  </p:clrMapOvr>
-</p:sld>
-</file>
-
-<file path=ppt/slides/slide56.xml><?xml version="1.0" encoding="utf-8"?>
-<p:sld xmlns:a="http://schemas.openxmlformats.org/drawingml/2006/main" xmlns:r="http://schemas.openxmlformats.org/officeDocument/2006/relationships" xmlns:p="http://schemas.openxmlformats.org/presentationml/2006/main">
-  <p:cSld name="Slide 56">
-    <p:spTree>
-      <p:nvGrpSpPr>
-        <p:cNvPr id="1" name=""/>
-        <p:cNvGrpSpPr/>
-        <p:nvPr/>
-      </p:nvGrpSpPr>
-      <p:grpSpPr>
-        <a:xfrm>
-          <a:off x="0" y="0"/>
-          <a:ext cx="0" cy="0"/>
-          <a:chOff x="0" y="0"/>
-          <a:chExt cx="0" cy="0"/>
-        </a:xfrm>
-      </p:grpSpPr>
-      <p:sp>
-        <p:nvSpPr>
-          <p:cNvPr id="2" name="Text 0"/>
-          <p:cNvSpPr/>
-          <p:nvPr/>
-        </p:nvSpPr>
-        <p:spPr>
-          <a:xfrm>
-            <a:off x="457200" y="713232"/>
-            <a:ext cx="11368735" cy="274320"/>
-          </a:xfrm>
-          <a:prstGeom prst="rect">
-            <a:avLst/>
-          </a:prstGeom>
-          <a:noFill/>
-          <a:ln/>
-        </p:spPr>
-        <p:txBody>
-          <a:bodyPr wrap="square" lIns="0" tIns="0" rIns="0" bIns="0" rtlCol="0" anchor="ctr"/>
-          <a:lstStyle/>
-          <a:p>
-            <a:pPr algn="r" indent="0" marL="0">
-              <a:buNone/>
-            </a:pPr>
-            <a:r>
-              <a:rPr lang="en-US" sz="1400" b="1" dirty="0">
-                <a:solidFill>
-                  <a:srgbClr val="1C3F6E"/>
-                </a:solidFill>
-                <a:latin typeface="Calibri" pitchFamily="34" charset="0"/>
-                <a:ea typeface="Calibri" pitchFamily="34" charset="-122"/>
-                <a:cs typeface="Calibri" pitchFamily="34" charset="-120"/>
-              </a:rPr>
               <a:t>BILINGUAL GAME</a:t>
             </a:r>
             <a:endParaRPr lang="en-US" sz="1400" dirty="0"/>
@@ -20151,7 +19425,7 @@
       </p:sp>
       <p:graphicFrame>
         <p:nvGraphicFramePr>
-          <p:cNvPr id="57" name="Table 0"/>
+          <p:cNvPr id="55" name="Table 0"/>
           <p:cNvGraphicFramePr>
             <a:graphicFrameLocks noGrp="1"/>
           </p:cNvGraphicFramePr>
@@ -21187,7 +20461,7 @@
             <a:pPr algn="ctr"/>
             <a:fld id="{F7021451-1387-4CA6-816F-3879F97B5CBC}" type="slidenum">
               <a:rPr b="1" lang="en-US"/>
-              <a:t>56</a:t>
+              <a:t>54</a:t>
             </a:fld>
             <a:endParaRPr lang="en-US"/>
           </a:p>
@@ -21201,9 +20475,9 @@
 </p:sld>
 </file>
 
-<file path=ppt/slides/slide57.xml><?xml version="1.0" encoding="utf-8"?>
+<file path=ppt/slides/slide55.xml><?xml version="1.0" encoding="utf-8"?>
 <p:sld xmlns:a="http://schemas.openxmlformats.org/drawingml/2006/main" xmlns:r="http://schemas.openxmlformats.org/officeDocument/2006/relationships" xmlns:p="http://schemas.openxmlformats.org/presentationml/2006/main">
-  <p:cSld name="Slide 57">
+  <p:cSld name="Slide 55">
     <p:spTree>
       <p:nvGrpSpPr>
         <p:cNvPr id="1" name=""/>
@@ -21298,7 +20572,7 @@
       </p:sp>
       <p:graphicFrame>
         <p:nvGraphicFramePr>
-          <p:cNvPr id="58" name="Table 0"/>
+          <p:cNvPr id="56" name="Table 0"/>
           <p:cNvGraphicFramePr>
             <a:graphicFrameLocks noGrp="1"/>
           </p:cNvGraphicFramePr>
@@ -21920,7 +21194,7 @@
             <a:pPr algn="ctr"/>
             <a:fld id="{F7021451-1387-4CA6-816F-3879F97B5CBC}" type="slidenum">
               <a:rPr b="1" lang="en-US"/>
-              <a:t>57</a:t>
+              <a:t>55</a:t>
             </a:fld>
             <a:endParaRPr lang="en-US"/>
           </a:p>
@@ -21934,9 +21208,9 @@
 </p:sld>
 </file>
 
-<file path=ppt/slides/slide58.xml><?xml version="1.0" encoding="utf-8"?>
+<file path=ppt/slides/slide56.xml><?xml version="1.0" encoding="utf-8"?>
 <p:sld xmlns:a="http://schemas.openxmlformats.org/drawingml/2006/main" xmlns:r="http://schemas.openxmlformats.org/officeDocument/2006/relationships" xmlns:p="http://schemas.openxmlformats.org/presentationml/2006/main">
-  <p:cSld name="Slide 58">
+  <p:cSld name="Slide 56">
     <p:spTree>
       <p:nvGrpSpPr>
         <p:cNvPr id="1" name=""/>
@@ -22031,7 +21305,7 @@
       </p:sp>
       <p:graphicFrame>
         <p:nvGraphicFramePr>
-          <p:cNvPr id="59" name="Table 0"/>
+          <p:cNvPr id="57" name="Table 0"/>
           <p:cNvGraphicFramePr>
             <a:graphicFrameLocks noGrp="1"/>
           </p:cNvGraphicFramePr>
@@ -22791,6 +22065,677 @@
             <a:pPr algn="ctr"/>
             <a:fld id="{F7021451-1387-4CA6-816F-3879F97B5CBC}" type="slidenum">
               <a:rPr b="1" lang="en-US"/>
+              <a:t>56</a:t>
+            </a:fld>
+            <a:endParaRPr lang="en-US"/>
+          </a:p>
+        </p:txBody>
+      </p:sp>
+    </p:spTree>
+  </p:cSld>
+  <p:clrMapOvr>
+    <a:masterClrMapping/>
+  </p:clrMapOvr>
+</p:sld>
+</file>
+
+<file path=ppt/slides/slide57.xml><?xml version="1.0" encoding="utf-8"?>
+<p:sld xmlns:a="http://schemas.openxmlformats.org/drawingml/2006/main" xmlns:r="http://schemas.openxmlformats.org/officeDocument/2006/relationships" xmlns:p="http://schemas.openxmlformats.org/presentationml/2006/main">
+  <p:cSld name="Slide 57">
+    <p:spTree>
+      <p:nvGrpSpPr>
+        <p:cNvPr id="1" name=""/>
+        <p:cNvGrpSpPr/>
+        <p:nvPr/>
+      </p:nvGrpSpPr>
+      <p:grpSpPr>
+        <a:xfrm>
+          <a:off x="0" y="0"/>
+          <a:ext cx="0" cy="0"/>
+          <a:chOff x="0" y="0"/>
+          <a:chExt cx="0" cy="0"/>
+        </a:xfrm>
+      </p:grpSpPr>
+      <p:sp>
+        <p:nvSpPr>
+          <p:cNvPr id="2" name="Text 0"/>
+          <p:cNvSpPr/>
+          <p:nvPr/>
+        </p:nvSpPr>
+        <p:spPr>
+          <a:xfrm>
+            <a:off x="457200" y="713232"/>
+            <a:ext cx="11368735" cy="274320"/>
+          </a:xfrm>
+          <a:prstGeom prst="rect">
+            <a:avLst/>
+          </a:prstGeom>
+          <a:noFill/>
+          <a:ln/>
+        </p:spPr>
+        <p:txBody>
+          <a:bodyPr wrap="square" lIns="0" tIns="0" rIns="0" bIns="0" rtlCol="0" anchor="ctr"/>
+          <a:lstStyle/>
+          <a:p>
+            <a:pPr algn="r" indent="0" marL="0">
+              <a:buNone/>
+            </a:pPr>
+            <a:r>
+              <a:rPr lang="en-US" sz="1400" b="1" dirty="0">
+                <a:solidFill>
+                  <a:srgbClr val="1C3F6E"/>
+                </a:solidFill>
+                <a:latin typeface="Calibri" pitchFamily="34" charset="0"/>
+                <a:ea typeface="Calibri" pitchFamily="34" charset="-122"/>
+                <a:cs typeface="Calibri" pitchFamily="34" charset="-120"/>
+              </a:rPr>
+              <a:t>TEACHER'S NOTE</a:t>
+            </a:r>
+            <a:endParaRPr lang="en-US" sz="1400" dirty="0"/>
+          </a:p>
+        </p:txBody>
+      </p:sp>
+      <p:pic>
+        <p:nvPicPr>
+          <p:cNvPr id="3" name="Image 0" descr="/home/claude/f4/img/minesec_sheet.png">    </p:cNvPr>
+          <p:cNvPicPr>
+            <a:picLocks noChangeAspect="1"/>
+          </p:cNvPicPr>
+          <p:nvPr/>
+        </p:nvPicPr>
+        <p:blipFill>
+          <a:blip r:embed="rId1"/>
+          <a:stretch>
+            <a:fillRect/>
+          </a:stretch>
+        </p:blipFill>
+        <p:spPr>
+          <a:xfrm>
+            <a:off x="0" y="658368"/>
+            <a:ext cx="3840480" cy="5833872"/>
+          </a:xfrm>
+          <a:prstGeom prst="rect">
+            <a:avLst/>
+          </a:prstGeom>
+        </p:spPr>
+      </p:pic>
+      <p:sp>
+        <p:nvSpPr>
+          <p:cNvPr id="4" name="Text 1"/>
+          <p:cNvSpPr/>
+          <p:nvPr/>
+        </p:nvSpPr>
+        <p:spPr>
+          <a:xfrm>
+            <a:off x="4069080" y="1005840"/>
+            <a:ext cx="7802575" cy="731520"/>
+          </a:xfrm>
+          <a:prstGeom prst="rect">
+            <a:avLst/>
+          </a:prstGeom>
+          <a:noFill/>
+          <a:ln/>
+        </p:spPr>
+        <p:txBody>
+          <a:bodyPr wrap="square" lIns="0" tIns="0" rIns="0" bIns="0" rtlCol="0" anchor="ctr">
+            <a:normAutofit/>
+          </a:bodyPr>
+          <a:lstStyle/>
+          <a:p>
+            <a:pPr algn="ctr" indent="0" marL="0">
+              <a:buNone/>
+            </a:pPr>
+            <a:r>
+              <a:rPr lang="en-US" sz="3600" b="1" dirty="0">
+                <a:solidFill>
+                  <a:srgbClr val="990011"/>
+                </a:solidFill>
+                <a:latin typeface="Times New Roman" pitchFamily="34" charset="0"/>
+                <a:ea typeface="Times New Roman" pitchFamily="34" charset="-122"/>
+                <a:cs typeface="Times New Roman" pitchFamily="34" charset="-120"/>
+              </a:rPr>
+              <a:t>Teacher's Note</a:t>
+            </a:r>
+            <a:endParaRPr lang="en-US" sz="3600" dirty="0"/>
+          </a:p>
+        </p:txBody>
+      </p:sp>
+      <p:sp>
+        <p:nvSpPr>
+          <p:cNvPr id="5" name="Text 2"/>
+          <p:cNvSpPr/>
+          <p:nvPr/>
+        </p:nvSpPr>
+        <p:spPr>
+          <a:xfrm>
+            <a:off x="4069080" y="1783080"/>
+            <a:ext cx="7802575" cy="4663440"/>
+          </a:xfrm>
+          <a:prstGeom prst="rect">
+            <a:avLst/>
+          </a:prstGeom>
+          <a:noFill/>
+          <a:ln/>
+        </p:spPr>
+        <p:txBody>
+          <a:bodyPr wrap="square" lIns="0" tIns="0" rIns="0" bIns="0" rtlCol="0" anchor="t"/>
+          <a:lstStyle/>
+          <a:p>
+            <a:pPr algn="l" marL="342900" indent="-342900">
+              <a:spcAft>
+                <a:spcPts val="800"/>
+              </a:spcAft>
+              <a:buSzPct val="100000"/>
+              <a:buChar char="•"/>
+            </a:pPr>
+            <a:r>
+              <a:rPr lang="en-US" sz="2000" dirty="0">
+                <a:solidFill>
+                  <a:srgbClr val="111111"/>
+                </a:solidFill>
+                <a:latin typeface="Calibri" pitchFamily="34" charset="0"/>
+                <a:ea typeface="Calibri" pitchFamily="34" charset="-122"/>
+                <a:cs typeface="Calibri" pitchFamily="34" charset="-120"/>
+              </a:rPr>
+              <a:t>Timing: Homework correction, plan, objectives 8 min | Recall, situation, action 10 min | 5 activities 30 min | Board summary (copying) 30 min | Evaluation, remediation 10 min | Homework, next lesson 5 min | Logbook 7 min</a:t>
+            </a:r>
+            <a:endParaRPr lang="en-US" sz="2000" dirty="0"/>
+          </a:p>
+          <a:p>
+            <a:pPr algn="l" marL="342900" indent="-342900">
+              <a:spcAft>
+                <a:spcPts val="800"/>
+              </a:spcAft>
+              <a:buSzPct val="100000"/>
+              <a:buChar char="•"/>
+            </a:pPr>
+            <a:r>
+              <a:rPr lang="en-US" sz="2000" dirty="0">
+                <a:solidFill>
+                  <a:srgbClr val="111111"/>
+                </a:solidFill>
+                <a:latin typeface="Calibri" pitchFamily="34" charset="0"/>
+                <a:ea typeface="Calibri" pitchFamily="34" charset="-122"/>
+                <a:cs typeface="Calibri" pitchFamily="34" charset="-120"/>
+              </a:rPr>
+              <a:t>Without the projector (Activity 1): draw the bars from a table.</a:t>
+            </a:r>
+            <a:endParaRPr lang="en-US" sz="2000" dirty="0"/>
+          </a:p>
+          <a:p>
+            <a:pPr algn="l" marL="342900" indent="-342900">
+              <a:spcAft>
+                <a:spcPts val="800"/>
+              </a:spcAft>
+              <a:buSzPct val="100000"/>
+              <a:buChar char="•"/>
+            </a:pPr>
+            <a:r>
+              <a:rPr lang="en-US" sz="2000" dirty="0">
+                <a:solidFill>
+                  <a:srgbClr val="111111"/>
+                </a:solidFill>
+                <a:latin typeface="Calibri" pitchFamily="34" charset="0"/>
+                <a:ea typeface="Calibri" pitchFamily="34" charset="-122"/>
+                <a:cs typeface="Calibri" pitchFamily="34" charset="-120"/>
+              </a:rPr>
+              <a:t>Without the projector (Activity 2): describe the summit of Mount Cameroon.</a:t>
+            </a:r>
+            <a:endParaRPr lang="en-US" sz="2000" dirty="0"/>
+          </a:p>
+          <a:p>
+            <a:pPr algn="l" marL="342900" indent="-342900">
+              <a:spcAft>
+                <a:spcPts val="800"/>
+              </a:spcAft>
+              <a:buSzPct val="100000"/>
+              <a:buChar char="•"/>
+            </a:pPr>
+            <a:r>
+              <a:rPr lang="en-US" sz="2000" dirty="0">
+                <a:solidFill>
+                  <a:srgbClr val="111111"/>
+                </a:solidFill>
+                <a:latin typeface="Calibri" pitchFamily="34" charset="0"/>
+                <a:ea typeface="Calibri" pitchFamily="34" charset="-122"/>
+                <a:cs typeface="Calibri" pitchFamily="34" charset="-120"/>
+              </a:rPr>
+              <a:t>Without the projector (Activity 3): write the table on the board.</a:t>
+            </a:r>
+            <a:endParaRPr lang="en-US" sz="2000" dirty="0"/>
+          </a:p>
+          <a:p>
+            <a:pPr algn="l" marL="342900" indent="-342900">
+              <a:spcAft>
+                <a:spcPts val="800"/>
+              </a:spcAft>
+              <a:buSzPct val="100000"/>
+              <a:buChar char="•"/>
+            </a:pPr>
+            <a:r>
+              <a:rPr lang="en-US" sz="2000" dirty="0">
+                <a:solidFill>
+                  <a:srgbClr val="111111"/>
+                </a:solidFill>
+                <a:latin typeface="Calibri" pitchFamily="34" charset="0"/>
+                <a:ea typeface="Calibri" pitchFamily="34" charset="-122"/>
+                <a:cs typeface="Calibri" pitchFamily="34" charset="-120"/>
+              </a:rPr>
+              <a:t>Without the projector (Activity 4): locate Bolivia on a map.</a:t>
+            </a:r>
+            <a:endParaRPr lang="en-US" sz="2000" dirty="0"/>
+          </a:p>
+          <a:p>
+            <a:pPr algn="l" marL="342900" indent="-342900">
+              <a:spcAft>
+                <a:spcPts val="800"/>
+              </a:spcAft>
+              <a:buSzPct val="100000"/>
+              <a:buChar char="•"/>
+            </a:pPr>
+            <a:r>
+              <a:rPr lang="en-US" sz="2000" dirty="0">
+                <a:solidFill>
+                  <a:srgbClr val="111111"/>
+                </a:solidFill>
+                <a:latin typeface="Calibri" pitchFamily="34" charset="0"/>
+                <a:ea typeface="Calibri" pitchFamily="34" charset="-122"/>
+                <a:cs typeface="Calibri" pitchFamily="34" charset="-120"/>
+              </a:rPr>
+              <a:t>Without the projector (Activity 5): name crops of the Western Highlands.</a:t>
+            </a:r>
+            <a:endParaRPr lang="en-US" sz="2000" dirty="0"/>
+          </a:p>
+        </p:txBody>
+      </p:sp>
+      <p:sp>
+        <p:nvSpPr>
+          <p:cNvPr id="25" name="Slide Number Placeholder 0"/>
+          <p:cNvSpPr>
+            <a:spLocks noGrp="1"/>
+          </p:cNvSpPr>
+          <p:nvPr>
+            <p:ph type="sldNum" sz="quarter" idx="4294967295"/>
+          </p:nvPr>
+        </p:nvSpPr>
+        <p:spPr>
+          <a:xfrm>
+            <a:off x="27432" y="91440"/>
+            <a:ext cx="585216" cy="475488"/>
+          </a:xfrm>
+          <a:prstGeom prst="rect">
+            <a:avLst/>
+          </a:prstGeom>
+          <a:extLst>
+            <a:ext uri="{C572A759-6A51-4108-AA02-DFA0A04FC94B}">
+              <ma14:wrappingTextBoxFlag xmlns:ma14="http://schemas.microsoft.com/office/mac/drawingml/2011/main" val="0"/>
+            </a:ext>
+          </a:extLst>
+        </p:spPr>
+        <p:txBody>
+          <a:bodyPr/>
+          <a:lstStyle>
+            <a:lvl1pPr>
+              <a:defRPr sz="2000">
+                <a:solidFill>
+                  <a:srgbClr val="FFFFFF"/>
+                </a:solidFill>
+                <a:latin typeface="Calibri"/>
+                <a:ea typeface="Calibri"/>
+                <a:cs typeface="Calibri"/>
+              </a:defRPr>
+            </a:lvl1pPr>
+          </a:lstStyle>
+          <a:p>
+            <a:pPr algn="ctr"/>
+            <a:fld id="{F7021451-1387-4CA6-816F-3879F97B5CBC}" type="slidenum">
+              <a:rPr b="1" lang="en-US"/>
+              <a:t>57</a:t>
+            </a:fld>
+            <a:endParaRPr lang="en-US"/>
+          </a:p>
+        </p:txBody>
+      </p:sp>
+    </p:spTree>
+  </p:cSld>
+  <p:clrMapOvr>
+    <a:masterClrMapping/>
+  </p:clrMapOvr>
+</p:sld>
+</file>
+
+<file path=ppt/slides/slide58.xml><?xml version="1.0" encoding="utf-8"?>
+<p:sld xmlns:a="http://schemas.openxmlformats.org/drawingml/2006/main" xmlns:r="http://schemas.openxmlformats.org/officeDocument/2006/relationships" xmlns:p="http://schemas.openxmlformats.org/presentationml/2006/main">
+  <p:cSld name="Slide 58">
+    <p:spTree>
+      <p:nvGrpSpPr>
+        <p:cNvPr id="1" name=""/>
+        <p:cNvGrpSpPr/>
+        <p:nvPr/>
+      </p:nvGrpSpPr>
+      <p:grpSpPr>
+        <a:xfrm>
+          <a:off x="0" y="0"/>
+          <a:ext cx="0" cy="0"/>
+          <a:chOff x="0" y="0"/>
+          <a:chExt cx="0" cy="0"/>
+        </a:xfrm>
+      </p:grpSpPr>
+      <p:sp>
+        <p:nvSpPr>
+          <p:cNvPr id="2" name="Text 0"/>
+          <p:cNvSpPr/>
+          <p:nvPr/>
+        </p:nvSpPr>
+        <p:spPr>
+          <a:xfrm>
+            <a:off x="457200" y="713232"/>
+            <a:ext cx="11368735" cy="274320"/>
+          </a:xfrm>
+          <a:prstGeom prst="rect">
+            <a:avLst/>
+          </a:prstGeom>
+          <a:noFill/>
+          <a:ln/>
+        </p:spPr>
+        <p:txBody>
+          <a:bodyPr wrap="square" lIns="0" tIns="0" rIns="0" bIns="0" rtlCol="0" anchor="ctr"/>
+          <a:lstStyle/>
+          <a:p>
+            <a:pPr algn="r" indent="0" marL="0">
+              <a:buNone/>
+            </a:pPr>
+            <a:r>
+              <a:rPr lang="en-US" sz="1400" b="1" dirty="0">
+                <a:solidFill>
+                  <a:srgbClr val="1C3F6E"/>
+                </a:solidFill>
+                <a:latin typeface="Calibri" pitchFamily="34" charset="0"/>
+                <a:ea typeface="Calibri" pitchFamily="34" charset="-122"/>
+                <a:cs typeface="Calibri" pitchFamily="34" charset="-120"/>
+              </a:rPr>
+              <a:t>REFERENCES</a:t>
+            </a:r>
+            <a:endParaRPr lang="en-US" sz="1400" dirty="0"/>
+          </a:p>
+        </p:txBody>
+      </p:sp>
+      <p:pic>
+        <p:nvPicPr>
+          <p:cNvPr id="3" name="Image 0" descr="/home/claude/f4/img/minesec_sheet.png">    </p:cNvPr>
+          <p:cNvPicPr>
+            <a:picLocks noChangeAspect="1"/>
+          </p:cNvPicPr>
+          <p:nvPr/>
+        </p:nvPicPr>
+        <p:blipFill>
+          <a:blip r:embed="rId1"/>
+          <a:stretch>
+            <a:fillRect/>
+          </a:stretch>
+        </p:blipFill>
+        <p:spPr>
+          <a:xfrm>
+            <a:off x="0" y="658368"/>
+            <a:ext cx="2468880" cy="5833872"/>
+          </a:xfrm>
+          <a:prstGeom prst="rect">
+            <a:avLst/>
+          </a:prstGeom>
+        </p:spPr>
+      </p:pic>
+      <p:sp>
+        <p:nvSpPr>
+          <p:cNvPr id="4" name="Text 1"/>
+          <p:cNvSpPr/>
+          <p:nvPr/>
+        </p:nvSpPr>
+        <p:spPr>
+          <a:xfrm>
+            <a:off x="2697480" y="1005840"/>
+            <a:ext cx="9174175" cy="731520"/>
+          </a:xfrm>
+          <a:prstGeom prst="rect">
+            <a:avLst/>
+          </a:prstGeom>
+          <a:noFill/>
+          <a:ln/>
+        </p:spPr>
+        <p:txBody>
+          <a:bodyPr wrap="square" lIns="0" tIns="0" rIns="0" bIns="0" rtlCol="0" anchor="ctr">
+            <a:normAutofit/>
+          </a:bodyPr>
+          <a:lstStyle/>
+          <a:p>
+            <a:pPr algn="ctr" indent="0" marL="0">
+              <a:buNone/>
+            </a:pPr>
+            <a:r>
+              <a:rPr lang="en-US" sz="3600" b="1" dirty="0">
+                <a:solidFill>
+                  <a:srgbClr val="990011"/>
+                </a:solidFill>
+                <a:latin typeface="Times New Roman" pitchFamily="34" charset="0"/>
+                <a:ea typeface="Times New Roman" pitchFamily="34" charset="-122"/>
+                <a:cs typeface="Times New Roman" pitchFamily="34" charset="-120"/>
+              </a:rPr>
+              <a:t>References</a:t>
+            </a:r>
+            <a:endParaRPr lang="en-US" sz="3600" dirty="0"/>
+          </a:p>
+        </p:txBody>
+      </p:sp>
+      <p:sp>
+        <p:nvSpPr>
+          <p:cNvPr id="5" name="Text 2"/>
+          <p:cNvSpPr/>
+          <p:nvPr/>
+        </p:nvSpPr>
+        <p:spPr>
+          <a:xfrm>
+            <a:off x="2697480" y="1783080"/>
+            <a:ext cx="9174175" cy="4663440"/>
+          </a:xfrm>
+          <a:prstGeom prst="rect">
+            <a:avLst/>
+          </a:prstGeom>
+          <a:noFill/>
+          <a:ln/>
+        </p:spPr>
+        <p:txBody>
+          <a:bodyPr wrap="square" lIns="0" tIns="0" rIns="0" bIns="0" rtlCol="0" anchor="t"/>
+          <a:lstStyle/>
+          <a:p>
+            <a:pPr algn="l" marL="342900" indent="-342900">
+              <a:spcAft>
+                <a:spcPts val="800"/>
+              </a:spcAft>
+              <a:buSzPct val="100000"/>
+              <a:buChar char="•"/>
+            </a:pPr>
+            <a:r>
+              <a:rPr lang="en-US" sz="1800" dirty="0">
+                <a:solidFill>
+                  <a:srgbClr val="111111"/>
+                </a:solidFill>
+                <a:latin typeface="Calibri" pitchFamily="34" charset="0"/>
+                <a:ea typeface="Calibri" pitchFamily="34" charset="-122"/>
+                <a:cs typeface="Calibri" pitchFamily="34" charset="-120"/>
+              </a:rPr>
+              <a:t>Geography Syllabus for Sixth Forms (Lower and Upper Sixth), MINESEC, 2019 — Module 4 (Population Geography).</a:t>
+            </a:r>
+            <a:endParaRPr lang="en-US" sz="1800" dirty="0"/>
+          </a:p>
+          <a:p>
+            <a:pPr algn="l" marL="342900" indent="-342900">
+              <a:spcAft>
+                <a:spcPts val="800"/>
+              </a:spcAft>
+              <a:buSzPct val="100000"/>
+              <a:buChar char="•"/>
+            </a:pPr>
+            <a:r>
+              <a:rPr lang="en-US" sz="1800" dirty="0">
+                <a:solidFill>
+                  <a:srgbClr val="111111"/>
+                </a:solidFill>
+                <a:latin typeface="Calibri" pitchFamily="34" charset="0"/>
+                <a:ea typeface="Calibri" pitchFamily="34" charset="-122"/>
+                <a:cs typeface="Calibri" pitchFamily="34" charset="-120"/>
+              </a:rPr>
+              <a:t>Teacher's course notes: Mr KAMDEM E., Population Geography (USA), GBHS Garoua, 2026.</a:t>
+            </a:r>
+            <a:endParaRPr lang="en-US" sz="1800" dirty="0"/>
+          </a:p>
+          <a:p>
+            <a:pPr algn="l" marL="342900" indent="-342900">
+              <a:spcAft>
+                <a:spcPts val="800"/>
+              </a:spcAft>
+              <a:buSzPct val="100000"/>
+              <a:buChar char="•"/>
+            </a:pPr>
+            <a:r>
+              <a:rPr lang="en-US" sz="1800" dirty="0">
+                <a:solidFill>
+                  <a:srgbClr val="111111"/>
+                </a:solidFill>
+                <a:latin typeface="Calibri" pitchFamily="34" charset="0"/>
+                <a:ea typeface="Calibri" pitchFamily="34" charset="-122"/>
+                <a:cs typeface="Calibri" pitchFamily="34" charset="-120"/>
+              </a:rPr>
+              <a:t>United Nations, World Population Prospects 2024.</a:t>
+            </a:r>
+            <a:endParaRPr lang="en-US" sz="1800" dirty="0"/>
+          </a:p>
+          <a:p>
+            <a:pPr algn="l" marL="342900" indent="-342900">
+              <a:spcAft>
+                <a:spcPts val="800"/>
+              </a:spcAft>
+              <a:buSzPct val="100000"/>
+              <a:buChar char="•"/>
+            </a:pPr>
+            <a:r>
+              <a:rPr lang="en-US" sz="1800" dirty="0">
+                <a:solidFill>
+                  <a:srgbClr val="111111"/>
+                </a:solidFill>
+                <a:latin typeface="Calibri" pitchFamily="34" charset="0"/>
+                <a:ea typeface="Calibri" pitchFamily="34" charset="-122"/>
+                <a:cs typeface="Calibri" pitchFamily="34" charset="-120"/>
+              </a:rPr>
+              <a:t>Photo, Activity 2: “View of the Himalaya Mountain Range” by NASA Johnson, CC BY-NC 2.0, via nasa (https://www.flickr.com/photos/29988733@N04/10678470543)</a:t>
+            </a:r>
+            <a:endParaRPr lang="en-US" sz="1800" dirty="0"/>
+          </a:p>
+          <a:p>
+            <a:pPr algn="l" marL="342900" indent="-342900">
+              <a:spcAft>
+                <a:spcPts val="800"/>
+              </a:spcAft>
+              <a:buSzPct val="100000"/>
+              <a:buChar char="•"/>
+            </a:pPr>
+            <a:r>
+              <a:rPr lang="en-US" sz="1800" dirty="0">
+                <a:solidFill>
+                  <a:srgbClr val="111111"/>
+                </a:solidFill>
+                <a:latin typeface="Calibri" pitchFamily="34" charset="0"/>
+                <a:ea typeface="Calibri" pitchFamily="34" charset="-122"/>
+                <a:cs typeface="Calibri" pitchFamily="34" charset="-120"/>
+              </a:rPr>
+              <a:t>Photo, Activity 4: “La Paz” by cliff.hellis, CC BY-NC-ND 2.0, via Flickr (https://www.flickr.com/photos/30099537@N02/6348597083)</a:t>
+            </a:r>
+            <a:endParaRPr lang="en-US" sz="1800" dirty="0"/>
+          </a:p>
+          <a:p>
+            <a:pPr algn="l" marL="342900" indent="-342900">
+              <a:spcAft>
+                <a:spcPts val="800"/>
+              </a:spcAft>
+              <a:buSzPct val="100000"/>
+              <a:buChar char="•"/>
+            </a:pPr>
+            <a:r>
+              <a:rPr lang="en-US" sz="1800" dirty="0">
+                <a:solidFill>
+                  <a:srgbClr val="111111"/>
+                </a:solidFill>
+                <a:latin typeface="Calibri" pitchFamily="34" charset="0"/>
+                <a:ea typeface="Calibri" pitchFamily="34" charset="-122"/>
+                <a:cs typeface="Calibri" pitchFamily="34" charset="-120"/>
+              </a:rPr>
+              <a:t>Photo, Activity 5: “Carlo in the tea” by luigig, CC BY 2.0, via Flickr (https://www.flickr.com/photos/51035803402@N01/3175986747)</a:t>
+            </a:r>
+            <a:endParaRPr lang="en-US" sz="1800" dirty="0"/>
+          </a:p>
+          <a:p>
+            <a:pPr algn="l" marL="342900" indent="-342900">
+              <a:spcAft>
+                <a:spcPts val="800"/>
+              </a:spcAft>
+              <a:buSzPct val="100000"/>
+              <a:buChar char="•"/>
+            </a:pPr>
+            <a:r>
+              <a:rPr lang="en-US" sz="1800" dirty="0">
+                <a:solidFill>
+                  <a:srgbClr val="111111"/>
+                </a:solidFill>
+                <a:latin typeface="Calibri" pitchFamily="34" charset="0"/>
+                <a:ea typeface="Calibri" pitchFamily="34" charset="-122"/>
+                <a:cs typeface="Calibri" pitchFamily="34" charset="-120"/>
+              </a:rPr>
+              <a:t>Photo, board summary (Low altitudes (0 to 500 m)): “A woman harvesting rice, Barotse floodplain, Zambia. Photo by Georgina” by WorldFish, CC BY-NC-ND 2.0, via Flickr (https://www.flickr.com/photos/61545321@N06/7848727138)</a:t>
+            </a:r>
+            <a:endParaRPr lang="en-US" sz="1800" dirty="0"/>
+          </a:p>
+        </p:txBody>
+      </p:sp>
+      <p:sp>
+        <p:nvSpPr>
+          <p:cNvPr id="25" name="Slide Number Placeholder 0"/>
+          <p:cNvSpPr>
+            <a:spLocks noGrp="1"/>
+          </p:cNvSpPr>
+          <p:nvPr>
+            <p:ph type="sldNum" sz="quarter" idx="4294967295"/>
+          </p:nvPr>
+        </p:nvSpPr>
+        <p:spPr>
+          <a:xfrm>
+            <a:off x="27432" y="91440"/>
+            <a:ext cx="585216" cy="475488"/>
+          </a:xfrm>
+          <a:prstGeom prst="rect">
+            <a:avLst/>
+          </a:prstGeom>
+          <a:extLst>
+            <a:ext uri="{C572A759-6A51-4108-AA02-DFA0A04FC94B}">
+              <ma14:wrappingTextBoxFlag xmlns:ma14="http://schemas.microsoft.com/office/mac/drawingml/2011/main" val="0"/>
+            </a:ext>
+          </a:extLst>
+        </p:spPr>
+        <p:txBody>
+          <a:bodyPr/>
+          <a:lstStyle>
+            <a:lvl1pPr>
+              <a:defRPr sz="2000">
+                <a:solidFill>
+                  <a:srgbClr val="FFFFFF"/>
+                </a:solidFill>
+                <a:latin typeface="Calibri"/>
+                <a:ea typeface="Calibri"/>
+                <a:cs typeface="Calibri"/>
+              </a:defRPr>
+            </a:lvl1pPr>
+          </a:lstStyle>
+          <a:p>
+            <a:pPr algn="ctr"/>
+            <a:fld id="{F7021451-1387-4CA6-816F-3879F97B5CBC}" type="slidenum">
+              <a:rPr b="1" lang="en-US"/>
               <a:t>58</a:t>
             </a:fld>
             <a:endParaRPr lang="en-US"/>
@@ -22855,7 +22800,7 @@
                 <a:ea typeface="Calibri" pitchFamily="34" charset="-122"/>
                 <a:cs typeface="Calibri" pitchFamily="34" charset="-120"/>
               </a:rPr>
-              <a:t>TEACHER'S NOTE</a:t>
+              <a:t>REFERENCES</a:t>
             </a:r>
             <a:endParaRPr lang="en-US" sz="1400" dirty="0"/>
           </a:p>
@@ -22878,7 +22823,7 @@
         <p:spPr>
           <a:xfrm>
             <a:off x="0" y="658368"/>
-            <a:ext cx="3840480" cy="5833872"/>
+            <a:ext cx="5120640" cy="5833872"/>
           </a:xfrm>
           <a:prstGeom prst="rect">
             <a:avLst/>
@@ -22893,8 +22838,8 @@
         </p:nvSpPr>
         <p:spPr>
           <a:xfrm>
-            <a:off x="4069080" y="1005840"/>
-            <a:ext cx="7802575" cy="731520"/>
+            <a:off x="5349240" y="1005840"/>
+            <a:ext cx="6522415" cy="731520"/>
           </a:xfrm>
           <a:prstGeom prst="rect">
             <a:avLst/>
@@ -22920,7 +22865,7 @@
                 <a:ea typeface="Times New Roman" pitchFamily="34" charset="-122"/>
                 <a:cs typeface="Times New Roman" pitchFamily="34" charset="-120"/>
               </a:rPr>
-              <a:t>Teacher's Note</a:t>
+              <a:t>References (continued)</a:t>
             </a:r>
             <a:endParaRPr lang="en-US" sz="3600" dirty="0"/>
           </a:p>
@@ -22934,8 +22879,8 @@
         </p:nvSpPr>
         <p:spPr>
           <a:xfrm>
-            <a:off x="4069080" y="1783080"/>
-            <a:ext cx="7802575" cy="4663440"/>
+            <a:off x="5349240" y="1783080"/>
+            <a:ext cx="6522415" cy="4663440"/>
           </a:xfrm>
           <a:prstGeom prst="rect">
             <a:avLst/>
@@ -22955,7 +22900,7 @@
               <a:buChar char="•"/>
             </a:pPr>
             <a:r>
-              <a:rPr lang="en-US" sz="2000" dirty="0">
+              <a:rPr lang="en-US" sz="1800" dirty="0">
                 <a:solidFill>
                   <a:srgbClr val="111111"/>
                 </a:solidFill>
@@ -22963,114 +22908,9 @@
                 <a:ea typeface="Calibri" pitchFamily="34" charset="-122"/>
                 <a:cs typeface="Calibri" pitchFamily="34" charset="-120"/>
               </a:rPr>
-              <a:t>Timing: Homework correction, plan, objectives 8 min | Recall, situation, action 10 min | 5 activities 30 min | Board summary (copying) 30 min | Evaluation, remediation 10 min | Homework, next lesson 5 min | Logbook 7 min</a:t>
-            </a:r>
-            <a:endParaRPr lang="en-US" sz="2000" dirty="0"/>
-          </a:p>
-          <a:p>
-            <a:pPr algn="l" marL="342900" indent="-342900">
-              <a:spcAft>
-                <a:spcPts val="800"/>
-              </a:spcAft>
-              <a:buSzPct val="100000"/>
-              <a:buChar char="•"/>
-            </a:pPr>
-            <a:r>
-              <a:rPr lang="en-US" sz="2000" dirty="0">
-                <a:solidFill>
-                  <a:srgbClr val="111111"/>
-                </a:solidFill>
-                <a:latin typeface="Calibri" pitchFamily="34" charset="0"/>
-                <a:ea typeface="Calibri" pitchFamily="34" charset="-122"/>
-                <a:cs typeface="Calibri" pitchFamily="34" charset="-120"/>
-              </a:rPr>
-              <a:t>Without the projector (Activity 1): draw the bars from a table.</a:t>
-            </a:r>
-            <a:endParaRPr lang="en-US" sz="2000" dirty="0"/>
-          </a:p>
-          <a:p>
-            <a:pPr algn="l" marL="342900" indent="-342900">
-              <a:spcAft>
-                <a:spcPts val="800"/>
-              </a:spcAft>
-              <a:buSzPct val="100000"/>
-              <a:buChar char="•"/>
-            </a:pPr>
-            <a:r>
-              <a:rPr lang="en-US" sz="2000" dirty="0">
-                <a:solidFill>
-                  <a:srgbClr val="111111"/>
-                </a:solidFill>
-                <a:latin typeface="Calibri" pitchFamily="34" charset="0"/>
-                <a:ea typeface="Calibri" pitchFamily="34" charset="-122"/>
-                <a:cs typeface="Calibri" pitchFamily="34" charset="-120"/>
-              </a:rPr>
-              <a:t>Without the projector (Activity 2): describe the summit of Mount Cameroon.</a:t>
-            </a:r>
-            <a:endParaRPr lang="en-US" sz="2000" dirty="0"/>
-          </a:p>
-          <a:p>
-            <a:pPr algn="l" marL="342900" indent="-342900">
-              <a:spcAft>
-                <a:spcPts val="800"/>
-              </a:spcAft>
-              <a:buSzPct val="100000"/>
-              <a:buChar char="•"/>
-            </a:pPr>
-            <a:r>
-              <a:rPr lang="en-US" sz="2000" dirty="0">
-                <a:solidFill>
-                  <a:srgbClr val="111111"/>
-                </a:solidFill>
-                <a:latin typeface="Calibri" pitchFamily="34" charset="0"/>
-                <a:ea typeface="Calibri" pitchFamily="34" charset="-122"/>
-                <a:cs typeface="Calibri" pitchFamily="34" charset="-120"/>
-              </a:rPr>
-              <a:t>Without the projector (Activity 3): write the table on the board.</a:t>
-            </a:r>
-            <a:endParaRPr lang="en-US" sz="2000" dirty="0"/>
-          </a:p>
-          <a:p>
-            <a:pPr algn="l" marL="342900" indent="-342900">
-              <a:spcAft>
-                <a:spcPts val="800"/>
-              </a:spcAft>
-              <a:buSzPct val="100000"/>
-              <a:buChar char="•"/>
-            </a:pPr>
-            <a:r>
-              <a:rPr lang="en-US" sz="2000" dirty="0">
-                <a:solidFill>
-                  <a:srgbClr val="111111"/>
-                </a:solidFill>
-                <a:latin typeface="Calibri" pitchFamily="34" charset="0"/>
-                <a:ea typeface="Calibri" pitchFamily="34" charset="-122"/>
-                <a:cs typeface="Calibri" pitchFamily="34" charset="-120"/>
-              </a:rPr>
-              <a:t>Without the projector (Activity 4): locate Bolivia on a map.</a:t>
-            </a:r>
-            <a:endParaRPr lang="en-US" sz="2000" dirty="0"/>
-          </a:p>
-          <a:p>
-            <a:pPr algn="l" marL="342900" indent="-342900">
-              <a:spcAft>
-                <a:spcPts val="800"/>
-              </a:spcAft>
-              <a:buSzPct val="100000"/>
-              <a:buChar char="•"/>
-            </a:pPr>
-            <a:r>
-              <a:rPr lang="en-US" sz="2000" dirty="0">
-                <a:solidFill>
-                  <a:srgbClr val="111111"/>
-                </a:solidFill>
-                <a:latin typeface="Calibri" pitchFamily="34" charset="0"/>
-                <a:ea typeface="Calibri" pitchFamily="34" charset="-122"/>
-                <a:cs typeface="Calibri" pitchFamily="34" charset="-120"/>
-              </a:rPr>
-              <a:t>Without the projector (Activity 5): name crops of the Western Highlands.</a:t>
-            </a:r>
-            <a:endParaRPr lang="en-US" sz="2000" dirty="0"/>
+              <a:t>Diagrams and animations: drawn for this lesson (Geography Department).</a:t>
+            </a:r>
+            <a:endParaRPr lang="en-US" sz="1800" dirty="0"/>
           </a:p>
         </p:txBody>
       </p:sp>
@@ -23448,593 +23288,6 @@
             <a:fld id="{F7021451-1387-4CA6-816F-3879F97B5CBC}" type="slidenum">
               <a:rPr b="1" lang="en-US"/>
               <a:t>6</a:t>
-            </a:fld>
-            <a:endParaRPr lang="en-US"/>
-          </a:p>
-        </p:txBody>
-      </p:sp>
-    </p:spTree>
-  </p:cSld>
-  <p:clrMapOvr>
-    <a:masterClrMapping/>
-  </p:clrMapOvr>
-</p:sld>
-</file>
-
-<file path=ppt/slides/slide60.xml><?xml version="1.0" encoding="utf-8"?>
-<p:sld xmlns:a="http://schemas.openxmlformats.org/drawingml/2006/main" xmlns:r="http://schemas.openxmlformats.org/officeDocument/2006/relationships" xmlns:p="http://schemas.openxmlformats.org/presentationml/2006/main">
-  <p:cSld name="Slide 60">
-    <p:spTree>
-      <p:nvGrpSpPr>
-        <p:cNvPr id="1" name=""/>
-        <p:cNvGrpSpPr/>
-        <p:nvPr/>
-      </p:nvGrpSpPr>
-      <p:grpSpPr>
-        <a:xfrm>
-          <a:off x="0" y="0"/>
-          <a:ext cx="0" cy="0"/>
-          <a:chOff x="0" y="0"/>
-          <a:chExt cx="0" cy="0"/>
-        </a:xfrm>
-      </p:grpSpPr>
-      <p:sp>
-        <p:nvSpPr>
-          <p:cNvPr id="2" name="Text 0"/>
-          <p:cNvSpPr/>
-          <p:nvPr/>
-        </p:nvSpPr>
-        <p:spPr>
-          <a:xfrm>
-            <a:off x="457200" y="713232"/>
-            <a:ext cx="11368735" cy="274320"/>
-          </a:xfrm>
-          <a:prstGeom prst="rect">
-            <a:avLst/>
-          </a:prstGeom>
-          <a:noFill/>
-          <a:ln/>
-        </p:spPr>
-        <p:txBody>
-          <a:bodyPr wrap="square" lIns="0" tIns="0" rIns="0" bIns="0" rtlCol="0" anchor="ctr"/>
-          <a:lstStyle/>
-          <a:p>
-            <a:pPr algn="r" indent="0" marL="0">
-              <a:buNone/>
-            </a:pPr>
-            <a:r>
-              <a:rPr lang="en-US" sz="1400" b="1" dirty="0">
-                <a:solidFill>
-                  <a:srgbClr val="1C3F6E"/>
-                </a:solidFill>
-                <a:latin typeface="Calibri" pitchFamily="34" charset="0"/>
-                <a:ea typeface="Calibri" pitchFamily="34" charset="-122"/>
-                <a:cs typeface="Calibri" pitchFamily="34" charset="-120"/>
-              </a:rPr>
-              <a:t>REFERENCES</a:t>
-            </a:r>
-            <a:endParaRPr lang="en-US" sz="1400" dirty="0"/>
-          </a:p>
-        </p:txBody>
-      </p:sp>
-      <p:pic>
-        <p:nvPicPr>
-          <p:cNvPr id="3" name="Image 0" descr="/home/claude/f4/img/minesec_sheet.png">    </p:cNvPr>
-          <p:cNvPicPr>
-            <a:picLocks noChangeAspect="1"/>
-          </p:cNvPicPr>
-          <p:nvPr/>
-        </p:nvPicPr>
-        <p:blipFill>
-          <a:blip r:embed="rId1"/>
-          <a:stretch>
-            <a:fillRect/>
-          </a:stretch>
-        </p:blipFill>
-        <p:spPr>
-          <a:xfrm>
-            <a:off x="0" y="658368"/>
-            <a:ext cx="2468880" cy="5833872"/>
-          </a:xfrm>
-          <a:prstGeom prst="rect">
-            <a:avLst/>
-          </a:prstGeom>
-        </p:spPr>
-      </p:pic>
-      <p:sp>
-        <p:nvSpPr>
-          <p:cNvPr id="4" name="Text 1"/>
-          <p:cNvSpPr/>
-          <p:nvPr/>
-        </p:nvSpPr>
-        <p:spPr>
-          <a:xfrm>
-            <a:off x="2697480" y="1005840"/>
-            <a:ext cx="9174175" cy="731520"/>
-          </a:xfrm>
-          <a:prstGeom prst="rect">
-            <a:avLst/>
-          </a:prstGeom>
-          <a:noFill/>
-          <a:ln/>
-        </p:spPr>
-        <p:txBody>
-          <a:bodyPr wrap="square" lIns="0" tIns="0" rIns="0" bIns="0" rtlCol="0" anchor="ctr">
-            <a:normAutofit/>
-          </a:bodyPr>
-          <a:lstStyle/>
-          <a:p>
-            <a:pPr algn="ctr" indent="0" marL="0">
-              <a:buNone/>
-            </a:pPr>
-            <a:r>
-              <a:rPr lang="en-US" sz="3600" b="1" dirty="0">
-                <a:solidFill>
-                  <a:srgbClr val="990011"/>
-                </a:solidFill>
-                <a:latin typeface="Times New Roman" pitchFamily="34" charset="0"/>
-                <a:ea typeface="Times New Roman" pitchFamily="34" charset="-122"/>
-                <a:cs typeface="Times New Roman" pitchFamily="34" charset="-120"/>
-              </a:rPr>
-              <a:t>References</a:t>
-            </a:r>
-            <a:endParaRPr lang="en-US" sz="3600" dirty="0"/>
-          </a:p>
-        </p:txBody>
-      </p:sp>
-      <p:sp>
-        <p:nvSpPr>
-          <p:cNvPr id="5" name="Text 2"/>
-          <p:cNvSpPr/>
-          <p:nvPr/>
-        </p:nvSpPr>
-        <p:spPr>
-          <a:xfrm>
-            <a:off x="2697480" y="1783080"/>
-            <a:ext cx="9174175" cy="4663440"/>
-          </a:xfrm>
-          <a:prstGeom prst="rect">
-            <a:avLst/>
-          </a:prstGeom>
-          <a:noFill/>
-          <a:ln/>
-        </p:spPr>
-        <p:txBody>
-          <a:bodyPr wrap="square" lIns="0" tIns="0" rIns="0" bIns="0" rtlCol="0" anchor="t"/>
-          <a:lstStyle/>
-          <a:p>
-            <a:pPr algn="l" marL="342900" indent="-342900">
-              <a:spcAft>
-                <a:spcPts val="800"/>
-              </a:spcAft>
-              <a:buSzPct val="100000"/>
-              <a:buChar char="•"/>
-            </a:pPr>
-            <a:r>
-              <a:rPr lang="en-US" sz="1800" dirty="0">
-                <a:solidFill>
-                  <a:srgbClr val="111111"/>
-                </a:solidFill>
-                <a:latin typeface="Calibri" pitchFamily="34" charset="0"/>
-                <a:ea typeface="Calibri" pitchFamily="34" charset="-122"/>
-                <a:cs typeface="Calibri" pitchFamily="34" charset="-120"/>
-              </a:rPr>
-              <a:t>Geography Syllabus for Sixth Forms (Lower and Upper Sixth), MINESEC, 2019 — Module 4 (Population Geography).</a:t>
-            </a:r>
-            <a:endParaRPr lang="en-US" sz="1800" dirty="0"/>
-          </a:p>
-          <a:p>
-            <a:pPr algn="l" marL="342900" indent="-342900">
-              <a:spcAft>
-                <a:spcPts val="800"/>
-              </a:spcAft>
-              <a:buSzPct val="100000"/>
-              <a:buChar char="•"/>
-            </a:pPr>
-            <a:r>
-              <a:rPr lang="en-US" sz="1800" dirty="0">
-                <a:solidFill>
-                  <a:srgbClr val="111111"/>
-                </a:solidFill>
-                <a:latin typeface="Calibri" pitchFamily="34" charset="0"/>
-                <a:ea typeface="Calibri" pitchFamily="34" charset="-122"/>
-                <a:cs typeface="Calibri" pitchFamily="34" charset="-120"/>
-              </a:rPr>
-              <a:t>Teacher's course notes: Mr KAMDEM E., Population Geography (USA), GBHS Garoua, 2026.</a:t>
-            </a:r>
-            <a:endParaRPr lang="en-US" sz="1800" dirty="0"/>
-          </a:p>
-          <a:p>
-            <a:pPr algn="l" marL="342900" indent="-342900">
-              <a:spcAft>
-                <a:spcPts val="800"/>
-              </a:spcAft>
-              <a:buSzPct val="100000"/>
-              <a:buChar char="•"/>
-            </a:pPr>
-            <a:r>
-              <a:rPr lang="en-US" sz="1800" dirty="0">
-                <a:solidFill>
-                  <a:srgbClr val="111111"/>
-                </a:solidFill>
-                <a:latin typeface="Calibri" pitchFamily="34" charset="0"/>
-                <a:ea typeface="Calibri" pitchFamily="34" charset="-122"/>
-                <a:cs typeface="Calibri" pitchFamily="34" charset="-120"/>
-              </a:rPr>
-              <a:t>United Nations, World Population Prospects 2024.</a:t>
-            </a:r>
-            <a:endParaRPr lang="en-US" sz="1800" dirty="0"/>
-          </a:p>
-          <a:p>
-            <a:pPr algn="l" marL="342900" indent="-342900">
-              <a:spcAft>
-                <a:spcPts val="800"/>
-              </a:spcAft>
-              <a:buSzPct val="100000"/>
-              <a:buChar char="•"/>
-            </a:pPr>
-            <a:r>
-              <a:rPr lang="en-US" sz="1800" dirty="0">
-                <a:solidFill>
-                  <a:srgbClr val="111111"/>
-                </a:solidFill>
-                <a:latin typeface="Calibri" pitchFamily="34" charset="0"/>
-                <a:ea typeface="Calibri" pitchFamily="34" charset="-122"/>
-                <a:cs typeface="Calibri" pitchFamily="34" charset="-120"/>
-              </a:rPr>
-              <a:t>Photo, Activity 2: “View of the Himalaya Mountain Range” by NASA Johnson, CC BY-NC 2.0, via nasa (https://www.flickr.com/photos/29988733@N04/10678470543)</a:t>
-            </a:r>
-            <a:endParaRPr lang="en-US" sz="1800" dirty="0"/>
-          </a:p>
-          <a:p>
-            <a:pPr algn="l" marL="342900" indent="-342900">
-              <a:spcAft>
-                <a:spcPts val="800"/>
-              </a:spcAft>
-              <a:buSzPct val="100000"/>
-              <a:buChar char="•"/>
-            </a:pPr>
-            <a:r>
-              <a:rPr lang="en-US" sz="1800" dirty="0">
-                <a:solidFill>
-                  <a:srgbClr val="111111"/>
-                </a:solidFill>
-                <a:latin typeface="Calibri" pitchFamily="34" charset="0"/>
-                <a:ea typeface="Calibri" pitchFamily="34" charset="-122"/>
-                <a:cs typeface="Calibri" pitchFamily="34" charset="-120"/>
-              </a:rPr>
-              <a:t>Photo, Activity 4: “La Paz” by cliff.hellis, CC BY-NC-ND 2.0, via Flickr (https://www.flickr.com/photos/30099537@N02/6348597083)</a:t>
-            </a:r>
-            <a:endParaRPr lang="en-US" sz="1800" dirty="0"/>
-          </a:p>
-          <a:p>
-            <a:pPr algn="l" marL="342900" indent="-342900">
-              <a:spcAft>
-                <a:spcPts val="800"/>
-              </a:spcAft>
-              <a:buSzPct val="100000"/>
-              <a:buChar char="•"/>
-            </a:pPr>
-            <a:r>
-              <a:rPr lang="en-US" sz="1800" dirty="0">
-                <a:solidFill>
-                  <a:srgbClr val="111111"/>
-                </a:solidFill>
-                <a:latin typeface="Calibri" pitchFamily="34" charset="0"/>
-                <a:ea typeface="Calibri" pitchFamily="34" charset="-122"/>
-                <a:cs typeface="Calibri" pitchFamily="34" charset="-120"/>
-              </a:rPr>
-              <a:t>Photo, Activity 5: “Carlo in the tea” by luigig, CC BY 2.0, via Flickr (https://www.flickr.com/photos/51035803402@N01/3175986747)</a:t>
-            </a:r>
-            <a:endParaRPr lang="en-US" sz="1800" dirty="0"/>
-          </a:p>
-          <a:p>
-            <a:pPr algn="l" marL="342900" indent="-342900">
-              <a:spcAft>
-                <a:spcPts val="800"/>
-              </a:spcAft>
-              <a:buSzPct val="100000"/>
-              <a:buChar char="•"/>
-            </a:pPr>
-            <a:r>
-              <a:rPr lang="en-US" sz="1800" dirty="0">
-                <a:solidFill>
-                  <a:srgbClr val="111111"/>
-                </a:solidFill>
-                <a:latin typeface="Calibri" pitchFamily="34" charset="0"/>
-                <a:ea typeface="Calibri" pitchFamily="34" charset="-122"/>
-                <a:cs typeface="Calibri" pitchFamily="34" charset="-120"/>
-              </a:rPr>
-              <a:t>Photo, board summary (Low altitudes (0–500 m)): “A woman harvesting rice, Barotse floodplain, Zambia. Photo by Georgina” by WorldFish, CC BY-NC-ND 2.0, via Flickr (https://www.flickr.com/photos/61545321@N06/7848727138)</a:t>
-            </a:r>
-            <a:endParaRPr lang="en-US" sz="1800" dirty="0"/>
-          </a:p>
-        </p:txBody>
-      </p:sp>
-      <p:sp>
-        <p:nvSpPr>
-          <p:cNvPr id="25" name="Slide Number Placeholder 0"/>
-          <p:cNvSpPr>
-            <a:spLocks noGrp="1"/>
-          </p:cNvSpPr>
-          <p:nvPr>
-            <p:ph type="sldNum" sz="quarter" idx="4294967295"/>
-          </p:nvPr>
-        </p:nvSpPr>
-        <p:spPr>
-          <a:xfrm>
-            <a:off x="27432" y="91440"/>
-            <a:ext cx="585216" cy="475488"/>
-          </a:xfrm>
-          <a:prstGeom prst="rect">
-            <a:avLst/>
-          </a:prstGeom>
-          <a:extLst>
-            <a:ext uri="{C572A759-6A51-4108-AA02-DFA0A04FC94B}">
-              <ma14:wrappingTextBoxFlag xmlns:ma14="http://schemas.microsoft.com/office/mac/drawingml/2011/main" val="0"/>
-            </a:ext>
-          </a:extLst>
-        </p:spPr>
-        <p:txBody>
-          <a:bodyPr/>
-          <a:lstStyle>
-            <a:lvl1pPr>
-              <a:defRPr sz="2000">
-                <a:solidFill>
-                  <a:srgbClr val="FFFFFF"/>
-                </a:solidFill>
-                <a:latin typeface="Calibri"/>
-                <a:ea typeface="Calibri"/>
-                <a:cs typeface="Calibri"/>
-              </a:defRPr>
-            </a:lvl1pPr>
-          </a:lstStyle>
-          <a:p>
-            <a:pPr algn="ctr"/>
-            <a:fld id="{F7021451-1387-4CA6-816F-3879F97B5CBC}" type="slidenum">
-              <a:rPr b="1" lang="en-US"/>
-              <a:t>60</a:t>
-            </a:fld>
-            <a:endParaRPr lang="en-US"/>
-          </a:p>
-        </p:txBody>
-      </p:sp>
-    </p:spTree>
-  </p:cSld>
-  <p:clrMapOvr>
-    <a:masterClrMapping/>
-  </p:clrMapOvr>
-</p:sld>
-</file>
-
-<file path=ppt/slides/slide61.xml><?xml version="1.0" encoding="utf-8"?>
-<p:sld xmlns:a="http://schemas.openxmlformats.org/drawingml/2006/main" xmlns:r="http://schemas.openxmlformats.org/officeDocument/2006/relationships" xmlns:p="http://schemas.openxmlformats.org/presentationml/2006/main">
-  <p:cSld name="Slide 61">
-    <p:spTree>
-      <p:nvGrpSpPr>
-        <p:cNvPr id="1" name=""/>
-        <p:cNvGrpSpPr/>
-        <p:nvPr/>
-      </p:nvGrpSpPr>
-      <p:grpSpPr>
-        <a:xfrm>
-          <a:off x="0" y="0"/>
-          <a:ext cx="0" cy="0"/>
-          <a:chOff x="0" y="0"/>
-          <a:chExt cx="0" cy="0"/>
-        </a:xfrm>
-      </p:grpSpPr>
-      <p:sp>
-        <p:nvSpPr>
-          <p:cNvPr id="2" name="Text 0"/>
-          <p:cNvSpPr/>
-          <p:nvPr/>
-        </p:nvSpPr>
-        <p:spPr>
-          <a:xfrm>
-            <a:off x="457200" y="713232"/>
-            <a:ext cx="11368735" cy="274320"/>
-          </a:xfrm>
-          <a:prstGeom prst="rect">
-            <a:avLst/>
-          </a:prstGeom>
-          <a:noFill/>
-          <a:ln/>
-        </p:spPr>
-        <p:txBody>
-          <a:bodyPr wrap="square" lIns="0" tIns="0" rIns="0" bIns="0" rtlCol="0" anchor="ctr"/>
-          <a:lstStyle/>
-          <a:p>
-            <a:pPr algn="r" indent="0" marL="0">
-              <a:buNone/>
-            </a:pPr>
-            <a:r>
-              <a:rPr lang="en-US" sz="1400" b="1" dirty="0">
-                <a:solidFill>
-                  <a:srgbClr val="1C3F6E"/>
-                </a:solidFill>
-                <a:latin typeface="Calibri" pitchFamily="34" charset="0"/>
-                <a:ea typeface="Calibri" pitchFamily="34" charset="-122"/>
-                <a:cs typeface="Calibri" pitchFamily="34" charset="-120"/>
-              </a:rPr>
-              <a:t>REFERENCES</a:t>
-            </a:r>
-            <a:endParaRPr lang="en-US" sz="1400" dirty="0"/>
-          </a:p>
-        </p:txBody>
-      </p:sp>
-      <p:pic>
-        <p:nvPicPr>
-          <p:cNvPr id="3" name="Image 0" descr="/home/claude/f4/img/minesec_sheet.png">    </p:cNvPr>
-          <p:cNvPicPr>
-            <a:picLocks noChangeAspect="1"/>
-          </p:cNvPicPr>
-          <p:nvPr/>
-        </p:nvPicPr>
-        <p:blipFill>
-          <a:blip r:embed="rId1"/>
-          <a:stretch>
-            <a:fillRect/>
-          </a:stretch>
-        </p:blipFill>
-        <p:spPr>
-          <a:xfrm>
-            <a:off x="0" y="658368"/>
-            <a:ext cx="5120640" cy="5833872"/>
-          </a:xfrm>
-          <a:prstGeom prst="rect">
-            <a:avLst/>
-          </a:prstGeom>
-        </p:spPr>
-      </p:pic>
-      <p:sp>
-        <p:nvSpPr>
-          <p:cNvPr id="4" name="Text 1"/>
-          <p:cNvSpPr/>
-          <p:nvPr/>
-        </p:nvSpPr>
-        <p:spPr>
-          <a:xfrm>
-            <a:off x="5349240" y="1005840"/>
-            <a:ext cx="6522415" cy="731520"/>
-          </a:xfrm>
-          <a:prstGeom prst="rect">
-            <a:avLst/>
-          </a:prstGeom>
-          <a:noFill/>
-          <a:ln/>
-        </p:spPr>
-        <p:txBody>
-          <a:bodyPr wrap="square" lIns="0" tIns="0" rIns="0" bIns="0" rtlCol="0" anchor="ctr">
-            <a:normAutofit/>
-          </a:bodyPr>
-          <a:lstStyle/>
-          <a:p>
-            <a:pPr algn="ctr" indent="0" marL="0">
-              <a:buNone/>
-            </a:pPr>
-            <a:r>
-              <a:rPr lang="en-US" sz="3600" b="1" dirty="0">
-                <a:solidFill>
-                  <a:srgbClr val="990011"/>
-                </a:solidFill>
-                <a:latin typeface="Times New Roman" pitchFamily="34" charset="0"/>
-                <a:ea typeface="Times New Roman" pitchFamily="34" charset="-122"/>
-                <a:cs typeface="Times New Roman" pitchFamily="34" charset="-120"/>
-              </a:rPr>
-              <a:t>References (continued)</a:t>
-            </a:r>
-            <a:endParaRPr lang="en-US" sz="3600" dirty="0"/>
-          </a:p>
-        </p:txBody>
-      </p:sp>
-      <p:sp>
-        <p:nvSpPr>
-          <p:cNvPr id="5" name="Text 2"/>
-          <p:cNvSpPr/>
-          <p:nvPr/>
-        </p:nvSpPr>
-        <p:spPr>
-          <a:xfrm>
-            <a:off x="5349240" y="1783080"/>
-            <a:ext cx="6522415" cy="4663440"/>
-          </a:xfrm>
-          <a:prstGeom prst="rect">
-            <a:avLst/>
-          </a:prstGeom>
-          <a:noFill/>
-          <a:ln/>
-        </p:spPr>
-        <p:txBody>
-          <a:bodyPr wrap="square" lIns="0" tIns="0" rIns="0" bIns="0" rtlCol="0" anchor="t"/>
-          <a:lstStyle/>
-          <a:p>
-            <a:pPr algn="l" marL="342900" indent="-342900">
-              <a:spcAft>
-                <a:spcPts val="800"/>
-              </a:spcAft>
-              <a:buSzPct val="100000"/>
-              <a:buChar char="•"/>
-            </a:pPr>
-            <a:r>
-              <a:rPr lang="en-US" sz="1800" dirty="0">
-                <a:solidFill>
-                  <a:srgbClr val="111111"/>
-                </a:solidFill>
-                <a:latin typeface="Calibri" pitchFamily="34" charset="0"/>
-                <a:ea typeface="Calibri" pitchFamily="34" charset="-122"/>
-                <a:cs typeface="Calibri" pitchFamily="34" charset="-120"/>
-              </a:rPr>
-              <a:t>Photo, board summary (Example of Cameroon): “Bamenda, Cameroon” by jbdodane, CC BY-NC 2.0, via Flickr (https://www.flickr.com/photos/27998473@N02/11293877215)</a:t>
-            </a:r>
-            <a:endParaRPr lang="en-US" sz="1800" dirty="0"/>
-          </a:p>
-          <a:p>
-            <a:pPr algn="l" marL="342900" indent="-342900">
-              <a:spcAft>
-                <a:spcPts val="800"/>
-              </a:spcAft>
-              <a:buSzPct val="100000"/>
-              <a:buChar char="•"/>
-            </a:pPr>
-            <a:r>
-              <a:rPr lang="en-US" sz="1800" dirty="0">
-                <a:solidFill>
-                  <a:srgbClr val="111111"/>
-                </a:solidFill>
-                <a:latin typeface="Calibri" pitchFamily="34" charset="0"/>
-                <a:ea typeface="Calibri" pitchFamily="34" charset="-122"/>
-                <a:cs typeface="Calibri" pitchFamily="34" charset="-120"/>
-              </a:rPr>
-              <a:t>Diagrams and animations: drawn for this lesson (Geography Department).</a:t>
-            </a:r>
-            <a:endParaRPr lang="en-US" sz="1800" dirty="0"/>
-          </a:p>
-        </p:txBody>
-      </p:sp>
-      <p:sp>
-        <p:nvSpPr>
-          <p:cNvPr id="25" name="Slide Number Placeholder 0"/>
-          <p:cNvSpPr>
-            <a:spLocks noGrp="1"/>
-          </p:cNvSpPr>
-          <p:nvPr>
-            <p:ph type="sldNum" sz="quarter" idx="4294967295"/>
-          </p:nvPr>
-        </p:nvSpPr>
-        <p:spPr>
-          <a:xfrm>
-            <a:off x="27432" y="91440"/>
-            <a:ext cx="585216" cy="475488"/>
-          </a:xfrm>
-          <a:prstGeom prst="rect">
-            <a:avLst/>
-          </a:prstGeom>
-          <a:extLst>
-            <a:ext uri="{C572A759-6A51-4108-AA02-DFA0A04FC94B}">
-              <ma14:wrappingTextBoxFlag xmlns:ma14="http://schemas.microsoft.com/office/mac/drawingml/2011/main" val="0"/>
-            </a:ext>
-          </a:extLst>
-        </p:spPr>
-        <p:txBody>
-          <a:bodyPr/>
-          <a:lstStyle>
-            <a:lvl1pPr>
-              <a:defRPr sz="2000">
-                <a:solidFill>
-                  <a:srgbClr val="FFFFFF"/>
-                </a:solidFill>
-                <a:latin typeface="Calibri"/>
-                <a:ea typeface="Calibri"/>
-                <a:cs typeface="Calibri"/>
-              </a:defRPr>
-            </a:lvl1pPr>
-          </a:lstStyle>
-          <a:p>
-            <a:pPr algn="ctr"/>
-            <a:fld id="{F7021451-1387-4CA6-816F-3879F97B5CBC}" type="slidenum">
-              <a:rPr b="1" lang="en-US"/>
-              <a:t>61</a:t>
             </a:fld>
             <a:endParaRPr lang="en-US"/>
           </a:p>
